--- a/発表スライド・ポスター/EC79_DAWIY_スライド.pptx
+++ b/発表スライド・ポスター/EC79_DAWIY_スライド.pptx
@@ -5,12 +5,12 @@
     <p:sldMasterId id="2147483648" r:id="rId1"/>
   </p:sldMasterIdLst>
   <p:notesMasterIdLst>
-    <p:notesMasterId r:id="rId16"/>
+    <p:notesMasterId r:id="rId17"/>
   </p:notesMasterIdLst>
   <p:sldIdLst>
     <p:sldId id="256" r:id="rId2"/>
     <p:sldId id="284" r:id="rId3"/>
-    <p:sldId id="278" r:id="rId4"/>
+    <p:sldId id="285" r:id="rId4"/>
     <p:sldId id="258" r:id="rId5"/>
     <p:sldId id="259" r:id="rId6"/>
     <p:sldId id="279" r:id="rId7"/>
@@ -22,6 +22,7 @@
     <p:sldId id="281" r:id="rId13"/>
     <p:sldId id="273" r:id="rId14"/>
     <p:sldId id="277" r:id="rId15"/>
+    <p:sldId id="278" r:id="rId16"/>
   </p:sldIdLst>
   <p:sldSz cx="12192000" cy="6858000"/>
   <p:notesSz cx="6858000" cy="9144000"/>
@@ -151,1385 +152,6 @@
 <file path=ppt/changesInfos/changesInfo1.xml><?xml version="1.0" encoding="utf-8"?>
 <pc:chgInfo xmlns:a="http://schemas.openxmlformats.org/drawingml/2006/main" xmlns:r="http://schemas.openxmlformats.org/officeDocument/2006/relationships" xmlns:ac="http://schemas.microsoft.com/office/drawing/2013/main/command" xmlns:pc="http://schemas.microsoft.com/office/powerpoint/2013/main/command">
   <pc:docChgLst>
-    <pc:chgData name="承太郎 山崎" userId="f065ba058e752810" providerId="LiveId" clId="{EE6D8BB2-87BE-4943-94DC-E90E182A0523}"/>
-    <pc:docChg chg="undo custSel addSld delSld modSld">
-      <pc:chgData name="承太郎 山崎" userId="f065ba058e752810" providerId="LiveId" clId="{EE6D8BB2-87BE-4943-94DC-E90E182A0523}" dt="2025-12-23T19:11:16.247" v="4292" actId="207"/>
-      <pc:docMkLst>
-        <pc:docMk/>
-      </pc:docMkLst>
-      <pc:sldChg chg="addSp delSp modSp mod">
-        <pc:chgData name="承太郎 山崎" userId="f065ba058e752810" providerId="LiveId" clId="{EE6D8BB2-87BE-4943-94DC-E90E182A0523}" dt="2025-12-23T19:01:10.535" v="4014" actId="2711"/>
-        <pc:sldMkLst>
-          <pc:docMk/>
-          <pc:sldMk cId="2574879856" sldId="258"/>
-        </pc:sldMkLst>
-        <pc:spChg chg="add del">
-          <ac:chgData name="承太郎 山崎" userId="f065ba058e752810" providerId="LiveId" clId="{EE6D8BB2-87BE-4943-94DC-E90E182A0523}" dt="2025-12-23T17:11:47.172" v="1131" actId="478"/>
-          <ac:spMkLst>
-            <pc:docMk/>
-            <pc:sldMk cId="2574879856" sldId="258"/>
-            <ac:spMk id="3" creationId="{C2A48E4D-A4DD-CFCF-E789-D2284C128CFB}"/>
-          </ac:spMkLst>
-        </pc:spChg>
-        <pc:spChg chg="add del">
-          <ac:chgData name="承太郎 山崎" userId="f065ba058e752810" providerId="LiveId" clId="{EE6D8BB2-87BE-4943-94DC-E90E182A0523}" dt="2025-12-23T17:11:55.524" v="1133" actId="478"/>
-          <ac:spMkLst>
-            <pc:docMk/>
-            <pc:sldMk cId="2574879856" sldId="258"/>
-            <ac:spMk id="5" creationId="{47C9ED75-F894-4745-5F54-6B28F46F8FB1}"/>
-          </ac:spMkLst>
-        </pc:spChg>
-        <pc:spChg chg="mod">
-          <ac:chgData name="承太郎 山崎" userId="f065ba058e752810" providerId="LiveId" clId="{EE6D8BB2-87BE-4943-94DC-E90E182A0523}" dt="2025-12-23T19:01:10.535" v="4014" actId="2711"/>
-          <ac:spMkLst>
-            <pc:docMk/>
-            <pc:sldMk cId="2574879856" sldId="258"/>
-            <ac:spMk id="25" creationId="{4C640862-EDA7-274C-C18E-46B040D772A0}"/>
-          </ac:spMkLst>
-        </pc:spChg>
-        <pc:picChg chg="add del mod ord">
-          <ac:chgData name="承太郎 山崎" userId="f065ba058e752810" providerId="LiveId" clId="{EE6D8BB2-87BE-4943-94DC-E90E182A0523}" dt="2025-12-23T17:12:37.764" v="1145" actId="478"/>
-          <ac:picMkLst>
-            <pc:docMk/>
-            <pc:sldMk cId="2574879856" sldId="258"/>
-            <ac:picMk id="7" creationId="{8072AECB-DAD3-894C-1F05-0D4AF7A707FC}"/>
-          </ac:picMkLst>
-        </pc:picChg>
-      </pc:sldChg>
-      <pc:sldChg chg="addSp delSp modSp mod">
-        <pc:chgData name="承太郎 山崎" userId="f065ba058e752810" providerId="LiveId" clId="{EE6D8BB2-87BE-4943-94DC-E90E182A0523}" dt="2025-12-23T19:05:03.215" v="4126" actId="1036"/>
-        <pc:sldMkLst>
-          <pc:docMk/>
-          <pc:sldMk cId="494613671" sldId="259"/>
-        </pc:sldMkLst>
-        <pc:spChg chg="add mod">
-          <ac:chgData name="承太郎 山崎" userId="f065ba058e752810" providerId="LiveId" clId="{EE6D8BB2-87BE-4943-94DC-E90E182A0523}" dt="2025-12-23T17:28:31.732" v="1517" actId="1037"/>
-          <ac:spMkLst>
-            <pc:docMk/>
-            <pc:sldMk cId="494613671" sldId="259"/>
-            <ac:spMk id="2" creationId="{5A6A2002-16C8-EC2E-0A80-1E4658F9F006}"/>
-          </ac:spMkLst>
-        </pc:spChg>
-        <pc:spChg chg="add mod">
-          <ac:chgData name="承太郎 山崎" userId="f065ba058e752810" providerId="LiveId" clId="{EE6D8BB2-87BE-4943-94DC-E90E182A0523}" dt="2025-12-23T17:28:31.732" v="1517" actId="1037"/>
-          <ac:spMkLst>
-            <pc:docMk/>
-            <pc:sldMk cId="494613671" sldId="259"/>
-            <ac:spMk id="3" creationId="{8FE1E699-7B2C-07EC-2E6E-AD4E7595A92E}"/>
-          </ac:spMkLst>
-        </pc:spChg>
-        <pc:spChg chg="add mod">
-          <ac:chgData name="承太郎 山崎" userId="f065ba058e752810" providerId="LiveId" clId="{EE6D8BB2-87BE-4943-94DC-E90E182A0523}" dt="2025-12-23T17:28:31.732" v="1517" actId="1037"/>
-          <ac:spMkLst>
-            <pc:docMk/>
-            <pc:sldMk cId="494613671" sldId="259"/>
-            <ac:spMk id="10" creationId="{A2120763-CF22-8A57-7613-9F7709C0A6D4}"/>
-          </ac:spMkLst>
-        </pc:spChg>
-        <pc:spChg chg="add mod">
-          <ac:chgData name="承太郎 山崎" userId="f065ba058e752810" providerId="LiveId" clId="{EE6D8BB2-87BE-4943-94DC-E90E182A0523}" dt="2025-12-23T17:24:56.910" v="1427"/>
-          <ac:spMkLst>
-            <pc:docMk/>
-            <pc:sldMk cId="494613671" sldId="259"/>
-            <ac:spMk id="11" creationId="{95602894-9341-579E-7ECF-D75EEF15329D}"/>
-          </ac:spMkLst>
-        </pc:spChg>
-        <pc:spChg chg="mod">
-          <ac:chgData name="承太郎 山崎" userId="f065ba058e752810" providerId="LiveId" clId="{EE6D8BB2-87BE-4943-94DC-E90E182A0523}" dt="2025-12-23T17:26:42.015" v="1463" actId="404"/>
-          <ac:spMkLst>
-            <pc:docMk/>
-            <pc:sldMk cId="494613671" sldId="259"/>
-            <ac:spMk id="12" creationId="{DEA3B902-27AA-29F2-473B-BDC50437AF7B}"/>
-          </ac:spMkLst>
-        </pc:spChg>
-        <pc:spChg chg="del mod">
-          <ac:chgData name="承太郎 山崎" userId="f065ba058e752810" providerId="LiveId" clId="{EE6D8BB2-87BE-4943-94DC-E90E182A0523}" dt="2025-12-23T17:24:52.420" v="1426" actId="478"/>
-          <ac:spMkLst>
-            <pc:docMk/>
-            <pc:sldMk cId="494613671" sldId="259"/>
-            <ac:spMk id="15" creationId="{83D8CDC1-A01F-D384-EA59-5B03223DEB29}"/>
-          </ac:spMkLst>
-        </pc:spChg>
-        <pc:spChg chg="add mod">
-          <ac:chgData name="承太郎 山崎" userId="f065ba058e752810" providerId="LiveId" clId="{EE6D8BB2-87BE-4943-94DC-E90E182A0523}" dt="2025-12-23T19:04:48.888" v="4113" actId="207"/>
-          <ac:spMkLst>
-            <pc:docMk/>
-            <pc:sldMk cId="494613671" sldId="259"/>
-            <ac:spMk id="18" creationId="{1FD247AD-F865-2658-16A0-4E9F7D21EE93}"/>
-          </ac:spMkLst>
-        </pc:spChg>
-        <pc:spChg chg="mod">
-          <ac:chgData name="承太郎 山崎" userId="f065ba058e752810" providerId="LiveId" clId="{EE6D8BB2-87BE-4943-94DC-E90E182A0523}" dt="2025-12-23T17:28:31.732" v="1517" actId="1037"/>
-          <ac:spMkLst>
-            <pc:docMk/>
-            <pc:sldMk cId="494613671" sldId="259"/>
-            <ac:spMk id="19" creationId="{6301626E-5D2C-7AC4-CC5A-336513BFA25A}"/>
-          </ac:spMkLst>
-        </pc:spChg>
-        <pc:spChg chg="del">
-          <ac:chgData name="承太郎 山崎" userId="f065ba058e752810" providerId="LiveId" clId="{EE6D8BB2-87BE-4943-94DC-E90E182A0523}" dt="2025-12-23T17:13:01.779" v="1147" actId="478"/>
-          <ac:spMkLst>
-            <pc:docMk/>
-            <pc:sldMk cId="494613671" sldId="259"/>
-            <ac:spMk id="20" creationId="{3CD77278-0916-DCA9-C11F-14AD185711EC}"/>
-          </ac:spMkLst>
-        </pc:spChg>
-        <pc:spChg chg="mod">
-          <ac:chgData name="承太郎 山崎" userId="f065ba058e752810" providerId="LiveId" clId="{EE6D8BB2-87BE-4943-94DC-E90E182A0523}" dt="2025-12-23T19:05:03.215" v="4126" actId="1036"/>
-          <ac:spMkLst>
-            <pc:docMk/>
-            <pc:sldMk cId="494613671" sldId="259"/>
-            <ac:spMk id="25" creationId="{DDC4373B-F5C3-82B6-46CE-4DC3F2E72984}"/>
-          </ac:spMkLst>
-        </pc:spChg>
-        <pc:spChg chg="del">
-          <ac:chgData name="承太郎 山崎" userId="f065ba058e752810" providerId="LiveId" clId="{EE6D8BB2-87BE-4943-94DC-E90E182A0523}" dt="2025-12-23T17:13:01.779" v="1147" actId="478"/>
-          <ac:spMkLst>
-            <pc:docMk/>
-            <pc:sldMk cId="494613671" sldId="259"/>
-            <ac:spMk id="26" creationId="{CD37BD79-8FB1-720E-9684-0125F968B432}"/>
-          </ac:spMkLst>
-        </pc:spChg>
-        <pc:spChg chg="del">
-          <ac:chgData name="承太郎 山崎" userId="f065ba058e752810" providerId="LiveId" clId="{EE6D8BB2-87BE-4943-94DC-E90E182A0523}" dt="2025-12-23T17:13:01.779" v="1147" actId="478"/>
-          <ac:spMkLst>
-            <pc:docMk/>
-            <pc:sldMk cId="494613671" sldId="259"/>
-            <ac:spMk id="28" creationId="{5376CF83-1358-2DFD-E36F-71370616DF02}"/>
-          </ac:spMkLst>
-        </pc:spChg>
-        <pc:spChg chg="del mod">
-          <ac:chgData name="承太郎 山崎" userId="f065ba058e752810" providerId="LiveId" clId="{EE6D8BB2-87BE-4943-94DC-E90E182A0523}" dt="2025-12-23T17:28:18.536" v="1510" actId="478"/>
-          <ac:spMkLst>
-            <pc:docMk/>
-            <pc:sldMk cId="494613671" sldId="259"/>
-            <ac:spMk id="29" creationId="{E17C987A-A550-1C54-90F4-63E1A6B503CC}"/>
-          </ac:spMkLst>
-        </pc:spChg>
-        <pc:spChg chg="del">
-          <ac:chgData name="承太郎 山崎" userId="f065ba058e752810" providerId="LiveId" clId="{EE6D8BB2-87BE-4943-94DC-E90E182A0523}" dt="2025-12-23T17:13:01.779" v="1147" actId="478"/>
-          <ac:spMkLst>
-            <pc:docMk/>
-            <pc:sldMk cId="494613671" sldId="259"/>
-            <ac:spMk id="30" creationId="{6A7008CC-FC66-1A8F-1869-37BBD0C99D52}"/>
-          </ac:spMkLst>
-        </pc:spChg>
-        <pc:picChg chg="add del mod">
-          <ac:chgData name="承太郎 山崎" userId="f065ba058e752810" providerId="LiveId" clId="{EE6D8BB2-87BE-4943-94DC-E90E182A0523}" dt="2025-12-23T17:32:52.593" v="1582" actId="478"/>
-          <ac:picMkLst>
-            <pc:docMk/>
-            <pc:sldMk cId="494613671" sldId="259"/>
-            <ac:picMk id="8" creationId="{848A8B29-800C-3BC2-8647-E2034BD6B551}"/>
-          </ac:picMkLst>
-        </pc:picChg>
-        <pc:picChg chg="add del mod">
-          <ac:chgData name="承太郎 山崎" userId="f065ba058e752810" providerId="LiveId" clId="{EE6D8BB2-87BE-4943-94DC-E90E182A0523}" dt="2025-12-23T17:32:52.125" v="1581" actId="478"/>
-          <ac:picMkLst>
-            <pc:docMk/>
-            <pc:sldMk cId="494613671" sldId="259"/>
-            <ac:picMk id="9" creationId="{48EC8850-41E9-839E-E0F4-AE562C88D6A4}"/>
-          </ac:picMkLst>
-        </pc:picChg>
-        <pc:picChg chg="add mod">
-          <ac:chgData name="承太郎 山崎" userId="f065ba058e752810" providerId="LiveId" clId="{EE6D8BB2-87BE-4943-94DC-E90E182A0523}" dt="2025-12-23T17:32:51.426" v="1580" actId="1076"/>
-          <ac:picMkLst>
-            <pc:docMk/>
-            <pc:sldMk cId="494613671" sldId="259"/>
-            <ac:picMk id="14" creationId="{70187111-A039-8636-60E7-67E4BE8157E0}"/>
-          </ac:picMkLst>
-        </pc:picChg>
-        <pc:picChg chg="mod">
-          <ac:chgData name="承太郎 山崎" userId="f065ba058e752810" providerId="LiveId" clId="{EE6D8BB2-87BE-4943-94DC-E90E182A0523}" dt="2025-12-23T17:30:56.855" v="1558" actId="1076"/>
-          <ac:picMkLst>
-            <pc:docMk/>
-            <pc:sldMk cId="494613671" sldId="259"/>
-            <ac:picMk id="17" creationId="{E8C8DDB6-4FCF-BC22-77A0-62C93EA6AC00}"/>
-          </ac:picMkLst>
-        </pc:picChg>
-        <pc:picChg chg="del mod ord">
-          <ac:chgData name="承太郎 山崎" userId="f065ba058e752810" providerId="LiveId" clId="{EE6D8BB2-87BE-4943-94DC-E90E182A0523}" dt="2025-12-23T17:28:16.696" v="1509" actId="478"/>
-          <ac:picMkLst>
-            <pc:docMk/>
-            <pc:sldMk cId="494613671" sldId="259"/>
-            <ac:picMk id="22" creationId="{D651834A-6DCC-21A5-6F26-09C1484BE15E}"/>
-          </ac:picMkLst>
-        </pc:picChg>
-        <pc:picChg chg="del">
-          <ac:chgData name="承太郎 山崎" userId="f065ba058e752810" providerId="LiveId" clId="{EE6D8BB2-87BE-4943-94DC-E90E182A0523}" dt="2025-12-23T17:13:01.779" v="1147" actId="478"/>
-          <ac:picMkLst>
-            <pc:docMk/>
-            <pc:sldMk cId="494613671" sldId="259"/>
-            <ac:picMk id="24" creationId="{8AB3397D-190A-9E4D-BA3F-CE00E3BD20CD}"/>
-          </ac:picMkLst>
-        </pc:picChg>
-        <pc:picChg chg="del">
-          <ac:chgData name="承太郎 山崎" userId="f065ba058e752810" providerId="LiveId" clId="{EE6D8BB2-87BE-4943-94DC-E90E182A0523}" dt="2025-12-23T17:13:01.779" v="1147" actId="478"/>
-          <ac:picMkLst>
-            <pc:docMk/>
-            <pc:sldMk cId="494613671" sldId="259"/>
-            <ac:picMk id="1028" creationId="{4D79B528-47C1-BEA7-7505-3C7E2DBB623A}"/>
-          </ac:picMkLst>
-        </pc:picChg>
-        <pc:picChg chg="add mod">
-          <ac:chgData name="承太郎 山崎" userId="f065ba058e752810" providerId="LiveId" clId="{EE6D8BB2-87BE-4943-94DC-E90E182A0523}" dt="2025-12-23T17:28:31.732" v="1517" actId="1037"/>
-          <ac:picMkLst>
-            <pc:docMk/>
-            <pc:sldMk cId="494613671" sldId="259"/>
-            <ac:picMk id="2050" creationId="{F08762CA-9D8E-1112-675A-FB2BD7650329}"/>
-          </ac:picMkLst>
-        </pc:picChg>
-        <pc:picChg chg="add mod">
-          <ac:chgData name="承太郎 山崎" userId="f065ba058e752810" providerId="LiveId" clId="{EE6D8BB2-87BE-4943-94DC-E90E182A0523}" dt="2025-12-23T17:28:31.732" v="1517" actId="1037"/>
-          <ac:picMkLst>
-            <pc:docMk/>
-            <pc:sldMk cId="494613671" sldId="259"/>
-            <ac:picMk id="2052" creationId="{CEA28437-0192-A66E-E6A7-503C049A1198}"/>
-          </ac:picMkLst>
-        </pc:picChg>
-        <pc:cxnChg chg="add del mod">
-          <ac:chgData name="承太郎 山崎" userId="f065ba058e752810" providerId="LiveId" clId="{EE6D8BB2-87BE-4943-94DC-E90E182A0523}" dt="2025-12-23T17:19:42.576" v="1268" actId="478"/>
-          <ac:cxnSpMkLst>
-            <pc:docMk/>
-            <pc:sldMk cId="494613671" sldId="259"/>
-            <ac:cxnSpMk id="6" creationId="{726BDBAF-A913-338C-5C94-9A1E6622E43F}"/>
-          </ac:cxnSpMkLst>
-        </pc:cxnChg>
-      </pc:sldChg>
-      <pc:sldChg chg="modSp mod">
-        <pc:chgData name="承太郎 山崎" userId="f065ba058e752810" providerId="LiveId" clId="{EE6D8BB2-87BE-4943-94DC-E90E182A0523}" dt="2025-12-23T18:51:05.553" v="3733" actId="1035"/>
-        <pc:sldMkLst>
-          <pc:docMk/>
-          <pc:sldMk cId="1985126989" sldId="269"/>
-        </pc:sldMkLst>
-        <pc:spChg chg="mod">
-          <ac:chgData name="承太郎 山崎" userId="f065ba058e752810" providerId="LiveId" clId="{EE6D8BB2-87BE-4943-94DC-E90E182A0523}" dt="2025-12-23T18:10:12.986" v="2519" actId="1076"/>
-          <ac:spMkLst>
-            <pc:docMk/>
-            <pc:sldMk cId="1985126989" sldId="269"/>
-            <ac:spMk id="8" creationId="{9A0D667E-38E9-715B-DC10-28BF31D00B6F}"/>
-          </ac:spMkLst>
-        </pc:spChg>
-        <pc:spChg chg="mod">
-          <ac:chgData name="承太郎 山崎" userId="f065ba058e752810" providerId="LiveId" clId="{EE6D8BB2-87BE-4943-94DC-E90E182A0523}" dt="2025-12-23T18:51:05.553" v="3733" actId="1035"/>
-          <ac:spMkLst>
-            <pc:docMk/>
-            <pc:sldMk cId="1985126989" sldId="269"/>
-            <ac:spMk id="14" creationId="{C56B4F15-D9F1-A0FF-44E3-5D831B98566B}"/>
-          </ac:spMkLst>
-        </pc:spChg>
-      </pc:sldChg>
-      <pc:sldChg chg="addSp delSp modSp mod">
-        <pc:chgData name="承太郎 山崎" userId="f065ba058e752810" providerId="LiveId" clId="{EE6D8BB2-87BE-4943-94DC-E90E182A0523}" dt="2025-12-23T18:26:18.749" v="2759" actId="1035"/>
-        <pc:sldMkLst>
-          <pc:docMk/>
-          <pc:sldMk cId="252509247" sldId="270"/>
-        </pc:sldMkLst>
-        <pc:spChg chg="mod">
-          <ac:chgData name="承太郎 山崎" userId="f065ba058e752810" providerId="LiveId" clId="{EE6D8BB2-87BE-4943-94DC-E90E182A0523}" dt="2025-12-23T18:26:05.795" v="2754" actId="403"/>
-          <ac:spMkLst>
-            <pc:docMk/>
-            <pc:sldMk cId="252509247" sldId="270"/>
-            <ac:spMk id="2" creationId="{37DF6DC2-3A56-CF1F-4FD0-C7B3A5EF1F77}"/>
-          </ac:spMkLst>
-        </pc:spChg>
-        <pc:spChg chg="del">
-          <ac:chgData name="承太郎 山崎" userId="f065ba058e752810" providerId="LiveId" clId="{EE6D8BB2-87BE-4943-94DC-E90E182A0523}" dt="2025-12-23T18:12:28.928" v="2554" actId="478"/>
-          <ac:spMkLst>
-            <pc:docMk/>
-            <pc:sldMk cId="252509247" sldId="270"/>
-            <ac:spMk id="3" creationId="{14607BEB-9AAC-EC9F-2F83-887852E68B88}"/>
-          </ac:spMkLst>
-        </pc:spChg>
-        <pc:spChg chg="mod">
-          <ac:chgData name="承太郎 山崎" userId="f065ba058e752810" providerId="LiveId" clId="{EE6D8BB2-87BE-4943-94DC-E90E182A0523}" dt="2025-12-23T18:18:44.349" v="2656" actId="1036"/>
-          <ac:spMkLst>
-            <pc:docMk/>
-            <pc:sldMk cId="252509247" sldId="270"/>
-            <ac:spMk id="5" creationId="{62275B28-395F-C850-F659-0F2E6B331888}"/>
-          </ac:spMkLst>
-        </pc:spChg>
-        <pc:spChg chg="mod">
-          <ac:chgData name="承太郎 山崎" userId="f065ba058e752810" providerId="LiveId" clId="{EE6D8BB2-87BE-4943-94DC-E90E182A0523}" dt="2025-12-23T18:26:18.749" v="2759" actId="1035"/>
-          <ac:spMkLst>
-            <pc:docMk/>
-            <pc:sldMk cId="252509247" sldId="270"/>
-            <ac:spMk id="6" creationId="{38CE5C71-0006-BF0E-0ED4-58B5AF8AD281}"/>
-          </ac:spMkLst>
-        </pc:spChg>
-        <pc:spChg chg="del">
-          <ac:chgData name="承太郎 山崎" userId="f065ba058e752810" providerId="LiveId" clId="{EE6D8BB2-87BE-4943-94DC-E90E182A0523}" dt="2025-12-23T18:12:48.717" v="2558" actId="478"/>
-          <ac:spMkLst>
-            <pc:docMk/>
-            <pc:sldMk cId="252509247" sldId="270"/>
-            <ac:spMk id="7" creationId="{EF82F387-8C80-3CF6-5B02-83FCC6C58D4B}"/>
-          </ac:spMkLst>
-        </pc:spChg>
-        <pc:spChg chg="del">
-          <ac:chgData name="承太郎 山崎" userId="f065ba058e752810" providerId="LiveId" clId="{EE6D8BB2-87BE-4943-94DC-E90E182A0523}" dt="2025-12-23T18:12:28.928" v="2554" actId="478"/>
-          <ac:spMkLst>
-            <pc:docMk/>
-            <pc:sldMk cId="252509247" sldId="270"/>
-            <ac:spMk id="8" creationId="{E1A156FC-11C1-6751-3FDA-F3A1ACA89DE1}"/>
-          </ac:spMkLst>
-        </pc:spChg>
-        <pc:spChg chg="mod">
-          <ac:chgData name="承太郎 山崎" userId="f065ba058e752810" providerId="LiveId" clId="{EE6D8BB2-87BE-4943-94DC-E90E182A0523}" dt="2025-12-23T18:18:44.349" v="2656" actId="1036"/>
-          <ac:spMkLst>
-            <pc:docMk/>
-            <pc:sldMk cId="252509247" sldId="270"/>
-            <ac:spMk id="10" creationId="{40C1A2CE-2268-4BA3-F341-A8B99E54CDEF}"/>
-          </ac:spMkLst>
-        </pc:spChg>
-        <pc:picChg chg="add del mod modCrop">
-          <ac:chgData name="承太郎 山崎" userId="f065ba058e752810" providerId="LiveId" clId="{EE6D8BB2-87BE-4943-94DC-E90E182A0523}" dt="2025-12-23T18:19:24.713" v="2669" actId="478"/>
-          <ac:picMkLst>
-            <pc:docMk/>
-            <pc:sldMk cId="252509247" sldId="270"/>
-            <ac:picMk id="11" creationId="{1BD17B49-00BA-660F-F0C4-3913CDA4AAB0}"/>
-          </ac:picMkLst>
-        </pc:picChg>
-        <pc:picChg chg="add mod modCrop">
-          <ac:chgData name="承太郎 山崎" userId="f065ba058e752810" providerId="LiveId" clId="{EE6D8BB2-87BE-4943-94DC-E90E182A0523}" dt="2025-12-23T18:23:12.138" v="2708" actId="1076"/>
-          <ac:picMkLst>
-            <pc:docMk/>
-            <pc:sldMk cId="252509247" sldId="270"/>
-            <ac:picMk id="13" creationId="{D27687B5-A048-A8B3-D15C-9C778015819F}"/>
-          </ac:picMkLst>
-        </pc:picChg>
-        <pc:picChg chg="add mod modCrop">
-          <ac:chgData name="承太郎 山崎" userId="f065ba058e752810" providerId="LiveId" clId="{EE6D8BB2-87BE-4943-94DC-E90E182A0523}" dt="2025-12-23T18:23:22.726" v="2714" actId="1037"/>
-          <ac:picMkLst>
-            <pc:docMk/>
-            <pc:sldMk cId="252509247" sldId="270"/>
-            <ac:picMk id="15" creationId="{18B817DF-51E2-4697-13C6-3CCBB57C50A4}"/>
-          </ac:picMkLst>
-        </pc:picChg>
-        <pc:picChg chg="add mod modCrop">
-          <ac:chgData name="承太郎 山崎" userId="f065ba058e752810" providerId="LiveId" clId="{EE6D8BB2-87BE-4943-94DC-E90E182A0523}" dt="2025-12-23T18:23:02.602" v="2706" actId="1076"/>
-          <ac:picMkLst>
-            <pc:docMk/>
-            <pc:sldMk cId="252509247" sldId="270"/>
-            <ac:picMk id="17" creationId="{0F4FE4D5-4D9E-82B8-10CF-8F9F8D811B7B}"/>
-          </ac:picMkLst>
-        </pc:picChg>
-        <pc:cxnChg chg="add mod">
-          <ac:chgData name="承太郎 山崎" userId="f065ba058e752810" providerId="LiveId" clId="{EE6D8BB2-87BE-4943-94DC-E90E182A0523}" dt="2025-12-23T18:24:27.223" v="2721" actId="208"/>
-          <ac:cxnSpMkLst>
-            <pc:docMk/>
-            <pc:sldMk cId="252509247" sldId="270"/>
-            <ac:cxnSpMk id="18" creationId="{395118A6-5912-4DBD-7AE4-F49624CE2465}"/>
-          </ac:cxnSpMkLst>
-        </pc:cxnChg>
-        <pc:cxnChg chg="add del mod">
-          <ac:chgData name="承太郎 山崎" userId="f065ba058e752810" providerId="LiveId" clId="{EE6D8BB2-87BE-4943-94DC-E90E182A0523}" dt="2025-12-23T18:24:40.686" v="2722" actId="478"/>
-          <ac:cxnSpMkLst>
-            <pc:docMk/>
-            <pc:sldMk cId="252509247" sldId="270"/>
-            <ac:cxnSpMk id="19" creationId="{40ACE6B6-53D2-0452-3326-E6B93ADEF43D}"/>
-          </ac:cxnSpMkLst>
-        </pc:cxnChg>
-        <pc:cxnChg chg="add mod">
-          <ac:chgData name="承太郎 山崎" userId="f065ba058e752810" providerId="LiveId" clId="{EE6D8BB2-87BE-4943-94DC-E90E182A0523}" dt="2025-12-23T18:24:55.869" v="2726" actId="1038"/>
-          <ac:cxnSpMkLst>
-            <pc:docMk/>
-            <pc:sldMk cId="252509247" sldId="270"/>
-            <ac:cxnSpMk id="20" creationId="{2D8A9046-23A8-AF5C-371D-919E33D85E36}"/>
-          </ac:cxnSpMkLst>
-        </pc:cxnChg>
-      </pc:sldChg>
-      <pc:sldChg chg="addSp delSp modSp mod">
-        <pc:chgData name="承太郎 山崎" userId="f065ba058e752810" providerId="LiveId" clId="{EE6D8BB2-87BE-4943-94DC-E90E182A0523}" dt="2025-12-23T18:48:41.424" v="3706" actId="20577"/>
-        <pc:sldMkLst>
-          <pc:docMk/>
-          <pc:sldMk cId="2841494129" sldId="273"/>
-        </pc:sldMkLst>
-        <pc:spChg chg="mod">
-          <ac:chgData name="承太郎 山崎" userId="f065ba058e752810" providerId="LiveId" clId="{EE6D8BB2-87BE-4943-94DC-E90E182A0523}" dt="2025-12-23T18:44:40.055" v="3497" actId="20577"/>
-          <ac:spMkLst>
-            <pc:docMk/>
-            <pc:sldMk cId="2841494129" sldId="273"/>
-            <ac:spMk id="3" creationId="{1D39C5EC-3B2F-6381-CD48-3E0FA32E9FF8}"/>
-          </ac:spMkLst>
-        </pc:spChg>
-        <pc:spChg chg="del">
-          <ac:chgData name="承太郎 山崎" userId="f065ba058e752810" providerId="LiveId" clId="{EE6D8BB2-87BE-4943-94DC-E90E182A0523}" dt="2025-12-23T18:36:17.165" v="3117" actId="478"/>
-          <ac:spMkLst>
-            <pc:docMk/>
-            <pc:sldMk cId="2841494129" sldId="273"/>
-            <ac:spMk id="7" creationId="{698EAA6C-17ED-D698-3A8B-BDBA0B369567}"/>
-          </ac:spMkLst>
-        </pc:spChg>
-        <pc:spChg chg="add del mod">
-          <ac:chgData name="承太郎 山崎" userId="f065ba058e752810" providerId="LiveId" clId="{EE6D8BB2-87BE-4943-94DC-E90E182A0523}" dt="2025-12-23T18:45:21.698" v="3509" actId="478"/>
-          <ac:spMkLst>
-            <pc:docMk/>
-            <pc:sldMk cId="2841494129" sldId="273"/>
-            <ac:spMk id="8" creationId="{9098A273-781F-E75D-CD97-D1F78756258C}"/>
-          </ac:spMkLst>
-        </pc:spChg>
-        <pc:spChg chg="add mod">
-          <ac:chgData name="承太郎 山崎" userId="f065ba058e752810" providerId="LiveId" clId="{EE6D8BB2-87BE-4943-94DC-E90E182A0523}" dt="2025-12-23T18:47:14.363" v="3581" actId="1035"/>
-          <ac:spMkLst>
-            <pc:docMk/>
-            <pc:sldMk cId="2841494129" sldId="273"/>
-            <ac:spMk id="9" creationId="{EE2A85BB-B805-A7E5-5000-B8DEFDA60583}"/>
-          </ac:spMkLst>
-        </pc:spChg>
-        <pc:spChg chg="add mod">
-          <ac:chgData name="承太郎 山崎" userId="f065ba058e752810" providerId="LiveId" clId="{EE6D8BB2-87BE-4943-94DC-E90E182A0523}" dt="2025-12-23T18:47:20.586" v="3583" actId="1035"/>
-          <ac:spMkLst>
-            <pc:docMk/>
-            <pc:sldMk cId="2841494129" sldId="273"/>
-            <ac:spMk id="10" creationId="{47C21C68-FB9F-5535-DCC9-4B61A4036CC0}"/>
-          </ac:spMkLst>
-        </pc:spChg>
-        <pc:spChg chg="add del mod">
-          <ac:chgData name="承太郎 山崎" userId="f065ba058e752810" providerId="LiveId" clId="{EE6D8BB2-87BE-4943-94DC-E90E182A0523}" dt="2025-12-23T18:46:21.818" v="3540"/>
-          <ac:spMkLst>
-            <pc:docMk/>
-            <pc:sldMk cId="2841494129" sldId="273"/>
-            <ac:spMk id="12" creationId="{578B2687-3D04-BD38-B398-855347AD4D29}"/>
-          </ac:spMkLst>
-        </pc:spChg>
-        <pc:spChg chg="add mod">
-          <ac:chgData name="承太郎 山崎" userId="f065ba058e752810" providerId="LiveId" clId="{EE6D8BB2-87BE-4943-94DC-E90E182A0523}" dt="2025-12-23T18:43:11.477" v="3433" actId="571"/>
-          <ac:spMkLst>
-            <pc:docMk/>
-            <pc:sldMk cId="2841494129" sldId="273"/>
-            <ac:spMk id="13" creationId="{E508A012-B2DD-F89A-4F5F-67CD743DA112}"/>
-          </ac:spMkLst>
-        </pc:spChg>
-        <pc:spChg chg="add mod">
-          <ac:chgData name="承太郎 山崎" userId="f065ba058e752810" providerId="LiveId" clId="{EE6D8BB2-87BE-4943-94DC-E90E182A0523}" dt="2025-12-23T18:46:52.374" v="3564" actId="14100"/>
-          <ac:spMkLst>
-            <pc:docMk/>
-            <pc:sldMk cId="2841494129" sldId="273"/>
-            <ac:spMk id="14" creationId="{054D4BA8-1433-7193-49E0-049F04CF4800}"/>
-          </ac:spMkLst>
-        </pc:spChg>
-        <pc:spChg chg="add mod">
-          <ac:chgData name="承太郎 山崎" userId="f065ba058e752810" providerId="LiveId" clId="{EE6D8BB2-87BE-4943-94DC-E90E182A0523}" dt="2025-12-23T18:47:06.186" v="3579" actId="1036"/>
-          <ac:spMkLst>
-            <pc:docMk/>
-            <pc:sldMk cId="2841494129" sldId="273"/>
-            <ac:spMk id="15" creationId="{06B557A4-8E3F-1C05-9AE4-BA1D0343C56D}"/>
-          </ac:spMkLst>
-        </pc:spChg>
-        <pc:spChg chg="add del mod">
-          <ac:chgData name="承太郎 山崎" userId="f065ba058e752810" providerId="LiveId" clId="{EE6D8BB2-87BE-4943-94DC-E90E182A0523}" dt="2025-12-23T18:46:13.754" v="3537" actId="478"/>
-          <ac:spMkLst>
-            <pc:docMk/>
-            <pc:sldMk cId="2841494129" sldId="273"/>
-            <ac:spMk id="16" creationId="{951E2C62-1EC4-5540-BBB1-BE6267747B47}"/>
-          </ac:spMkLst>
-        </pc:spChg>
-        <pc:spChg chg="add mod">
-          <ac:chgData name="承太郎 山崎" userId="f065ba058e752810" providerId="LiveId" clId="{EE6D8BB2-87BE-4943-94DC-E90E182A0523}" dt="2025-12-23T18:48:41.424" v="3706" actId="20577"/>
-          <ac:spMkLst>
-            <pc:docMk/>
-            <pc:sldMk cId="2841494129" sldId="273"/>
-            <ac:spMk id="17" creationId="{DDA1D378-961C-7A15-F7DD-2019E55761FF}"/>
-          </ac:spMkLst>
-        </pc:spChg>
-      </pc:sldChg>
-      <pc:sldChg chg="delSp modSp del mod">
-        <pc:chgData name="承太郎 山崎" userId="f065ba058e752810" providerId="LiveId" clId="{EE6D8BB2-87BE-4943-94DC-E90E182A0523}" dt="2025-12-23T17:43:03.617" v="1790" actId="47"/>
-        <pc:sldMkLst>
-          <pc:docMk/>
-          <pc:sldMk cId="1201227305" sldId="274"/>
-        </pc:sldMkLst>
-        <pc:spChg chg="del">
-          <ac:chgData name="承太郎 山崎" userId="f065ba058e752810" providerId="LiveId" clId="{EE6D8BB2-87BE-4943-94DC-E90E182A0523}" dt="2025-12-23T17:28:48.180" v="1521" actId="478"/>
-          <ac:spMkLst>
-            <pc:docMk/>
-            <pc:sldMk cId="1201227305" sldId="274"/>
-            <ac:spMk id="9" creationId="{FA639227-A214-960B-55CC-FEED2B5E49D6}"/>
-          </ac:spMkLst>
-        </pc:spChg>
-        <pc:spChg chg="del">
-          <ac:chgData name="承太郎 山崎" userId="f065ba058e752810" providerId="LiveId" clId="{EE6D8BB2-87BE-4943-94DC-E90E182A0523}" dt="2025-12-23T17:28:48.180" v="1521" actId="478"/>
-          <ac:spMkLst>
-            <pc:docMk/>
-            <pc:sldMk cId="1201227305" sldId="274"/>
-            <ac:spMk id="16" creationId="{EBDEA05C-7BE7-C68E-8F6D-FDD067DEA1A5}"/>
-          </ac:spMkLst>
-        </pc:spChg>
-        <pc:spChg chg="del">
-          <ac:chgData name="承太郎 山崎" userId="f065ba058e752810" providerId="LiveId" clId="{EE6D8BB2-87BE-4943-94DC-E90E182A0523}" dt="2025-12-23T17:28:48.180" v="1521" actId="478"/>
-          <ac:spMkLst>
-            <pc:docMk/>
-            <pc:sldMk cId="1201227305" sldId="274"/>
-            <ac:spMk id="18" creationId="{710B3A2B-EEB6-8ECB-8E3B-2D1F258251A4}"/>
-          </ac:spMkLst>
-        </pc:spChg>
-        <pc:spChg chg="del">
-          <ac:chgData name="承太郎 山崎" userId="f065ba058e752810" providerId="LiveId" clId="{EE6D8BB2-87BE-4943-94DC-E90E182A0523}" dt="2025-12-23T17:28:48.180" v="1521" actId="478"/>
-          <ac:spMkLst>
-            <pc:docMk/>
-            <pc:sldMk cId="1201227305" sldId="274"/>
-            <ac:spMk id="21" creationId="{5812080B-6CE4-A1E7-DF65-0CC457AE25C1}"/>
-          </ac:spMkLst>
-        </pc:spChg>
-        <pc:spChg chg="mod">
-          <ac:chgData name="承太郎 山崎" userId="f065ba058e752810" providerId="LiveId" clId="{EE6D8BB2-87BE-4943-94DC-E90E182A0523}" dt="2025-12-23T17:40:28.857" v="1741" actId="14100"/>
-          <ac:spMkLst>
-            <pc:docMk/>
-            <pc:sldMk cId="1201227305" sldId="274"/>
-            <ac:spMk id="23" creationId="{3D4E6B45-5981-365A-DA5E-9525B4F884F7}"/>
-          </ac:spMkLst>
-        </pc:spChg>
-        <pc:picChg chg="del">
-          <ac:chgData name="承太郎 山崎" userId="f065ba058e752810" providerId="LiveId" clId="{EE6D8BB2-87BE-4943-94DC-E90E182A0523}" dt="2025-12-23T17:28:48.180" v="1521" actId="478"/>
-          <ac:picMkLst>
-            <pc:docMk/>
-            <pc:sldMk cId="1201227305" sldId="274"/>
-            <ac:picMk id="8" creationId="{7219844A-017F-BB54-14FE-08C3A7535483}"/>
-          </ac:picMkLst>
-        </pc:picChg>
-        <pc:picChg chg="del">
-          <ac:chgData name="承太郎 山崎" userId="f065ba058e752810" providerId="LiveId" clId="{EE6D8BB2-87BE-4943-94DC-E90E182A0523}" dt="2025-12-23T17:28:48.180" v="1521" actId="478"/>
-          <ac:picMkLst>
-            <pc:docMk/>
-            <pc:sldMk cId="1201227305" sldId="274"/>
-            <ac:picMk id="14" creationId="{FF3D8BCF-00E4-865A-D831-DD427CC8B59B}"/>
-          </ac:picMkLst>
-        </pc:picChg>
-      </pc:sldChg>
-      <pc:sldChg chg="addSp delSp modSp mod">
-        <pc:chgData name="承太郎 山崎" userId="f065ba058e752810" providerId="LiveId" clId="{EE6D8BB2-87BE-4943-94DC-E90E182A0523}" dt="2025-12-23T18:26:02.175" v="2752" actId="403"/>
-        <pc:sldMkLst>
-          <pc:docMk/>
-          <pc:sldMk cId="3794169852" sldId="275"/>
-        </pc:sldMkLst>
-        <pc:spChg chg="mod">
-          <ac:chgData name="承太郎 山崎" userId="f065ba058e752810" providerId="LiveId" clId="{EE6D8BB2-87BE-4943-94DC-E90E182A0523}" dt="2025-12-23T18:26:02.175" v="2752" actId="403"/>
-          <ac:spMkLst>
-            <pc:docMk/>
-            <pc:sldMk cId="3794169852" sldId="275"/>
-            <ac:spMk id="2" creationId="{37DF6DC2-3A56-CF1F-4FD0-C7B3A5EF1F77}"/>
-          </ac:spMkLst>
-        </pc:spChg>
-        <pc:spChg chg="mod">
-          <ac:chgData name="承太郎 山崎" userId="f065ba058e752810" providerId="LiveId" clId="{EE6D8BB2-87BE-4943-94DC-E90E182A0523}" dt="2025-12-23T18:16:24.397" v="2569" actId="1076"/>
-          <ac:spMkLst>
-            <pc:docMk/>
-            <pc:sldMk cId="3794169852" sldId="275"/>
-            <ac:spMk id="8" creationId="{FBFFE6C4-CCF4-B346-DF4D-C5F297560C0E}"/>
-          </ac:spMkLst>
-        </pc:spChg>
-        <pc:spChg chg="mod">
-          <ac:chgData name="承太郎 山崎" userId="f065ba058e752810" providerId="LiveId" clId="{EE6D8BB2-87BE-4943-94DC-E90E182A0523}" dt="2025-12-23T18:17:17.769" v="2637" actId="1076"/>
-          <ac:spMkLst>
-            <pc:docMk/>
-            <pc:sldMk cId="3794169852" sldId="275"/>
-            <ac:spMk id="11" creationId="{0B4FE377-16CA-78DA-D372-A924CB24DF50}"/>
-          </ac:spMkLst>
-        </pc:spChg>
-        <pc:picChg chg="del">
-          <ac:chgData name="承太郎 山崎" userId="f065ba058e752810" providerId="LiveId" clId="{EE6D8BB2-87BE-4943-94DC-E90E182A0523}" dt="2025-12-23T18:15:48.281" v="2559" actId="478"/>
-          <ac:picMkLst>
-            <pc:docMk/>
-            <pc:sldMk cId="3794169852" sldId="275"/>
-            <ac:picMk id="7" creationId="{FFC6302B-D808-39D9-53A2-C68B427F1C02}"/>
-          </ac:picMkLst>
-        </pc:picChg>
-        <pc:picChg chg="add mod">
-          <ac:chgData name="承太郎 山崎" userId="f065ba058e752810" providerId="LiveId" clId="{EE6D8BB2-87BE-4943-94DC-E90E182A0523}" dt="2025-12-23T18:16:03.182" v="2566" actId="1076"/>
-          <ac:picMkLst>
-            <pc:docMk/>
-            <pc:sldMk cId="3794169852" sldId="275"/>
-            <ac:picMk id="9" creationId="{3A4F80BB-DC23-2740-EBDE-4F015476C1E8}"/>
-          </ac:picMkLst>
-        </pc:picChg>
-      </pc:sldChg>
-      <pc:sldChg chg="addSp delSp modSp mod">
-        <pc:chgData name="承太郎 山崎" userId="f065ba058e752810" providerId="LiveId" clId="{EE6D8BB2-87BE-4943-94DC-E90E182A0523}" dt="2025-12-23T18:58:52.500" v="3980" actId="1036"/>
-        <pc:sldMkLst>
-          <pc:docMk/>
-          <pc:sldMk cId="409304608" sldId="277"/>
-        </pc:sldMkLst>
-        <pc:spChg chg="add del mod">
-          <ac:chgData name="承太郎 山崎" userId="f065ba058e752810" providerId="LiveId" clId="{EE6D8BB2-87BE-4943-94DC-E90E182A0523}" dt="2025-12-23T18:51:22.624" v="3737" actId="478"/>
-          <ac:spMkLst>
-            <pc:docMk/>
-            <pc:sldMk cId="409304608" sldId="277"/>
-            <ac:spMk id="5" creationId="{33063F91-6B87-899F-48BD-B3EE1B05A288}"/>
-          </ac:spMkLst>
-        </pc:spChg>
-        <pc:spChg chg="mod">
-          <ac:chgData name="承太郎 山崎" userId="f065ba058e752810" providerId="LiveId" clId="{EE6D8BB2-87BE-4943-94DC-E90E182A0523}" dt="2025-12-23T18:56:56.884" v="3941"/>
-          <ac:spMkLst>
-            <pc:docMk/>
-            <pc:sldMk cId="409304608" sldId="277"/>
-            <ac:spMk id="7" creationId="{CC356605-4991-C8AE-9A5D-140B7F49BD61}"/>
-          </ac:spMkLst>
-        </pc:spChg>
-        <pc:spChg chg="del mod">
-          <ac:chgData name="承太郎 山崎" userId="f065ba058e752810" providerId="LiveId" clId="{EE6D8BB2-87BE-4943-94DC-E90E182A0523}" dt="2025-12-23T18:49:09.426" v="3709" actId="478"/>
-          <ac:spMkLst>
-            <pc:docMk/>
-            <pc:sldMk cId="409304608" sldId="277"/>
-            <ac:spMk id="9" creationId="{3CB872B5-0ED0-6F41-ED04-B0E7BAD6A428}"/>
-          </ac:spMkLst>
-        </pc:spChg>
-        <pc:spChg chg="add mod">
-          <ac:chgData name="承太郎 山崎" userId="f065ba058e752810" providerId="LiveId" clId="{EE6D8BB2-87BE-4943-94DC-E90E182A0523}" dt="2025-12-23T18:58:50.249" v="3970" actId="1076"/>
-          <ac:spMkLst>
-            <pc:docMk/>
-            <pc:sldMk cId="409304608" sldId="277"/>
-            <ac:spMk id="10" creationId="{CAE7C409-CDC6-B99A-70E4-0F4962684971}"/>
-          </ac:spMkLst>
-        </pc:spChg>
-        <pc:picChg chg="add mod">
-          <ac:chgData name="承太郎 山崎" userId="f065ba058e752810" providerId="LiveId" clId="{EE6D8BB2-87BE-4943-94DC-E90E182A0523}" dt="2025-12-23T18:58:52.500" v="3980" actId="1036"/>
-          <ac:picMkLst>
-            <pc:docMk/>
-            <pc:sldMk cId="409304608" sldId="277"/>
-            <ac:picMk id="5122" creationId="{934944A2-60BC-48B9-4B34-26D5C7A68456}"/>
-          </ac:picMkLst>
-        </pc:picChg>
-      </pc:sldChg>
-      <pc:sldChg chg="addSp delSp modSp mod modAnim">
-        <pc:chgData name="承太郎 山崎" userId="f065ba058e752810" providerId="LiveId" clId="{EE6D8BB2-87BE-4943-94DC-E90E182A0523}" dt="2025-12-23T19:01:20.303" v="4016" actId="2711"/>
-        <pc:sldMkLst>
-          <pc:docMk/>
-          <pc:sldMk cId="241645947" sldId="278"/>
-        </pc:sldMkLst>
-        <pc:spChg chg="mod">
-          <ac:chgData name="承太郎 山崎" userId="f065ba058e752810" providerId="LiveId" clId="{EE6D8BB2-87BE-4943-94DC-E90E182A0523}" dt="2025-12-23T16:33:26.297" v="595" actId="404"/>
-          <ac:spMkLst>
-            <pc:docMk/>
-            <pc:sldMk cId="241645947" sldId="278"/>
-            <ac:spMk id="2" creationId="{B71EA3D7-81E8-ECF8-6276-B9715D40D464}"/>
-          </ac:spMkLst>
-        </pc:spChg>
-        <pc:spChg chg="add mod">
-          <ac:chgData name="承太郎 山崎" userId="f065ba058e752810" providerId="LiveId" clId="{EE6D8BB2-87BE-4943-94DC-E90E182A0523}" dt="2025-12-23T17:01:02.965" v="617"/>
-          <ac:spMkLst>
-            <pc:docMk/>
-            <pc:sldMk cId="241645947" sldId="278"/>
-            <ac:spMk id="9" creationId="{30BD9595-1FB2-2ABB-73D3-D714D5FF9054}"/>
-          </ac:spMkLst>
-        </pc:spChg>
-        <pc:spChg chg="add mod">
-          <ac:chgData name="承太郎 山崎" userId="f065ba058e752810" providerId="LiveId" clId="{EE6D8BB2-87BE-4943-94DC-E90E182A0523}" dt="2025-12-23T17:03:37.179" v="793" actId="1037"/>
-          <ac:spMkLst>
-            <pc:docMk/>
-            <pc:sldMk cId="241645947" sldId="278"/>
-            <ac:spMk id="10" creationId="{E8BD57E8-22E8-A3DD-36E6-6B8E4D908AA5}"/>
-          </ac:spMkLst>
-        </pc:spChg>
-        <pc:spChg chg="add mod">
-          <ac:chgData name="承太郎 山崎" userId="f065ba058e752810" providerId="LiveId" clId="{EE6D8BB2-87BE-4943-94DC-E90E182A0523}" dt="2025-12-23T17:06:35.943" v="1015" actId="1076"/>
-          <ac:spMkLst>
-            <pc:docMk/>
-            <pc:sldMk cId="241645947" sldId="278"/>
-            <ac:spMk id="11" creationId="{57EDB50D-2993-ECDC-A331-32E1DECD78AA}"/>
-          </ac:spMkLst>
-        </pc:spChg>
-        <pc:spChg chg="add mod">
-          <ac:chgData name="承太郎 山崎" userId="f065ba058e752810" providerId="LiveId" clId="{EE6D8BB2-87BE-4943-94DC-E90E182A0523}" dt="2025-12-23T17:07:11.347" v="1041" actId="1035"/>
-          <ac:spMkLst>
-            <pc:docMk/>
-            <pc:sldMk cId="241645947" sldId="278"/>
-            <ac:spMk id="12" creationId="{53A4C69E-FF9A-625B-1689-745968DCFFAC}"/>
-          </ac:spMkLst>
-        </pc:spChg>
-        <pc:spChg chg="add mod">
-          <ac:chgData name="承太郎 山崎" userId="f065ba058e752810" providerId="LiveId" clId="{EE6D8BB2-87BE-4943-94DC-E90E182A0523}" dt="2025-12-23T17:07:08.832" v="1038" actId="1035"/>
-          <ac:spMkLst>
-            <pc:docMk/>
-            <pc:sldMk cId="241645947" sldId="278"/>
-            <ac:spMk id="13" creationId="{F8E7837F-B8D0-B0CA-B517-10094F43369A}"/>
-          </ac:spMkLst>
-        </pc:spChg>
-        <pc:spChg chg="add mod">
-          <ac:chgData name="承太郎 山崎" userId="f065ba058e752810" providerId="LiveId" clId="{EE6D8BB2-87BE-4943-94DC-E90E182A0523}" dt="2025-12-23T19:00:27.679" v="3981" actId="14100"/>
-          <ac:spMkLst>
-            <pc:docMk/>
-            <pc:sldMk cId="241645947" sldId="278"/>
-            <ac:spMk id="14" creationId="{DFBA8598-F7C2-5408-3CCE-5E6CB84EB2D7}"/>
-          </ac:spMkLst>
-        </pc:spChg>
-        <pc:spChg chg="add mod">
-          <ac:chgData name="承太郎 山崎" userId="f065ba058e752810" providerId="LiveId" clId="{EE6D8BB2-87BE-4943-94DC-E90E182A0523}" dt="2025-12-23T19:01:20.303" v="4016" actId="2711"/>
-          <ac:spMkLst>
-            <pc:docMk/>
-            <pc:sldMk cId="241645947" sldId="278"/>
-            <ac:spMk id="15" creationId="{84D588D4-B54F-C1C9-01FA-68B20076D38E}"/>
-          </ac:spMkLst>
-        </pc:spChg>
-        <pc:picChg chg="add del mod">
-          <ac:chgData name="承太郎 山崎" userId="f065ba058e752810" providerId="LiveId" clId="{EE6D8BB2-87BE-4943-94DC-E90E182A0523}" dt="2025-12-23T16:59:23.554" v="608" actId="478"/>
-          <ac:picMkLst>
-            <pc:docMk/>
-            <pc:sldMk cId="241645947" sldId="278"/>
-            <ac:picMk id="5" creationId="{7A903F39-4F04-B8B6-579E-46FD71679D49}"/>
-          </ac:picMkLst>
-        </pc:picChg>
-        <pc:picChg chg="del">
-          <ac:chgData name="承太郎 山崎" userId="f065ba058e752810" providerId="LiveId" clId="{EE6D8BB2-87BE-4943-94DC-E90E182A0523}" dt="2025-12-23T16:58:18.255" v="596" actId="478"/>
-          <ac:picMkLst>
-            <pc:docMk/>
-            <pc:sldMk cId="241645947" sldId="278"/>
-            <ac:picMk id="6" creationId="{344E34FD-3A41-04F1-0FB4-DE11D472BDE9}"/>
-          </ac:picMkLst>
-        </pc:picChg>
-        <pc:picChg chg="add mod">
-          <ac:chgData name="承太郎 山崎" userId="f065ba058e752810" providerId="LiveId" clId="{EE6D8BB2-87BE-4943-94DC-E90E182A0523}" dt="2025-12-23T17:04:47.215" v="885" actId="1035"/>
-          <ac:picMkLst>
-            <pc:docMk/>
-            <pc:sldMk cId="241645947" sldId="278"/>
-            <ac:picMk id="8" creationId="{7432A55C-237A-AD1E-F3AA-1B16C9F1FA0D}"/>
-          </ac:picMkLst>
-        </pc:picChg>
-      </pc:sldChg>
-      <pc:sldChg chg="addSp delSp modSp add mod modAnim">
-        <pc:chgData name="承太郎 山崎" userId="f065ba058e752810" providerId="LiveId" clId="{EE6D8BB2-87BE-4943-94DC-E90E182A0523}" dt="2025-12-23T19:07:17.411" v="4153" actId="1035"/>
-        <pc:sldMkLst>
-          <pc:docMk/>
-          <pc:sldMk cId="3820761124" sldId="279"/>
-        </pc:sldMkLst>
-        <pc:spChg chg="add del mod">
-          <ac:chgData name="承太郎 山崎" userId="f065ba058e752810" providerId="LiveId" clId="{EE6D8BB2-87BE-4943-94DC-E90E182A0523}" dt="2025-12-23T17:24:34.988" v="1424" actId="478"/>
-          <ac:spMkLst>
-            <pc:docMk/>
-            <pc:sldMk cId="3820761124" sldId="279"/>
-            <ac:spMk id="3" creationId="{EF16FB27-6B8B-DAC4-B8A5-7F13E351FB79}"/>
-          </ac:spMkLst>
-        </pc:spChg>
-        <pc:spChg chg="add del mod">
-          <ac:chgData name="承太郎 山崎" userId="f065ba058e752810" providerId="LiveId" clId="{EE6D8BB2-87BE-4943-94DC-E90E182A0523}" dt="2025-12-23T17:26:53.189" v="1466" actId="478"/>
-          <ac:spMkLst>
-            <pc:docMk/>
-            <pc:sldMk cId="3820761124" sldId="279"/>
-            <ac:spMk id="6" creationId="{C6F3D126-CA72-6E74-723C-9FA3A0034799}"/>
-          </ac:spMkLst>
-        </pc:spChg>
-        <pc:spChg chg="add mod">
-          <ac:chgData name="承太郎 山崎" userId="f065ba058e752810" providerId="LiveId" clId="{EE6D8BB2-87BE-4943-94DC-E90E182A0523}" dt="2025-12-23T17:26:57.791" v="1486" actId="27636"/>
-          <ac:spMkLst>
-            <pc:docMk/>
-            <pc:sldMk cId="3820761124" sldId="279"/>
-            <ac:spMk id="7" creationId="{17D6DCC8-8292-4849-4A68-1A63711D177E}"/>
-          </ac:spMkLst>
-        </pc:spChg>
-        <pc:spChg chg="del mod">
-          <ac:chgData name="承太郎 山崎" userId="f065ba058e752810" providerId="LiveId" clId="{EE6D8BB2-87BE-4943-94DC-E90E182A0523}" dt="2025-12-23T17:26:49.654" v="1464" actId="478"/>
-          <ac:spMkLst>
-            <pc:docMk/>
-            <pc:sldMk cId="3820761124" sldId="279"/>
-            <ac:spMk id="12" creationId="{51F05618-1FB8-62C6-CBA8-9B0C1103F974}"/>
-          </ac:spMkLst>
-        </pc:spChg>
-        <pc:spChg chg="del">
-          <ac:chgData name="承太郎 山崎" userId="f065ba058e752810" providerId="LiveId" clId="{EE6D8BB2-87BE-4943-94DC-E90E182A0523}" dt="2025-12-23T17:24:32.467" v="1423" actId="478"/>
-          <ac:spMkLst>
-            <pc:docMk/>
-            <pc:sldMk cId="3820761124" sldId="279"/>
-            <ac:spMk id="15" creationId="{F8429AA3-DB52-A82A-B9FA-B0CE8721EC97}"/>
-          </ac:spMkLst>
-        </pc:spChg>
-        <pc:spChg chg="add del">
-          <ac:chgData name="承太郎 山崎" userId="f065ba058e752810" providerId="LiveId" clId="{EE6D8BB2-87BE-4943-94DC-E90E182A0523}" dt="2025-12-23T17:34:56.419" v="1600" actId="478"/>
-          <ac:spMkLst>
-            <pc:docMk/>
-            <pc:sldMk cId="3820761124" sldId="279"/>
-            <ac:spMk id="16" creationId="{A369D2FD-7162-6A7D-6DA8-BAEF3798D762}"/>
-          </ac:spMkLst>
-        </pc:spChg>
-        <pc:spChg chg="del">
-          <ac:chgData name="承太郎 山崎" userId="f065ba058e752810" providerId="LiveId" clId="{EE6D8BB2-87BE-4943-94DC-E90E182A0523}" dt="2025-12-23T17:24:32.467" v="1423" actId="478"/>
-          <ac:spMkLst>
-            <pc:docMk/>
-            <pc:sldMk cId="3820761124" sldId="279"/>
-            <ac:spMk id="19" creationId="{944CC350-FCFB-9169-1FC0-2A4B1404BF47}"/>
-          </ac:spMkLst>
-        </pc:spChg>
-        <pc:spChg chg="mod">
-          <ac:chgData name="承太郎 山崎" userId="f065ba058e752810" providerId="LiveId" clId="{EE6D8BB2-87BE-4943-94DC-E90E182A0523}" dt="2025-12-23T17:45:44.980" v="1883" actId="1038"/>
-          <ac:spMkLst>
-            <pc:docMk/>
-            <pc:sldMk cId="3820761124" sldId="279"/>
-            <ac:spMk id="20" creationId="{24DFD758-7709-A8A0-5C58-A134E6FF571A}"/>
-          </ac:spMkLst>
-        </pc:spChg>
-        <pc:spChg chg="del">
-          <ac:chgData name="承太郎 山崎" userId="f065ba058e752810" providerId="LiveId" clId="{EE6D8BB2-87BE-4943-94DC-E90E182A0523}" dt="2025-12-23T17:24:32.467" v="1423" actId="478"/>
-          <ac:spMkLst>
-            <pc:docMk/>
-            <pc:sldMk cId="3820761124" sldId="279"/>
-            <ac:spMk id="25" creationId="{0B0F337A-969F-F1E5-2587-44A7403BC4B7}"/>
-          </ac:spMkLst>
-        </pc:spChg>
-        <pc:spChg chg="mod">
-          <ac:chgData name="承太郎 山崎" userId="f065ba058e752810" providerId="LiveId" clId="{EE6D8BB2-87BE-4943-94DC-E90E182A0523}" dt="2025-12-23T17:45:39.944" v="1876" actId="1038"/>
-          <ac:spMkLst>
-            <pc:docMk/>
-            <pc:sldMk cId="3820761124" sldId="279"/>
-            <ac:spMk id="26" creationId="{762F0ACF-9E2A-2E74-7D59-5135AB809F16}"/>
-          </ac:spMkLst>
-        </pc:spChg>
-        <pc:spChg chg="mod">
-          <ac:chgData name="承太郎 山崎" userId="f065ba058e752810" providerId="LiveId" clId="{EE6D8BB2-87BE-4943-94DC-E90E182A0523}" dt="2025-12-23T17:40:15.525" v="1740" actId="14100"/>
-          <ac:spMkLst>
-            <pc:docMk/>
-            <pc:sldMk cId="3820761124" sldId="279"/>
-            <ac:spMk id="28" creationId="{D8272DF9-B211-4D8C-12D3-C077C60CB2D7}"/>
-          </ac:spMkLst>
-        </pc:spChg>
-        <pc:spChg chg="del">
-          <ac:chgData name="承太郎 山崎" userId="f065ba058e752810" providerId="LiveId" clId="{EE6D8BB2-87BE-4943-94DC-E90E182A0523}" dt="2025-12-23T17:24:32.467" v="1423" actId="478"/>
-          <ac:spMkLst>
-            <pc:docMk/>
-            <pc:sldMk cId="3820761124" sldId="279"/>
-            <ac:spMk id="29" creationId="{297E2858-BB0C-9AA6-1156-C489F87860AD}"/>
-          </ac:spMkLst>
-        </pc:spChg>
-        <pc:spChg chg="del mod">
-          <ac:chgData name="承太郎 山崎" userId="f065ba058e752810" providerId="LiveId" clId="{EE6D8BB2-87BE-4943-94DC-E90E182A0523}" dt="2025-12-23T17:28:44.028" v="1520" actId="478"/>
-          <ac:spMkLst>
-            <pc:docMk/>
-            <pc:sldMk cId="3820761124" sldId="279"/>
-            <ac:spMk id="30" creationId="{236FE403-FDBE-702B-227B-5393FCD74920}"/>
-          </ac:spMkLst>
-        </pc:spChg>
-        <pc:spChg chg="add mod">
-          <ac:chgData name="承太郎 山崎" userId="f065ba058e752810" providerId="LiveId" clId="{EE6D8BB2-87BE-4943-94DC-E90E182A0523}" dt="2025-12-23T17:40:40.038" v="1742" actId="571"/>
-          <ac:spMkLst>
-            <pc:docMk/>
-            <pc:sldMk cId="3820761124" sldId="279"/>
-            <ac:spMk id="34" creationId="{B6FE5240-0ABC-2C08-34EB-A2CD65347016}"/>
-          </ac:spMkLst>
-        </pc:spChg>
-        <pc:spChg chg="add mod">
-          <ac:chgData name="承太郎 山崎" userId="f065ba058e752810" providerId="LiveId" clId="{EE6D8BB2-87BE-4943-94DC-E90E182A0523}" dt="2025-12-23T17:45:27.736" v="1850" actId="1035"/>
-          <ac:spMkLst>
-            <pc:docMk/>
-            <pc:sldMk cId="3820761124" sldId="279"/>
-            <ac:spMk id="36" creationId="{653EC9A7-C057-C283-24D5-CB726648464A}"/>
-          </ac:spMkLst>
-        </pc:spChg>
-        <pc:spChg chg="add mod">
-          <ac:chgData name="承太郎 山崎" userId="f065ba058e752810" providerId="LiveId" clId="{EE6D8BB2-87BE-4943-94DC-E90E182A0523}" dt="2025-12-23T17:45:32.433" v="1867" actId="1035"/>
-          <ac:spMkLst>
-            <pc:docMk/>
-            <pc:sldMk cId="3820761124" sldId="279"/>
-            <ac:spMk id="37" creationId="{63A9C504-A2AE-5DEC-5C08-C643390215FE}"/>
-          </ac:spMkLst>
-        </pc:spChg>
-        <pc:spChg chg="add del mod">
-          <ac:chgData name="承太郎 山崎" userId="f065ba058e752810" providerId="LiveId" clId="{EE6D8BB2-87BE-4943-94DC-E90E182A0523}" dt="2025-12-23T17:44:58.504" v="1838" actId="478"/>
-          <ac:spMkLst>
-            <pc:docMk/>
-            <pc:sldMk cId="3820761124" sldId="279"/>
-            <ac:spMk id="38" creationId="{F5262E16-B0E9-9F0B-1F91-D05DD2E3D0BE}"/>
-          </ac:spMkLst>
-        </pc:spChg>
-        <pc:spChg chg="add mod">
-          <ac:chgData name="承太郎 山崎" userId="f065ba058e752810" providerId="LiveId" clId="{EE6D8BB2-87BE-4943-94DC-E90E182A0523}" dt="2025-12-23T19:07:17.411" v="4153" actId="1035"/>
-          <ac:spMkLst>
-            <pc:docMk/>
-            <pc:sldMk cId="3820761124" sldId="279"/>
-            <ac:spMk id="39" creationId="{C0D23D01-347E-4A13-6D9C-7DADA76CC6E4}"/>
-          </ac:spMkLst>
-        </pc:spChg>
-        <pc:picChg chg="add del mod">
-          <ac:chgData name="承太郎 山崎" userId="f065ba058e752810" providerId="LiveId" clId="{EE6D8BB2-87BE-4943-94DC-E90E182A0523}" dt="2025-12-23T17:32:59.960" v="1584" actId="478"/>
-          <ac:picMkLst>
-            <pc:docMk/>
-            <pc:sldMk cId="3820761124" sldId="279"/>
-            <ac:picMk id="9" creationId="{C344DBDF-F551-851E-E088-52CB34802A1A}"/>
-          </ac:picMkLst>
-        </pc:picChg>
-        <pc:picChg chg="add mod">
-          <ac:chgData name="承太郎 山崎" userId="f065ba058e752810" providerId="LiveId" clId="{EE6D8BB2-87BE-4943-94DC-E90E182A0523}" dt="2025-12-23T17:39:57.222" v="1731" actId="1038"/>
-          <ac:picMkLst>
-            <pc:docMk/>
-            <pc:sldMk cId="3820761124" sldId="279"/>
-            <ac:picMk id="14" creationId="{EE60486D-79BC-2636-0609-F82939000749}"/>
-          </ac:picMkLst>
-        </pc:picChg>
-        <pc:picChg chg="del">
-          <ac:chgData name="承太郎 山崎" userId="f065ba058e752810" providerId="LiveId" clId="{EE6D8BB2-87BE-4943-94DC-E90E182A0523}" dt="2025-12-23T17:24:32.467" v="1423" actId="478"/>
-          <ac:picMkLst>
-            <pc:docMk/>
-            <pc:sldMk cId="3820761124" sldId="279"/>
-            <ac:picMk id="17" creationId="{2DCCE62E-3CD9-2834-ED9E-024F41E64CB6}"/>
-          </ac:picMkLst>
-        </pc:picChg>
-        <pc:picChg chg="add mod modCrop">
-          <ac:chgData name="承太郎 山崎" userId="f065ba058e752810" providerId="LiveId" clId="{EE6D8BB2-87BE-4943-94DC-E90E182A0523}" dt="2025-12-23T17:39:57.222" v="1731" actId="1038"/>
-          <ac:picMkLst>
-            <pc:docMk/>
-            <pc:sldMk cId="3820761124" sldId="279"/>
-            <ac:picMk id="21" creationId="{3F75A2B8-8FC2-0854-9FA9-FDACD3703102}"/>
-          </ac:picMkLst>
-        </pc:picChg>
-        <pc:picChg chg="del">
-          <ac:chgData name="承太郎 山崎" userId="f065ba058e752810" providerId="LiveId" clId="{EE6D8BB2-87BE-4943-94DC-E90E182A0523}" dt="2025-12-23T17:24:32.467" v="1423" actId="478"/>
-          <ac:picMkLst>
-            <pc:docMk/>
-            <pc:sldMk cId="3820761124" sldId="279"/>
-            <ac:picMk id="22" creationId="{C38A5AB4-5CFB-9EA2-BAD6-A2B20832DAB9}"/>
-          </ac:picMkLst>
-        </pc:picChg>
-        <pc:picChg chg="del mod">
-          <ac:chgData name="承太郎 山崎" userId="f065ba058e752810" providerId="LiveId" clId="{EE6D8BB2-87BE-4943-94DC-E90E182A0523}" dt="2025-12-23T17:28:44.028" v="1520" actId="478"/>
-          <ac:picMkLst>
-            <pc:docMk/>
-            <pc:sldMk cId="3820761124" sldId="279"/>
-            <ac:picMk id="24" creationId="{C42354D0-4CC9-272D-9E14-9A8252358AC7}"/>
-          </ac:picMkLst>
-        </pc:picChg>
-        <pc:picChg chg="add mod">
-          <ac:chgData name="承太郎 山崎" userId="f065ba058e752810" providerId="LiveId" clId="{EE6D8BB2-87BE-4943-94DC-E90E182A0523}" dt="2025-12-23T17:39:57.222" v="1731" actId="1038"/>
-          <ac:picMkLst>
-            <pc:docMk/>
-            <pc:sldMk cId="3820761124" sldId="279"/>
-            <ac:picMk id="27" creationId="{BEB4B5CB-9ADA-385D-4365-5FA235A5067E}"/>
-          </ac:picMkLst>
-        </pc:picChg>
-        <pc:picChg chg="add mod">
-          <ac:chgData name="承太郎 山崎" userId="f065ba058e752810" providerId="LiveId" clId="{EE6D8BB2-87BE-4943-94DC-E90E182A0523}" dt="2025-12-23T17:39:57.222" v="1731" actId="1038"/>
-          <ac:picMkLst>
-            <pc:docMk/>
-            <pc:sldMk cId="3820761124" sldId="279"/>
-            <ac:picMk id="32" creationId="{3A55FD4E-5775-9CA7-4399-C06FB9DC0961}"/>
-          </ac:picMkLst>
-        </pc:picChg>
-        <pc:picChg chg="add mod">
-          <ac:chgData name="承太郎 山崎" userId="f065ba058e752810" providerId="LiveId" clId="{EE6D8BB2-87BE-4943-94DC-E90E182A0523}" dt="2025-12-23T17:41:08.816" v="1746" actId="1076"/>
-          <ac:picMkLst>
-            <pc:docMk/>
-            <pc:sldMk cId="3820761124" sldId="279"/>
-            <ac:picMk id="35" creationId="{E4E1D661-2F43-F5E0-A5C7-6C9470835D02}"/>
-          </ac:picMkLst>
-        </pc:picChg>
-        <pc:picChg chg="mod">
-          <ac:chgData name="承太郎 山崎" userId="f065ba058e752810" providerId="LiveId" clId="{EE6D8BB2-87BE-4943-94DC-E90E182A0523}" dt="2025-12-23T17:39:57.222" v="1731" actId="1038"/>
-          <ac:picMkLst>
-            <pc:docMk/>
-            <pc:sldMk cId="3820761124" sldId="279"/>
-            <ac:picMk id="1028" creationId="{876EF1CA-FCAC-589C-1492-09E620A05471}"/>
-          </ac:picMkLst>
-        </pc:picChg>
-        <pc:cxnChg chg="add mod">
-          <ac:chgData name="承太郎 山崎" userId="f065ba058e752810" providerId="LiveId" clId="{EE6D8BB2-87BE-4943-94DC-E90E182A0523}" dt="2025-12-23T17:39:57.222" v="1731" actId="1038"/>
-          <ac:cxnSpMkLst>
-            <pc:docMk/>
-            <pc:sldMk cId="3820761124" sldId="279"/>
-            <ac:cxnSpMk id="11" creationId="{1B7ACC22-FDC0-3B60-10E2-0030D4A81A2F}"/>
-          </ac:cxnSpMkLst>
-        </pc:cxnChg>
-        <pc:cxnChg chg="add mod">
-          <ac:chgData name="承太郎 山崎" userId="f065ba058e752810" providerId="LiveId" clId="{EE6D8BB2-87BE-4943-94DC-E90E182A0523}" dt="2025-12-23T17:39:45.298" v="1721" actId="1076"/>
-          <ac:cxnSpMkLst>
-            <pc:docMk/>
-            <pc:sldMk cId="3820761124" sldId="279"/>
-            <ac:cxnSpMk id="33" creationId="{F52CE1B5-F05F-21EB-CE6C-10083DD6A5D1}"/>
-          </ac:cxnSpMkLst>
-        </pc:cxnChg>
-      </pc:sldChg>
-      <pc:sldChg chg="addSp delSp modSp new mod modAnim">
-        <pc:chgData name="承太郎 山崎" userId="f065ba058e752810" providerId="LiveId" clId="{EE6D8BB2-87BE-4943-94DC-E90E182A0523}" dt="2025-12-23T19:09:38.515" v="4264" actId="1076"/>
-        <pc:sldMkLst>
-          <pc:docMk/>
-          <pc:sldMk cId="844885977" sldId="280"/>
-        </pc:sldMkLst>
-        <pc:spChg chg="mod">
-          <ac:chgData name="承太郎 山崎" userId="f065ba058e752810" providerId="LiveId" clId="{EE6D8BB2-87BE-4943-94DC-E90E182A0523}" dt="2025-12-23T17:48:49.962" v="1985" actId="404"/>
-          <ac:spMkLst>
-            <pc:docMk/>
-            <pc:sldMk cId="844885977" sldId="280"/>
-            <ac:spMk id="2" creationId="{3843B8D4-0896-403A-E335-0BAFED37BD06}"/>
-          </ac:spMkLst>
-        </pc:spChg>
-        <pc:spChg chg="del">
-          <ac:chgData name="承太郎 山崎" userId="f065ba058e752810" providerId="LiveId" clId="{EE6D8BB2-87BE-4943-94DC-E90E182A0523}" dt="2025-12-23T17:46:41.465" v="1927" actId="478"/>
-          <ac:spMkLst>
-            <pc:docMk/>
-            <pc:sldMk cId="844885977" sldId="280"/>
-            <ac:spMk id="3" creationId="{09C140D2-0765-5243-1FAF-BA1C3CD6F373}"/>
-          </ac:spMkLst>
-        </pc:spChg>
-        <pc:spChg chg="add mod">
-          <ac:chgData name="承太郎 山崎" userId="f065ba058e752810" providerId="LiveId" clId="{EE6D8BB2-87BE-4943-94DC-E90E182A0523}" dt="2025-12-23T17:46:38.615" v="1926"/>
-          <ac:spMkLst>
-            <pc:docMk/>
-            <pc:sldMk cId="844885977" sldId="280"/>
-            <ac:spMk id="5" creationId="{9A456A46-C5DA-858E-B8F3-D12B5DDA1A4E}"/>
-          </ac:spMkLst>
-        </pc:spChg>
-        <pc:spChg chg="add del mod">
-          <ac:chgData name="承太郎 山崎" userId="f065ba058e752810" providerId="LiveId" clId="{EE6D8BB2-87BE-4943-94DC-E90E182A0523}" dt="2025-12-23T19:08:38.794" v="4213" actId="1037"/>
-          <ac:spMkLst>
-            <pc:docMk/>
-            <pc:sldMk cId="844885977" sldId="280"/>
-            <ac:spMk id="6" creationId="{CB3B9780-360E-310B-F73A-5264F62901E9}"/>
-          </ac:spMkLst>
-        </pc:spChg>
-        <pc:spChg chg="add mod">
-          <ac:chgData name="承太郎 山崎" userId="f065ba058e752810" providerId="LiveId" clId="{EE6D8BB2-87BE-4943-94DC-E90E182A0523}" dt="2025-12-23T19:08:38.794" v="4213" actId="1037"/>
-          <ac:spMkLst>
-            <pc:docMk/>
-            <pc:sldMk cId="844885977" sldId="280"/>
-            <ac:spMk id="7" creationId="{3AB58C0D-A478-090C-1823-BFB9C29241AC}"/>
-          </ac:spMkLst>
-        </pc:spChg>
-        <pc:spChg chg="add mod">
-          <ac:chgData name="承太郎 山崎" userId="f065ba058e752810" providerId="LiveId" clId="{EE6D8BB2-87BE-4943-94DC-E90E182A0523}" dt="2025-12-23T19:08:57.774" v="4232" actId="1035"/>
-          <ac:spMkLst>
-            <pc:docMk/>
-            <pc:sldMk cId="844885977" sldId="280"/>
-            <ac:spMk id="8" creationId="{5BFB7702-834F-DBF5-FFA9-E8EB39CD5CDF}"/>
-          </ac:spMkLst>
-        </pc:spChg>
-        <pc:spChg chg="add del mod">
-          <ac:chgData name="承太郎 山崎" userId="f065ba058e752810" providerId="LiveId" clId="{EE6D8BB2-87BE-4943-94DC-E90E182A0523}" dt="2025-12-23T17:58:05.626" v="2347" actId="478"/>
-          <ac:spMkLst>
-            <pc:docMk/>
-            <pc:sldMk cId="844885977" sldId="280"/>
-            <ac:spMk id="11" creationId="{226FAC86-76C4-0311-AFF6-11E47A42FF52}"/>
-          </ac:spMkLst>
-        </pc:spChg>
-        <pc:spChg chg="add mod">
-          <ac:chgData name="承太郎 山崎" userId="f065ba058e752810" providerId="LiveId" clId="{EE6D8BB2-87BE-4943-94DC-E90E182A0523}" dt="2025-12-23T19:09:06.527" v="4250" actId="1036"/>
-          <ac:spMkLst>
-            <pc:docMk/>
-            <pc:sldMk cId="844885977" sldId="280"/>
-            <ac:spMk id="23" creationId="{D5C7BBCF-4573-7A60-7CEE-12F3A6F3EA94}"/>
-          </ac:spMkLst>
-        </pc:spChg>
-        <pc:spChg chg="add mod">
-          <ac:chgData name="承太郎 山崎" userId="f065ba058e752810" providerId="LiveId" clId="{EE6D8BB2-87BE-4943-94DC-E90E182A0523}" dt="2025-12-23T19:09:06.527" v="4250" actId="1036"/>
-          <ac:spMkLst>
-            <pc:docMk/>
-            <pc:sldMk cId="844885977" sldId="280"/>
-            <ac:spMk id="24" creationId="{889FFB72-BF0B-2846-91D7-2C25C40FBE3C}"/>
-          </ac:spMkLst>
-        </pc:spChg>
-        <pc:spChg chg="add mod">
-          <ac:chgData name="承太郎 山崎" userId="f065ba058e752810" providerId="LiveId" clId="{EE6D8BB2-87BE-4943-94DC-E90E182A0523}" dt="2025-12-23T19:09:38.515" v="4264" actId="1076"/>
-          <ac:spMkLst>
-            <pc:docMk/>
-            <pc:sldMk cId="844885977" sldId="280"/>
-            <ac:spMk id="26" creationId="{9CE24E19-5C40-53B1-B9FE-52320169BD39}"/>
-          </ac:spMkLst>
-        </pc:spChg>
-        <pc:picChg chg="add mod">
-          <ac:chgData name="承太郎 山崎" userId="f065ba058e752810" providerId="LiveId" clId="{EE6D8BB2-87BE-4943-94DC-E90E182A0523}" dt="2025-12-23T19:09:17.866" v="4259" actId="1035"/>
-          <ac:picMkLst>
-            <pc:docMk/>
-            <pc:sldMk cId="844885977" sldId="280"/>
-            <ac:picMk id="10" creationId="{2BB1030A-8783-EA84-1BC9-541CD97111D8}"/>
-          </ac:picMkLst>
-        </pc:picChg>
-        <pc:picChg chg="add mod">
-          <ac:chgData name="承太郎 山崎" userId="f065ba058e752810" providerId="LiveId" clId="{EE6D8BB2-87BE-4943-94DC-E90E182A0523}" dt="2025-12-23T19:09:17.866" v="4259" actId="1035"/>
-          <ac:picMkLst>
-            <pc:docMk/>
-            <pc:sldMk cId="844885977" sldId="280"/>
-            <ac:picMk id="18" creationId="{6EEC5913-96C3-E61B-3437-241B288F2404}"/>
-          </ac:picMkLst>
-        </pc:picChg>
-        <pc:picChg chg="add mod">
-          <ac:chgData name="承太郎 山崎" userId="f065ba058e752810" providerId="LiveId" clId="{EE6D8BB2-87BE-4943-94DC-E90E182A0523}" dt="2025-12-23T19:09:06.527" v="4250" actId="1036"/>
-          <ac:picMkLst>
-            <pc:docMk/>
-            <pc:sldMk cId="844885977" sldId="280"/>
-            <ac:picMk id="20" creationId="{BAF1E191-8390-2FBC-62D3-C03C4F11F6EA}"/>
-          </ac:picMkLst>
-        </pc:picChg>
-        <pc:picChg chg="add mod">
-          <ac:chgData name="承太郎 山崎" userId="f065ba058e752810" providerId="LiveId" clId="{EE6D8BB2-87BE-4943-94DC-E90E182A0523}" dt="2025-12-23T19:09:06.527" v="4250" actId="1036"/>
-          <ac:picMkLst>
-            <pc:docMk/>
-            <pc:sldMk cId="844885977" sldId="280"/>
-            <ac:picMk id="21" creationId="{A19E5C10-7AA5-5C4C-D7F9-3C7DDFD9FC58}"/>
-          </ac:picMkLst>
-        </pc:picChg>
-        <pc:picChg chg="add mod">
-          <ac:chgData name="承太郎 山崎" userId="f065ba058e752810" providerId="LiveId" clId="{EE6D8BB2-87BE-4943-94DC-E90E182A0523}" dt="2025-12-23T19:09:06.527" v="4250" actId="1036"/>
-          <ac:picMkLst>
-            <pc:docMk/>
-            <pc:sldMk cId="844885977" sldId="280"/>
-            <ac:picMk id="22" creationId="{34F2B9FB-BDC1-7F10-E85F-43072DD4EB2D}"/>
-          </ac:picMkLst>
-        </pc:picChg>
-        <pc:picChg chg="add mod">
-          <ac:chgData name="承太郎 山崎" userId="f065ba058e752810" providerId="LiveId" clId="{EE6D8BB2-87BE-4943-94DC-E90E182A0523}" dt="2025-12-23T19:09:06.527" v="4250" actId="1036"/>
-          <ac:picMkLst>
-            <pc:docMk/>
-            <pc:sldMk cId="844885977" sldId="280"/>
-            <ac:picMk id="25" creationId="{507761F6-170A-CB41-7007-52E944E42C8F}"/>
-          </ac:picMkLst>
-        </pc:picChg>
-        <pc:picChg chg="add del mod">
-          <ac:chgData name="承太郎 山崎" userId="f065ba058e752810" providerId="LiveId" clId="{EE6D8BB2-87BE-4943-94DC-E90E182A0523}" dt="2025-12-23T17:59:28.012" v="2367" actId="478"/>
-          <ac:picMkLst>
-            <pc:docMk/>
-            <pc:sldMk cId="844885977" sldId="280"/>
-            <ac:picMk id="4098" creationId="{5FA21CD2-707A-E4E7-3226-5AFBCDFF8431}"/>
-          </ac:picMkLst>
-        </pc:picChg>
-        <pc:picChg chg="add del">
-          <ac:chgData name="承太郎 山崎" userId="f065ba058e752810" providerId="LiveId" clId="{EE6D8BB2-87BE-4943-94DC-E90E182A0523}" dt="2025-12-23T18:00:19.021" v="2369" actId="478"/>
-          <ac:picMkLst>
-            <pc:docMk/>
-            <pc:sldMk cId="844885977" sldId="280"/>
-            <ac:picMk id="4100" creationId="{FBD6011C-3D0B-D690-B898-079CD6AC7DF6}"/>
-          </ac:picMkLst>
-        </pc:picChg>
-        <pc:cxnChg chg="add del mod">
-          <ac:chgData name="承太郎 山崎" userId="f065ba058e752810" providerId="LiveId" clId="{EE6D8BB2-87BE-4943-94DC-E90E182A0523}" dt="2025-12-23T17:58:42.526" v="2361" actId="478"/>
-          <ac:cxnSpMkLst>
-            <pc:docMk/>
-            <pc:sldMk cId="844885977" sldId="280"/>
-            <ac:cxnSpMk id="13" creationId="{5E22C372-D38F-7BE3-8220-3AA78EABDE18}"/>
-          </ac:cxnSpMkLst>
-        </pc:cxnChg>
-        <pc:cxnChg chg="add del mod">
-          <ac:chgData name="承太郎 山崎" userId="f065ba058e752810" providerId="LiveId" clId="{EE6D8BB2-87BE-4943-94DC-E90E182A0523}" dt="2025-12-23T17:58:42.025" v="2360" actId="478"/>
-          <ac:cxnSpMkLst>
-            <pc:docMk/>
-            <pc:sldMk cId="844885977" sldId="280"/>
-            <ac:cxnSpMk id="15" creationId="{545A526D-1274-411D-36EF-42F4B7A711DD}"/>
-          </ac:cxnSpMkLst>
-        </pc:cxnChg>
-      </pc:sldChg>
-      <pc:sldChg chg="addSp delSp modSp add mod">
-        <pc:chgData name="承太郎 山崎" userId="f065ba058e752810" providerId="LiveId" clId="{EE6D8BB2-87BE-4943-94DC-E90E182A0523}" dt="2025-12-23T18:37:14.355" v="3133" actId="115"/>
-        <pc:sldMkLst>
-          <pc:docMk/>
-          <pc:sldMk cId="2867371047" sldId="281"/>
-        </pc:sldMkLst>
-        <pc:spChg chg="mod">
-          <ac:chgData name="承太郎 山崎" userId="f065ba058e752810" providerId="LiveId" clId="{EE6D8BB2-87BE-4943-94DC-E90E182A0523}" dt="2025-12-23T18:26:09.755" v="2756" actId="403"/>
-          <ac:spMkLst>
-            <pc:docMk/>
-            <pc:sldMk cId="2867371047" sldId="281"/>
-            <ac:spMk id="2" creationId="{C1EE7133-8C0F-BBFD-BF1C-FCD02209D56B}"/>
-          </ac:spMkLst>
-        </pc:spChg>
-        <pc:spChg chg="add mod">
-          <ac:chgData name="承太郎 山崎" userId="f065ba058e752810" providerId="LiveId" clId="{EE6D8BB2-87BE-4943-94DC-E90E182A0523}" dt="2025-12-23T18:26:20.586" v="2760"/>
-          <ac:spMkLst>
-            <pc:docMk/>
-            <pc:sldMk cId="2867371047" sldId="281"/>
-            <ac:spMk id="3" creationId="{C6D6B083-9AD1-8E5D-70FE-69C99193D94B}"/>
-          </ac:spMkLst>
-        </pc:spChg>
-        <pc:spChg chg="del">
-          <ac:chgData name="承太郎 山崎" userId="f065ba058e752810" providerId="LiveId" clId="{EE6D8BB2-87BE-4943-94DC-E90E182A0523}" dt="2025-12-23T18:26:13.678" v="2757" actId="478"/>
-          <ac:spMkLst>
-            <pc:docMk/>
-            <pc:sldMk cId="2867371047" sldId="281"/>
-            <ac:spMk id="5" creationId="{E19A5570-9F34-F067-AE4C-A84B8433E41E}"/>
-          </ac:spMkLst>
-        </pc:spChg>
-        <pc:spChg chg="del">
-          <ac:chgData name="承太郎 山崎" userId="f065ba058e752810" providerId="LiveId" clId="{EE6D8BB2-87BE-4943-94DC-E90E182A0523}" dt="2025-12-23T18:26:13.678" v="2757" actId="478"/>
-          <ac:spMkLst>
-            <pc:docMk/>
-            <pc:sldMk cId="2867371047" sldId="281"/>
-            <ac:spMk id="6" creationId="{3BE7FCD2-B9B2-DB9D-43CC-8CAAA33B1325}"/>
-          </ac:spMkLst>
-        </pc:spChg>
-        <pc:spChg chg="add mod">
-          <ac:chgData name="承太郎 山崎" userId="f065ba058e752810" providerId="LiveId" clId="{EE6D8BB2-87BE-4943-94DC-E90E182A0523}" dt="2025-12-23T18:27:36.341" v="2818" actId="1076"/>
-          <ac:spMkLst>
-            <pc:docMk/>
-            <pc:sldMk cId="2867371047" sldId="281"/>
-            <ac:spMk id="8" creationId="{8AE58323-A736-D26D-7C1A-02B56A7F5EC8}"/>
-          </ac:spMkLst>
-        </pc:spChg>
-        <pc:spChg chg="add mod">
-          <ac:chgData name="承太郎 山崎" userId="f065ba058e752810" providerId="LiveId" clId="{EE6D8BB2-87BE-4943-94DC-E90E182A0523}" dt="2025-12-23T18:37:14.355" v="3133" actId="115"/>
-          <ac:spMkLst>
-            <pc:docMk/>
-            <pc:sldMk cId="2867371047" sldId="281"/>
-            <ac:spMk id="9" creationId="{435A0884-5ED8-6A0D-62BB-AE7989BF7BCC}"/>
-          </ac:spMkLst>
-        </pc:spChg>
-        <pc:spChg chg="del">
-          <ac:chgData name="承太郎 山崎" userId="f065ba058e752810" providerId="LiveId" clId="{EE6D8BB2-87BE-4943-94DC-E90E182A0523}" dt="2025-12-23T18:26:13.678" v="2757" actId="478"/>
-          <ac:spMkLst>
-            <pc:docMk/>
-            <pc:sldMk cId="2867371047" sldId="281"/>
-            <ac:spMk id="10" creationId="{974AF266-BBA3-5548-25BB-F14256DDA80E}"/>
-          </ac:spMkLst>
-        </pc:spChg>
-        <pc:spChg chg="add mod">
-          <ac:chgData name="承太郎 山崎" userId="f065ba058e752810" providerId="LiveId" clId="{EE6D8BB2-87BE-4943-94DC-E90E182A0523}" dt="2025-12-23T18:35:19.032" v="3073" actId="404"/>
-          <ac:spMkLst>
-            <pc:docMk/>
-            <pc:sldMk cId="2867371047" sldId="281"/>
-            <ac:spMk id="23" creationId="{705D9B4E-E06D-25DA-CADA-C88AB4D62C92}"/>
-          </ac:spMkLst>
-        </pc:spChg>
-        <pc:picChg chg="add mod">
-          <ac:chgData name="承太郎 山崎" userId="f065ba058e752810" providerId="LiveId" clId="{EE6D8BB2-87BE-4943-94DC-E90E182A0523}" dt="2025-12-23T18:32:52.198" v="2950" actId="1037"/>
-          <ac:picMkLst>
-            <pc:docMk/>
-            <pc:sldMk cId="2867371047" sldId="281"/>
-            <ac:picMk id="12" creationId="{2F984F85-6898-295D-1CEC-814857219537}"/>
-          </ac:picMkLst>
-        </pc:picChg>
-        <pc:picChg chg="del">
-          <ac:chgData name="承太郎 山崎" userId="f065ba058e752810" providerId="LiveId" clId="{EE6D8BB2-87BE-4943-94DC-E90E182A0523}" dt="2025-12-23T18:26:13.678" v="2757" actId="478"/>
-          <ac:picMkLst>
-            <pc:docMk/>
-            <pc:sldMk cId="2867371047" sldId="281"/>
-            <ac:picMk id="13" creationId="{4B9E552F-5A18-8ED6-0264-B45B2494F4FE}"/>
-          </ac:picMkLst>
-        </pc:picChg>
-        <pc:picChg chg="del">
-          <ac:chgData name="承太郎 山崎" userId="f065ba058e752810" providerId="LiveId" clId="{EE6D8BB2-87BE-4943-94DC-E90E182A0523}" dt="2025-12-23T18:26:13.678" v="2757" actId="478"/>
-          <ac:picMkLst>
-            <pc:docMk/>
-            <pc:sldMk cId="2867371047" sldId="281"/>
-            <ac:picMk id="15" creationId="{FA986874-1663-8CF5-BE3D-C89D40CED2D0}"/>
-          </ac:picMkLst>
-        </pc:picChg>
-        <pc:picChg chg="add mod">
-          <ac:chgData name="承太郎 山崎" userId="f065ba058e752810" providerId="LiveId" clId="{EE6D8BB2-87BE-4943-94DC-E90E182A0523}" dt="2025-12-23T18:33:26.651" v="2974" actId="1038"/>
-          <ac:picMkLst>
-            <pc:docMk/>
-            <pc:sldMk cId="2867371047" sldId="281"/>
-            <ac:picMk id="16" creationId="{4457A670-DA65-B2FF-DDD8-D09EB9AD3FC3}"/>
-          </ac:picMkLst>
-        </pc:picChg>
-        <pc:picChg chg="del">
-          <ac:chgData name="承太郎 山崎" userId="f065ba058e752810" providerId="LiveId" clId="{EE6D8BB2-87BE-4943-94DC-E90E182A0523}" dt="2025-12-23T18:26:13.678" v="2757" actId="478"/>
-          <ac:picMkLst>
-            <pc:docMk/>
-            <pc:sldMk cId="2867371047" sldId="281"/>
-            <ac:picMk id="17" creationId="{44C9BFF2-7F9A-2F01-2238-5910E67DE348}"/>
-          </ac:picMkLst>
-        </pc:picChg>
-        <pc:picChg chg="add mod">
-          <ac:chgData name="承太郎 山崎" userId="f065ba058e752810" providerId="LiveId" clId="{EE6D8BB2-87BE-4943-94DC-E90E182A0523}" dt="2025-12-23T18:35:07.593" v="3062" actId="1076"/>
-          <ac:picMkLst>
-            <pc:docMk/>
-            <pc:sldMk cId="2867371047" sldId="281"/>
-            <ac:picMk id="22" creationId="{2AD62358-DA24-AB96-1D27-4E0F899F27DE}"/>
-          </ac:picMkLst>
-        </pc:picChg>
-        <pc:cxnChg chg="del">
-          <ac:chgData name="承太郎 山崎" userId="f065ba058e752810" providerId="LiveId" clId="{EE6D8BB2-87BE-4943-94DC-E90E182A0523}" dt="2025-12-23T18:26:13.678" v="2757" actId="478"/>
-          <ac:cxnSpMkLst>
-            <pc:docMk/>
-            <pc:sldMk cId="2867371047" sldId="281"/>
-            <ac:cxnSpMk id="18" creationId="{DB87B7C4-19BB-D8DF-A61A-1018F1B5903F}"/>
-          </ac:cxnSpMkLst>
-        </pc:cxnChg>
-        <pc:cxnChg chg="add mod">
-          <ac:chgData name="承太郎 山崎" userId="f065ba058e752810" providerId="LiveId" clId="{EE6D8BB2-87BE-4943-94DC-E90E182A0523}" dt="2025-12-23T18:33:20.206" v="2956" actId="1076"/>
-          <ac:cxnSpMkLst>
-            <pc:docMk/>
-            <pc:sldMk cId="2867371047" sldId="281"/>
-            <ac:cxnSpMk id="19" creationId="{520846E7-D8D5-2015-FE74-FBC443CA6489}"/>
-          </ac:cxnSpMkLst>
-        </pc:cxnChg>
-        <pc:cxnChg chg="del">
-          <ac:chgData name="承太郎 山崎" userId="f065ba058e752810" providerId="LiveId" clId="{EE6D8BB2-87BE-4943-94DC-E90E182A0523}" dt="2025-12-23T18:26:13.678" v="2757" actId="478"/>
-          <ac:cxnSpMkLst>
-            <pc:docMk/>
-            <pc:sldMk cId="2867371047" sldId="281"/>
-            <ac:cxnSpMk id="20" creationId="{2B680050-5A7D-0F9F-3A72-587DBF0CAA6F}"/>
-          </ac:cxnSpMkLst>
-        </pc:cxnChg>
-      </pc:sldChg>
-      <pc:sldChg chg="modSp add modAnim">
-        <pc:chgData name="承太郎 山崎" userId="f065ba058e752810" providerId="LiveId" clId="{EE6D8BB2-87BE-4943-94DC-E90E182A0523}" dt="2025-12-23T19:03:35.196" v="4090" actId="2711"/>
-        <pc:sldMkLst>
-          <pc:docMk/>
-          <pc:sldMk cId="27512861" sldId="282"/>
-        </pc:sldMkLst>
-        <pc:spChg chg="mod">
-          <ac:chgData name="承太郎 山崎" userId="f065ba058e752810" providerId="LiveId" clId="{EE6D8BB2-87BE-4943-94DC-E90E182A0523}" dt="2025-12-23T19:02:41.350" v="4055" actId="207"/>
-          <ac:spMkLst>
-            <pc:docMk/>
-            <pc:sldMk cId="27512861" sldId="282"/>
-            <ac:spMk id="23" creationId="{6A4763EA-784F-4B5A-F20D-7E3A46F0E7B1}"/>
-          </ac:spMkLst>
-        </pc:spChg>
-        <pc:spChg chg="mod">
-          <ac:chgData name="承太郎 山崎" userId="f065ba058e752810" providerId="LiveId" clId="{EE6D8BB2-87BE-4943-94DC-E90E182A0523}" dt="2025-12-23T19:02:41.350" v="4055" actId="207"/>
-          <ac:spMkLst>
-            <pc:docMk/>
-            <pc:sldMk cId="27512861" sldId="282"/>
-            <ac:spMk id="24" creationId="{A144ED25-F496-AA1C-9381-1AEAD032B22D}"/>
-          </ac:spMkLst>
-        </pc:spChg>
-        <pc:spChg chg="mod">
-          <ac:chgData name="承太郎 山崎" userId="f065ba058e752810" providerId="LiveId" clId="{EE6D8BB2-87BE-4943-94DC-E90E182A0523}" dt="2025-12-23T19:03:35.196" v="4090" actId="2711"/>
-          <ac:spMkLst>
-            <pc:docMk/>
-            <pc:sldMk cId="27512861" sldId="282"/>
-            <ac:spMk id="25" creationId="{AD9EB868-2553-A8D5-FC55-11BA73F92166}"/>
-          </ac:spMkLst>
-        </pc:spChg>
-        <pc:spChg chg="mod">
-          <ac:chgData name="承太郎 山崎" userId="f065ba058e752810" providerId="LiveId" clId="{EE6D8BB2-87BE-4943-94DC-E90E182A0523}" dt="2025-12-23T19:02:41.350" v="4055" actId="207"/>
-          <ac:spMkLst>
-            <pc:docMk/>
-            <pc:sldMk cId="27512861" sldId="282"/>
-            <ac:spMk id="26" creationId="{C9D456D0-4CDF-1193-86BB-AA8BD85818AC}"/>
-          </ac:spMkLst>
-        </pc:spChg>
-        <pc:spChg chg="mod">
-          <ac:chgData name="承太郎 山崎" userId="f065ba058e752810" providerId="LiveId" clId="{EE6D8BB2-87BE-4943-94DC-E90E182A0523}" dt="2025-12-23T19:02:41.350" v="4055" actId="207"/>
-          <ac:spMkLst>
-            <pc:docMk/>
-            <pc:sldMk cId="27512861" sldId="282"/>
-            <ac:spMk id="28" creationId="{85A77882-62D1-E922-95BD-10AE763829FA}"/>
-          </ac:spMkLst>
-        </pc:spChg>
-        <pc:spChg chg="mod">
-          <ac:chgData name="承太郎 山崎" userId="f065ba058e752810" providerId="LiveId" clId="{EE6D8BB2-87BE-4943-94DC-E90E182A0523}" dt="2025-12-23T19:02:41.350" v="4055" actId="207"/>
-          <ac:spMkLst>
-            <pc:docMk/>
-            <pc:sldMk cId="27512861" sldId="282"/>
-            <ac:spMk id="32" creationId="{8BBA027B-F06C-F461-EB1E-EE36AB5CD434}"/>
-          </ac:spMkLst>
-        </pc:spChg>
-        <pc:spChg chg="mod">
-          <ac:chgData name="承太郎 山崎" userId="f065ba058e752810" providerId="LiveId" clId="{EE6D8BB2-87BE-4943-94DC-E90E182A0523}" dt="2025-12-23T19:02:41.350" v="4055" actId="207"/>
-          <ac:spMkLst>
-            <pc:docMk/>
-            <pc:sldMk cId="27512861" sldId="282"/>
-            <ac:spMk id="33" creationId="{9A7CA8FE-C8AA-D059-C7DC-D8954A961E56}"/>
-          </ac:spMkLst>
-        </pc:spChg>
-        <pc:spChg chg="mod">
-          <ac:chgData name="承太郎 山崎" userId="f065ba058e752810" providerId="LiveId" clId="{EE6D8BB2-87BE-4943-94DC-E90E182A0523}" dt="2025-12-23T19:02:41.350" v="4055" actId="207"/>
-          <ac:spMkLst>
-            <pc:docMk/>
-            <pc:sldMk cId="27512861" sldId="282"/>
-            <ac:spMk id="34" creationId="{A6364F59-09BC-B9E4-349D-22CBBDD5AFB9}"/>
-          </ac:spMkLst>
-        </pc:spChg>
-      </pc:sldChg>
-      <pc:sldChg chg="modSp add mod">
-        <pc:chgData name="承太郎 山崎" userId="f065ba058e752810" providerId="LiveId" clId="{EE6D8BB2-87BE-4943-94DC-E90E182A0523}" dt="2025-12-23T19:11:16.247" v="4292" actId="207"/>
-        <pc:sldMkLst>
-          <pc:docMk/>
-          <pc:sldMk cId="470406599" sldId="283"/>
-        </pc:sldMkLst>
-        <pc:spChg chg="mod">
-          <ac:chgData name="承太郎 山崎" userId="f065ba058e752810" providerId="LiveId" clId="{EE6D8BB2-87BE-4943-94DC-E90E182A0523}" dt="2025-12-23T19:11:16.247" v="4292" actId="207"/>
-          <ac:spMkLst>
-            <pc:docMk/>
-            <pc:sldMk cId="470406599" sldId="283"/>
-            <ac:spMk id="14" creationId="{4BF15CB3-AE8E-C1CF-A074-C01805D23E3B}"/>
-          </ac:spMkLst>
-        </pc:spChg>
-      </pc:sldChg>
-    </pc:docChg>
-  </pc:docChgLst>
-  <pc:docChgLst>
     <pc:chgData name="承太郎 山崎" userId="f065ba058e752810" providerId="LiveId" clId="{3B8B9E92-5D31-4345-BE2F-F8EEC2F73A79}"/>
     <pc:docChg chg="undo redo custSel addSld delSld modSld sldOrd modMainMaster">
       <pc:chgData name="承太郎 山崎" userId="f065ba058e752810" providerId="LiveId" clId="{3B8B9E92-5D31-4345-BE2F-F8EEC2F73A79}" dt="2025-12-24T01:50:01.159" v="21667" actId="1036"/>
@@ -2168,6 +790,1385 @@
           </pc:cxnChg>
         </pc:sldLayoutChg>
       </pc:sldMasterChg>
+    </pc:docChg>
+  </pc:docChgLst>
+  <pc:docChgLst>
+    <pc:chgData name="承太郎 山崎" userId="f065ba058e752810" providerId="LiveId" clId="{EE6D8BB2-87BE-4943-94DC-E90E182A0523}"/>
+    <pc:docChg chg="undo custSel addSld delSld modSld">
+      <pc:chgData name="承太郎 山崎" userId="f065ba058e752810" providerId="LiveId" clId="{EE6D8BB2-87BE-4943-94DC-E90E182A0523}" dt="2025-12-23T19:11:16.247" v="4292" actId="207"/>
+      <pc:docMkLst>
+        <pc:docMk/>
+      </pc:docMkLst>
+      <pc:sldChg chg="addSp delSp modSp mod">
+        <pc:chgData name="承太郎 山崎" userId="f065ba058e752810" providerId="LiveId" clId="{EE6D8BB2-87BE-4943-94DC-E90E182A0523}" dt="2025-12-23T19:01:10.535" v="4014" actId="2711"/>
+        <pc:sldMkLst>
+          <pc:docMk/>
+          <pc:sldMk cId="2574879856" sldId="258"/>
+        </pc:sldMkLst>
+        <pc:spChg chg="add del">
+          <ac:chgData name="承太郎 山崎" userId="f065ba058e752810" providerId="LiveId" clId="{EE6D8BB2-87BE-4943-94DC-E90E182A0523}" dt="2025-12-23T17:11:47.172" v="1131" actId="478"/>
+          <ac:spMkLst>
+            <pc:docMk/>
+            <pc:sldMk cId="2574879856" sldId="258"/>
+            <ac:spMk id="3" creationId="{C2A48E4D-A4DD-CFCF-E789-D2284C128CFB}"/>
+          </ac:spMkLst>
+        </pc:spChg>
+        <pc:spChg chg="add del">
+          <ac:chgData name="承太郎 山崎" userId="f065ba058e752810" providerId="LiveId" clId="{EE6D8BB2-87BE-4943-94DC-E90E182A0523}" dt="2025-12-23T17:11:55.524" v="1133" actId="478"/>
+          <ac:spMkLst>
+            <pc:docMk/>
+            <pc:sldMk cId="2574879856" sldId="258"/>
+            <ac:spMk id="5" creationId="{47C9ED75-F894-4745-5F54-6B28F46F8FB1}"/>
+          </ac:spMkLst>
+        </pc:spChg>
+        <pc:spChg chg="mod">
+          <ac:chgData name="承太郎 山崎" userId="f065ba058e752810" providerId="LiveId" clId="{EE6D8BB2-87BE-4943-94DC-E90E182A0523}" dt="2025-12-23T19:01:10.535" v="4014" actId="2711"/>
+          <ac:spMkLst>
+            <pc:docMk/>
+            <pc:sldMk cId="2574879856" sldId="258"/>
+            <ac:spMk id="25" creationId="{4C640862-EDA7-274C-C18E-46B040D772A0}"/>
+          </ac:spMkLst>
+        </pc:spChg>
+        <pc:picChg chg="add del mod ord">
+          <ac:chgData name="承太郎 山崎" userId="f065ba058e752810" providerId="LiveId" clId="{EE6D8BB2-87BE-4943-94DC-E90E182A0523}" dt="2025-12-23T17:12:37.764" v="1145" actId="478"/>
+          <ac:picMkLst>
+            <pc:docMk/>
+            <pc:sldMk cId="2574879856" sldId="258"/>
+            <ac:picMk id="7" creationId="{8072AECB-DAD3-894C-1F05-0D4AF7A707FC}"/>
+          </ac:picMkLst>
+        </pc:picChg>
+      </pc:sldChg>
+      <pc:sldChg chg="addSp delSp modSp mod">
+        <pc:chgData name="承太郎 山崎" userId="f065ba058e752810" providerId="LiveId" clId="{EE6D8BB2-87BE-4943-94DC-E90E182A0523}" dt="2025-12-23T19:05:03.215" v="4126" actId="1036"/>
+        <pc:sldMkLst>
+          <pc:docMk/>
+          <pc:sldMk cId="494613671" sldId="259"/>
+        </pc:sldMkLst>
+        <pc:spChg chg="add mod">
+          <ac:chgData name="承太郎 山崎" userId="f065ba058e752810" providerId="LiveId" clId="{EE6D8BB2-87BE-4943-94DC-E90E182A0523}" dt="2025-12-23T17:28:31.732" v="1517" actId="1037"/>
+          <ac:spMkLst>
+            <pc:docMk/>
+            <pc:sldMk cId="494613671" sldId="259"/>
+            <ac:spMk id="2" creationId="{5A6A2002-16C8-EC2E-0A80-1E4658F9F006}"/>
+          </ac:spMkLst>
+        </pc:spChg>
+        <pc:spChg chg="add mod">
+          <ac:chgData name="承太郎 山崎" userId="f065ba058e752810" providerId="LiveId" clId="{EE6D8BB2-87BE-4943-94DC-E90E182A0523}" dt="2025-12-23T17:28:31.732" v="1517" actId="1037"/>
+          <ac:spMkLst>
+            <pc:docMk/>
+            <pc:sldMk cId="494613671" sldId="259"/>
+            <ac:spMk id="3" creationId="{8FE1E699-7B2C-07EC-2E6E-AD4E7595A92E}"/>
+          </ac:spMkLst>
+        </pc:spChg>
+        <pc:spChg chg="add mod">
+          <ac:chgData name="承太郎 山崎" userId="f065ba058e752810" providerId="LiveId" clId="{EE6D8BB2-87BE-4943-94DC-E90E182A0523}" dt="2025-12-23T17:28:31.732" v="1517" actId="1037"/>
+          <ac:spMkLst>
+            <pc:docMk/>
+            <pc:sldMk cId="494613671" sldId="259"/>
+            <ac:spMk id="10" creationId="{A2120763-CF22-8A57-7613-9F7709C0A6D4}"/>
+          </ac:spMkLst>
+        </pc:spChg>
+        <pc:spChg chg="add mod">
+          <ac:chgData name="承太郎 山崎" userId="f065ba058e752810" providerId="LiveId" clId="{EE6D8BB2-87BE-4943-94DC-E90E182A0523}" dt="2025-12-23T17:24:56.910" v="1427"/>
+          <ac:spMkLst>
+            <pc:docMk/>
+            <pc:sldMk cId="494613671" sldId="259"/>
+            <ac:spMk id="11" creationId="{95602894-9341-579E-7ECF-D75EEF15329D}"/>
+          </ac:spMkLst>
+        </pc:spChg>
+        <pc:spChg chg="mod">
+          <ac:chgData name="承太郎 山崎" userId="f065ba058e752810" providerId="LiveId" clId="{EE6D8BB2-87BE-4943-94DC-E90E182A0523}" dt="2025-12-23T17:26:42.015" v="1463" actId="404"/>
+          <ac:spMkLst>
+            <pc:docMk/>
+            <pc:sldMk cId="494613671" sldId="259"/>
+            <ac:spMk id="12" creationId="{DEA3B902-27AA-29F2-473B-BDC50437AF7B}"/>
+          </ac:spMkLst>
+        </pc:spChg>
+        <pc:spChg chg="del mod">
+          <ac:chgData name="承太郎 山崎" userId="f065ba058e752810" providerId="LiveId" clId="{EE6D8BB2-87BE-4943-94DC-E90E182A0523}" dt="2025-12-23T17:24:52.420" v="1426" actId="478"/>
+          <ac:spMkLst>
+            <pc:docMk/>
+            <pc:sldMk cId="494613671" sldId="259"/>
+            <ac:spMk id="15" creationId="{83D8CDC1-A01F-D384-EA59-5B03223DEB29}"/>
+          </ac:spMkLst>
+        </pc:spChg>
+        <pc:spChg chg="add mod">
+          <ac:chgData name="承太郎 山崎" userId="f065ba058e752810" providerId="LiveId" clId="{EE6D8BB2-87BE-4943-94DC-E90E182A0523}" dt="2025-12-23T19:04:48.888" v="4113" actId="207"/>
+          <ac:spMkLst>
+            <pc:docMk/>
+            <pc:sldMk cId="494613671" sldId="259"/>
+            <ac:spMk id="18" creationId="{1FD247AD-F865-2658-16A0-4E9F7D21EE93}"/>
+          </ac:spMkLst>
+        </pc:spChg>
+        <pc:spChg chg="mod">
+          <ac:chgData name="承太郎 山崎" userId="f065ba058e752810" providerId="LiveId" clId="{EE6D8BB2-87BE-4943-94DC-E90E182A0523}" dt="2025-12-23T17:28:31.732" v="1517" actId="1037"/>
+          <ac:spMkLst>
+            <pc:docMk/>
+            <pc:sldMk cId="494613671" sldId="259"/>
+            <ac:spMk id="19" creationId="{6301626E-5D2C-7AC4-CC5A-336513BFA25A}"/>
+          </ac:spMkLst>
+        </pc:spChg>
+        <pc:spChg chg="del">
+          <ac:chgData name="承太郎 山崎" userId="f065ba058e752810" providerId="LiveId" clId="{EE6D8BB2-87BE-4943-94DC-E90E182A0523}" dt="2025-12-23T17:13:01.779" v="1147" actId="478"/>
+          <ac:spMkLst>
+            <pc:docMk/>
+            <pc:sldMk cId="494613671" sldId="259"/>
+            <ac:spMk id="20" creationId="{3CD77278-0916-DCA9-C11F-14AD185711EC}"/>
+          </ac:spMkLst>
+        </pc:spChg>
+        <pc:spChg chg="mod">
+          <ac:chgData name="承太郎 山崎" userId="f065ba058e752810" providerId="LiveId" clId="{EE6D8BB2-87BE-4943-94DC-E90E182A0523}" dt="2025-12-23T19:05:03.215" v="4126" actId="1036"/>
+          <ac:spMkLst>
+            <pc:docMk/>
+            <pc:sldMk cId="494613671" sldId="259"/>
+            <ac:spMk id="25" creationId="{DDC4373B-F5C3-82B6-46CE-4DC3F2E72984}"/>
+          </ac:spMkLst>
+        </pc:spChg>
+        <pc:spChg chg="del">
+          <ac:chgData name="承太郎 山崎" userId="f065ba058e752810" providerId="LiveId" clId="{EE6D8BB2-87BE-4943-94DC-E90E182A0523}" dt="2025-12-23T17:13:01.779" v="1147" actId="478"/>
+          <ac:spMkLst>
+            <pc:docMk/>
+            <pc:sldMk cId="494613671" sldId="259"/>
+            <ac:spMk id="26" creationId="{CD37BD79-8FB1-720E-9684-0125F968B432}"/>
+          </ac:spMkLst>
+        </pc:spChg>
+        <pc:spChg chg="del">
+          <ac:chgData name="承太郎 山崎" userId="f065ba058e752810" providerId="LiveId" clId="{EE6D8BB2-87BE-4943-94DC-E90E182A0523}" dt="2025-12-23T17:13:01.779" v="1147" actId="478"/>
+          <ac:spMkLst>
+            <pc:docMk/>
+            <pc:sldMk cId="494613671" sldId="259"/>
+            <ac:spMk id="28" creationId="{5376CF83-1358-2DFD-E36F-71370616DF02}"/>
+          </ac:spMkLst>
+        </pc:spChg>
+        <pc:spChg chg="del mod">
+          <ac:chgData name="承太郎 山崎" userId="f065ba058e752810" providerId="LiveId" clId="{EE6D8BB2-87BE-4943-94DC-E90E182A0523}" dt="2025-12-23T17:28:18.536" v="1510" actId="478"/>
+          <ac:spMkLst>
+            <pc:docMk/>
+            <pc:sldMk cId="494613671" sldId="259"/>
+            <ac:spMk id="29" creationId="{E17C987A-A550-1C54-90F4-63E1A6B503CC}"/>
+          </ac:spMkLst>
+        </pc:spChg>
+        <pc:spChg chg="del">
+          <ac:chgData name="承太郎 山崎" userId="f065ba058e752810" providerId="LiveId" clId="{EE6D8BB2-87BE-4943-94DC-E90E182A0523}" dt="2025-12-23T17:13:01.779" v="1147" actId="478"/>
+          <ac:spMkLst>
+            <pc:docMk/>
+            <pc:sldMk cId="494613671" sldId="259"/>
+            <ac:spMk id="30" creationId="{6A7008CC-FC66-1A8F-1869-37BBD0C99D52}"/>
+          </ac:spMkLst>
+        </pc:spChg>
+        <pc:picChg chg="add del mod">
+          <ac:chgData name="承太郎 山崎" userId="f065ba058e752810" providerId="LiveId" clId="{EE6D8BB2-87BE-4943-94DC-E90E182A0523}" dt="2025-12-23T17:32:52.593" v="1582" actId="478"/>
+          <ac:picMkLst>
+            <pc:docMk/>
+            <pc:sldMk cId="494613671" sldId="259"/>
+            <ac:picMk id="8" creationId="{848A8B29-800C-3BC2-8647-E2034BD6B551}"/>
+          </ac:picMkLst>
+        </pc:picChg>
+        <pc:picChg chg="add del mod">
+          <ac:chgData name="承太郎 山崎" userId="f065ba058e752810" providerId="LiveId" clId="{EE6D8BB2-87BE-4943-94DC-E90E182A0523}" dt="2025-12-23T17:32:52.125" v="1581" actId="478"/>
+          <ac:picMkLst>
+            <pc:docMk/>
+            <pc:sldMk cId="494613671" sldId="259"/>
+            <ac:picMk id="9" creationId="{48EC8850-41E9-839E-E0F4-AE562C88D6A4}"/>
+          </ac:picMkLst>
+        </pc:picChg>
+        <pc:picChg chg="add mod">
+          <ac:chgData name="承太郎 山崎" userId="f065ba058e752810" providerId="LiveId" clId="{EE6D8BB2-87BE-4943-94DC-E90E182A0523}" dt="2025-12-23T17:32:51.426" v="1580" actId="1076"/>
+          <ac:picMkLst>
+            <pc:docMk/>
+            <pc:sldMk cId="494613671" sldId="259"/>
+            <ac:picMk id="14" creationId="{70187111-A039-8636-60E7-67E4BE8157E0}"/>
+          </ac:picMkLst>
+        </pc:picChg>
+        <pc:picChg chg="mod">
+          <ac:chgData name="承太郎 山崎" userId="f065ba058e752810" providerId="LiveId" clId="{EE6D8BB2-87BE-4943-94DC-E90E182A0523}" dt="2025-12-23T17:30:56.855" v="1558" actId="1076"/>
+          <ac:picMkLst>
+            <pc:docMk/>
+            <pc:sldMk cId="494613671" sldId="259"/>
+            <ac:picMk id="17" creationId="{E8C8DDB6-4FCF-BC22-77A0-62C93EA6AC00}"/>
+          </ac:picMkLst>
+        </pc:picChg>
+        <pc:picChg chg="del mod ord">
+          <ac:chgData name="承太郎 山崎" userId="f065ba058e752810" providerId="LiveId" clId="{EE6D8BB2-87BE-4943-94DC-E90E182A0523}" dt="2025-12-23T17:28:16.696" v="1509" actId="478"/>
+          <ac:picMkLst>
+            <pc:docMk/>
+            <pc:sldMk cId="494613671" sldId="259"/>
+            <ac:picMk id="22" creationId="{D651834A-6DCC-21A5-6F26-09C1484BE15E}"/>
+          </ac:picMkLst>
+        </pc:picChg>
+        <pc:picChg chg="del">
+          <ac:chgData name="承太郎 山崎" userId="f065ba058e752810" providerId="LiveId" clId="{EE6D8BB2-87BE-4943-94DC-E90E182A0523}" dt="2025-12-23T17:13:01.779" v="1147" actId="478"/>
+          <ac:picMkLst>
+            <pc:docMk/>
+            <pc:sldMk cId="494613671" sldId="259"/>
+            <ac:picMk id="24" creationId="{8AB3397D-190A-9E4D-BA3F-CE00E3BD20CD}"/>
+          </ac:picMkLst>
+        </pc:picChg>
+        <pc:picChg chg="del">
+          <ac:chgData name="承太郎 山崎" userId="f065ba058e752810" providerId="LiveId" clId="{EE6D8BB2-87BE-4943-94DC-E90E182A0523}" dt="2025-12-23T17:13:01.779" v="1147" actId="478"/>
+          <ac:picMkLst>
+            <pc:docMk/>
+            <pc:sldMk cId="494613671" sldId="259"/>
+            <ac:picMk id="1028" creationId="{4D79B528-47C1-BEA7-7505-3C7E2DBB623A}"/>
+          </ac:picMkLst>
+        </pc:picChg>
+        <pc:picChg chg="add mod">
+          <ac:chgData name="承太郎 山崎" userId="f065ba058e752810" providerId="LiveId" clId="{EE6D8BB2-87BE-4943-94DC-E90E182A0523}" dt="2025-12-23T17:28:31.732" v="1517" actId="1037"/>
+          <ac:picMkLst>
+            <pc:docMk/>
+            <pc:sldMk cId="494613671" sldId="259"/>
+            <ac:picMk id="2050" creationId="{F08762CA-9D8E-1112-675A-FB2BD7650329}"/>
+          </ac:picMkLst>
+        </pc:picChg>
+        <pc:picChg chg="add mod">
+          <ac:chgData name="承太郎 山崎" userId="f065ba058e752810" providerId="LiveId" clId="{EE6D8BB2-87BE-4943-94DC-E90E182A0523}" dt="2025-12-23T17:28:31.732" v="1517" actId="1037"/>
+          <ac:picMkLst>
+            <pc:docMk/>
+            <pc:sldMk cId="494613671" sldId="259"/>
+            <ac:picMk id="2052" creationId="{CEA28437-0192-A66E-E6A7-503C049A1198}"/>
+          </ac:picMkLst>
+        </pc:picChg>
+        <pc:cxnChg chg="add del mod">
+          <ac:chgData name="承太郎 山崎" userId="f065ba058e752810" providerId="LiveId" clId="{EE6D8BB2-87BE-4943-94DC-E90E182A0523}" dt="2025-12-23T17:19:42.576" v="1268" actId="478"/>
+          <ac:cxnSpMkLst>
+            <pc:docMk/>
+            <pc:sldMk cId="494613671" sldId="259"/>
+            <ac:cxnSpMk id="6" creationId="{726BDBAF-A913-338C-5C94-9A1E6622E43F}"/>
+          </ac:cxnSpMkLst>
+        </pc:cxnChg>
+      </pc:sldChg>
+      <pc:sldChg chg="modSp mod">
+        <pc:chgData name="承太郎 山崎" userId="f065ba058e752810" providerId="LiveId" clId="{EE6D8BB2-87BE-4943-94DC-E90E182A0523}" dt="2025-12-23T18:51:05.553" v="3733" actId="1035"/>
+        <pc:sldMkLst>
+          <pc:docMk/>
+          <pc:sldMk cId="1985126989" sldId="269"/>
+        </pc:sldMkLst>
+        <pc:spChg chg="mod">
+          <ac:chgData name="承太郎 山崎" userId="f065ba058e752810" providerId="LiveId" clId="{EE6D8BB2-87BE-4943-94DC-E90E182A0523}" dt="2025-12-23T18:10:12.986" v="2519" actId="1076"/>
+          <ac:spMkLst>
+            <pc:docMk/>
+            <pc:sldMk cId="1985126989" sldId="269"/>
+            <ac:spMk id="8" creationId="{9A0D667E-38E9-715B-DC10-28BF31D00B6F}"/>
+          </ac:spMkLst>
+        </pc:spChg>
+        <pc:spChg chg="mod">
+          <ac:chgData name="承太郎 山崎" userId="f065ba058e752810" providerId="LiveId" clId="{EE6D8BB2-87BE-4943-94DC-E90E182A0523}" dt="2025-12-23T18:51:05.553" v="3733" actId="1035"/>
+          <ac:spMkLst>
+            <pc:docMk/>
+            <pc:sldMk cId="1985126989" sldId="269"/>
+            <ac:spMk id="14" creationId="{C56B4F15-D9F1-A0FF-44E3-5D831B98566B}"/>
+          </ac:spMkLst>
+        </pc:spChg>
+      </pc:sldChg>
+      <pc:sldChg chg="addSp delSp modSp mod">
+        <pc:chgData name="承太郎 山崎" userId="f065ba058e752810" providerId="LiveId" clId="{EE6D8BB2-87BE-4943-94DC-E90E182A0523}" dt="2025-12-23T18:26:18.749" v="2759" actId="1035"/>
+        <pc:sldMkLst>
+          <pc:docMk/>
+          <pc:sldMk cId="252509247" sldId="270"/>
+        </pc:sldMkLst>
+        <pc:spChg chg="mod">
+          <ac:chgData name="承太郎 山崎" userId="f065ba058e752810" providerId="LiveId" clId="{EE6D8BB2-87BE-4943-94DC-E90E182A0523}" dt="2025-12-23T18:26:05.795" v="2754" actId="403"/>
+          <ac:spMkLst>
+            <pc:docMk/>
+            <pc:sldMk cId="252509247" sldId="270"/>
+            <ac:spMk id="2" creationId="{37DF6DC2-3A56-CF1F-4FD0-C7B3A5EF1F77}"/>
+          </ac:spMkLst>
+        </pc:spChg>
+        <pc:spChg chg="del">
+          <ac:chgData name="承太郎 山崎" userId="f065ba058e752810" providerId="LiveId" clId="{EE6D8BB2-87BE-4943-94DC-E90E182A0523}" dt="2025-12-23T18:12:28.928" v="2554" actId="478"/>
+          <ac:spMkLst>
+            <pc:docMk/>
+            <pc:sldMk cId="252509247" sldId="270"/>
+            <ac:spMk id="3" creationId="{14607BEB-9AAC-EC9F-2F83-887852E68B88}"/>
+          </ac:spMkLst>
+        </pc:spChg>
+        <pc:spChg chg="mod">
+          <ac:chgData name="承太郎 山崎" userId="f065ba058e752810" providerId="LiveId" clId="{EE6D8BB2-87BE-4943-94DC-E90E182A0523}" dt="2025-12-23T18:18:44.349" v="2656" actId="1036"/>
+          <ac:spMkLst>
+            <pc:docMk/>
+            <pc:sldMk cId="252509247" sldId="270"/>
+            <ac:spMk id="5" creationId="{62275B28-395F-C850-F659-0F2E6B331888}"/>
+          </ac:spMkLst>
+        </pc:spChg>
+        <pc:spChg chg="mod">
+          <ac:chgData name="承太郎 山崎" userId="f065ba058e752810" providerId="LiveId" clId="{EE6D8BB2-87BE-4943-94DC-E90E182A0523}" dt="2025-12-23T18:26:18.749" v="2759" actId="1035"/>
+          <ac:spMkLst>
+            <pc:docMk/>
+            <pc:sldMk cId="252509247" sldId="270"/>
+            <ac:spMk id="6" creationId="{38CE5C71-0006-BF0E-0ED4-58B5AF8AD281}"/>
+          </ac:spMkLst>
+        </pc:spChg>
+        <pc:spChg chg="del">
+          <ac:chgData name="承太郎 山崎" userId="f065ba058e752810" providerId="LiveId" clId="{EE6D8BB2-87BE-4943-94DC-E90E182A0523}" dt="2025-12-23T18:12:48.717" v="2558" actId="478"/>
+          <ac:spMkLst>
+            <pc:docMk/>
+            <pc:sldMk cId="252509247" sldId="270"/>
+            <ac:spMk id="7" creationId="{EF82F387-8C80-3CF6-5B02-83FCC6C58D4B}"/>
+          </ac:spMkLst>
+        </pc:spChg>
+        <pc:spChg chg="del">
+          <ac:chgData name="承太郎 山崎" userId="f065ba058e752810" providerId="LiveId" clId="{EE6D8BB2-87BE-4943-94DC-E90E182A0523}" dt="2025-12-23T18:12:28.928" v="2554" actId="478"/>
+          <ac:spMkLst>
+            <pc:docMk/>
+            <pc:sldMk cId="252509247" sldId="270"/>
+            <ac:spMk id="8" creationId="{E1A156FC-11C1-6751-3FDA-F3A1ACA89DE1}"/>
+          </ac:spMkLst>
+        </pc:spChg>
+        <pc:spChg chg="mod">
+          <ac:chgData name="承太郎 山崎" userId="f065ba058e752810" providerId="LiveId" clId="{EE6D8BB2-87BE-4943-94DC-E90E182A0523}" dt="2025-12-23T18:18:44.349" v="2656" actId="1036"/>
+          <ac:spMkLst>
+            <pc:docMk/>
+            <pc:sldMk cId="252509247" sldId="270"/>
+            <ac:spMk id="10" creationId="{40C1A2CE-2268-4BA3-F341-A8B99E54CDEF}"/>
+          </ac:spMkLst>
+        </pc:spChg>
+        <pc:picChg chg="add del mod modCrop">
+          <ac:chgData name="承太郎 山崎" userId="f065ba058e752810" providerId="LiveId" clId="{EE6D8BB2-87BE-4943-94DC-E90E182A0523}" dt="2025-12-23T18:19:24.713" v="2669" actId="478"/>
+          <ac:picMkLst>
+            <pc:docMk/>
+            <pc:sldMk cId="252509247" sldId="270"/>
+            <ac:picMk id="11" creationId="{1BD17B49-00BA-660F-F0C4-3913CDA4AAB0}"/>
+          </ac:picMkLst>
+        </pc:picChg>
+        <pc:picChg chg="add mod modCrop">
+          <ac:chgData name="承太郎 山崎" userId="f065ba058e752810" providerId="LiveId" clId="{EE6D8BB2-87BE-4943-94DC-E90E182A0523}" dt="2025-12-23T18:23:12.138" v="2708" actId="1076"/>
+          <ac:picMkLst>
+            <pc:docMk/>
+            <pc:sldMk cId="252509247" sldId="270"/>
+            <ac:picMk id="13" creationId="{D27687B5-A048-A8B3-D15C-9C778015819F}"/>
+          </ac:picMkLst>
+        </pc:picChg>
+        <pc:picChg chg="add mod modCrop">
+          <ac:chgData name="承太郎 山崎" userId="f065ba058e752810" providerId="LiveId" clId="{EE6D8BB2-87BE-4943-94DC-E90E182A0523}" dt="2025-12-23T18:23:22.726" v="2714" actId="1037"/>
+          <ac:picMkLst>
+            <pc:docMk/>
+            <pc:sldMk cId="252509247" sldId="270"/>
+            <ac:picMk id="15" creationId="{18B817DF-51E2-4697-13C6-3CCBB57C50A4}"/>
+          </ac:picMkLst>
+        </pc:picChg>
+        <pc:picChg chg="add mod modCrop">
+          <ac:chgData name="承太郎 山崎" userId="f065ba058e752810" providerId="LiveId" clId="{EE6D8BB2-87BE-4943-94DC-E90E182A0523}" dt="2025-12-23T18:23:02.602" v="2706" actId="1076"/>
+          <ac:picMkLst>
+            <pc:docMk/>
+            <pc:sldMk cId="252509247" sldId="270"/>
+            <ac:picMk id="17" creationId="{0F4FE4D5-4D9E-82B8-10CF-8F9F8D811B7B}"/>
+          </ac:picMkLst>
+        </pc:picChg>
+        <pc:cxnChg chg="add mod">
+          <ac:chgData name="承太郎 山崎" userId="f065ba058e752810" providerId="LiveId" clId="{EE6D8BB2-87BE-4943-94DC-E90E182A0523}" dt="2025-12-23T18:24:27.223" v="2721" actId="208"/>
+          <ac:cxnSpMkLst>
+            <pc:docMk/>
+            <pc:sldMk cId="252509247" sldId="270"/>
+            <ac:cxnSpMk id="18" creationId="{395118A6-5912-4DBD-7AE4-F49624CE2465}"/>
+          </ac:cxnSpMkLst>
+        </pc:cxnChg>
+        <pc:cxnChg chg="add del mod">
+          <ac:chgData name="承太郎 山崎" userId="f065ba058e752810" providerId="LiveId" clId="{EE6D8BB2-87BE-4943-94DC-E90E182A0523}" dt="2025-12-23T18:24:40.686" v="2722" actId="478"/>
+          <ac:cxnSpMkLst>
+            <pc:docMk/>
+            <pc:sldMk cId="252509247" sldId="270"/>
+            <ac:cxnSpMk id="19" creationId="{40ACE6B6-53D2-0452-3326-E6B93ADEF43D}"/>
+          </ac:cxnSpMkLst>
+        </pc:cxnChg>
+        <pc:cxnChg chg="add mod">
+          <ac:chgData name="承太郎 山崎" userId="f065ba058e752810" providerId="LiveId" clId="{EE6D8BB2-87BE-4943-94DC-E90E182A0523}" dt="2025-12-23T18:24:55.869" v="2726" actId="1038"/>
+          <ac:cxnSpMkLst>
+            <pc:docMk/>
+            <pc:sldMk cId="252509247" sldId="270"/>
+            <ac:cxnSpMk id="20" creationId="{2D8A9046-23A8-AF5C-371D-919E33D85E36}"/>
+          </ac:cxnSpMkLst>
+        </pc:cxnChg>
+      </pc:sldChg>
+      <pc:sldChg chg="addSp delSp modSp mod">
+        <pc:chgData name="承太郎 山崎" userId="f065ba058e752810" providerId="LiveId" clId="{EE6D8BB2-87BE-4943-94DC-E90E182A0523}" dt="2025-12-23T18:48:41.424" v="3706" actId="20577"/>
+        <pc:sldMkLst>
+          <pc:docMk/>
+          <pc:sldMk cId="2841494129" sldId="273"/>
+        </pc:sldMkLst>
+        <pc:spChg chg="mod">
+          <ac:chgData name="承太郎 山崎" userId="f065ba058e752810" providerId="LiveId" clId="{EE6D8BB2-87BE-4943-94DC-E90E182A0523}" dt="2025-12-23T18:44:40.055" v="3497" actId="20577"/>
+          <ac:spMkLst>
+            <pc:docMk/>
+            <pc:sldMk cId="2841494129" sldId="273"/>
+            <ac:spMk id="3" creationId="{1D39C5EC-3B2F-6381-CD48-3E0FA32E9FF8}"/>
+          </ac:spMkLst>
+        </pc:spChg>
+        <pc:spChg chg="del">
+          <ac:chgData name="承太郎 山崎" userId="f065ba058e752810" providerId="LiveId" clId="{EE6D8BB2-87BE-4943-94DC-E90E182A0523}" dt="2025-12-23T18:36:17.165" v="3117" actId="478"/>
+          <ac:spMkLst>
+            <pc:docMk/>
+            <pc:sldMk cId="2841494129" sldId="273"/>
+            <ac:spMk id="7" creationId="{698EAA6C-17ED-D698-3A8B-BDBA0B369567}"/>
+          </ac:spMkLst>
+        </pc:spChg>
+        <pc:spChg chg="add del mod">
+          <ac:chgData name="承太郎 山崎" userId="f065ba058e752810" providerId="LiveId" clId="{EE6D8BB2-87BE-4943-94DC-E90E182A0523}" dt="2025-12-23T18:45:21.698" v="3509" actId="478"/>
+          <ac:spMkLst>
+            <pc:docMk/>
+            <pc:sldMk cId="2841494129" sldId="273"/>
+            <ac:spMk id="8" creationId="{9098A273-781F-E75D-CD97-D1F78756258C}"/>
+          </ac:spMkLst>
+        </pc:spChg>
+        <pc:spChg chg="add mod">
+          <ac:chgData name="承太郎 山崎" userId="f065ba058e752810" providerId="LiveId" clId="{EE6D8BB2-87BE-4943-94DC-E90E182A0523}" dt="2025-12-23T18:47:14.363" v="3581" actId="1035"/>
+          <ac:spMkLst>
+            <pc:docMk/>
+            <pc:sldMk cId="2841494129" sldId="273"/>
+            <ac:spMk id="9" creationId="{EE2A85BB-B805-A7E5-5000-B8DEFDA60583}"/>
+          </ac:spMkLst>
+        </pc:spChg>
+        <pc:spChg chg="add mod">
+          <ac:chgData name="承太郎 山崎" userId="f065ba058e752810" providerId="LiveId" clId="{EE6D8BB2-87BE-4943-94DC-E90E182A0523}" dt="2025-12-23T18:47:20.586" v="3583" actId="1035"/>
+          <ac:spMkLst>
+            <pc:docMk/>
+            <pc:sldMk cId="2841494129" sldId="273"/>
+            <ac:spMk id="10" creationId="{47C21C68-FB9F-5535-DCC9-4B61A4036CC0}"/>
+          </ac:spMkLst>
+        </pc:spChg>
+        <pc:spChg chg="add del mod">
+          <ac:chgData name="承太郎 山崎" userId="f065ba058e752810" providerId="LiveId" clId="{EE6D8BB2-87BE-4943-94DC-E90E182A0523}" dt="2025-12-23T18:46:21.818" v="3540"/>
+          <ac:spMkLst>
+            <pc:docMk/>
+            <pc:sldMk cId="2841494129" sldId="273"/>
+            <ac:spMk id="12" creationId="{578B2687-3D04-BD38-B398-855347AD4D29}"/>
+          </ac:spMkLst>
+        </pc:spChg>
+        <pc:spChg chg="add mod">
+          <ac:chgData name="承太郎 山崎" userId="f065ba058e752810" providerId="LiveId" clId="{EE6D8BB2-87BE-4943-94DC-E90E182A0523}" dt="2025-12-23T18:43:11.477" v="3433" actId="571"/>
+          <ac:spMkLst>
+            <pc:docMk/>
+            <pc:sldMk cId="2841494129" sldId="273"/>
+            <ac:spMk id="13" creationId="{E508A012-B2DD-F89A-4F5F-67CD743DA112}"/>
+          </ac:spMkLst>
+        </pc:spChg>
+        <pc:spChg chg="add mod">
+          <ac:chgData name="承太郎 山崎" userId="f065ba058e752810" providerId="LiveId" clId="{EE6D8BB2-87BE-4943-94DC-E90E182A0523}" dt="2025-12-23T18:46:52.374" v="3564" actId="14100"/>
+          <ac:spMkLst>
+            <pc:docMk/>
+            <pc:sldMk cId="2841494129" sldId="273"/>
+            <ac:spMk id="14" creationId="{054D4BA8-1433-7193-49E0-049F04CF4800}"/>
+          </ac:spMkLst>
+        </pc:spChg>
+        <pc:spChg chg="add mod">
+          <ac:chgData name="承太郎 山崎" userId="f065ba058e752810" providerId="LiveId" clId="{EE6D8BB2-87BE-4943-94DC-E90E182A0523}" dt="2025-12-23T18:47:06.186" v="3579" actId="1036"/>
+          <ac:spMkLst>
+            <pc:docMk/>
+            <pc:sldMk cId="2841494129" sldId="273"/>
+            <ac:spMk id="15" creationId="{06B557A4-8E3F-1C05-9AE4-BA1D0343C56D}"/>
+          </ac:spMkLst>
+        </pc:spChg>
+        <pc:spChg chg="add del mod">
+          <ac:chgData name="承太郎 山崎" userId="f065ba058e752810" providerId="LiveId" clId="{EE6D8BB2-87BE-4943-94DC-E90E182A0523}" dt="2025-12-23T18:46:13.754" v="3537" actId="478"/>
+          <ac:spMkLst>
+            <pc:docMk/>
+            <pc:sldMk cId="2841494129" sldId="273"/>
+            <ac:spMk id="16" creationId="{951E2C62-1EC4-5540-BBB1-BE6267747B47}"/>
+          </ac:spMkLst>
+        </pc:spChg>
+        <pc:spChg chg="add mod">
+          <ac:chgData name="承太郎 山崎" userId="f065ba058e752810" providerId="LiveId" clId="{EE6D8BB2-87BE-4943-94DC-E90E182A0523}" dt="2025-12-23T18:48:41.424" v="3706" actId="20577"/>
+          <ac:spMkLst>
+            <pc:docMk/>
+            <pc:sldMk cId="2841494129" sldId="273"/>
+            <ac:spMk id="17" creationId="{DDA1D378-961C-7A15-F7DD-2019E55761FF}"/>
+          </ac:spMkLst>
+        </pc:spChg>
+      </pc:sldChg>
+      <pc:sldChg chg="delSp modSp del mod">
+        <pc:chgData name="承太郎 山崎" userId="f065ba058e752810" providerId="LiveId" clId="{EE6D8BB2-87BE-4943-94DC-E90E182A0523}" dt="2025-12-23T17:43:03.617" v="1790" actId="47"/>
+        <pc:sldMkLst>
+          <pc:docMk/>
+          <pc:sldMk cId="1201227305" sldId="274"/>
+        </pc:sldMkLst>
+        <pc:spChg chg="del">
+          <ac:chgData name="承太郎 山崎" userId="f065ba058e752810" providerId="LiveId" clId="{EE6D8BB2-87BE-4943-94DC-E90E182A0523}" dt="2025-12-23T17:28:48.180" v="1521" actId="478"/>
+          <ac:spMkLst>
+            <pc:docMk/>
+            <pc:sldMk cId="1201227305" sldId="274"/>
+            <ac:spMk id="9" creationId="{FA639227-A214-960B-55CC-FEED2B5E49D6}"/>
+          </ac:spMkLst>
+        </pc:spChg>
+        <pc:spChg chg="del">
+          <ac:chgData name="承太郎 山崎" userId="f065ba058e752810" providerId="LiveId" clId="{EE6D8BB2-87BE-4943-94DC-E90E182A0523}" dt="2025-12-23T17:28:48.180" v="1521" actId="478"/>
+          <ac:spMkLst>
+            <pc:docMk/>
+            <pc:sldMk cId="1201227305" sldId="274"/>
+            <ac:spMk id="16" creationId="{EBDEA05C-7BE7-C68E-8F6D-FDD067DEA1A5}"/>
+          </ac:spMkLst>
+        </pc:spChg>
+        <pc:spChg chg="del">
+          <ac:chgData name="承太郎 山崎" userId="f065ba058e752810" providerId="LiveId" clId="{EE6D8BB2-87BE-4943-94DC-E90E182A0523}" dt="2025-12-23T17:28:48.180" v="1521" actId="478"/>
+          <ac:spMkLst>
+            <pc:docMk/>
+            <pc:sldMk cId="1201227305" sldId="274"/>
+            <ac:spMk id="18" creationId="{710B3A2B-EEB6-8ECB-8E3B-2D1F258251A4}"/>
+          </ac:spMkLst>
+        </pc:spChg>
+        <pc:spChg chg="del">
+          <ac:chgData name="承太郎 山崎" userId="f065ba058e752810" providerId="LiveId" clId="{EE6D8BB2-87BE-4943-94DC-E90E182A0523}" dt="2025-12-23T17:28:48.180" v="1521" actId="478"/>
+          <ac:spMkLst>
+            <pc:docMk/>
+            <pc:sldMk cId="1201227305" sldId="274"/>
+            <ac:spMk id="21" creationId="{5812080B-6CE4-A1E7-DF65-0CC457AE25C1}"/>
+          </ac:spMkLst>
+        </pc:spChg>
+        <pc:spChg chg="mod">
+          <ac:chgData name="承太郎 山崎" userId="f065ba058e752810" providerId="LiveId" clId="{EE6D8BB2-87BE-4943-94DC-E90E182A0523}" dt="2025-12-23T17:40:28.857" v="1741" actId="14100"/>
+          <ac:spMkLst>
+            <pc:docMk/>
+            <pc:sldMk cId="1201227305" sldId="274"/>
+            <ac:spMk id="23" creationId="{3D4E6B45-5981-365A-DA5E-9525B4F884F7}"/>
+          </ac:spMkLst>
+        </pc:spChg>
+        <pc:picChg chg="del">
+          <ac:chgData name="承太郎 山崎" userId="f065ba058e752810" providerId="LiveId" clId="{EE6D8BB2-87BE-4943-94DC-E90E182A0523}" dt="2025-12-23T17:28:48.180" v="1521" actId="478"/>
+          <ac:picMkLst>
+            <pc:docMk/>
+            <pc:sldMk cId="1201227305" sldId="274"/>
+            <ac:picMk id="8" creationId="{7219844A-017F-BB54-14FE-08C3A7535483}"/>
+          </ac:picMkLst>
+        </pc:picChg>
+        <pc:picChg chg="del">
+          <ac:chgData name="承太郎 山崎" userId="f065ba058e752810" providerId="LiveId" clId="{EE6D8BB2-87BE-4943-94DC-E90E182A0523}" dt="2025-12-23T17:28:48.180" v="1521" actId="478"/>
+          <ac:picMkLst>
+            <pc:docMk/>
+            <pc:sldMk cId="1201227305" sldId="274"/>
+            <ac:picMk id="14" creationId="{FF3D8BCF-00E4-865A-D831-DD427CC8B59B}"/>
+          </ac:picMkLst>
+        </pc:picChg>
+      </pc:sldChg>
+      <pc:sldChg chg="addSp delSp modSp mod">
+        <pc:chgData name="承太郎 山崎" userId="f065ba058e752810" providerId="LiveId" clId="{EE6D8BB2-87BE-4943-94DC-E90E182A0523}" dt="2025-12-23T18:26:02.175" v="2752" actId="403"/>
+        <pc:sldMkLst>
+          <pc:docMk/>
+          <pc:sldMk cId="3794169852" sldId="275"/>
+        </pc:sldMkLst>
+        <pc:spChg chg="mod">
+          <ac:chgData name="承太郎 山崎" userId="f065ba058e752810" providerId="LiveId" clId="{EE6D8BB2-87BE-4943-94DC-E90E182A0523}" dt="2025-12-23T18:26:02.175" v="2752" actId="403"/>
+          <ac:spMkLst>
+            <pc:docMk/>
+            <pc:sldMk cId="3794169852" sldId="275"/>
+            <ac:spMk id="2" creationId="{37DF6DC2-3A56-CF1F-4FD0-C7B3A5EF1F77}"/>
+          </ac:spMkLst>
+        </pc:spChg>
+        <pc:spChg chg="mod">
+          <ac:chgData name="承太郎 山崎" userId="f065ba058e752810" providerId="LiveId" clId="{EE6D8BB2-87BE-4943-94DC-E90E182A0523}" dt="2025-12-23T18:16:24.397" v="2569" actId="1076"/>
+          <ac:spMkLst>
+            <pc:docMk/>
+            <pc:sldMk cId="3794169852" sldId="275"/>
+            <ac:spMk id="8" creationId="{FBFFE6C4-CCF4-B346-DF4D-C5F297560C0E}"/>
+          </ac:spMkLst>
+        </pc:spChg>
+        <pc:spChg chg="mod">
+          <ac:chgData name="承太郎 山崎" userId="f065ba058e752810" providerId="LiveId" clId="{EE6D8BB2-87BE-4943-94DC-E90E182A0523}" dt="2025-12-23T18:17:17.769" v="2637" actId="1076"/>
+          <ac:spMkLst>
+            <pc:docMk/>
+            <pc:sldMk cId="3794169852" sldId="275"/>
+            <ac:spMk id="11" creationId="{0B4FE377-16CA-78DA-D372-A924CB24DF50}"/>
+          </ac:spMkLst>
+        </pc:spChg>
+        <pc:picChg chg="del">
+          <ac:chgData name="承太郎 山崎" userId="f065ba058e752810" providerId="LiveId" clId="{EE6D8BB2-87BE-4943-94DC-E90E182A0523}" dt="2025-12-23T18:15:48.281" v="2559" actId="478"/>
+          <ac:picMkLst>
+            <pc:docMk/>
+            <pc:sldMk cId="3794169852" sldId="275"/>
+            <ac:picMk id="7" creationId="{FFC6302B-D808-39D9-53A2-C68B427F1C02}"/>
+          </ac:picMkLst>
+        </pc:picChg>
+        <pc:picChg chg="add mod">
+          <ac:chgData name="承太郎 山崎" userId="f065ba058e752810" providerId="LiveId" clId="{EE6D8BB2-87BE-4943-94DC-E90E182A0523}" dt="2025-12-23T18:16:03.182" v="2566" actId="1076"/>
+          <ac:picMkLst>
+            <pc:docMk/>
+            <pc:sldMk cId="3794169852" sldId="275"/>
+            <ac:picMk id="9" creationId="{3A4F80BB-DC23-2740-EBDE-4F015476C1E8}"/>
+          </ac:picMkLst>
+        </pc:picChg>
+      </pc:sldChg>
+      <pc:sldChg chg="addSp delSp modSp mod">
+        <pc:chgData name="承太郎 山崎" userId="f065ba058e752810" providerId="LiveId" clId="{EE6D8BB2-87BE-4943-94DC-E90E182A0523}" dt="2025-12-23T18:58:52.500" v="3980" actId="1036"/>
+        <pc:sldMkLst>
+          <pc:docMk/>
+          <pc:sldMk cId="409304608" sldId="277"/>
+        </pc:sldMkLst>
+        <pc:spChg chg="add del mod">
+          <ac:chgData name="承太郎 山崎" userId="f065ba058e752810" providerId="LiveId" clId="{EE6D8BB2-87BE-4943-94DC-E90E182A0523}" dt="2025-12-23T18:51:22.624" v="3737" actId="478"/>
+          <ac:spMkLst>
+            <pc:docMk/>
+            <pc:sldMk cId="409304608" sldId="277"/>
+            <ac:spMk id="5" creationId="{33063F91-6B87-899F-48BD-B3EE1B05A288}"/>
+          </ac:spMkLst>
+        </pc:spChg>
+        <pc:spChg chg="mod">
+          <ac:chgData name="承太郎 山崎" userId="f065ba058e752810" providerId="LiveId" clId="{EE6D8BB2-87BE-4943-94DC-E90E182A0523}" dt="2025-12-23T18:56:56.884" v="3941"/>
+          <ac:spMkLst>
+            <pc:docMk/>
+            <pc:sldMk cId="409304608" sldId="277"/>
+            <ac:spMk id="7" creationId="{CC356605-4991-C8AE-9A5D-140B7F49BD61}"/>
+          </ac:spMkLst>
+        </pc:spChg>
+        <pc:spChg chg="del mod">
+          <ac:chgData name="承太郎 山崎" userId="f065ba058e752810" providerId="LiveId" clId="{EE6D8BB2-87BE-4943-94DC-E90E182A0523}" dt="2025-12-23T18:49:09.426" v="3709" actId="478"/>
+          <ac:spMkLst>
+            <pc:docMk/>
+            <pc:sldMk cId="409304608" sldId="277"/>
+            <ac:spMk id="9" creationId="{3CB872B5-0ED0-6F41-ED04-B0E7BAD6A428}"/>
+          </ac:spMkLst>
+        </pc:spChg>
+        <pc:spChg chg="add mod">
+          <ac:chgData name="承太郎 山崎" userId="f065ba058e752810" providerId="LiveId" clId="{EE6D8BB2-87BE-4943-94DC-E90E182A0523}" dt="2025-12-23T18:58:50.249" v="3970" actId="1076"/>
+          <ac:spMkLst>
+            <pc:docMk/>
+            <pc:sldMk cId="409304608" sldId="277"/>
+            <ac:spMk id="10" creationId="{CAE7C409-CDC6-B99A-70E4-0F4962684971}"/>
+          </ac:spMkLst>
+        </pc:spChg>
+        <pc:picChg chg="add mod">
+          <ac:chgData name="承太郎 山崎" userId="f065ba058e752810" providerId="LiveId" clId="{EE6D8BB2-87BE-4943-94DC-E90E182A0523}" dt="2025-12-23T18:58:52.500" v="3980" actId="1036"/>
+          <ac:picMkLst>
+            <pc:docMk/>
+            <pc:sldMk cId="409304608" sldId="277"/>
+            <ac:picMk id="5122" creationId="{934944A2-60BC-48B9-4B34-26D5C7A68456}"/>
+          </ac:picMkLst>
+        </pc:picChg>
+      </pc:sldChg>
+      <pc:sldChg chg="addSp delSp modSp mod modAnim">
+        <pc:chgData name="承太郎 山崎" userId="f065ba058e752810" providerId="LiveId" clId="{EE6D8BB2-87BE-4943-94DC-E90E182A0523}" dt="2025-12-23T19:01:20.303" v="4016" actId="2711"/>
+        <pc:sldMkLst>
+          <pc:docMk/>
+          <pc:sldMk cId="241645947" sldId="278"/>
+        </pc:sldMkLst>
+        <pc:spChg chg="mod">
+          <ac:chgData name="承太郎 山崎" userId="f065ba058e752810" providerId="LiveId" clId="{EE6D8BB2-87BE-4943-94DC-E90E182A0523}" dt="2025-12-23T16:33:26.297" v="595" actId="404"/>
+          <ac:spMkLst>
+            <pc:docMk/>
+            <pc:sldMk cId="241645947" sldId="278"/>
+            <ac:spMk id="2" creationId="{B71EA3D7-81E8-ECF8-6276-B9715D40D464}"/>
+          </ac:spMkLst>
+        </pc:spChg>
+        <pc:spChg chg="add mod">
+          <ac:chgData name="承太郎 山崎" userId="f065ba058e752810" providerId="LiveId" clId="{EE6D8BB2-87BE-4943-94DC-E90E182A0523}" dt="2025-12-23T17:01:02.965" v="617"/>
+          <ac:spMkLst>
+            <pc:docMk/>
+            <pc:sldMk cId="241645947" sldId="278"/>
+            <ac:spMk id="9" creationId="{30BD9595-1FB2-2ABB-73D3-D714D5FF9054}"/>
+          </ac:spMkLst>
+        </pc:spChg>
+        <pc:spChg chg="add mod">
+          <ac:chgData name="承太郎 山崎" userId="f065ba058e752810" providerId="LiveId" clId="{EE6D8BB2-87BE-4943-94DC-E90E182A0523}" dt="2025-12-23T17:03:37.179" v="793" actId="1037"/>
+          <ac:spMkLst>
+            <pc:docMk/>
+            <pc:sldMk cId="241645947" sldId="278"/>
+            <ac:spMk id="10" creationId="{E8BD57E8-22E8-A3DD-36E6-6B8E4D908AA5}"/>
+          </ac:spMkLst>
+        </pc:spChg>
+        <pc:spChg chg="add mod">
+          <ac:chgData name="承太郎 山崎" userId="f065ba058e752810" providerId="LiveId" clId="{EE6D8BB2-87BE-4943-94DC-E90E182A0523}" dt="2025-12-23T17:06:35.943" v="1015" actId="1076"/>
+          <ac:spMkLst>
+            <pc:docMk/>
+            <pc:sldMk cId="241645947" sldId="278"/>
+            <ac:spMk id="11" creationId="{57EDB50D-2993-ECDC-A331-32E1DECD78AA}"/>
+          </ac:spMkLst>
+        </pc:spChg>
+        <pc:spChg chg="add mod">
+          <ac:chgData name="承太郎 山崎" userId="f065ba058e752810" providerId="LiveId" clId="{EE6D8BB2-87BE-4943-94DC-E90E182A0523}" dt="2025-12-23T17:07:11.347" v="1041" actId="1035"/>
+          <ac:spMkLst>
+            <pc:docMk/>
+            <pc:sldMk cId="241645947" sldId="278"/>
+            <ac:spMk id="12" creationId="{53A4C69E-FF9A-625B-1689-745968DCFFAC}"/>
+          </ac:spMkLst>
+        </pc:spChg>
+        <pc:spChg chg="add mod">
+          <ac:chgData name="承太郎 山崎" userId="f065ba058e752810" providerId="LiveId" clId="{EE6D8BB2-87BE-4943-94DC-E90E182A0523}" dt="2025-12-23T17:07:08.832" v="1038" actId="1035"/>
+          <ac:spMkLst>
+            <pc:docMk/>
+            <pc:sldMk cId="241645947" sldId="278"/>
+            <ac:spMk id="13" creationId="{F8E7837F-B8D0-B0CA-B517-10094F43369A}"/>
+          </ac:spMkLst>
+        </pc:spChg>
+        <pc:spChg chg="add mod">
+          <ac:chgData name="承太郎 山崎" userId="f065ba058e752810" providerId="LiveId" clId="{EE6D8BB2-87BE-4943-94DC-E90E182A0523}" dt="2025-12-23T19:00:27.679" v="3981" actId="14100"/>
+          <ac:spMkLst>
+            <pc:docMk/>
+            <pc:sldMk cId="241645947" sldId="278"/>
+            <ac:spMk id="14" creationId="{DFBA8598-F7C2-5408-3CCE-5E6CB84EB2D7}"/>
+          </ac:spMkLst>
+        </pc:spChg>
+        <pc:spChg chg="add mod">
+          <ac:chgData name="承太郎 山崎" userId="f065ba058e752810" providerId="LiveId" clId="{EE6D8BB2-87BE-4943-94DC-E90E182A0523}" dt="2025-12-23T19:01:20.303" v="4016" actId="2711"/>
+          <ac:spMkLst>
+            <pc:docMk/>
+            <pc:sldMk cId="241645947" sldId="278"/>
+            <ac:spMk id="15" creationId="{84D588D4-B54F-C1C9-01FA-68B20076D38E}"/>
+          </ac:spMkLst>
+        </pc:spChg>
+        <pc:picChg chg="add del mod">
+          <ac:chgData name="承太郎 山崎" userId="f065ba058e752810" providerId="LiveId" clId="{EE6D8BB2-87BE-4943-94DC-E90E182A0523}" dt="2025-12-23T16:59:23.554" v="608" actId="478"/>
+          <ac:picMkLst>
+            <pc:docMk/>
+            <pc:sldMk cId="241645947" sldId="278"/>
+            <ac:picMk id="5" creationId="{7A903F39-4F04-B8B6-579E-46FD71679D49}"/>
+          </ac:picMkLst>
+        </pc:picChg>
+        <pc:picChg chg="del">
+          <ac:chgData name="承太郎 山崎" userId="f065ba058e752810" providerId="LiveId" clId="{EE6D8BB2-87BE-4943-94DC-E90E182A0523}" dt="2025-12-23T16:58:18.255" v="596" actId="478"/>
+          <ac:picMkLst>
+            <pc:docMk/>
+            <pc:sldMk cId="241645947" sldId="278"/>
+            <ac:picMk id="6" creationId="{344E34FD-3A41-04F1-0FB4-DE11D472BDE9}"/>
+          </ac:picMkLst>
+        </pc:picChg>
+        <pc:picChg chg="add mod">
+          <ac:chgData name="承太郎 山崎" userId="f065ba058e752810" providerId="LiveId" clId="{EE6D8BB2-87BE-4943-94DC-E90E182A0523}" dt="2025-12-23T17:04:47.215" v="885" actId="1035"/>
+          <ac:picMkLst>
+            <pc:docMk/>
+            <pc:sldMk cId="241645947" sldId="278"/>
+            <ac:picMk id="8" creationId="{7432A55C-237A-AD1E-F3AA-1B16C9F1FA0D}"/>
+          </ac:picMkLst>
+        </pc:picChg>
+      </pc:sldChg>
+      <pc:sldChg chg="addSp delSp modSp add mod modAnim">
+        <pc:chgData name="承太郎 山崎" userId="f065ba058e752810" providerId="LiveId" clId="{EE6D8BB2-87BE-4943-94DC-E90E182A0523}" dt="2025-12-23T19:07:17.411" v="4153" actId="1035"/>
+        <pc:sldMkLst>
+          <pc:docMk/>
+          <pc:sldMk cId="3820761124" sldId="279"/>
+        </pc:sldMkLst>
+        <pc:spChg chg="add del mod">
+          <ac:chgData name="承太郎 山崎" userId="f065ba058e752810" providerId="LiveId" clId="{EE6D8BB2-87BE-4943-94DC-E90E182A0523}" dt="2025-12-23T17:24:34.988" v="1424" actId="478"/>
+          <ac:spMkLst>
+            <pc:docMk/>
+            <pc:sldMk cId="3820761124" sldId="279"/>
+            <ac:spMk id="3" creationId="{EF16FB27-6B8B-DAC4-B8A5-7F13E351FB79}"/>
+          </ac:spMkLst>
+        </pc:spChg>
+        <pc:spChg chg="add del mod">
+          <ac:chgData name="承太郎 山崎" userId="f065ba058e752810" providerId="LiveId" clId="{EE6D8BB2-87BE-4943-94DC-E90E182A0523}" dt="2025-12-23T17:26:53.189" v="1466" actId="478"/>
+          <ac:spMkLst>
+            <pc:docMk/>
+            <pc:sldMk cId="3820761124" sldId="279"/>
+            <ac:spMk id="6" creationId="{C6F3D126-CA72-6E74-723C-9FA3A0034799}"/>
+          </ac:spMkLst>
+        </pc:spChg>
+        <pc:spChg chg="add mod">
+          <ac:chgData name="承太郎 山崎" userId="f065ba058e752810" providerId="LiveId" clId="{EE6D8BB2-87BE-4943-94DC-E90E182A0523}" dt="2025-12-23T17:26:57.791" v="1486" actId="27636"/>
+          <ac:spMkLst>
+            <pc:docMk/>
+            <pc:sldMk cId="3820761124" sldId="279"/>
+            <ac:spMk id="7" creationId="{17D6DCC8-8292-4849-4A68-1A63711D177E}"/>
+          </ac:spMkLst>
+        </pc:spChg>
+        <pc:spChg chg="del mod">
+          <ac:chgData name="承太郎 山崎" userId="f065ba058e752810" providerId="LiveId" clId="{EE6D8BB2-87BE-4943-94DC-E90E182A0523}" dt="2025-12-23T17:26:49.654" v="1464" actId="478"/>
+          <ac:spMkLst>
+            <pc:docMk/>
+            <pc:sldMk cId="3820761124" sldId="279"/>
+            <ac:spMk id="12" creationId="{51F05618-1FB8-62C6-CBA8-9B0C1103F974}"/>
+          </ac:spMkLst>
+        </pc:spChg>
+        <pc:spChg chg="del">
+          <ac:chgData name="承太郎 山崎" userId="f065ba058e752810" providerId="LiveId" clId="{EE6D8BB2-87BE-4943-94DC-E90E182A0523}" dt="2025-12-23T17:24:32.467" v="1423" actId="478"/>
+          <ac:spMkLst>
+            <pc:docMk/>
+            <pc:sldMk cId="3820761124" sldId="279"/>
+            <ac:spMk id="15" creationId="{F8429AA3-DB52-A82A-B9FA-B0CE8721EC97}"/>
+          </ac:spMkLst>
+        </pc:spChg>
+        <pc:spChg chg="add del">
+          <ac:chgData name="承太郎 山崎" userId="f065ba058e752810" providerId="LiveId" clId="{EE6D8BB2-87BE-4943-94DC-E90E182A0523}" dt="2025-12-23T17:34:56.419" v="1600" actId="478"/>
+          <ac:spMkLst>
+            <pc:docMk/>
+            <pc:sldMk cId="3820761124" sldId="279"/>
+            <ac:spMk id="16" creationId="{A369D2FD-7162-6A7D-6DA8-BAEF3798D762}"/>
+          </ac:spMkLst>
+        </pc:spChg>
+        <pc:spChg chg="del">
+          <ac:chgData name="承太郎 山崎" userId="f065ba058e752810" providerId="LiveId" clId="{EE6D8BB2-87BE-4943-94DC-E90E182A0523}" dt="2025-12-23T17:24:32.467" v="1423" actId="478"/>
+          <ac:spMkLst>
+            <pc:docMk/>
+            <pc:sldMk cId="3820761124" sldId="279"/>
+            <ac:spMk id="19" creationId="{944CC350-FCFB-9169-1FC0-2A4B1404BF47}"/>
+          </ac:spMkLst>
+        </pc:spChg>
+        <pc:spChg chg="mod">
+          <ac:chgData name="承太郎 山崎" userId="f065ba058e752810" providerId="LiveId" clId="{EE6D8BB2-87BE-4943-94DC-E90E182A0523}" dt="2025-12-23T17:45:44.980" v="1883" actId="1038"/>
+          <ac:spMkLst>
+            <pc:docMk/>
+            <pc:sldMk cId="3820761124" sldId="279"/>
+            <ac:spMk id="20" creationId="{24DFD758-7709-A8A0-5C58-A134E6FF571A}"/>
+          </ac:spMkLst>
+        </pc:spChg>
+        <pc:spChg chg="del">
+          <ac:chgData name="承太郎 山崎" userId="f065ba058e752810" providerId="LiveId" clId="{EE6D8BB2-87BE-4943-94DC-E90E182A0523}" dt="2025-12-23T17:24:32.467" v="1423" actId="478"/>
+          <ac:spMkLst>
+            <pc:docMk/>
+            <pc:sldMk cId="3820761124" sldId="279"/>
+            <ac:spMk id="25" creationId="{0B0F337A-969F-F1E5-2587-44A7403BC4B7}"/>
+          </ac:spMkLst>
+        </pc:spChg>
+        <pc:spChg chg="mod">
+          <ac:chgData name="承太郎 山崎" userId="f065ba058e752810" providerId="LiveId" clId="{EE6D8BB2-87BE-4943-94DC-E90E182A0523}" dt="2025-12-23T17:45:39.944" v="1876" actId="1038"/>
+          <ac:spMkLst>
+            <pc:docMk/>
+            <pc:sldMk cId="3820761124" sldId="279"/>
+            <ac:spMk id="26" creationId="{762F0ACF-9E2A-2E74-7D59-5135AB809F16}"/>
+          </ac:spMkLst>
+        </pc:spChg>
+        <pc:spChg chg="mod">
+          <ac:chgData name="承太郎 山崎" userId="f065ba058e752810" providerId="LiveId" clId="{EE6D8BB2-87BE-4943-94DC-E90E182A0523}" dt="2025-12-23T17:40:15.525" v="1740" actId="14100"/>
+          <ac:spMkLst>
+            <pc:docMk/>
+            <pc:sldMk cId="3820761124" sldId="279"/>
+            <ac:spMk id="28" creationId="{D8272DF9-B211-4D8C-12D3-C077C60CB2D7}"/>
+          </ac:spMkLst>
+        </pc:spChg>
+        <pc:spChg chg="del">
+          <ac:chgData name="承太郎 山崎" userId="f065ba058e752810" providerId="LiveId" clId="{EE6D8BB2-87BE-4943-94DC-E90E182A0523}" dt="2025-12-23T17:24:32.467" v="1423" actId="478"/>
+          <ac:spMkLst>
+            <pc:docMk/>
+            <pc:sldMk cId="3820761124" sldId="279"/>
+            <ac:spMk id="29" creationId="{297E2858-BB0C-9AA6-1156-C489F87860AD}"/>
+          </ac:spMkLst>
+        </pc:spChg>
+        <pc:spChg chg="del mod">
+          <ac:chgData name="承太郎 山崎" userId="f065ba058e752810" providerId="LiveId" clId="{EE6D8BB2-87BE-4943-94DC-E90E182A0523}" dt="2025-12-23T17:28:44.028" v="1520" actId="478"/>
+          <ac:spMkLst>
+            <pc:docMk/>
+            <pc:sldMk cId="3820761124" sldId="279"/>
+            <ac:spMk id="30" creationId="{236FE403-FDBE-702B-227B-5393FCD74920}"/>
+          </ac:spMkLst>
+        </pc:spChg>
+        <pc:spChg chg="add mod">
+          <ac:chgData name="承太郎 山崎" userId="f065ba058e752810" providerId="LiveId" clId="{EE6D8BB2-87BE-4943-94DC-E90E182A0523}" dt="2025-12-23T17:40:40.038" v="1742" actId="571"/>
+          <ac:spMkLst>
+            <pc:docMk/>
+            <pc:sldMk cId="3820761124" sldId="279"/>
+            <ac:spMk id="34" creationId="{B6FE5240-0ABC-2C08-34EB-A2CD65347016}"/>
+          </ac:spMkLst>
+        </pc:spChg>
+        <pc:spChg chg="add mod">
+          <ac:chgData name="承太郎 山崎" userId="f065ba058e752810" providerId="LiveId" clId="{EE6D8BB2-87BE-4943-94DC-E90E182A0523}" dt="2025-12-23T17:45:27.736" v="1850" actId="1035"/>
+          <ac:spMkLst>
+            <pc:docMk/>
+            <pc:sldMk cId="3820761124" sldId="279"/>
+            <ac:spMk id="36" creationId="{653EC9A7-C057-C283-24D5-CB726648464A}"/>
+          </ac:spMkLst>
+        </pc:spChg>
+        <pc:spChg chg="add mod">
+          <ac:chgData name="承太郎 山崎" userId="f065ba058e752810" providerId="LiveId" clId="{EE6D8BB2-87BE-4943-94DC-E90E182A0523}" dt="2025-12-23T17:45:32.433" v="1867" actId="1035"/>
+          <ac:spMkLst>
+            <pc:docMk/>
+            <pc:sldMk cId="3820761124" sldId="279"/>
+            <ac:spMk id="37" creationId="{63A9C504-A2AE-5DEC-5C08-C643390215FE}"/>
+          </ac:spMkLst>
+        </pc:spChg>
+        <pc:spChg chg="add del mod">
+          <ac:chgData name="承太郎 山崎" userId="f065ba058e752810" providerId="LiveId" clId="{EE6D8BB2-87BE-4943-94DC-E90E182A0523}" dt="2025-12-23T17:44:58.504" v="1838" actId="478"/>
+          <ac:spMkLst>
+            <pc:docMk/>
+            <pc:sldMk cId="3820761124" sldId="279"/>
+            <ac:spMk id="38" creationId="{F5262E16-B0E9-9F0B-1F91-D05DD2E3D0BE}"/>
+          </ac:spMkLst>
+        </pc:spChg>
+        <pc:spChg chg="add mod">
+          <ac:chgData name="承太郎 山崎" userId="f065ba058e752810" providerId="LiveId" clId="{EE6D8BB2-87BE-4943-94DC-E90E182A0523}" dt="2025-12-23T19:07:17.411" v="4153" actId="1035"/>
+          <ac:spMkLst>
+            <pc:docMk/>
+            <pc:sldMk cId="3820761124" sldId="279"/>
+            <ac:spMk id="39" creationId="{C0D23D01-347E-4A13-6D9C-7DADA76CC6E4}"/>
+          </ac:spMkLst>
+        </pc:spChg>
+        <pc:picChg chg="add del mod">
+          <ac:chgData name="承太郎 山崎" userId="f065ba058e752810" providerId="LiveId" clId="{EE6D8BB2-87BE-4943-94DC-E90E182A0523}" dt="2025-12-23T17:32:59.960" v="1584" actId="478"/>
+          <ac:picMkLst>
+            <pc:docMk/>
+            <pc:sldMk cId="3820761124" sldId="279"/>
+            <ac:picMk id="9" creationId="{C344DBDF-F551-851E-E088-52CB34802A1A}"/>
+          </ac:picMkLst>
+        </pc:picChg>
+        <pc:picChg chg="add mod">
+          <ac:chgData name="承太郎 山崎" userId="f065ba058e752810" providerId="LiveId" clId="{EE6D8BB2-87BE-4943-94DC-E90E182A0523}" dt="2025-12-23T17:39:57.222" v="1731" actId="1038"/>
+          <ac:picMkLst>
+            <pc:docMk/>
+            <pc:sldMk cId="3820761124" sldId="279"/>
+            <ac:picMk id="14" creationId="{EE60486D-79BC-2636-0609-F82939000749}"/>
+          </ac:picMkLst>
+        </pc:picChg>
+        <pc:picChg chg="del">
+          <ac:chgData name="承太郎 山崎" userId="f065ba058e752810" providerId="LiveId" clId="{EE6D8BB2-87BE-4943-94DC-E90E182A0523}" dt="2025-12-23T17:24:32.467" v="1423" actId="478"/>
+          <ac:picMkLst>
+            <pc:docMk/>
+            <pc:sldMk cId="3820761124" sldId="279"/>
+            <ac:picMk id="17" creationId="{2DCCE62E-3CD9-2834-ED9E-024F41E64CB6}"/>
+          </ac:picMkLst>
+        </pc:picChg>
+        <pc:picChg chg="add mod modCrop">
+          <ac:chgData name="承太郎 山崎" userId="f065ba058e752810" providerId="LiveId" clId="{EE6D8BB2-87BE-4943-94DC-E90E182A0523}" dt="2025-12-23T17:39:57.222" v="1731" actId="1038"/>
+          <ac:picMkLst>
+            <pc:docMk/>
+            <pc:sldMk cId="3820761124" sldId="279"/>
+            <ac:picMk id="21" creationId="{3F75A2B8-8FC2-0854-9FA9-FDACD3703102}"/>
+          </ac:picMkLst>
+        </pc:picChg>
+        <pc:picChg chg="del">
+          <ac:chgData name="承太郎 山崎" userId="f065ba058e752810" providerId="LiveId" clId="{EE6D8BB2-87BE-4943-94DC-E90E182A0523}" dt="2025-12-23T17:24:32.467" v="1423" actId="478"/>
+          <ac:picMkLst>
+            <pc:docMk/>
+            <pc:sldMk cId="3820761124" sldId="279"/>
+            <ac:picMk id="22" creationId="{C38A5AB4-5CFB-9EA2-BAD6-A2B20832DAB9}"/>
+          </ac:picMkLst>
+        </pc:picChg>
+        <pc:picChg chg="del mod">
+          <ac:chgData name="承太郎 山崎" userId="f065ba058e752810" providerId="LiveId" clId="{EE6D8BB2-87BE-4943-94DC-E90E182A0523}" dt="2025-12-23T17:28:44.028" v="1520" actId="478"/>
+          <ac:picMkLst>
+            <pc:docMk/>
+            <pc:sldMk cId="3820761124" sldId="279"/>
+            <ac:picMk id="24" creationId="{C42354D0-4CC9-272D-9E14-9A8252358AC7}"/>
+          </ac:picMkLst>
+        </pc:picChg>
+        <pc:picChg chg="add mod">
+          <ac:chgData name="承太郎 山崎" userId="f065ba058e752810" providerId="LiveId" clId="{EE6D8BB2-87BE-4943-94DC-E90E182A0523}" dt="2025-12-23T17:39:57.222" v="1731" actId="1038"/>
+          <ac:picMkLst>
+            <pc:docMk/>
+            <pc:sldMk cId="3820761124" sldId="279"/>
+            <ac:picMk id="27" creationId="{BEB4B5CB-9ADA-385D-4365-5FA235A5067E}"/>
+          </ac:picMkLst>
+        </pc:picChg>
+        <pc:picChg chg="add mod">
+          <ac:chgData name="承太郎 山崎" userId="f065ba058e752810" providerId="LiveId" clId="{EE6D8BB2-87BE-4943-94DC-E90E182A0523}" dt="2025-12-23T17:39:57.222" v="1731" actId="1038"/>
+          <ac:picMkLst>
+            <pc:docMk/>
+            <pc:sldMk cId="3820761124" sldId="279"/>
+            <ac:picMk id="32" creationId="{3A55FD4E-5775-9CA7-4399-C06FB9DC0961}"/>
+          </ac:picMkLst>
+        </pc:picChg>
+        <pc:picChg chg="add mod">
+          <ac:chgData name="承太郎 山崎" userId="f065ba058e752810" providerId="LiveId" clId="{EE6D8BB2-87BE-4943-94DC-E90E182A0523}" dt="2025-12-23T17:41:08.816" v="1746" actId="1076"/>
+          <ac:picMkLst>
+            <pc:docMk/>
+            <pc:sldMk cId="3820761124" sldId="279"/>
+            <ac:picMk id="35" creationId="{E4E1D661-2F43-F5E0-A5C7-6C9470835D02}"/>
+          </ac:picMkLst>
+        </pc:picChg>
+        <pc:picChg chg="mod">
+          <ac:chgData name="承太郎 山崎" userId="f065ba058e752810" providerId="LiveId" clId="{EE6D8BB2-87BE-4943-94DC-E90E182A0523}" dt="2025-12-23T17:39:57.222" v="1731" actId="1038"/>
+          <ac:picMkLst>
+            <pc:docMk/>
+            <pc:sldMk cId="3820761124" sldId="279"/>
+            <ac:picMk id="1028" creationId="{876EF1CA-FCAC-589C-1492-09E620A05471}"/>
+          </ac:picMkLst>
+        </pc:picChg>
+        <pc:cxnChg chg="add mod">
+          <ac:chgData name="承太郎 山崎" userId="f065ba058e752810" providerId="LiveId" clId="{EE6D8BB2-87BE-4943-94DC-E90E182A0523}" dt="2025-12-23T17:39:57.222" v="1731" actId="1038"/>
+          <ac:cxnSpMkLst>
+            <pc:docMk/>
+            <pc:sldMk cId="3820761124" sldId="279"/>
+            <ac:cxnSpMk id="11" creationId="{1B7ACC22-FDC0-3B60-10E2-0030D4A81A2F}"/>
+          </ac:cxnSpMkLst>
+        </pc:cxnChg>
+        <pc:cxnChg chg="add mod">
+          <ac:chgData name="承太郎 山崎" userId="f065ba058e752810" providerId="LiveId" clId="{EE6D8BB2-87BE-4943-94DC-E90E182A0523}" dt="2025-12-23T17:39:45.298" v="1721" actId="1076"/>
+          <ac:cxnSpMkLst>
+            <pc:docMk/>
+            <pc:sldMk cId="3820761124" sldId="279"/>
+            <ac:cxnSpMk id="33" creationId="{F52CE1B5-F05F-21EB-CE6C-10083DD6A5D1}"/>
+          </ac:cxnSpMkLst>
+        </pc:cxnChg>
+      </pc:sldChg>
+      <pc:sldChg chg="addSp delSp modSp new mod modAnim">
+        <pc:chgData name="承太郎 山崎" userId="f065ba058e752810" providerId="LiveId" clId="{EE6D8BB2-87BE-4943-94DC-E90E182A0523}" dt="2025-12-23T19:09:38.515" v="4264" actId="1076"/>
+        <pc:sldMkLst>
+          <pc:docMk/>
+          <pc:sldMk cId="844885977" sldId="280"/>
+        </pc:sldMkLst>
+        <pc:spChg chg="mod">
+          <ac:chgData name="承太郎 山崎" userId="f065ba058e752810" providerId="LiveId" clId="{EE6D8BB2-87BE-4943-94DC-E90E182A0523}" dt="2025-12-23T17:48:49.962" v="1985" actId="404"/>
+          <ac:spMkLst>
+            <pc:docMk/>
+            <pc:sldMk cId="844885977" sldId="280"/>
+            <ac:spMk id="2" creationId="{3843B8D4-0896-403A-E335-0BAFED37BD06}"/>
+          </ac:spMkLst>
+        </pc:spChg>
+        <pc:spChg chg="del">
+          <ac:chgData name="承太郎 山崎" userId="f065ba058e752810" providerId="LiveId" clId="{EE6D8BB2-87BE-4943-94DC-E90E182A0523}" dt="2025-12-23T17:46:41.465" v="1927" actId="478"/>
+          <ac:spMkLst>
+            <pc:docMk/>
+            <pc:sldMk cId="844885977" sldId="280"/>
+            <ac:spMk id="3" creationId="{09C140D2-0765-5243-1FAF-BA1C3CD6F373}"/>
+          </ac:spMkLst>
+        </pc:spChg>
+        <pc:spChg chg="add mod">
+          <ac:chgData name="承太郎 山崎" userId="f065ba058e752810" providerId="LiveId" clId="{EE6D8BB2-87BE-4943-94DC-E90E182A0523}" dt="2025-12-23T17:46:38.615" v="1926"/>
+          <ac:spMkLst>
+            <pc:docMk/>
+            <pc:sldMk cId="844885977" sldId="280"/>
+            <ac:spMk id="5" creationId="{9A456A46-C5DA-858E-B8F3-D12B5DDA1A4E}"/>
+          </ac:spMkLst>
+        </pc:spChg>
+        <pc:spChg chg="add del mod">
+          <ac:chgData name="承太郎 山崎" userId="f065ba058e752810" providerId="LiveId" clId="{EE6D8BB2-87BE-4943-94DC-E90E182A0523}" dt="2025-12-23T19:08:38.794" v="4213" actId="1037"/>
+          <ac:spMkLst>
+            <pc:docMk/>
+            <pc:sldMk cId="844885977" sldId="280"/>
+            <ac:spMk id="6" creationId="{CB3B9780-360E-310B-F73A-5264F62901E9}"/>
+          </ac:spMkLst>
+        </pc:spChg>
+        <pc:spChg chg="add mod">
+          <ac:chgData name="承太郎 山崎" userId="f065ba058e752810" providerId="LiveId" clId="{EE6D8BB2-87BE-4943-94DC-E90E182A0523}" dt="2025-12-23T19:08:38.794" v="4213" actId="1037"/>
+          <ac:spMkLst>
+            <pc:docMk/>
+            <pc:sldMk cId="844885977" sldId="280"/>
+            <ac:spMk id="7" creationId="{3AB58C0D-A478-090C-1823-BFB9C29241AC}"/>
+          </ac:spMkLst>
+        </pc:spChg>
+        <pc:spChg chg="add mod">
+          <ac:chgData name="承太郎 山崎" userId="f065ba058e752810" providerId="LiveId" clId="{EE6D8BB2-87BE-4943-94DC-E90E182A0523}" dt="2025-12-23T19:08:57.774" v="4232" actId="1035"/>
+          <ac:spMkLst>
+            <pc:docMk/>
+            <pc:sldMk cId="844885977" sldId="280"/>
+            <ac:spMk id="8" creationId="{5BFB7702-834F-DBF5-FFA9-E8EB39CD5CDF}"/>
+          </ac:spMkLst>
+        </pc:spChg>
+        <pc:spChg chg="add del mod">
+          <ac:chgData name="承太郎 山崎" userId="f065ba058e752810" providerId="LiveId" clId="{EE6D8BB2-87BE-4943-94DC-E90E182A0523}" dt="2025-12-23T17:58:05.626" v="2347" actId="478"/>
+          <ac:spMkLst>
+            <pc:docMk/>
+            <pc:sldMk cId="844885977" sldId="280"/>
+            <ac:spMk id="11" creationId="{226FAC86-76C4-0311-AFF6-11E47A42FF52}"/>
+          </ac:spMkLst>
+        </pc:spChg>
+        <pc:spChg chg="add mod">
+          <ac:chgData name="承太郎 山崎" userId="f065ba058e752810" providerId="LiveId" clId="{EE6D8BB2-87BE-4943-94DC-E90E182A0523}" dt="2025-12-23T19:09:06.527" v="4250" actId="1036"/>
+          <ac:spMkLst>
+            <pc:docMk/>
+            <pc:sldMk cId="844885977" sldId="280"/>
+            <ac:spMk id="23" creationId="{D5C7BBCF-4573-7A60-7CEE-12F3A6F3EA94}"/>
+          </ac:spMkLst>
+        </pc:spChg>
+        <pc:spChg chg="add mod">
+          <ac:chgData name="承太郎 山崎" userId="f065ba058e752810" providerId="LiveId" clId="{EE6D8BB2-87BE-4943-94DC-E90E182A0523}" dt="2025-12-23T19:09:06.527" v="4250" actId="1036"/>
+          <ac:spMkLst>
+            <pc:docMk/>
+            <pc:sldMk cId="844885977" sldId="280"/>
+            <ac:spMk id="24" creationId="{889FFB72-BF0B-2846-91D7-2C25C40FBE3C}"/>
+          </ac:spMkLst>
+        </pc:spChg>
+        <pc:spChg chg="add mod">
+          <ac:chgData name="承太郎 山崎" userId="f065ba058e752810" providerId="LiveId" clId="{EE6D8BB2-87BE-4943-94DC-E90E182A0523}" dt="2025-12-23T19:09:38.515" v="4264" actId="1076"/>
+          <ac:spMkLst>
+            <pc:docMk/>
+            <pc:sldMk cId="844885977" sldId="280"/>
+            <ac:spMk id="26" creationId="{9CE24E19-5C40-53B1-B9FE-52320169BD39}"/>
+          </ac:spMkLst>
+        </pc:spChg>
+        <pc:picChg chg="add mod">
+          <ac:chgData name="承太郎 山崎" userId="f065ba058e752810" providerId="LiveId" clId="{EE6D8BB2-87BE-4943-94DC-E90E182A0523}" dt="2025-12-23T19:09:17.866" v="4259" actId="1035"/>
+          <ac:picMkLst>
+            <pc:docMk/>
+            <pc:sldMk cId="844885977" sldId="280"/>
+            <ac:picMk id="10" creationId="{2BB1030A-8783-EA84-1BC9-541CD97111D8}"/>
+          </ac:picMkLst>
+        </pc:picChg>
+        <pc:picChg chg="add mod">
+          <ac:chgData name="承太郎 山崎" userId="f065ba058e752810" providerId="LiveId" clId="{EE6D8BB2-87BE-4943-94DC-E90E182A0523}" dt="2025-12-23T19:09:17.866" v="4259" actId="1035"/>
+          <ac:picMkLst>
+            <pc:docMk/>
+            <pc:sldMk cId="844885977" sldId="280"/>
+            <ac:picMk id="18" creationId="{6EEC5913-96C3-E61B-3437-241B288F2404}"/>
+          </ac:picMkLst>
+        </pc:picChg>
+        <pc:picChg chg="add mod">
+          <ac:chgData name="承太郎 山崎" userId="f065ba058e752810" providerId="LiveId" clId="{EE6D8BB2-87BE-4943-94DC-E90E182A0523}" dt="2025-12-23T19:09:06.527" v="4250" actId="1036"/>
+          <ac:picMkLst>
+            <pc:docMk/>
+            <pc:sldMk cId="844885977" sldId="280"/>
+            <ac:picMk id="20" creationId="{BAF1E191-8390-2FBC-62D3-C03C4F11F6EA}"/>
+          </ac:picMkLst>
+        </pc:picChg>
+        <pc:picChg chg="add mod">
+          <ac:chgData name="承太郎 山崎" userId="f065ba058e752810" providerId="LiveId" clId="{EE6D8BB2-87BE-4943-94DC-E90E182A0523}" dt="2025-12-23T19:09:06.527" v="4250" actId="1036"/>
+          <ac:picMkLst>
+            <pc:docMk/>
+            <pc:sldMk cId="844885977" sldId="280"/>
+            <ac:picMk id="21" creationId="{A19E5C10-7AA5-5C4C-D7F9-3C7DDFD9FC58}"/>
+          </ac:picMkLst>
+        </pc:picChg>
+        <pc:picChg chg="add mod">
+          <ac:chgData name="承太郎 山崎" userId="f065ba058e752810" providerId="LiveId" clId="{EE6D8BB2-87BE-4943-94DC-E90E182A0523}" dt="2025-12-23T19:09:06.527" v="4250" actId="1036"/>
+          <ac:picMkLst>
+            <pc:docMk/>
+            <pc:sldMk cId="844885977" sldId="280"/>
+            <ac:picMk id="22" creationId="{34F2B9FB-BDC1-7F10-E85F-43072DD4EB2D}"/>
+          </ac:picMkLst>
+        </pc:picChg>
+        <pc:picChg chg="add mod">
+          <ac:chgData name="承太郎 山崎" userId="f065ba058e752810" providerId="LiveId" clId="{EE6D8BB2-87BE-4943-94DC-E90E182A0523}" dt="2025-12-23T19:09:06.527" v="4250" actId="1036"/>
+          <ac:picMkLst>
+            <pc:docMk/>
+            <pc:sldMk cId="844885977" sldId="280"/>
+            <ac:picMk id="25" creationId="{507761F6-170A-CB41-7007-52E944E42C8F}"/>
+          </ac:picMkLst>
+        </pc:picChg>
+        <pc:picChg chg="add del mod">
+          <ac:chgData name="承太郎 山崎" userId="f065ba058e752810" providerId="LiveId" clId="{EE6D8BB2-87BE-4943-94DC-E90E182A0523}" dt="2025-12-23T17:59:28.012" v="2367" actId="478"/>
+          <ac:picMkLst>
+            <pc:docMk/>
+            <pc:sldMk cId="844885977" sldId="280"/>
+            <ac:picMk id="4098" creationId="{5FA21CD2-707A-E4E7-3226-5AFBCDFF8431}"/>
+          </ac:picMkLst>
+        </pc:picChg>
+        <pc:picChg chg="add del">
+          <ac:chgData name="承太郎 山崎" userId="f065ba058e752810" providerId="LiveId" clId="{EE6D8BB2-87BE-4943-94DC-E90E182A0523}" dt="2025-12-23T18:00:19.021" v="2369" actId="478"/>
+          <ac:picMkLst>
+            <pc:docMk/>
+            <pc:sldMk cId="844885977" sldId="280"/>
+            <ac:picMk id="4100" creationId="{FBD6011C-3D0B-D690-B898-079CD6AC7DF6}"/>
+          </ac:picMkLst>
+        </pc:picChg>
+        <pc:cxnChg chg="add del mod">
+          <ac:chgData name="承太郎 山崎" userId="f065ba058e752810" providerId="LiveId" clId="{EE6D8BB2-87BE-4943-94DC-E90E182A0523}" dt="2025-12-23T17:58:42.526" v="2361" actId="478"/>
+          <ac:cxnSpMkLst>
+            <pc:docMk/>
+            <pc:sldMk cId="844885977" sldId="280"/>
+            <ac:cxnSpMk id="13" creationId="{5E22C372-D38F-7BE3-8220-3AA78EABDE18}"/>
+          </ac:cxnSpMkLst>
+        </pc:cxnChg>
+        <pc:cxnChg chg="add del mod">
+          <ac:chgData name="承太郎 山崎" userId="f065ba058e752810" providerId="LiveId" clId="{EE6D8BB2-87BE-4943-94DC-E90E182A0523}" dt="2025-12-23T17:58:42.025" v="2360" actId="478"/>
+          <ac:cxnSpMkLst>
+            <pc:docMk/>
+            <pc:sldMk cId="844885977" sldId="280"/>
+            <ac:cxnSpMk id="15" creationId="{545A526D-1274-411D-36EF-42F4B7A711DD}"/>
+          </ac:cxnSpMkLst>
+        </pc:cxnChg>
+      </pc:sldChg>
+      <pc:sldChg chg="addSp delSp modSp add mod">
+        <pc:chgData name="承太郎 山崎" userId="f065ba058e752810" providerId="LiveId" clId="{EE6D8BB2-87BE-4943-94DC-E90E182A0523}" dt="2025-12-23T18:37:14.355" v="3133" actId="115"/>
+        <pc:sldMkLst>
+          <pc:docMk/>
+          <pc:sldMk cId="2867371047" sldId="281"/>
+        </pc:sldMkLst>
+        <pc:spChg chg="mod">
+          <ac:chgData name="承太郎 山崎" userId="f065ba058e752810" providerId="LiveId" clId="{EE6D8BB2-87BE-4943-94DC-E90E182A0523}" dt="2025-12-23T18:26:09.755" v="2756" actId="403"/>
+          <ac:spMkLst>
+            <pc:docMk/>
+            <pc:sldMk cId="2867371047" sldId="281"/>
+            <ac:spMk id="2" creationId="{C1EE7133-8C0F-BBFD-BF1C-FCD02209D56B}"/>
+          </ac:spMkLst>
+        </pc:spChg>
+        <pc:spChg chg="add mod">
+          <ac:chgData name="承太郎 山崎" userId="f065ba058e752810" providerId="LiveId" clId="{EE6D8BB2-87BE-4943-94DC-E90E182A0523}" dt="2025-12-23T18:26:20.586" v="2760"/>
+          <ac:spMkLst>
+            <pc:docMk/>
+            <pc:sldMk cId="2867371047" sldId="281"/>
+            <ac:spMk id="3" creationId="{C6D6B083-9AD1-8E5D-70FE-69C99193D94B}"/>
+          </ac:spMkLst>
+        </pc:spChg>
+        <pc:spChg chg="del">
+          <ac:chgData name="承太郎 山崎" userId="f065ba058e752810" providerId="LiveId" clId="{EE6D8BB2-87BE-4943-94DC-E90E182A0523}" dt="2025-12-23T18:26:13.678" v="2757" actId="478"/>
+          <ac:spMkLst>
+            <pc:docMk/>
+            <pc:sldMk cId="2867371047" sldId="281"/>
+            <ac:spMk id="5" creationId="{E19A5570-9F34-F067-AE4C-A84B8433E41E}"/>
+          </ac:spMkLst>
+        </pc:spChg>
+        <pc:spChg chg="del">
+          <ac:chgData name="承太郎 山崎" userId="f065ba058e752810" providerId="LiveId" clId="{EE6D8BB2-87BE-4943-94DC-E90E182A0523}" dt="2025-12-23T18:26:13.678" v="2757" actId="478"/>
+          <ac:spMkLst>
+            <pc:docMk/>
+            <pc:sldMk cId="2867371047" sldId="281"/>
+            <ac:spMk id="6" creationId="{3BE7FCD2-B9B2-DB9D-43CC-8CAAA33B1325}"/>
+          </ac:spMkLst>
+        </pc:spChg>
+        <pc:spChg chg="add mod">
+          <ac:chgData name="承太郎 山崎" userId="f065ba058e752810" providerId="LiveId" clId="{EE6D8BB2-87BE-4943-94DC-E90E182A0523}" dt="2025-12-23T18:27:36.341" v="2818" actId="1076"/>
+          <ac:spMkLst>
+            <pc:docMk/>
+            <pc:sldMk cId="2867371047" sldId="281"/>
+            <ac:spMk id="8" creationId="{8AE58323-A736-D26D-7C1A-02B56A7F5EC8}"/>
+          </ac:spMkLst>
+        </pc:spChg>
+        <pc:spChg chg="add mod">
+          <ac:chgData name="承太郎 山崎" userId="f065ba058e752810" providerId="LiveId" clId="{EE6D8BB2-87BE-4943-94DC-E90E182A0523}" dt="2025-12-23T18:37:14.355" v="3133" actId="115"/>
+          <ac:spMkLst>
+            <pc:docMk/>
+            <pc:sldMk cId="2867371047" sldId="281"/>
+            <ac:spMk id="9" creationId="{435A0884-5ED8-6A0D-62BB-AE7989BF7BCC}"/>
+          </ac:spMkLst>
+        </pc:spChg>
+        <pc:spChg chg="del">
+          <ac:chgData name="承太郎 山崎" userId="f065ba058e752810" providerId="LiveId" clId="{EE6D8BB2-87BE-4943-94DC-E90E182A0523}" dt="2025-12-23T18:26:13.678" v="2757" actId="478"/>
+          <ac:spMkLst>
+            <pc:docMk/>
+            <pc:sldMk cId="2867371047" sldId="281"/>
+            <ac:spMk id="10" creationId="{974AF266-BBA3-5548-25BB-F14256DDA80E}"/>
+          </ac:spMkLst>
+        </pc:spChg>
+        <pc:spChg chg="add mod">
+          <ac:chgData name="承太郎 山崎" userId="f065ba058e752810" providerId="LiveId" clId="{EE6D8BB2-87BE-4943-94DC-E90E182A0523}" dt="2025-12-23T18:35:19.032" v="3073" actId="404"/>
+          <ac:spMkLst>
+            <pc:docMk/>
+            <pc:sldMk cId="2867371047" sldId="281"/>
+            <ac:spMk id="23" creationId="{705D9B4E-E06D-25DA-CADA-C88AB4D62C92}"/>
+          </ac:spMkLst>
+        </pc:spChg>
+        <pc:picChg chg="add mod">
+          <ac:chgData name="承太郎 山崎" userId="f065ba058e752810" providerId="LiveId" clId="{EE6D8BB2-87BE-4943-94DC-E90E182A0523}" dt="2025-12-23T18:32:52.198" v="2950" actId="1037"/>
+          <ac:picMkLst>
+            <pc:docMk/>
+            <pc:sldMk cId="2867371047" sldId="281"/>
+            <ac:picMk id="12" creationId="{2F984F85-6898-295D-1CEC-814857219537}"/>
+          </ac:picMkLst>
+        </pc:picChg>
+        <pc:picChg chg="del">
+          <ac:chgData name="承太郎 山崎" userId="f065ba058e752810" providerId="LiveId" clId="{EE6D8BB2-87BE-4943-94DC-E90E182A0523}" dt="2025-12-23T18:26:13.678" v="2757" actId="478"/>
+          <ac:picMkLst>
+            <pc:docMk/>
+            <pc:sldMk cId="2867371047" sldId="281"/>
+            <ac:picMk id="13" creationId="{4B9E552F-5A18-8ED6-0264-B45B2494F4FE}"/>
+          </ac:picMkLst>
+        </pc:picChg>
+        <pc:picChg chg="del">
+          <ac:chgData name="承太郎 山崎" userId="f065ba058e752810" providerId="LiveId" clId="{EE6D8BB2-87BE-4943-94DC-E90E182A0523}" dt="2025-12-23T18:26:13.678" v="2757" actId="478"/>
+          <ac:picMkLst>
+            <pc:docMk/>
+            <pc:sldMk cId="2867371047" sldId="281"/>
+            <ac:picMk id="15" creationId="{FA986874-1663-8CF5-BE3D-C89D40CED2D0}"/>
+          </ac:picMkLst>
+        </pc:picChg>
+        <pc:picChg chg="add mod">
+          <ac:chgData name="承太郎 山崎" userId="f065ba058e752810" providerId="LiveId" clId="{EE6D8BB2-87BE-4943-94DC-E90E182A0523}" dt="2025-12-23T18:33:26.651" v="2974" actId="1038"/>
+          <ac:picMkLst>
+            <pc:docMk/>
+            <pc:sldMk cId="2867371047" sldId="281"/>
+            <ac:picMk id="16" creationId="{4457A670-DA65-B2FF-DDD8-D09EB9AD3FC3}"/>
+          </ac:picMkLst>
+        </pc:picChg>
+        <pc:picChg chg="del">
+          <ac:chgData name="承太郎 山崎" userId="f065ba058e752810" providerId="LiveId" clId="{EE6D8BB2-87BE-4943-94DC-E90E182A0523}" dt="2025-12-23T18:26:13.678" v="2757" actId="478"/>
+          <ac:picMkLst>
+            <pc:docMk/>
+            <pc:sldMk cId="2867371047" sldId="281"/>
+            <ac:picMk id="17" creationId="{44C9BFF2-7F9A-2F01-2238-5910E67DE348}"/>
+          </ac:picMkLst>
+        </pc:picChg>
+        <pc:picChg chg="add mod">
+          <ac:chgData name="承太郎 山崎" userId="f065ba058e752810" providerId="LiveId" clId="{EE6D8BB2-87BE-4943-94DC-E90E182A0523}" dt="2025-12-23T18:35:07.593" v="3062" actId="1076"/>
+          <ac:picMkLst>
+            <pc:docMk/>
+            <pc:sldMk cId="2867371047" sldId="281"/>
+            <ac:picMk id="22" creationId="{2AD62358-DA24-AB96-1D27-4E0F899F27DE}"/>
+          </ac:picMkLst>
+        </pc:picChg>
+        <pc:cxnChg chg="del">
+          <ac:chgData name="承太郎 山崎" userId="f065ba058e752810" providerId="LiveId" clId="{EE6D8BB2-87BE-4943-94DC-E90E182A0523}" dt="2025-12-23T18:26:13.678" v="2757" actId="478"/>
+          <ac:cxnSpMkLst>
+            <pc:docMk/>
+            <pc:sldMk cId="2867371047" sldId="281"/>
+            <ac:cxnSpMk id="18" creationId="{DB87B7C4-19BB-D8DF-A61A-1018F1B5903F}"/>
+          </ac:cxnSpMkLst>
+        </pc:cxnChg>
+        <pc:cxnChg chg="add mod">
+          <ac:chgData name="承太郎 山崎" userId="f065ba058e752810" providerId="LiveId" clId="{EE6D8BB2-87BE-4943-94DC-E90E182A0523}" dt="2025-12-23T18:33:20.206" v="2956" actId="1076"/>
+          <ac:cxnSpMkLst>
+            <pc:docMk/>
+            <pc:sldMk cId="2867371047" sldId="281"/>
+            <ac:cxnSpMk id="19" creationId="{520846E7-D8D5-2015-FE74-FBC443CA6489}"/>
+          </ac:cxnSpMkLst>
+        </pc:cxnChg>
+        <pc:cxnChg chg="del">
+          <ac:chgData name="承太郎 山崎" userId="f065ba058e752810" providerId="LiveId" clId="{EE6D8BB2-87BE-4943-94DC-E90E182A0523}" dt="2025-12-23T18:26:13.678" v="2757" actId="478"/>
+          <ac:cxnSpMkLst>
+            <pc:docMk/>
+            <pc:sldMk cId="2867371047" sldId="281"/>
+            <ac:cxnSpMk id="20" creationId="{2B680050-5A7D-0F9F-3A72-587DBF0CAA6F}"/>
+          </ac:cxnSpMkLst>
+        </pc:cxnChg>
+      </pc:sldChg>
+      <pc:sldChg chg="modSp add modAnim">
+        <pc:chgData name="承太郎 山崎" userId="f065ba058e752810" providerId="LiveId" clId="{EE6D8BB2-87BE-4943-94DC-E90E182A0523}" dt="2025-12-23T19:03:35.196" v="4090" actId="2711"/>
+        <pc:sldMkLst>
+          <pc:docMk/>
+          <pc:sldMk cId="27512861" sldId="282"/>
+        </pc:sldMkLst>
+        <pc:spChg chg="mod">
+          <ac:chgData name="承太郎 山崎" userId="f065ba058e752810" providerId="LiveId" clId="{EE6D8BB2-87BE-4943-94DC-E90E182A0523}" dt="2025-12-23T19:02:41.350" v="4055" actId="207"/>
+          <ac:spMkLst>
+            <pc:docMk/>
+            <pc:sldMk cId="27512861" sldId="282"/>
+            <ac:spMk id="23" creationId="{6A4763EA-784F-4B5A-F20D-7E3A46F0E7B1}"/>
+          </ac:spMkLst>
+        </pc:spChg>
+        <pc:spChg chg="mod">
+          <ac:chgData name="承太郎 山崎" userId="f065ba058e752810" providerId="LiveId" clId="{EE6D8BB2-87BE-4943-94DC-E90E182A0523}" dt="2025-12-23T19:02:41.350" v="4055" actId="207"/>
+          <ac:spMkLst>
+            <pc:docMk/>
+            <pc:sldMk cId="27512861" sldId="282"/>
+            <ac:spMk id="24" creationId="{A144ED25-F496-AA1C-9381-1AEAD032B22D}"/>
+          </ac:spMkLst>
+        </pc:spChg>
+        <pc:spChg chg="mod">
+          <ac:chgData name="承太郎 山崎" userId="f065ba058e752810" providerId="LiveId" clId="{EE6D8BB2-87BE-4943-94DC-E90E182A0523}" dt="2025-12-23T19:03:35.196" v="4090" actId="2711"/>
+          <ac:spMkLst>
+            <pc:docMk/>
+            <pc:sldMk cId="27512861" sldId="282"/>
+            <ac:spMk id="25" creationId="{AD9EB868-2553-A8D5-FC55-11BA73F92166}"/>
+          </ac:spMkLst>
+        </pc:spChg>
+        <pc:spChg chg="mod">
+          <ac:chgData name="承太郎 山崎" userId="f065ba058e752810" providerId="LiveId" clId="{EE6D8BB2-87BE-4943-94DC-E90E182A0523}" dt="2025-12-23T19:02:41.350" v="4055" actId="207"/>
+          <ac:spMkLst>
+            <pc:docMk/>
+            <pc:sldMk cId="27512861" sldId="282"/>
+            <ac:spMk id="26" creationId="{C9D456D0-4CDF-1193-86BB-AA8BD85818AC}"/>
+          </ac:spMkLst>
+        </pc:spChg>
+        <pc:spChg chg="mod">
+          <ac:chgData name="承太郎 山崎" userId="f065ba058e752810" providerId="LiveId" clId="{EE6D8BB2-87BE-4943-94DC-E90E182A0523}" dt="2025-12-23T19:02:41.350" v="4055" actId="207"/>
+          <ac:spMkLst>
+            <pc:docMk/>
+            <pc:sldMk cId="27512861" sldId="282"/>
+            <ac:spMk id="28" creationId="{85A77882-62D1-E922-95BD-10AE763829FA}"/>
+          </ac:spMkLst>
+        </pc:spChg>
+        <pc:spChg chg="mod">
+          <ac:chgData name="承太郎 山崎" userId="f065ba058e752810" providerId="LiveId" clId="{EE6D8BB2-87BE-4943-94DC-E90E182A0523}" dt="2025-12-23T19:02:41.350" v="4055" actId="207"/>
+          <ac:spMkLst>
+            <pc:docMk/>
+            <pc:sldMk cId="27512861" sldId="282"/>
+            <ac:spMk id="32" creationId="{8BBA027B-F06C-F461-EB1E-EE36AB5CD434}"/>
+          </ac:spMkLst>
+        </pc:spChg>
+        <pc:spChg chg="mod">
+          <ac:chgData name="承太郎 山崎" userId="f065ba058e752810" providerId="LiveId" clId="{EE6D8BB2-87BE-4943-94DC-E90E182A0523}" dt="2025-12-23T19:02:41.350" v="4055" actId="207"/>
+          <ac:spMkLst>
+            <pc:docMk/>
+            <pc:sldMk cId="27512861" sldId="282"/>
+            <ac:spMk id="33" creationId="{9A7CA8FE-C8AA-D059-C7DC-D8954A961E56}"/>
+          </ac:spMkLst>
+        </pc:spChg>
+        <pc:spChg chg="mod">
+          <ac:chgData name="承太郎 山崎" userId="f065ba058e752810" providerId="LiveId" clId="{EE6D8BB2-87BE-4943-94DC-E90E182A0523}" dt="2025-12-23T19:02:41.350" v="4055" actId="207"/>
+          <ac:spMkLst>
+            <pc:docMk/>
+            <pc:sldMk cId="27512861" sldId="282"/>
+            <ac:spMk id="34" creationId="{A6364F59-09BC-B9E4-349D-22CBBDD5AFB9}"/>
+          </ac:spMkLst>
+        </pc:spChg>
+      </pc:sldChg>
+      <pc:sldChg chg="modSp add mod">
+        <pc:chgData name="承太郎 山崎" userId="f065ba058e752810" providerId="LiveId" clId="{EE6D8BB2-87BE-4943-94DC-E90E182A0523}" dt="2025-12-23T19:11:16.247" v="4292" actId="207"/>
+        <pc:sldMkLst>
+          <pc:docMk/>
+          <pc:sldMk cId="470406599" sldId="283"/>
+        </pc:sldMkLst>
+        <pc:spChg chg="mod">
+          <ac:chgData name="承太郎 山崎" userId="f065ba058e752810" providerId="LiveId" clId="{EE6D8BB2-87BE-4943-94DC-E90E182A0523}" dt="2025-12-23T19:11:16.247" v="4292" actId="207"/>
+          <ac:spMkLst>
+            <pc:docMk/>
+            <pc:sldMk cId="470406599" sldId="283"/>
+            <ac:spMk id="14" creationId="{4BF15CB3-AE8E-C1CF-A074-C01805D23E3B}"/>
+          </ac:spMkLst>
+        </pc:spChg>
+      </pc:sldChg>
     </pc:docChg>
   </pc:docChgLst>
 </pc:chgInfo>
@@ -2255,7 +2256,7 @@
           <a:p>
             <a:fld id="{9D3C98C4-E324-4B5F-A467-4E429B944069}" type="datetimeFigureOut">
               <a:rPr kumimoji="1" lang="ja-JP" altLang="en-US" smtClean="0"/>
-              <a:t>2025/12/24</a:t>
+              <a:t>2026/2/17</a:t>
             </a:fld>
             <a:endParaRPr kumimoji="1" lang="ja-JP" altLang="en-US"/>
           </a:p>
@@ -3156,7 +3157,7 @@
           <a:p>
             <a:fld id="{E0484DAA-C3B5-44F4-9200-4AF8B0FBAE1A}" type="datetime1">
               <a:rPr kumimoji="1" lang="ja-JP" altLang="en-US" smtClean="0"/>
-              <a:t>2025/12/24</a:t>
+              <a:t>2026/2/17</a:t>
             </a:fld>
             <a:endParaRPr kumimoji="1" lang="ja-JP" altLang="en-US"/>
           </a:p>
@@ -3412,7 +3413,7 @@
           <a:p>
             <a:fld id="{95D61B96-9514-4705-89D9-92806E92DA3C}" type="datetime1">
               <a:rPr kumimoji="1" lang="ja-JP" altLang="en-US" smtClean="0"/>
-              <a:t>2025/12/24</a:t>
+              <a:t>2026/2/17</a:t>
             </a:fld>
             <a:endParaRPr kumimoji="1" lang="ja-JP" altLang="en-US"/>
           </a:p>
@@ -4016,7 +4017,7 @@
           <a:p>
             <a:fld id="{1FCCFD67-B65E-4F1F-A7E9-33A8DD3FE8A4}" type="datetime1">
               <a:rPr kumimoji="1" lang="ja-JP" altLang="en-US" smtClean="0"/>
-              <a:t>2025/12/24</a:t>
+              <a:t>2026/2/17</a:t>
             </a:fld>
             <a:endParaRPr kumimoji="1" lang="ja-JP" altLang="en-US"/>
           </a:p>
@@ -4361,7 +4362,7 @@
           <a:p>
             <a:fld id="{EECD23D5-4953-48EC-9BD6-9F672EEAD81E}" type="datetime1">
               <a:rPr kumimoji="1" lang="ja-JP" altLang="en-US" smtClean="0"/>
-              <a:t>2025/12/24</a:t>
+              <a:t>2026/2/17</a:t>
             </a:fld>
             <a:endParaRPr kumimoji="1" lang="ja-JP" altLang="en-US"/>
           </a:p>
@@ -4853,7 +4854,7 @@
           <a:p>
             <a:fld id="{DEDA03B9-D085-40D4-88AC-E0DF4D6CC4C7}" type="datetime1">
               <a:rPr kumimoji="1" lang="ja-JP" altLang="en-US" smtClean="0"/>
-              <a:t>2025/12/24</a:t>
+              <a:t>2026/2/17</a:t>
             </a:fld>
             <a:endParaRPr kumimoji="1" lang="ja-JP" altLang="en-US"/>
           </a:p>
@@ -5010,7 +5011,7 @@
           <a:p>
             <a:fld id="{E0D848FA-23B7-42A2-A87B-F6ECE932BBB8}" type="datetime1">
               <a:rPr kumimoji="1" lang="ja-JP" altLang="en-US" smtClean="0"/>
-              <a:t>2025/12/24</a:t>
+              <a:t>2026/2/17</a:t>
             </a:fld>
             <a:endParaRPr kumimoji="1" lang="ja-JP" altLang="en-US"/>
           </a:p>
@@ -5139,7 +5140,7 @@
           <a:p>
             <a:fld id="{205ADBA9-D679-4B2D-B088-2474FEE86FAF}" type="datetime1">
               <a:rPr kumimoji="1" lang="ja-JP" altLang="en-US" smtClean="0"/>
-              <a:t>2025/12/24</a:t>
+              <a:t>2026/2/17</a:t>
             </a:fld>
             <a:endParaRPr kumimoji="1" lang="ja-JP" altLang="en-US"/>
           </a:p>
@@ -5498,7 +5499,7 @@
           <a:p>
             <a:fld id="{4D2BC66D-E74D-4F10-A234-4764544E1699}" type="datetime1">
               <a:rPr kumimoji="1" lang="ja-JP" altLang="en-US" smtClean="0"/>
-              <a:t>2025/12/24</a:t>
+              <a:t>2026/2/17</a:t>
             </a:fld>
             <a:endParaRPr kumimoji="1" lang="ja-JP" altLang="en-US"/>
           </a:p>
@@ -5802,7 +5803,7 @@
           <a:p>
             <a:fld id="{84FE09BC-A4DE-4553-A94A-9B24F83CE1AF}" type="datetime1">
               <a:rPr kumimoji="1" lang="ja-JP" altLang="en-US" smtClean="0"/>
-              <a:t>2025/12/24</a:t>
+              <a:t>2026/2/17</a:t>
             </a:fld>
             <a:endParaRPr kumimoji="1" lang="ja-JP" altLang="en-US"/>
           </a:p>
@@ -10577,304 +10578,8 @@
 </p:sld>
 </file>
 
-<file path=ppt/slides/slide2.xml><?xml version="1.0" encoding="utf-8"?>
-<p:sld xmlns:a="http://schemas.openxmlformats.org/drawingml/2006/main" xmlns:r="http://schemas.openxmlformats.org/officeDocument/2006/relationships" xmlns:p="http://schemas.openxmlformats.org/presentationml/2006/main">
-  <p:cSld>
-    <p:spTree>
-      <p:nvGrpSpPr>
-        <p:cNvPr id="1" name=""/>
-        <p:cNvGrpSpPr/>
-        <p:nvPr/>
-      </p:nvGrpSpPr>
-      <p:grpSpPr>
-        <a:xfrm>
-          <a:off x="0" y="0"/>
-          <a:ext cx="0" cy="0"/>
-          <a:chOff x="0" y="0"/>
-          <a:chExt cx="0" cy="0"/>
-        </a:xfrm>
-      </p:grpSpPr>
-      <p:pic>
-        <p:nvPicPr>
-          <p:cNvPr id="9" name="図 8" descr="モニター, スコアボード, 画面, 座る が含まれている画像">
-            <a:extLst>
-              <a:ext uri="{FF2B5EF4-FFF2-40B4-BE49-F238E27FC236}">
-                <a16:creationId xmlns:a16="http://schemas.microsoft.com/office/drawing/2014/main" id="{947CBF56-C379-06E6-0816-EF099A07A595}"/>
-              </a:ext>
-            </a:extLst>
-          </p:cNvPr>
-          <p:cNvPicPr>
-            <a:picLocks noChangeAspect="1"/>
-          </p:cNvPicPr>
-          <p:nvPr/>
-        </p:nvPicPr>
-        <p:blipFill>
-          <a:blip r:embed="rId2">
-            <a:alphaModFix amt="20000"/>
-          </a:blip>
-          <a:srcRect t="2057" b="8622"/>
-          <a:stretch>
-            <a:fillRect/>
-          </a:stretch>
-        </p:blipFill>
-        <p:spPr>
-          <a:xfrm>
-            <a:off x="786014" y="1329642"/>
-            <a:ext cx="10723357" cy="5125987"/>
-          </a:xfrm>
-          <a:prstGeom prst="rect">
-            <a:avLst/>
-          </a:prstGeom>
-          <a:effectLst>
-            <a:softEdge rad="241300"/>
-          </a:effectLst>
-        </p:spPr>
-      </p:pic>
-      <p:sp>
-        <p:nvSpPr>
-          <p:cNvPr id="2" name="タイトル 1">
-            <a:extLst>
-              <a:ext uri="{FF2B5EF4-FFF2-40B4-BE49-F238E27FC236}">
-                <a16:creationId xmlns:a16="http://schemas.microsoft.com/office/drawing/2014/main" id="{C231FF74-E1FE-B9F4-2930-DC50319E09A9}"/>
-              </a:ext>
-            </a:extLst>
-          </p:cNvPr>
-          <p:cNvSpPr>
-            <a:spLocks noGrp="1"/>
-          </p:cNvSpPr>
-          <p:nvPr>
-            <p:ph type="title"/>
-          </p:nvPr>
-        </p:nvSpPr>
-        <p:spPr/>
-        <p:txBody>
-          <a:bodyPr>
-            <a:normAutofit/>
-          </a:bodyPr>
-          <a:lstStyle/>
-          <a:p>
-            <a:r>
-              <a:rPr kumimoji="1" lang="ja-JP" altLang="en-US" sz="6000" dirty="0"/>
-              <a:t>現</a:t>
-            </a:r>
-            <a:r>
-              <a:rPr kumimoji="1" lang="ja-JP" altLang="en-US" sz="5400" dirty="0"/>
-              <a:t>在私</a:t>
-            </a:r>
-            <a:r>
-              <a:rPr kumimoji="1" lang="ja-JP" altLang="en-US" dirty="0"/>
-              <a:t>が</a:t>
-            </a:r>
-            <a:r>
-              <a:rPr kumimoji="1" lang="ja-JP" altLang="en-US" sz="5400" dirty="0"/>
-              <a:t>開発中</a:t>
-            </a:r>
-            <a:r>
-              <a:rPr kumimoji="1" lang="ja-JP" altLang="en-US" dirty="0"/>
-              <a:t>の</a:t>
-            </a:r>
-            <a:r>
-              <a:rPr kumimoji="1" lang="ja-JP" altLang="en-US" sz="5400" dirty="0"/>
-              <a:t>リポジトリ</a:t>
-            </a:r>
-            <a:endParaRPr kumimoji="1" lang="ja-JP" altLang="en-US" sz="4800" dirty="0"/>
-          </a:p>
-        </p:txBody>
-      </p:sp>
-      <p:sp>
-        <p:nvSpPr>
-          <p:cNvPr id="4" name="スライド番号プレースホルダー 3">
-            <a:extLst>
-              <a:ext uri="{FF2B5EF4-FFF2-40B4-BE49-F238E27FC236}">
-                <a16:creationId xmlns:a16="http://schemas.microsoft.com/office/drawing/2014/main" id="{767CDCC5-2FDD-6F87-498A-94C5A2508D71}"/>
-              </a:ext>
-            </a:extLst>
-          </p:cNvPr>
-          <p:cNvSpPr>
-            <a:spLocks noGrp="1"/>
-          </p:cNvSpPr>
-          <p:nvPr>
-            <p:ph type="sldNum" sz="quarter" idx="10"/>
-          </p:nvPr>
-        </p:nvSpPr>
-        <p:spPr/>
-        <p:txBody>
-          <a:bodyPr/>
-          <a:lstStyle/>
-          <a:p>
-            <a:fld id="{7A0ED1C7-8A26-48CF-81C0-2A5ADFEC2E18}" type="slidenum">
-              <a:rPr lang="ja-JP" altLang="en-US" smtClean="0"/>
-              <a:pPr/>
-              <a:t>2</a:t>
-            </a:fld>
-            <a:endParaRPr lang="ja-JP" altLang="en-US" dirty="0">
-              <a:solidFill>
-                <a:schemeClr val="tx1"/>
-              </a:solidFill>
-            </a:endParaRPr>
-          </a:p>
-        </p:txBody>
-      </p:sp>
-      <p:sp>
-        <p:nvSpPr>
-          <p:cNvPr id="5" name="四角形: 角を丸くする 4">
-            <a:extLst>
-              <a:ext uri="{FF2B5EF4-FFF2-40B4-BE49-F238E27FC236}">
-                <a16:creationId xmlns:a16="http://schemas.microsoft.com/office/drawing/2014/main" id="{A9493A1E-A79E-01F1-B874-0664CB6F5585}"/>
-              </a:ext>
-            </a:extLst>
-          </p:cNvPr>
-          <p:cNvSpPr/>
-          <p:nvPr/>
-        </p:nvSpPr>
-        <p:spPr>
-          <a:xfrm>
-            <a:off x="483576" y="1366887"/>
-            <a:ext cx="11289323" cy="5051498"/>
-          </a:xfrm>
-          <a:prstGeom prst="roundRect">
-            <a:avLst>
-              <a:gd name="adj" fmla="val 8806"/>
-            </a:avLst>
-          </a:prstGeom>
-          <a:noFill/>
-          <a:ln w="76200">
-            <a:solidFill>
-              <a:schemeClr val="tx1"/>
-            </a:solidFill>
-          </a:ln>
-        </p:spPr>
-        <p:style>
-          <a:lnRef idx="2">
-            <a:schemeClr val="accent1">
-              <a:shade val="15000"/>
-            </a:schemeClr>
-          </a:lnRef>
-          <a:fillRef idx="1">
-            <a:schemeClr val="accent1"/>
-          </a:fillRef>
-          <a:effectRef idx="0">
-            <a:schemeClr val="accent1"/>
-          </a:effectRef>
-          <a:fontRef idx="minor">
-            <a:schemeClr val="lt1"/>
-          </a:fontRef>
-        </p:style>
-        <p:txBody>
-          <a:bodyPr rtlCol="0" anchor="ctr"/>
-          <a:lstStyle/>
-          <a:p>
-            <a:pPr algn="ctr"/>
-            <a:endParaRPr kumimoji="1" lang="ja-JP" altLang="en-US" dirty="0"/>
-          </a:p>
-        </p:txBody>
-      </p:sp>
-      <p:sp>
-        <p:nvSpPr>
-          <p:cNvPr id="6" name="テキスト ボックス 5">
-            <a:extLst>
-              <a:ext uri="{FF2B5EF4-FFF2-40B4-BE49-F238E27FC236}">
-                <a16:creationId xmlns:a16="http://schemas.microsoft.com/office/drawing/2014/main" id="{75F76486-39CB-9131-219C-53ED0956A98C}"/>
-              </a:ext>
-            </a:extLst>
-          </p:cNvPr>
-          <p:cNvSpPr txBox="1"/>
-          <p:nvPr/>
-        </p:nvSpPr>
-        <p:spPr>
-          <a:xfrm>
-            <a:off x="1987412" y="5718951"/>
-            <a:ext cx="8320559" cy="461665"/>
-          </a:xfrm>
-          <a:prstGeom prst="rect">
-            <a:avLst/>
-          </a:prstGeom>
-          <a:noFill/>
-        </p:spPr>
-        <p:txBody>
-          <a:bodyPr wrap="square">
-            <a:spAutoFit/>
-          </a:bodyPr>
-          <a:lstStyle/>
-          <a:p>
-            <a:pPr algn="ctr"/>
-            <a:r>
-              <a:rPr lang="ja-JP" altLang="en-US" sz="2400" dirty="0">
-                <a:latin typeface="+mj-ea"/>
-                <a:ea typeface="+mj-ea"/>
-                <a:hlinkClick r:id="rId3"/>
-              </a:rPr>
-              <a:t>https://github.com/NumberZero-0621/wam-studio</a:t>
-            </a:r>
-            <a:endParaRPr lang="ja-JP" altLang="en-US" sz="2400" dirty="0">
-              <a:latin typeface="+mj-ea"/>
-              <a:ea typeface="+mj-ea"/>
-            </a:endParaRPr>
-          </a:p>
-        </p:txBody>
-      </p:sp>
-      <p:pic>
-        <p:nvPicPr>
-          <p:cNvPr id="7" name="Picture 2">
-            <a:extLst>
-              <a:ext uri="{FF2B5EF4-FFF2-40B4-BE49-F238E27FC236}">
-                <a16:creationId xmlns:a16="http://schemas.microsoft.com/office/drawing/2014/main" id="{A931FBB0-70F8-A00B-A92D-6163970042F4}"/>
-              </a:ext>
-            </a:extLst>
-          </p:cNvPr>
-          <p:cNvPicPr>
-            <a:picLocks noChangeAspect="1" noChangeArrowheads="1"/>
-          </p:cNvPicPr>
-          <p:nvPr/>
-        </p:nvPicPr>
-        <p:blipFill rotWithShape="1">
-          <a:blip r:embed="rId4">
-            <a:extLst>
-              <a:ext uri="{28A0092B-C50C-407E-A947-70E740481C1C}">
-                <a14:useLocalDpi xmlns:a14="http://schemas.microsoft.com/office/drawing/2010/main" val="0"/>
-              </a:ext>
-            </a:extLst>
-          </a:blip>
-          <a:srcRect l="3984" t="5904" r="3992" b="6185"/>
-          <a:stretch>
-            <a:fillRect/>
-          </a:stretch>
-        </p:blipFill>
-        <p:spPr bwMode="auto">
-          <a:xfrm>
-            <a:off x="3949431" y="1572122"/>
-            <a:ext cx="4309352" cy="4116698"/>
-          </a:xfrm>
-          <a:prstGeom prst="rect">
-            <a:avLst/>
-          </a:prstGeom>
-          <a:noFill/>
-          <a:extLst>
-            <a:ext uri="{909E8E84-426E-40DD-AFC4-6F175D3DCCD1}">
-              <a14:hiddenFill xmlns:a14="http://schemas.microsoft.com/office/drawing/2010/main">
-                <a:solidFill>
-                  <a:srgbClr val="FFFFFF"/>
-                </a:solidFill>
-              </a14:hiddenFill>
-            </a:ext>
-          </a:extLst>
-        </p:spPr>
-      </p:pic>
-    </p:spTree>
-    <p:extLst>
-      <p:ext uri="{BB962C8B-B14F-4D97-AF65-F5344CB8AC3E}">
-        <p14:creationId xmlns:p14="http://schemas.microsoft.com/office/powerpoint/2010/main" val="2093853378"/>
-      </p:ext>
-    </p:extLst>
-  </p:cSld>
-  <p:clrMapOvr>
-    <a:masterClrMapping/>
-  </p:clrMapOvr>
-</p:sld>
-</file>
-
-<file path=ppt/slides/slide3.xml><?xml version="1.0" encoding="utf-8"?>
-<p:sld xmlns:a="http://schemas.openxmlformats.org/drawingml/2006/main" xmlns:r="http://schemas.openxmlformats.org/officeDocument/2006/relationships" xmlns:p="http://schemas.openxmlformats.org/presentationml/2006/main">
+<file path=ppt/slides/slide15.xml><?xml version="1.0" encoding="utf-8"?>
+<p:sld xmlns:a="http://schemas.openxmlformats.org/drawingml/2006/main" xmlns:r="http://schemas.openxmlformats.org/officeDocument/2006/relationships" xmlns:p="http://schemas.openxmlformats.org/presentationml/2006/main" show="0">
   <p:cSld>
     <p:spTree>
       <p:nvGrpSpPr>
@@ -10965,7 +10670,7 @@
             <a:fld id="{7A0ED1C7-8A26-48CF-81C0-2A5ADFEC2E18}" type="slidenum">
               <a:rPr lang="ja-JP" altLang="en-US" smtClean="0"/>
               <a:pPr/>
-              <a:t>3</a:t>
+              <a:t>15</a:t>
             </a:fld>
             <a:endParaRPr lang="ja-JP" altLang="en-US" dirty="0">
               <a:solidFill>
@@ -12491,6 +12196,782 @@
       <p:bldP spid="15" grpId="0"/>
     </p:bldLst>
   </p:timing>
+</p:sld>
+</file>
+
+<file path=ppt/slides/slide2.xml><?xml version="1.0" encoding="utf-8"?>
+<p:sld xmlns:a="http://schemas.openxmlformats.org/drawingml/2006/main" xmlns:r="http://schemas.openxmlformats.org/officeDocument/2006/relationships" xmlns:p="http://schemas.openxmlformats.org/presentationml/2006/main">
+  <p:cSld>
+    <p:spTree>
+      <p:nvGrpSpPr>
+        <p:cNvPr id="1" name=""/>
+        <p:cNvGrpSpPr/>
+        <p:nvPr/>
+      </p:nvGrpSpPr>
+      <p:grpSpPr>
+        <a:xfrm>
+          <a:off x="0" y="0"/>
+          <a:ext cx="0" cy="0"/>
+          <a:chOff x="0" y="0"/>
+          <a:chExt cx="0" cy="0"/>
+        </a:xfrm>
+      </p:grpSpPr>
+      <p:pic>
+        <p:nvPicPr>
+          <p:cNvPr id="9" name="図 8" descr="モニター, スコアボード, 画面, 座る が含まれている画像">
+            <a:extLst>
+              <a:ext uri="{FF2B5EF4-FFF2-40B4-BE49-F238E27FC236}">
+                <a16:creationId xmlns:a16="http://schemas.microsoft.com/office/drawing/2014/main" id="{947CBF56-C379-06E6-0816-EF099A07A595}"/>
+              </a:ext>
+            </a:extLst>
+          </p:cNvPr>
+          <p:cNvPicPr>
+            <a:picLocks noChangeAspect="1"/>
+          </p:cNvPicPr>
+          <p:nvPr/>
+        </p:nvPicPr>
+        <p:blipFill>
+          <a:blip r:embed="rId2">
+            <a:alphaModFix amt="20000"/>
+          </a:blip>
+          <a:srcRect t="2057" b="8622"/>
+          <a:stretch>
+            <a:fillRect/>
+          </a:stretch>
+        </p:blipFill>
+        <p:spPr>
+          <a:xfrm>
+            <a:off x="786014" y="1329642"/>
+            <a:ext cx="10723357" cy="5125987"/>
+          </a:xfrm>
+          <a:prstGeom prst="rect">
+            <a:avLst/>
+          </a:prstGeom>
+          <a:effectLst>
+            <a:softEdge rad="241300"/>
+          </a:effectLst>
+        </p:spPr>
+      </p:pic>
+      <p:sp>
+        <p:nvSpPr>
+          <p:cNvPr id="2" name="タイトル 1">
+            <a:extLst>
+              <a:ext uri="{FF2B5EF4-FFF2-40B4-BE49-F238E27FC236}">
+                <a16:creationId xmlns:a16="http://schemas.microsoft.com/office/drawing/2014/main" id="{C231FF74-E1FE-B9F4-2930-DC50319E09A9}"/>
+              </a:ext>
+            </a:extLst>
+          </p:cNvPr>
+          <p:cNvSpPr>
+            <a:spLocks noGrp="1"/>
+          </p:cNvSpPr>
+          <p:nvPr>
+            <p:ph type="title"/>
+          </p:nvPr>
+        </p:nvSpPr>
+        <p:spPr/>
+        <p:txBody>
+          <a:bodyPr>
+            <a:normAutofit/>
+          </a:bodyPr>
+          <a:lstStyle/>
+          <a:p>
+            <a:r>
+              <a:rPr kumimoji="1" lang="ja-JP" altLang="en-US" sz="6000" dirty="0"/>
+              <a:t>現</a:t>
+            </a:r>
+            <a:r>
+              <a:rPr kumimoji="1" lang="ja-JP" altLang="en-US" sz="5400" dirty="0"/>
+              <a:t>在私</a:t>
+            </a:r>
+            <a:r>
+              <a:rPr kumimoji="1" lang="ja-JP" altLang="en-US" dirty="0"/>
+              <a:t>が</a:t>
+            </a:r>
+            <a:r>
+              <a:rPr kumimoji="1" lang="ja-JP" altLang="en-US" sz="5400" dirty="0"/>
+              <a:t>開発中</a:t>
+            </a:r>
+            <a:r>
+              <a:rPr kumimoji="1" lang="ja-JP" altLang="en-US" dirty="0"/>
+              <a:t>の</a:t>
+            </a:r>
+            <a:r>
+              <a:rPr kumimoji="1" lang="ja-JP" altLang="en-US" sz="5400" dirty="0"/>
+              <a:t>リポジトリ</a:t>
+            </a:r>
+            <a:endParaRPr kumimoji="1" lang="ja-JP" altLang="en-US" sz="4800" dirty="0"/>
+          </a:p>
+        </p:txBody>
+      </p:sp>
+      <p:sp>
+        <p:nvSpPr>
+          <p:cNvPr id="4" name="スライド番号プレースホルダー 3">
+            <a:extLst>
+              <a:ext uri="{FF2B5EF4-FFF2-40B4-BE49-F238E27FC236}">
+                <a16:creationId xmlns:a16="http://schemas.microsoft.com/office/drawing/2014/main" id="{767CDCC5-2FDD-6F87-498A-94C5A2508D71}"/>
+              </a:ext>
+            </a:extLst>
+          </p:cNvPr>
+          <p:cNvSpPr>
+            <a:spLocks noGrp="1"/>
+          </p:cNvSpPr>
+          <p:nvPr>
+            <p:ph type="sldNum" sz="quarter" idx="10"/>
+          </p:nvPr>
+        </p:nvSpPr>
+        <p:spPr/>
+        <p:txBody>
+          <a:bodyPr/>
+          <a:lstStyle/>
+          <a:p>
+            <a:fld id="{7A0ED1C7-8A26-48CF-81C0-2A5ADFEC2E18}" type="slidenum">
+              <a:rPr lang="ja-JP" altLang="en-US" smtClean="0"/>
+              <a:pPr/>
+              <a:t>2</a:t>
+            </a:fld>
+            <a:endParaRPr lang="ja-JP" altLang="en-US" dirty="0">
+              <a:solidFill>
+                <a:schemeClr val="tx1"/>
+              </a:solidFill>
+            </a:endParaRPr>
+          </a:p>
+        </p:txBody>
+      </p:sp>
+      <p:sp>
+        <p:nvSpPr>
+          <p:cNvPr id="5" name="四角形: 角を丸くする 4">
+            <a:extLst>
+              <a:ext uri="{FF2B5EF4-FFF2-40B4-BE49-F238E27FC236}">
+                <a16:creationId xmlns:a16="http://schemas.microsoft.com/office/drawing/2014/main" id="{A9493A1E-A79E-01F1-B874-0664CB6F5585}"/>
+              </a:ext>
+            </a:extLst>
+          </p:cNvPr>
+          <p:cNvSpPr/>
+          <p:nvPr/>
+        </p:nvSpPr>
+        <p:spPr>
+          <a:xfrm>
+            <a:off x="483576" y="1366887"/>
+            <a:ext cx="11289323" cy="5051498"/>
+          </a:xfrm>
+          <a:prstGeom prst="roundRect">
+            <a:avLst>
+              <a:gd name="adj" fmla="val 8806"/>
+            </a:avLst>
+          </a:prstGeom>
+          <a:noFill/>
+          <a:ln w="76200">
+            <a:solidFill>
+              <a:schemeClr val="tx1"/>
+            </a:solidFill>
+          </a:ln>
+        </p:spPr>
+        <p:style>
+          <a:lnRef idx="2">
+            <a:schemeClr val="accent1">
+              <a:shade val="15000"/>
+            </a:schemeClr>
+          </a:lnRef>
+          <a:fillRef idx="1">
+            <a:schemeClr val="accent1"/>
+          </a:fillRef>
+          <a:effectRef idx="0">
+            <a:schemeClr val="accent1"/>
+          </a:effectRef>
+          <a:fontRef idx="minor">
+            <a:schemeClr val="lt1"/>
+          </a:fontRef>
+        </p:style>
+        <p:txBody>
+          <a:bodyPr rtlCol="0" anchor="ctr"/>
+          <a:lstStyle/>
+          <a:p>
+            <a:pPr algn="ctr"/>
+            <a:endParaRPr kumimoji="1" lang="ja-JP" altLang="en-US" dirty="0"/>
+          </a:p>
+        </p:txBody>
+      </p:sp>
+      <p:sp>
+        <p:nvSpPr>
+          <p:cNvPr id="6" name="テキスト ボックス 5">
+            <a:extLst>
+              <a:ext uri="{FF2B5EF4-FFF2-40B4-BE49-F238E27FC236}">
+                <a16:creationId xmlns:a16="http://schemas.microsoft.com/office/drawing/2014/main" id="{75F76486-39CB-9131-219C-53ED0956A98C}"/>
+              </a:ext>
+            </a:extLst>
+          </p:cNvPr>
+          <p:cNvSpPr txBox="1"/>
+          <p:nvPr/>
+        </p:nvSpPr>
+        <p:spPr>
+          <a:xfrm>
+            <a:off x="1987412" y="5718951"/>
+            <a:ext cx="8320559" cy="461665"/>
+          </a:xfrm>
+          <a:prstGeom prst="rect">
+            <a:avLst/>
+          </a:prstGeom>
+          <a:noFill/>
+        </p:spPr>
+        <p:txBody>
+          <a:bodyPr wrap="square">
+            <a:spAutoFit/>
+          </a:bodyPr>
+          <a:lstStyle/>
+          <a:p>
+            <a:pPr algn="ctr"/>
+            <a:r>
+              <a:rPr lang="ja-JP" altLang="en-US" sz="2400" dirty="0">
+                <a:latin typeface="+mj-ea"/>
+                <a:ea typeface="+mj-ea"/>
+                <a:hlinkClick r:id="rId3"/>
+              </a:rPr>
+              <a:t>https://github.com/NumberZero-0621/wam-studio</a:t>
+            </a:r>
+            <a:endParaRPr lang="ja-JP" altLang="en-US" sz="2400" dirty="0">
+              <a:latin typeface="+mj-ea"/>
+              <a:ea typeface="+mj-ea"/>
+            </a:endParaRPr>
+          </a:p>
+        </p:txBody>
+      </p:sp>
+      <p:pic>
+        <p:nvPicPr>
+          <p:cNvPr id="7" name="Picture 2">
+            <a:extLst>
+              <a:ext uri="{FF2B5EF4-FFF2-40B4-BE49-F238E27FC236}">
+                <a16:creationId xmlns:a16="http://schemas.microsoft.com/office/drawing/2014/main" id="{A931FBB0-70F8-A00B-A92D-6163970042F4}"/>
+              </a:ext>
+            </a:extLst>
+          </p:cNvPr>
+          <p:cNvPicPr>
+            <a:picLocks noChangeAspect="1" noChangeArrowheads="1"/>
+          </p:cNvPicPr>
+          <p:nvPr/>
+        </p:nvPicPr>
+        <p:blipFill rotWithShape="1">
+          <a:blip r:embed="rId4">
+            <a:extLst>
+              <a:ext uri="{28A0092B-C50C-407E-A947-70E740481C1C}">
+                <a14:useLocalDpi xmlns:a14="http://schemas.microsoft.com/office/drawing/2010/main" val="0"/>
+              </a:ext>
+            </a:extLst>
+          </a:blip>
+          <a:srcRect l="3984" t="5904" r="3992" b="6185"/>
+          <a:stretch>
+            <a:fillRect/>
+          </a:stretch>
+        </p:blipFill>
+        <p:spPr bwMode="auto">
+          <a:xfrm>
+            <a:off x="3949431" y="1572122"/>
+            <a:ext cx="4309352" cy="4116698"/>
+          </a:xfrm>
+          <a:prstGeom prst="rect">
+            <a:avLst/>
+          </a:prstGeom>
+          <a:noFill/>
+          <a:extLst>
+            <a:ext uri="{909E8E84-426E-40DD-AFC4-6F175D3DCCD1}">
+              <a14:hiddenFill xmlns:a14="http://schemas.microsoft.com/office/drawing/2010/main">
+                <a:solidFill>
+                  <a:srgbClr val="FFFFFF"/>
+                </a:solidFill>
+              </a14:hiddenFill>
+            </a:ext>
+          </a:extLst>
+        </p:spPr>
+      </p:pic>
+    </p:spTree>
+    <p:extLst>
+      <p:ext uri="{BB962C8B-B14F-4D97-AF65-F5344CB8AC3E}">
+        <p14:creationId xmlns:p14="http://schemas.microsoft.com/office/powerpoint/2010/main" val="2093853378"/>
+      </p:ext>
+    </p:extLst>
+  </p:cSld>
+  <p:clrMapOvr>
+    <a:masterClrMapping/>
+  </p:clrMapOvr>
+</p:sld>
+</file>
+
+<file path=ppt/slides/slide3.xml><?xml version="1.0" encoding="utf-8"?>
+<p:sld xmlns:a="http://schemas.openxmlformats.org/drawingml/2006/main" xmlns:r="http://schemas.openxmlformats.org/officeDocument/2006/relationships" xmlns:p="http://schemas.openxmlformats.org/presentationml/2006/main">
+  <p:cSld>
+    <p:spTree>
+      <p:nvGrpSpPr>
+        <p:cNvPr id="1" name="">
+          <a:extLst>
+            <a:ext uri="{FF2B5EF4-FFF2-40B4-BE49-F238E27FC236}">
+              <a16:creationId xmlns:a16="http://schemas.microsoft.com/office/drawing/2014/main" id="{98E9839D-A39C-0840-858F-9778A1C9AD0D}"/>
+            </a:ext>
+          </a:extLst>
+        </p:cNvPr>
+        <p:cNvGrpSpPr/>
+        <p:nvPr/>
+      </p:nvGrpSpPr>
+      <p:grpSpPr>
+        <a:xfrm>
+          <a:off x="0" y="0"/>
+          <a:ext cx="0" cy="0"/>
+          <a:chOff x="0" y="0"/>
+          <a:chExt cx="0" cy="0"/>
+        </a:xfrm>
+      </p:grpSpPr>
+      <p:sp>
+        <p:nvSpPr>
+          <p:cNvPr id="2" name="タイトル 1">
+            <a:extLst>
+              <a:ext uri="{FF2B5EF4-FFF2-40B4-BE49-F238E27FC236}">
+                <a16:creationId xmlns:a16="http://schemas.microsoft.com/office/drawing/2014/main" id="{140975FE-0A6E-2C4C-81BE-EE0EA7AD368A}"/>
+              </a:ext>
+            </a:extLst>
+          </p:cNvPr>
+          <p:cNvSpPr>
+            <a:spLocks noGrp="1"/>
+          </p:cNvSpPr>
+          <p:nvPr>
+            <p:ph type="title"/>
+          </p:nvPr>
+        </p:nvSpPr>
+        <p:spPr>
+          <a:xfrm>
+            <a:off x="134511" y="120622"/>
+            <a:ext cx="4138551" cy="1055171"/>
+          </a:xfrm>
+        </p:spPr>
+        <p:txBody>
+          <a:bodyPr>
+            <a:normAutofit/>
+          </a:bodyPr>
+          <a:lstStyle/>
+          <a:p>
+            <a:r>
+              <a:rPr kumimoji="1" lang="ja-JP" altLang="en-US" sz="6600" dirty="0"/>
+              <a:t>まとめ</a:t>
+            </a:r>
+          </a:p>
+        </p:txBody>
+      </p:sp>
+      <p:sp>
+        <p:nvSpPr>
+          <p:cNvPr id="4" name="スライド番号プレースホルダー 3">
+            <a:extLst>
+              <a:ext uri="{FF2B5EF4-FFF2-40B4-BE49-F238E27FC236}">
+                <a16:creationId xmlns:a16="http://schemas.microsoft.com/office/drawing/2014/main" id="{B633C5C1-4AED-3698-E17D-017B5E49542A}"/>
+              </a:ext>
+            </a:extLst>
+          </p:cNvPr>
+          <p:cNvSpPr>
+            <a:spLocks noGrp="1"/>
+          </p:cNvSpPr>
+          <p:nvPr>
+            <p:ph type="sldNum" sz="quarter" idx="10"/>
+          </p:nvPr>
+        </p:nvSpPr>
+        <p:spPr/>
+        <p:txBody>
+          <a:bodyPr/>
+          <a:lstStyle/>
+          <a:p>
+            <a:fld id="{7A0ED1C7-8A26-48CF-81C0-2A5ADFEC2E18}" type="slidenum">
+              <a:rPr lang="ja-JP" altLang="en-US" smtClean="0"/>
+              <a:pPr/>
+              <a:t>3</a:t>
+            </a:fld>
+            <a:endParaRPr lang="ja-JP" altLang="en-US" dirty="0">
+              <a:solidFill>
+                <a:schemeClr val="tx1"/>
+              </a:solidFill>
+            </a:endParaRPr>
+          </a:p>
+        </p:txBody>
+      </p:sp>
+      <p:sp>
+        <p:nvSpPr>
+          <p:cNvPr id="12" name="四角形: 角を丸くする 11">
+            <a:extLst>
+              <a:ext uri="{FF2B5EF4-FFF2-40B4-BE49-F238E27FC236}">
+                <a16:creationId xmlns:a16="http://schemas.microsoft.com/office/drawing/2014/main" id="{849AEA12-95E7-1677-A811-A5C20C0C1606}"/>
+              </a:ext>
+            </a:extLst>
+          </p:cNvPr>
+          <p:cNvSpPr/>
+          <p:nvPr/>
+        </p:nvSpPr>
+        <p:spPr>
+          <a:xfrm>
+            <a:off x="483576" y="1366887"/>
+            <a:ext cx="11289323" cy="5051498"/>
+          </a:xfrm>
+          <a:prstGeom prst="roundRect">
+            <a:avLst>
+              <a:gd name="adj" fmla="val 8806"/>
+            </a:avLst>
+          </a:prstGeom>
+          <a:noFill/>
+          <a:ln w="76200">
+            <a:solidFill>
+              <a:schemeClr val="tx1"/>
+            </a:solidFill>
+          </a:ln>
+        </p:spPr>
+        <p:style>
+          <a:lnRef idx="2">
+            <a:schemeClr val="accent1">
+              <a:shade val="15000"/>
+            </a:schemeClr>
+          </a:lnRef>
+          <a:fillRef idx="1">
+            <a:schemeClr val="accent1"/>
+          </a:fillRef>
+          <a:effectRef idx="0">
+            <a:schemeClr val="accent1"/>
+          </a:effectRef>
+          <a:fontRef idx="minor">
+            <a:schemeClr val="lt1"/>
+          </a:fontRef>
+        </p:style>
+        <p:txBody>
+          <a:bodyPr rtlCol="0" anchor="ctr"/>
+          <a:lstStyle/>
+          <a:p>
+            <a:pPr algn="ctr"/>
+            <a:endParaRPr kumimoji="1" lang="ja-JP" altLang="en-US" dirty="0"/>
+          </a:p>
+        </p:txBody>
+      </p:sp>
+      <p:sp>
+        <p:nvSpPr>
+          <p:cNvPr id="7" name="テキスト ボックス 6">
+            <a:extLst>
+              <a:ext uri="{FF2B5EF4-FFF2-40B4-BE49-F238E27FC236}">
+                <a16:creationId xmlns:a16="http://schemas.microsoft.com/office/drawing/2014/main" id="{6C792AA2-D6B1-AD06-CE08-43A83D7B1438}"/>
+              </a:ext>
+            </a:extLst>
+          </p:cNvPr>
+          <p:cNvSpPr txBox="1"/>
+          <p:nvPr/>
+        </p:nvSpPr>
+        <p:spPr>
+          <a:xfrm>
+            <a:off x="608347" y="1446015"/>
+            <a:ext cx="11100077" cy="4271747"/>
+          </a:xfrm>
+          <a:prstGeom prst="rect">
+            <a:avLst/>
+          </a:prstGeom>
+          <a:noFill/>
+        </p:spPr>
+        <p:txBody>
+          <a:bodyPr wrap="square">
+            <a:spAutoFit/>
+          </a:bodyPr>
+          <a:lstStyle/>
+          <a:p>
+            <a:pPr>
+              <a:lnSpc>
+                <a:spcPct val="120000"/>
+              </a:lnSpc>
+            </a:pPr>
+            <a:r>
+              <a:rPr lang="en-US" altLang="ja-JP" sz="4400" dirty="0">
+                <a:latin typeface="+mj-ea"/>
+                <a:ea typeface="+mj-ea"/>
+              </a:rPr>
+              <a:t>DAWIY</a:t>
+            </a:r>
+            <a:r>
+              <a:rPr lang="ja-JP" altLang="en-US" sz="4400" dirty="0">
+                <a:latin typeface="+mj-ea"/>
+                <a:ea typeface="+mj-ea"/>
+              </a:rPr>
+              <a:t>：</a:t>
+            </a:r>
+            <a:r>
+              <a:rPr lang="ja-JP" altLang="en-US" sz="2800" u="sng" dirty="0">
+                <a:latin typeface="モボ-SemiBold" panose="02000700000000000000" pitchFamily="50" charset="-128"/>
+                <a:ea typeface="モボ-SemiBold" panose="02000700000000000000" pitchFamily="50" charset="-128"/>
+              </a:rPr>
+              <a:t>自分好みの音楽制作環境</a:t>
+            </a:r>
+            <a:r>
+              <a:rPr lang="ja-JP" altLang="en-US" sz="2400" dirty="0"/>
+              <a:t>を</a:t>
+            </a:r>
+            <a:r>
+              <a:rPr lang="en-US" altLang="ja-JP" sz="2400" dirty="0"/>
+              <a:t>DIY</a:t>
+            </a:r>
+            <a:r>
+              <a:rPr lang="ja-JP" altLang="en-US" sz="2400" dirty="0"/>
+              <a:t>するプラットフォーム</a:t>
+            </a:r>
+            <a:endParaRPr lang="en-US" altLang="ja-JP" sz="1600" dirty="0"/>
+          </a:p>
+          <a:p>
+            <a:pPr marL="914400" lvl="1" indent="-457200">
+              <a:lnSpc>
+                <a:spcPct val="120000"/>
+              </a:lnSpc>
+              <a:buFont typeface="Arial" panose="020B0604020202020204" pitchFamily="34" charset="0"/>
+              <a:buChar char="•"/>
+            </a:pPr>
+            <a:r>
+              <a:rPr lang="ja-JP" altLang="en-US" sz="2800" dirty="0"/>
+              <a:t>モジュール化された機能構成</a:t>
+            </a:r>
+          </a:p>
+          <a:p>
+            <a:pPr marL="914400" lvl="1" indent="-457200">
+              <a:lnSpc>
+                <a:spcPct val="120000"/>
+              </a:lnSpc>
+              <a:buFont typeface="Arial" panose="020B0604020202020204" pitchFamily="34" charset="0"/>
+              <a:buChar char="•"/>
+            </a:pPr>
+            <a:r>
+              <a:rPr lang="ja-JP" altLang="en-US" sz="2800" dirty="0"/>
+              <a:t>柔軟な </a:t>
+            </a:r>
+            <a:r>
+              <a:rPr lang="en-US" altLang="ja-JP" sz="2800" dirty="0"/>
+              <a:t>UI </a:t>
+            </a:r>
+            <a:r>
+              <a:rPr lang="ja-JP" altLang="en-US" sz="2800" dirty="0"/>
+              <a:t>カスタマイズ</a:t>
+            </a:r>
+          </a:p>
+          <a:p>
+            <a:pPr marL="914400" lvl="1" indent="-457200">
+              <a:lnSpc>
+                <a:spcPct val="120000"/>
+              </a:lnSpc>
+              <a:buFont typeface="Arial" panose="020B0604020202020204" pitchFamily="34" charset="0"/>
+              <a:buChar char="•"/>
+            </a:pPr>
+            <a:r>
+              <a:rPr lang="ja-JP" altLang="en-US" sz="2800" dirty="0"/>
+              <a:t>拡張可能なプラグインシステム</a:t>
+            </a:r>
+            <a:endParaRPr lang="en-US" altLang="ja-JP" sz="2800" dirty="0"/>
+          </a:p>
+          <a:p>
+            <a:pPr marL="1371600" lvl="2" indent="-457200">
+              <a:lnSpc>
+                <a:spcPct val="120000"/>
+              </a:lnSpc>
+              <a:buFont typeface="Arial" panose="020B0604020202020204" pitchFamily="34" charset="0"/>
+              <a:buChar char="•"/>
+            </a:pPr>
+            <a:r>
+              <a:rPr lang="en-US" altLang="ja-JP" sz="2400" dirty="0"/>
+              <a:t>VST</a:t>
+            </a:r>
+            <a:r>
+              <a:rPr lang="ja-JP" altLang="en-US" sz="2400" dirty="0"/>
+              <a:t>プラグイン </a:t>
+            </a:r>
+            <a:r>
+              <a:rPr lang="en-US" altLang="ja-JP" sz="2400" dirty="0"/>
+              <a:t>/ DAWIY</a:t>
+            </a:r>
+            <a:r>
+              <a:rPr lang="ja-JP" altLang="en-US" sz="2400" dirty="0"/>
+              <a:t>プラグイン</a:t>
+            </a:r>
+            <a:endParaRPr lang="en-US" altLang="ja-JP" sz="2400" dirty="0"/>
+          </a:p>
+          <a:p>
+            <a:pPr>
+              <a:lnSpc>
+                <a:spcPct val="120000"/>
+              </a:lnSpc>
+            </a:pPr>
+            <a:r>
+              <a:rPr lang="ja-JP" altLang="en-US" sz="2800" dirty="0"/>
+              <a:t>デモセッションでは、</a:t>
+            </a:r>
+            <a:endParaRPr lang="en-US" altLang="ja-JP" sz="2800" dirty="0"/>
+          </a:p>
+          <a:p>
+            <a:pPr marL="914400" lvl="1" indent="-457200">
+              <a:lnSpc>
+                <a:spcPct val="120000"/>
+              </a:lnSpc>
+              <a:buFont typeface="Arial" panose="020B0604020202020204" pitchFamily="34" charset="0"/>
+              <a:buChar char="•"/>
+            </a:pPr>
+            <a:r>
+              <a:rPr lang="ja-JP" altLang="en-US" sz="2400" dirty="0"/>
+              <a:t>システムを体験</a:t>
+            </a:r>
+            <a:endParaRPr lang="en-US" altLang="ja-JP" sz="2400" dirty="0"/>
+          </a:p>
+          <a:p>
+            <a:pPr marL="914400" lvl="1" indent="-457200">
+              <a:lnSpc>
+                <a:spcPct val="120000"/>
+              </a:lnSpc>
+              <a:buFont typeface="Arial" panose="020B0604020202020204" pitchFamily="34" charset="0"/>
+              <a:buChar char="•"/>
+            </a:pPr>
+            <a:r>
+              <a:rPr lang="en-US" altLang="ja-JP" sz="2400" dirty="0"/>
+              <a:t>AI</a:t>
+            </a:r>
+            <a:r>
+              <a:rPr lang="ja-JP" altLang="en-US" sz="2400" dirty="0"/>
+              <a:t>アシスタントを体験</a:t>
+            </a:r>
+            <a:endParaRPr lang="en-US" altLang="ja-JP" sz="2400" dirty="0"/>
+          </a:p>
+        </p:txBody>
+      </p:sp>
+      <p:sp>
+        <p:nvSpPr>
+          <p:cNvPr id="8" name="テキスト ボックス 7">
+            <a:extLst>
+              <a:ext uri="{FF2B5EF4-FFF2-40B4-BE49-F238E27FC236}">
+                <a16:creationId xmlns:a16="http://schemas.microsoft.com/office/drawing/2014/main" id="{E97DF12A-B8A7-A3A4-FE4A-89A9B88A93F8}"/>
+              </a:ext>
+            </a:extLst>
+          </p:cNvPr>
+          <p:cNvSpPr txBox="1"/>
+          <p:nvPr/>
+        </p:nvSpPr>
+        <p:spPr>
+          <a:xfrm>
+            <a:off x="7326705" y="872418"/>
+            <a:ext cx="3826327" cy="276999"/>
+          </a:xfrm>
+          <a:prstGeom prst="rect">
+            <a:avLst/>
+          </a:prstGeom>
+          <a:noFill/>
+        </p:spPr>
+        <p:txBody>
+          <a:bodyPr wrap="square">
+            <a:spAutoFit/>
+          </a:bodyPr>
+          <a:lstStyle/>
+          <a:p>
+            <a:r>
+              <a:rPr lang="ja-JP" altLang="en-US" sz="1200" dirty="0">
+                <a:hlinkClick r:id="rId2"/>
+              </a:rPr>
+              <a:t>https://github.com/NumberZero-0621/wam-studio</a:t>
+            </a:r>
+            <a:endParaRPr lang="ja-JP" altLang="en-US" sz="1200" dirty="0"/>
+          </a:p>
+        </p:txBody>
+      </p:sp>
+      <p:pic>
+        <p:nvPicPr>
+          <p:cNvPr id="9" name="Picture 2">
+            <a:extLst>
+              <a:ext uri="{FF2B5EF4-FFF2-40B4-BE49-F238E27FC236}">
+                <a16:creationId xmlns:a16="http://schemas.microsoft.com/office/drawing/2014/main" id="{102B1583-DBA3-3F73-7F7E-541C45E542C3}"/>
+              </a:ext>
+            </a:extLst>
+          </p:cNvPr>
+          <p:cNvPicPr>
+            <a:picLocks noChangeAspect="1" noChangeArrowheads="1"/>
+          </p:cNvPicPr>
+          <p:nvPr/>
+        </p:nvPicPr>
+        <p:blipFill rotWithShape="1">
+          <a:blip r:embed="rId3">
+            <a:extLst>
+              <a:ext uri="{28A0092B-C50C-407E-A947-70E740481C1C}">
+                <a14:useLocalDpi xmlns:a14="http://schemas.microsoft.com/office/drawing/2010/main" val="0"/>
+              </a:ext>
+            </a:extLst>
+          </a:blip>
+          <a:srcRect l="7937" t="5904" r="9056" b="6185"/>
+          <a:stretch>
+            <a:fillRect/>
+          </a:stretch>
+        </p:blipFill>
+        <p:spPr bwMode="auto">
+          <a:xfrm>
+            <a:off x="11100280" y="61498"/>
+            <a:ext cx="1002323" cy="1061543"/>
+          </a:xfrm>
+          <a:prstGeom prst="rect">
+            <a:avLst/>
+          </a:prstGeom>
+          <a:noFill/>
+          <a:extLst>
+            <a:ext uri="{909E8E84-426E-40DD-AFC4-6F175D3DCCD1}">
+              <a14:hiddenFill xmlns:a14="http://schemas.microsoft.com/office/drawing/2010/main">
+                <a:solidFill>
+                  <a:srgbClr val="FFFFFF"/>
+                </a:solidFill>
+              </a14:hiddenFill>
+            </a:ext>
+          </a:extLst>
+        </p:spPr>
+      </p:pic>
+      <p:sp>
+        <p:nvSpPr>
+          <p:cNvPr id="10" name="テキスト ボックス 9">
+            <a:extLst>
+              <a:ext uri="{FF2B5EF4-FFF2-40B4-BE49-F238E27FC236}">
+                <a16:creationId xmlns:a16="http://schemas.microsoft.com/office/drawing/2014/main" id="{1E4567D0-7BFA-401E-FF07-AB2CA5E1D560}"/>
+              </a:ext>
+            </a:extLst>
+          </p:cNvPr>
+          <p:cNvSpPr txBox="1"/>
+          <p:nvPr/>
+        </p:nvSpPr>
+        <p:spPr>
+          <a:xfrm>
+            <a:off x="1569639" y="5862498"/>
+            <a:ext cx="10622361" cy="461665"/>
+          </a:xfrm>
+          <a:prstGeom prst="rect">
+            <a:avLst/>
+          </a:prstGeom>
+          <a:noFill/>
+        </p:spPr>
+        <p:txBody>
+          <a:bodyPr wrap="square">
+            <a:spAutoFit/>
+          </a:bodyPr>
+          <a:lstStyle/>
+          <a:p>
+            <a:r>
+              <a:rPr lang="ja-JP" altLang="en-US" sz="1200" dirty="0"/>
+              <a:t>参考技術：</a:t>
+            </a:r>
+            <a:r>
+              <a:rPr lang="en-US" altLang="ja-JP" sz="1200" dirty="0"/>
+              <a:t>Buffa, M. and Vidal-</a:t>
+            </a:r>
+            <a:r>
+              <a:rPr lang="en-US" altLang="ja-JP" sz="1200" dirty="0" err="1"/>
+              <a:t>Mazuy</a:t>
+            </a:r>
+            <a:r>
+              <a:rPr lang="en-US" altLang="ja-JP" sz="1200" dirty="0"/>
+              <a:t>, A.: WAM-studio, a Digital Audio Workstation (DAW) for the Web, Companion Proceedings of the ACM Web Conference 2023, WWW ’23 Companion, New York, NY, USA, Association for Computing Machinery, pp. 543–548 (2023).</a:t>
+            </a:r>
+            <a:endParaRPr lang="ja-JP" altLang="en-US" sz="1200" dirty="0"/>
+          </a:p>
+        </p:txBody>
+      </p:sp>
+    </p:spTree>
+    <p:extLst>
+      <p:ext uri="{BB962C8B-B14F-4D97-AF65-F5344CB8AC3E}">
+        <p14:creationId xmlns:p14="http://schemas.microsoft.com/office/powerpoint/2010/main" val="199486289"/>
+      </p:ext>
+    </p:extLst>
+  </p:cSld>
+  <p:clrMapOvr>
+    <a:masterClrMapping/>
+  </p:clrMapOvr>
 </p:sld>
 </file>
 

--- a/発表スライド・ポスター/EC79_DAWIY_スライド.pptx
+++ b/発表スライド・ポスター/EC79_DAWIY_スライド.pptx
@@ -5,31 +5,39 @@
     <p:sldMasterId id="2147483648" r:id="rId1"/>
   </p:sldMasterIdLst>
   <p:notesMasterIdLst>
-    <p:notesMasterId r:id="rId24"/>
+    <p:notesMasterId r:id="rId32"/>
   </p:notesMasterIdLst>
   <p:sldIdLst>
     <p:sldId id="256" r:id="rId2"/>
     <p:sldId id="284" r:id="rId3"/>
-    <p:sldId id="258" r:id="rId4"/>
-    <p:sldId id="293" r:id="rId5"/>
-    <p:sldId id="285" r:id="rId6"/>
-    <p:sldId id="287" r:id="rId7"/>
-    <p:sldId id="288" r:id="rId8"/>
-    <p:sldId id="289" r:id="rId9"/>
-    <p:sldId id="290" r:id="rId10"/>
-    <p:sldId id="294" r:id="rId11"/>
-    <p:sldId id="286" r:id="rId12"/>
-    <p:sldId id="277" r:id="rId13"/>
-    <p:sldId id="259" r:id="rId14"/>
-    <p:sldId id="279" r:id="rId15"/>
-    <p:sldId id="280" r:id="rId16"/>
-    <p:sldId id="269" r:id="rId17"/>
-    <p:sldId id="283" r:id="rId18"/>
-    <p:sldId id="275" r:id="rId19"/>
-    <p:sldId id="270" r:id="rId20"/>
-    <p:sldId id="281" r:id="rId21"/>
-    <p:sldId id="273" r:id="rId22"/>
-    <p:sldId id="278" r:id="rId23"/>
+    <p:sldId id="295" r:id="rId4"/>
+    <p:sldId id="258" r:id="rId5"/>
+    <p:sldId id="293" r:id="rId6"/>
+    <p:sldId id="285" r:id="rId7"/>
+    <p:sldId id="294" r:id="rId8"/>
+    <p:sldId id="297" r:id="rId9"/>
+    <p:sldId id="287" r:id="rId10"/>
+    <p:sldId id="296" r:id="rId11"/>
+    <p:sldId id="298" r:id="rId12"/>
+    <p:sldId id="299" r:id="rId13"/>
+    <p:sldId id="300" r:id="rId14"/>
+    <p:sldId id="301" r:id="rId15"/>
+    <p:sldId id="302" r:id="rId16"/>
+    <p:sldId id="288" r:id="rId17"/>
+    <p:sldId id="289" r:id="rId18"/>
+    <p:sldId id="290" r:id="rId19"/>
+    <p:sldId id="286" r:id="rId20"/>
+    <p:sldId id="277" r:id="rId21"/>
+    <p:sldId id="259" r:id="rId22"/>
+    <p:sldId id="279" r:id="rId23"/>
+    <p:sldId id="280" r:id="rId24"/>
+    <p:sldId id="269" r:id="rId25"/>
+    <p:sldId id="283" r:id="rId26"/>
+    <p:sldId id="275" r:id="rId27"/>
+    <p:sldId id="270" r:id="rId28"/>
+    <p:sldId id="281" r:id="rId29"/>
+    <p:sldId id="273" r:id="rId30"/>
+    <p:sldId id="278" r:id="rId31"/>
   </p:sldIdLst>
   <p:sldSz cx="12192000" cy="6858000"/>
   <p:notesSz cx="6858000" cy="9144000"/>
@@ -2263,7 +2271,7 @@
           <a:p>
             <a:fld id="{9D3C98C4-E324-4B5F-A467-4E429B944069}" type="datetimeFigureOut">
               <a:rPr kumimoji="1" lang="ja-JP" altLang="en-US" smtClean="0"/>
-              <a:t>2026/2/21</a:t>
+              <a:t>2026/2/27</a:t>
             </a:fld>
             <a:endParaRPr kumimoji="1" lang="ja-JP" altLang="en-US"/>
           </a:p>
@@ -2637,7 +2645,7 @@
           <a:p>
             <a:fld id="{DA518C43-3AD6-4C5A-9E6E-E4C1457F78D0}" type="slidenum">
               <a:rPr kumimoji="1" lang="ja-JP" altLang="en-US" smtClean="0"/>
-              <a:t>3</a:t>
+              <a:t>4</a:t>
             </a:fld>
             <a:endParaRPr kumimoji="1" lang="ja-JP" altLang="en-US"/>
           </a:p>
@@ -2647,6 +2655,212 @@
     <p:extLst>
       <p:ext uri="{BB962C8B-B14F-4D97-AF65-F5344CB8AC3E}">
         <p14:creationId xmlns:p14="http://schemas.microsoft.com/office/powerpoint/2010/main" val="3689103347"/>
+      </p:ext>
+    </p:extLst>
+  </p:cSld>
+  <p:clrMapOvr>
+    <a:masterClrMapping/>
+  </p:clrMapOvr>
+</p:notes>
+</file>
+
+<file path=ppt/notesSlides/notesSlide10.xml><?xml version="1.0" encoding="utf-8"?>
+<p:notes xmlns:a="http://schemas.openxmlformats.org/drawingml/2006/main" xmlns:r="http://schemas.openxmlformats.org/officeDocument/2006/relationships" xmlns:p="http://schemas.openxmlformats.org/presentationml/2006/main">
+  <p:cSld>
+    <p:spTree>
+      <p:nvGrpSpPr>
+        <p:cNvPr id="1" name=""/>
+        <p:cNvGrpSpPr/>
+        <p:nvPr/>
+      </p:nvGrpSpPr>
+      <p:grpSpPr>
+        <a:xfrm>
+          <a:off x="0" y="0"/>
+          <a:ext cx="0" cy="0"/>
+          <a:chOff x="0" y="0"/>
+          <a:chExt cx="0" cy="0"/>
+        </a:xfrm>
+      </p:grpSpPr>
+      <p:sp>
+        <p:nvSpPr>
+          <p:cNvPr id="2" name="スライド イメージ プレースホルダー 1"/>
+          <p:cNvSpPr>
+            <a:spLocks noGrp="1" noRot="1" noChangeAspect="1"/>
+          </p:cNvSpPr>
+          <p:nvPr>
+            <p:ph type="sldImg"/>
+          </p:nvPr>
+        </p:nvSpPr>
+        <p:spPr/>
+        <p:txBody>
+          <a:bodyPr/>
+          <a:lstStyle/>
+          <a:p>
+            <a:endParaRPr lang="ja-JP" altLang="en-US"/>
+          </a:p>
+        </p:txBody>
+      </p:sp>
+      <p:sp>
+        <p:nvSpPr>
+          <p:cNvPr id="3" name="ノート プレースホルダー 2"/>
+          <p:cNvSpPr>
+            <a:spLocks noGrp="1"/>
+          </p:cNvSpPr>
+          <p:nvPr>
+            <p:ph type="body" idx="1"/>
+          </p:nvPr>
+        </p:nvSpPr>
+        <p:spPr/>
+        <p:txBody>
+          <a:bodyPr/>
+          <a:lstStyle/>
+          <a:p>
+            <a:endParaRPr kumimoji="1" lang="ja-JP" altLang="en-US" dirty="0"/>
+          </a:p>
+        </p:txBody>
+      </p:sp>
+      <p:sp>
+        <p:nvSpPr>
+          <p:cNvPr id="4" name="スライド番号プレースホルダー 3"/>
+          <p:cNvSpPr>
+            <a:spLocks noGrp="1"/>
+          </p:cNvSpPr>
+          <p:nvPr>
+            <p:ph type="sldNum" sz="quarter" idx="5"/>
+          </p:nvPr>
+        </p:nvSpPr>
+        <p:spPr/>
+        <p:txBody>
+          <a:bodyPr/>
+          <a:lstStyle/>
+          <a:p>
+            <a:fld id="{DA518C43-3AD6-4C5A-9E6E-E4C1457F78D0}" type="slidenum">
+              <a:rPr kumimoji="1" lang="ja-JP" altLang="en-US" smtClean="0"/>
+              <a:t>24</a:t>
+            </a:fld>
+            <a:endParaRPr kumimoji="1" lang="ja-JP" altLang="en-US"/>
+          </a:p>
+        </p:txBody>
+      </p:sp>
+    </p:spTree>
+    <p:extLst>
+      <p:ext uri="{BB962C8B-B14F-4D97-AF65-F5344CB8AC3E}">
+        <p14:creationId xmlns:p14="http://schemas.microsoft.com/office/powerpoint/2010/main" val="3450056053"/>
+      </p:ext>
+    </p:extLst>
+  </p:cSld>
+  <p:clrMapOvr>
+    <a:masterClrMapping/>
+  </p:clrMapOvr>
+</p:notes>
+</file>
+
+<file path=ppt/notesSlides/notesSlide11.xml><?xml version="1.0" encoding="utf-8"?>
+<p:notes xmlns:a="http://schemas.openxmlformats.org/drawingml/2006/main" xmlns:r="http://schemas.openxmlformats.org/officeDocument/2006/relationships" xmlns:p="http://schemas.openxmlformats.org/presentationml/2006/main">
+  <p:cSld>
+    <p:spTree>
+      <p:nvGrpSpPr>
+        <p:cNvPr id="1" name="">
+          <a:extLst>
+            <a:ext uri="{FF2B5EF4-FFF2-40B4-BE49-F238E27FC236}">
+              <a16:creationId xmlns:a16="http://schemas.microsoft.com/office/drawing/2014/main" id="{27F6E916-E643-9FB6-691E-124D7CF89C2B}"/>
+            </a:ext>
+          </a:extLst>
+        </p:cNvPr>
+        <p:cNvGrpSpPr/>
+        <p:nvPr/>
+      </p:nvGrpSpPr>
+      <p:grpSpPr>
+        <a:xfrm>
+          <a:off x="0" y="0"/>
+          <a:ext cx="0" cy="0"/>
+          <a:chOff x="0" y="0"/>
+          <a:chExt cx="0" cy="0"/>
+        </a:xfrm>
+      </p:grpSpPr>
+      <p:sp>
+        <p:nvSpPr>
+          <p:cNvPr id="2" name="スライド イメージ プレースホルダー 1">
+            <a:extLst>
+              <a:ext uri="{FF2B5EF4-FFF2-40B4-BE49-F238E27FC236}">
+                <a16:creationId xmlns:a16="http://schemas.microsoft.com/office/drawing/2014/main" id="{3DCE94AF-50B8-6A8E-98F1-E2FC136A6F7A}"/>
+              </a:ext>
+            </a:extLst>
+          </p:cNvPr>
+          <p:cNvSpPr>
+            <a:spLocks noGrp="1" noRot="1" noChangeAspect="1"/>
+          </p:cNvSpPr>
+          <p:nvPr>
+            <p:ph type="sldImg"/>
+          </p:nvPr>
+        </p:nvSpPr>
+        <p:spPr/>
+        <p:txBody>
+          <a:bodyPr/>
+          <a:lstStyle/>
+          <a:p>
+            <a:endParaRPr lang="ja-JP" altLang="en-US"/>
+          </a:p>
+        </p:txBody>
+      </p:sp>
+      <p:sp>
+        <p:nvSpPr>
+          <p:cNvPr id="3" name="ノート プレースホルダー 2">
+            <a:extLst>
+              <a:ext uri="{FF2B5EF4-FFF2-40B4-BE49-F238E27FC236}">
+                <a16:creationId xmlns:a16="http://schemas.microsoft.com/office/drawing/2014/main" id="{E3B3E065-4086-269E-431C-616D7D59B030}"/>
+              </a:ext>
+            </a:extLst>
+          </p:cNvPr>
+          <p:cNvSpPr>
+            <a:spLocks noGrp="1"/>
+          </p:cNvSpPr>
+          <p:nvPr>
+            <p:ph type="body" idx="1"/>
+          </p:nvPr>
+        </p:nvSpPr>
+        <p:spPr/>
+        <p:txBody>
+          <a:bodyPr/>
+          <a:lstStyle/>
+          <a:p>
+            <a:endParaRPr kumimoji="1" lang="ja-JP" altLang="en-US" dirty="0"/>
+          </a:p>
+        </p:txBody>
+      </p:sp>
+      <p:sp>
+        <p:nvSpPr>
+          <p:cNvPr id="4" name="スライド番号プレースホルダー 3">
+            <a:extLst>
+              <a:ext uri="{FF2B5EF4-FFF2-40B4-BE49-F238E27FC236}">
+                <a16:creationId xmlns:a16="http://schemas.microsoft.com/office/drawing/2014/main" id="{CE174B39-B39D-EE97-7FF3-C32EDFB8FFE9}"/>
+              </a:ext>
+            </a:extLst>
+          </p:cNvPr>
+          <p:cNvSpPr>
+            <a:spLocks noGrp="1"/>
+          </p:cNvSpPr>
+          <p:nvPr>
+            <p:ph type="sldNum" sz="quarter" idx="5"/>
+          </p:nvPr>
+        </p:nvSpPr>
+        <p:spPr/>
+        <p:txBody>
+          <a:bodyPr/>
+          <a:lstStyle/>
+          <a:p>
+            <a:fld id="{DA518C43-3AD6-4C5A-9E6E-E4C1457F78D0}" type="slidenum">
+              <a:rPr kumimoji="1" lang="ja-JP" altLang="en-US" smtClean="0"/>
+              <a:t>25</a:t>
+            </a:fld>
+            <a:endParaRPr kumimoji="1" lang="ja-JP" altLang="en-US"/>
+          </a:p>
+        </p:txBody>
+      </p:sp>
+    </p:spTree>
+    <p:extLst>
+      <p:ext uri="{BB962C8B-B14F-4D97-AF65-F5344CB8AC3E}">
+        <p14:creationId xmlns:p14="http://schemas.microsoft.com/office/powerpoint/2010/main" val="1490318889"/>
       </p:ext>
     </p:extLst>
   </p:cSld>
@@ -2755,7 +2969,7 @@
           <a:p>
             <a:fld id="{DA518C43-3AD6-4C5A-9E6E-E4C1457F78D0}" type="slidenum">
               <a:rPr kumimoji="1" lang="ja-JP" altLang="en-US" smtClean="0"/>
-              <a:t>4</a:t>
+              <a:t>5</a:t>
             </a:fld>
             <a:endParaRPr kumimoji="1" lang="ja-JP" altLang="en-US"/>
           </a:p>
@@ -2846,7 +3060,7 @@
           <a:p>
             <a:fld id="{DA518C43-3AD6-4C5A-9E6E-E4C1457F78D0}" type="slidenum">
               <a:rPr kumimoji="1" lang="ja-JP" altLang="en-US" smtClean="0"/>
-              <a:t>6</a:t>
+              <a:t>9</a:t>
             </a:fld>
             <a:endParaRPr kumimoji="1" lang="ja-JP" altLang="en-US"/>
           </a:p>
@@ -2870,7 +3084,13 @@
   <p:cSld>
     <p:spTree>
       <p:nvGrpSpPr>
-        <p:cNvPr id="1" name=""/>
+        <p:cNvPr id="1" name="">
+          <a:extLst>
+            <a:ext uri="{FF2B5EF4-FFF2-40B4-BE49-F238E27FC236}">
+              <a16:creationId xmlns:a16="http://schemas.microsoft.com/office/drawing/2014/main" id="{0B21333C-7EE9-AE7E-4715-FC6D9529223A}"/>
+            </a:ext>
+          </a:extLst>
+        </p:cNvPr>
         <p:cNvGrpSpPr/>
         <p:nvPr/>
       </p:nvGrpSpPr>
@@ -2884,7 +3104,13 @@
       </p:grpSpPr>
       <p:sp>
         <p:nvSpPr>
-          <p:cNvPr id="2" name="スライド イメージ プレースホルダー 1"/>
+          <p:cNvPr id="2" name="スライド イメージ プレースホルダー 1">
+            <a:extLst>
+              <a:ext uri="{FF2B5EF4-FFF2-40B4-BE49-F238E27FC236}">
+                <a16:creationId xmlns:a16="http://schemas.microsoft.com/office/drawing/2014/main" id="{9B5C2701-6180-A224-06AC-72B133872DD8}"/>
+              </a:ext>
+            </a:extLst>
+          </p:cNvPr>
           <p:cNvSpPr>
             <a:spLocks noGrp="1" noRot="1" noChangeAspect="1"/>
           </p:cNvSpPr>
@@ -2903,7 +3129,13 @@
       </p:sp>
       <p:sp>
         <p:nvSpPr>
-          <p:cNvPr id="3" name="ノート プレースホルダー 2"/>
+          <p:cNvPr id="3" name="ノート プレースホルダー 2">
+            <a:extLst>
+              <a:ext uri="{FF2B5EF4-FFF2-40B4-BE49-F238E27FC236}">
+                <a16:creationId xmlns:a16="http://schemas.microsoft.com/office/drawing/2014/main" id="{69138935-82C1-231D-03FB-980406093E92}"/>
+              </a:ext>
+            </a:extLst>
+          </p:cNvPr>
           <p:cNvSpPr>
             <a:spLocks noGrp="1"/>
           </p:cNvSpPr>
@@ -2922,7 +3154,13 @@
       </p:sp>
       <p:sp>
         <p:nvSpPr>
-          <p:cNvPr id="4" name="スライド番号プレースホルダー 3"/>
+          <p:cNvPr id="4" name="スライド番号プレースホルダー 3">
+            <a:extLst>
+              <a:ext uri="{FF2B5EF4-FFF2-40B4-BE49-F238E27FC236}">
+                <a16:creationId xmlns:a16="http://schemas.microsoft.com/office/drawing/2014/main" id="{64ED7495-82B8-8C36-A6D8-279C5EF03745}"/>
+              </a:ext>
+            </a:extLst>
+          </p:cNvPr>
           <p:cNvSpPr>
             <a:spLocks noGrp="1"/>
           </p:cNvSpPr>
@@ -2937,7 +3175,7 @@
           <a:p>
             <a:fld id="{DA518C43-3AD6-4C5A-9E6E-E4C1457F78D0}" type="slidenum">
               <a:rPr kumimoji="1" lang="ja-JP" altLang="en-US" smtClean="0"/>
-              <a:t>16</a:t>
+              <a:t>10</a:t>
             </a:fld>
             <a:endParaRPr kumimoji="1" lang="ja-JP" altLang="en-US"/>
           </a:p>
@@ -2946,7 +3184,7 @@
     </p:spTree>
     <p:extLst>
       <p:ext uri="{BB962C8B-B14F-4D97-AF65-F5344CB8AC3E}">
-        <p14:creationId xmlns:p14="http://schemas.microsoft.com/office/powerpoint/2010/main" val="3450056053"/>
+        <p14:creationId xmlns:p14="http://schemas.microsoft.com/office/powerpoint/2010/main" val="2782630947"/>
       </p:ext>
     </p:extLst>
   </p:cSld>
@@ -2964,7 +3202,7 @@
         <p:cNvPr id="1" name="">
           <a:extLst>
             <a:ext uri="{FF2B5EF4-FFF2-40B4-BE49-F238E27FC236}">
-              <a16:creationId xmlns:a16="http://schemas.microsoft.com/office/drawing/2014/main" id="{27F6E916-E643-9FB6-691E-124D7CF89C2B}"/>
+              <a16:creationId xmlns:a16="http://schemas.microsoft.com/office/drawing/2014/main" id="{B83C5B43-3872-9CE1-8759-6A7A5284BADA}"/>
             </a:ext>
           </a:extLst>
         </p:cNvPr>
@@ -2984,7 +3222,7 @@
           <p:cNvPr id="2" name="スライド イメージ プレースホルダー 1">
             <a:extLst>
               <a:ext uri="{FF2B5EF4-FFF2-40B4-BE49-F238E27FC236}">
-                <a16:creationId xmlns:a16="http://schemas.microsoft.com/office/drawing/2014/main" id="{3DCE94AF-50B8-6A8E-98F1-E2FC136A6F7A}"/>
+                <a16:creationId xmlns:a16="http://schemas.microsoft.com/office/drawing/2014/main" id="{27E75D9C-6A4A-930B-2483-E45FCF47B1B9}"/>
               </a:ext>
             </a:extLst>
           </p:cNvPr>
@@ -3009,7 +3247,7 @@
           <p:cNvPr id="3" name="ノート プレースホルダー 2">
             <a:extLst>
               <a:ext uri="{FF2B5EF4-FFF2-40B4-BE49-F238E27FC236}">
-                <a16:creationId xmlns:a16="http://schemas.microsoft.com/office/drawing/2014/main" id="{E3B3E065-4086-269E-431C-616D7D59B030}"/>
+                <a16:creationId xmlns:a16="http://schemas.microsoft.com/office/drawing/2014/main" id="{8DF36B98-7793-2BCD-3BC0-43B739CDC2E3}"/>
               </a:ext>
             </a:extLst>
           </p:cNvPr>
@@ -3034,7 +3272,7 @@
           <p:cNvPr id="4" name="スライド番号プレースホルダー 3">
             <a:extLst>
               <a:ext uri="{FF2B5EF4-FFF2-40B4-BE49-F238E27FC236}">
-                <a16:creationId xmlns:a16="http://schemas.microsoft.com/office/drawing/2014/main" id="{CE174B39-B39D-EE97-7FF3-C32EDFB8FFE9}"/>
+                <a16:creationId xmlns:a16="http://schemas.microsoft.com/office/drawing/2014/main" id="{EE1569D8-A36A-2313-482F-AC98746898AA}"/>
               </a:ext>
             </a:extLst>
           </p:cNvPr>
@@ -3052,7 +3290,7 @@
           <a:p>
             <a:fld id="{DA518C43-3AD6-4C5A-9E6E-E4C1457F78D0}" type="slidenum">
               <a:rPr kumimoji="1" lang="ja-JP" altLang="en-US" smtClean="0"/>
-              <a:t>17</a:t>
+              <a:t>11</a:t>
             </a:fld>
             <a:endParaRPr kumimoji="1" lang="ja-JP" altLang="en-US"/>
           </a:p>
@@ -3061,7 +3299,467 @@
     </p:spTree>
     <p:extLst>
       <p:ext uri="{BB962C8B-B14F-4D97-AF65-F5344CB8AC3E}">
-        <p14:creationId xmlns:p14="http://schemas.microsoft.com/office/powerpoint/2010/main" val="1490318889"/>
+        <p14:creationId xmlns:p14="http://schemas.microsoft.com/office/powerpoint/2010/main" val="3525911740"/>
+      </p:ext>
+    </p:extLst>
+  </p:cSld>
+  <p:clrMapOvr>
+    <a:masterClrMapping/>
+  </p:clrMapOvr>
+</p:notes>
+</file>
+
+<file path=ppt/notesSlides/notesSlide6.xml><?xml version="1.0" encoding="utf-8"?>
+<p:notes xmlns:a="http://schemas.openxmlformats.org/drawingml/2006/main" xmlns:r="http://schemas.openxmlformats.org/officeDocument/2006/relationships" xmlns:p="http://schemas.openxmlformats.org/presentationml/2006/main">
+  <p:cSld>
+    <p:spTree>
+      <p:nvGrpSpPr>
+        <p:cNvPr id="1" name="">
+          <a:extLst>
+            <a:ext uri="{FF2B5EF4-FFF2-40B4-BE49-F238E27FC236}">
+              <a16:creationId xmlns:a16="http://schemas.microsoft.com/office/drawing/2014/main" id="{90B75092-EF71-096E-B972-B6AA0910FA02}"/>
+            </a:ext>
+          </a:extLst>
+        </p:cNvPr>
+        <p:cNvGrpSpPr/>
+        <p:nvPr/>
+      </p:nvGrpSpPr>
+      <p:grpSpPr>
+        <a:xfrm>
+          <a:off x="0" y="0"/>
+          <a:ext cx="0" cy="0"/>
+          <a:chOff x="0" y="0"/>
+          <a:chExt cx="0" cy="0"/>
+        </a:xfrm>
+      </p:grpSpPr>
+      <p:sp>
+        <p:nvSpPr>
+          <p:cNvPr id="2" name="スライド イメージ プレースホルダー 1">
+            <a:extLst>
+              <a:ext uri="{FF2B5EF4-FFF2-40B4-BE49-F238E27FC236}">
+                <a16:creationId xmlns:a16="http://schemas.microsoft.com/office/drawing/2014/main" id="{8DCC835E-DF78-C909-DC40-F6BAB2C5A52B}"/>
+              </a:ext>
+            </a:extLst>
+          </p:cNvPr>
+          <p:cNvSpPr>
+            <a:spLocks noGrp="1" noRot="1" noChangeAspect="1"/>
+          </p:cNvSpPr>
+          <p:nvPr>
+            <p:ph type="sldImg"/>
+          </p:nvPr>
+        </p:nvSpPr>
+        <p:spPr/>
+        <p:txBody>
+          <a:bodyPr/>
+          <a:lstStyle/>
+          <a:p>
+            <a:endParaRPr lang="ja-JP" altLang="en-US"/>
+          </a:p>
+        </p:txBody>
+      </p:sp>
+      <p:sp>
+        <p:nvSpPr>
+          <p:cNvPr id="3" name="ノート プレースホルダー 2">
+            <a:extLst>
+              <a:ext uri="{FF2B5EF4-FFF2-40B4-BE49-F238E27FC236}">
+                <a16:creationId xmlns:a16="http://schemas.microsoft.com/office/drawing/2014/main" id="{1C0FC462-83DB-B443-88D6-142BFB2EA918}"/>
+              </a:ext>
+            </a:extLst>
+          </p:cNvPr>
+          <p:cNvSpPr>
+            <a:spLocks noGrp="1"/>
+          </p:cNvSpPr>
+          <p:nvPr>
+            <p:ph type="body" idx="1"/>
+          </p:nvPr>
+        </p:nvSpPr>
+        <p:spPr/>
+        <p:txBody>
+          <a:bodyPr/>
+          <a:lstStyle/>
+          <a:p>
+            <a:endParaRPr kumimoji="1" lang="ja-JP" altLang="en-US" dirty="0"/>
+          </a:p>
+        </p:txBody>
+      </p:sp>
+      <p:sp>
+        <p:nvSpPr>
+          <p:cNvPr id="4" name="スライド番号プレースホルダー 3">
+            <a:extLst>
+              <a:ext uri="{FF2B5EF4-FFF2-40B4-BE49-F238E27FC236}">
+                <a16:creationId xmlns:a16="http://schemas.microsoft.com/office/drawing/2014/main" id="{2A643D91-7173-977C-4B92-754E4F489E23}"/>
+              </a:ext>
+            </a:extLst>
+          </p:cNvPr>
+          <p:cNvSpPr>
+            <a:spLocks noGrp="1"/>
+          </p:cNvSpPr>
+          <p:nvPr>
+            <p:ph type="sldNum" sz="quarter" idx="5"/>
+          </p:nvPr>
+        </p:nvSpPr>
+        <p:spPr/>
+        <p:txBody>
+          <a:bodyPr/>
+          <a:lstStyle/>
+          <a:p>
+            <a:fld id="{DA518C43-3AD6-4C5A-9E6E-E4C1457F78D0}" type="slidenum">
+              <a:rPr kumimoji="1" lang="ja-JP" altLang="en-US" smtClean="0"/>
+              <a:t>12</a:t>
+            </a:fld>
+            <a:endParaRPr kumimoji="1" lang="ja-JP" altLang="en-US"/>
+          </a:p>
+        </p:txBody>
+      </p:sp>
+    </p:spTree>
+    <p:extLst>
+      <p:ext uri="{BB962C8B-B14F-4D97-AF65-F5344CB8AC3E}">
+        <p14:creationId xmlns:p14="http://schemas.microsoft.com/office/powerpoint/2010/main" val="4221173323"/>
+      </p:ext>
+    </p:extLst>
+  </p:cSld>
+  <p:clrMapOvr>
+    <a:masterClrMapping/>
+  </p:clrMapOvr>
+</p:notes>
+</file>
+
+<file path=ppt/notesSlides/notesSlide7.xml><?xml version="1.0" encoding="utf-8"?>
+<p:notes xmlns:a="http://schemas.openxmlformats.org/drawingml/2006/main" xmlns:r="http://schemas.openxmlformats.org/officeDocument/2006/relationships" xmlns:p="http://schemas.openxmlformats.org/presentationml/2006/main">
+  <p:cSld>
+    <p:spTree>
+      <p:nvGrpSpPr>
+        <p:cNvPr id="1" name="">
+          <a:extLst>
+            <a:ext uri="{FF2B5EF4-FFF2-40B4-BE49-F238E27FC236}">
+              <a16:creationId xmlns:a16="http://schemas.microsoft.com/office/drawing/2014/main" id="{1E45560E-2EEE-17DF-22EC-6E8AE0E90C26}"/>
+            </a:ext>
+          </a:extLst>
+        </p:cNvPr>
+        <p:cNvGrpSpPr/>
+        <p:nvPr/>
+      </p:nvGrpSpPr>
+      <p:grpSpPr>
+        <a:xfrm>
+          <a:off x="0" y="0"/>
+          <a:ext cx="0" cy="0"/>
+          <a:chOff x="0" y="0"/>
+          <a:chExt cx="0" cy="0"/>
+        </a:xfrm>
+      </p:grpSpPr>
+      <p:sp>
+        <p:nvSpPr>
+          <p:cNvPr id="2" name="スライド イメージ プレースホルダー 1">
+            <a:extLst>
+              <a:ext uri="{FF2B5EF4-FFF2-40B4-BE49-F238E27FC236}">
+                <a16:creationId xmlns:a16="http://schemas.microsoft.com/office/drawing/2014/main" id="{3929DD3F-FDB0-44D9-4E2A-A6580A458606}"/>
+              </a:ext>
+            </a:extLst>
+          </p:cNvPr>
+          <p:cNvSpPr>
+            <a:spLocks noGrp="1" noRot="1" noChangeAspect="1"/>
+          </p:cNvSpPr>
+          <p:nvPr>
+            <p:ph type="sldImg"/>
+          </p:nvPr>
+        </p:nvSpPr>
+        <p:spPr/>
+        <p:txBody>
+          <a:bodyPr/>
+          <a:lstStyle/>
+          <a:p>
+            <a:endParaRPr lang="ja-JP" altLang="en-US"/>
+          </a:p>
+        </p:txBody>
+      </p:sp>
+      <p:sp>
+        <p:nvSpPr>
+          <p:cNvPr id="3" name="ノート プレースホルダー 2">
+            <a:extLst>
+              <a:ext uri="{FF2B5EF4-FFF2-40B4-BE49-F238E27FC236}">
+                <a16:creationId xmlns:a16="http://schemas.microsoft.com/office/drawing/2014/main" id="{C605583F-04C5-DA91-0F3F-EE54DBF0C014}"/>
+              </a:ext>
+            </a:extLst>
+          </p:cNvPr>
+          <p:cNvSpPr>
+            <a:spLocks noGrp="1"/>
+          </p:cNvSpPr>
+          <p:nvPr>
+            <p:ph type="body" idx="1"/>
+          </p:nvPr>
+        </p:nvSpPr>
+        <p:spPr/>
+        <p:txBody>
+          <a:bodyPr/>
+          <a:lstStyle/>
+          <a:p>
+            <a:endParaRPr kumimoji="1" lang="ja-JP" altLang="en-US" dirty="0"/>
+          </a:p>
+        </p:txBody>
+      </p:sp>
+      <p:sp>
+        <p:nvSpPr>
+          <p:cNvPr id="4" name="スライド番号プレースホルダー 3">
+            <a:extLst>
+              <a:ext uri="{FF2B5EF4-FFF2-40B4-BE49-F238E27FC236}">
+                <a16:creationId xmlns:a16="http://schemas.microsoft.com/office/drawing/2014/main" id="{7880D86F-5767-C6CC-10F2-F9F9D8C10080}"/>
+              </a:ext>
+            </a:extLst>
+          </p:cNvPr>
+          <p:cNvSpPr>
+            <a:spLocks noGrp="1"/>
+          </p:cNvSpPr>
+          <p:nvPr>
+            <p:ph type="sldNum" sz="quarter" idx="5"/>
+          </p:nvPr>
+        </p:nvSpPr>
+        <p:spPr/>
+        <p:txBody>
+          <a:bodyPr/>
+          <a:lstStyle/>
+          <a:p>
+            <a:fld id="{DA518C43-3AD6-4C5A-9E6E-E4C1457F78D0}" type="slidenum">
+              <a:rPr kumimoji="1" lang="ja-JP" altLang="en-US" smtClean="0"/>
+              <a:t>13</a:t>
+            </a:fld>
+            <a:endParaRPr kumimoji="1" lang="ja-JP" altLang="en-US"/>
+          </a:p>
+        </p:txBody>
+      </p:sp>
+    </p:spTree>
+    <p:extLst>
+      <p:ext uri="{BB962C8B-B14F-4D97-AF65-F5344CB8AC3E}">
+        <p14:creationId xmlns:p14="http://schemas.microsoft.com/office/powerpoint/2010/main" val="1679935683"/>
+      </p:ext>
+    </p:extLst>
+  </p:cSld>
+  <p:clrMapOvr>
+    <a:masterClrMapping/>
+  </p:clrMapOvr>
+</p:notes>
+</file>
+
+<file path=ppt/notesSlides/notesSlide8.xml><?xml version="1.0" encoding="utf-8"?>
+<p:notes xmlns:a="http://schemas.openxmlformats.org/drawingml/2006/main" xmlns:r="http://schemas.openxmlformats.org/officeDocument/2006/relationships" xmlns:p="http://schemas.openxmlformats.org/presentationml/2006/main">
+  <p:cSld>
+    <p:spTree>
+      <p:nvGrpSpPr>
+        <p:cNvPr id="1" name="">
+          <a:extLst>
+            <a:ext uri="{FF2B5EF4-FFF2-40B4-BE49-F238E27FC236}">
+              <a16:creationId xmlns:a16="http://schemas.microsoft.com/office/drawing/2014/main" id="{D29E3486-B757-10C6-E61E-4FD969F94D71}"/>
+            </a:ext>
+          </a:extLst>
+        </p:cNvPr>
+        <p:cNvGrpSpPr/>
+        <p:nvPr/>
+      </p:nvGrpSpPr>
+      <p:grpSpPr>
+        <a:xfrm>
+          <a:off x="0" y="0"/>
+          <a:ext cx="0" cy="0"/>
+          <a:chOff x="0" y="0"/>
+          <a:chExt cx="0" cy="0"/>
+        </a:xfrm>
+      </p:grpSpPr>
+      <p:sp>
+        <p:nvSpPr>
+          <p:cNvPr id="2" name="スライド イメージ プレースホルダー 1">
+            <a:extLst>
+              <a:ext uri="{FF2B5EF4-FFF2-40B4-BE49-F238E27FC236}">
+                <a16:creationId xmlns:a16="http://schemas.microsoft.com/office/drawing/2014/main" id="{5672E66E-D1CF-54C2-E5DF-FC089280AF06}"/>
+              </a:ext>
+            </a:extLst>
+          </p:cNvPr>
+          <p:cNvSpPr>
+            <a:spLocks noGrp="1" noRot="1" noChangeAspect="1"/>
+          </p:cNvSpPr>
+          <p:nvPr>
+            <p:ph type="sldImg"/>
+          </p:nvPr>
+        </p:nvSpPr>
+        <p:spPr/>
+        <p:txBody>
+          <a:bodyPr/>
+          <a:lstStyle/>
+          <a:p>
+            <a:endParaRPr lang="ja-JP" altLang="en-US"/>
+          </a:p>
+        </p:txBody>
+      </p:sp>
+      <p:sp>
+        <p:nvSpPr>
+          <p:cNvPr id="3" name="ノート プレースホルダー 2">
+            <a:extLst>
+              <a:ext uri="{FF2B5EF4-FFF2-40B4-BE49-F238E27FC236}">
+                <a16:creationId xmlns:a16="http://schemas.microsoft.com/office/drawing/2014/main" id="{B8F3E9FA-B004-854B-B35F-4D5DBDCCCD1E}"/>
+              </a:ext>
+            </a:extLst>
+          </p:cNvPr>
+          <p:cNvSpPr>
+            <a:spLocks noGrp="1"/>
+          </p:cNvSpPr>
+          <p:nvPr>
+            <p:ph type="body" idx="1"/>
+          </p:nvPr>
+        </p:nvSpPr>
+        <p:spPr/>
+        <p:txBody>
+          <a:bodyPr/>
+          <a:lstStyle/>
+          <a:p>
+            <a:endParaRPr kumimoji="1" lang="ja-JP" altLang="en-US" dirty="0"/>
+          </a:p>
+        </p:txBody>
+      </p:sp>
+      <p:sp>
+        <p:nvSpPr>
+          <p:cNvPr id="4" name="スライド番号プレースホルダー 3">
+            <a:extLst>
+              <a:ext uri="{FF2B5EF4-FFF2-40B4-BE49-F238E27FC236}">
+                <a16:creationId xmlns:a16="http://schemas.microsoft.com/office/drawing/2014/main" id="{497C3C61-3AE7-D84B-5CDC-DE2BE6E03527}"/>
+              </a:ext>
+            </a:extLst>
+          </p:cNvPr>
+          <p:cNvSpPr>
+            <a:spLocks noGrp="1"/>
+          </p:cNvSpPr>
+          <p:nvPr>
+            <p:ph type="sldNum" sz="quarter" idx="5"/>
+          </p:nvPr>
+        </p:nvSpPr>
+        <p:spPr/>
+        <p:txBody>
+          <a:bodyPr/>
+          <a:lstStyle/>
+          <a:p>
+            <a:fld id="{DA518C43-3AD6-4C5A-9E6E-E4C1457F78D0}" type="slidenum">
+              <a:rPr kumimoji="1" lang="ja-JP" altLang="en-US" smtClean="0"/>
+              <a:t>14</a:t>
+            </a:fld>
+            <a:endParaRPr kumimoji="1" lang="ja-JP" altLang="en-US"/>
+          </a:p>
+        </p:txBody>
+      </p:sp>
+    </p:spTree>
+    <p:extLst>
+      <p:ext uri="{BB962C8B-B14F-4D97-AF65-F5344CB8AC3E}">
+        <p14:creationId xmlns:p14="http://schemas.microsoft.com/office/powerpoint/2010/main" val="3182674967"/>
+      </p:ext>
+    </p:extLst>
+  </p:cSld>
+  <p:clrMapOvr>
+    <a:masterClrMapping/>
+  </p:clrMapOvr>
+</p:notes>
+</file>
+
+<file path=ppt/notesSlides/notesSlide9.xml><?xml version="1.0" encoding="utf-8"?>
+<p:notes xmlns:a="http://schemas.openxmlformats.org/drawingml/2006/main" xmlns:r="http://schemas.openxmlformats.org/officeDocument/2006/relationships" xmlns:p="http://schemas.openxmlformats.org/presentationml/2006/main">
+  <p:cSld>
+    <p:spTree>
+      <p:nvGrpSpPr>
+        <p:cNvPr id="1" name="">
+          <a:extLst>
+            <a:ext uri="{FF2B5EF4-FFF2-40B4-BE49-F238E27FC236}">
+              <a16:creationId xmlns:a16="http://schemas.microsoft.com/office/drawing/2014/main" id="{4F75E2B6-82EE-2D86-48BC-36AA1ED6396E}"/>
+            </a:ext>
+          </a:extLst>
+        </p:cNvPr>
+        <p:cNvGrpSpPr/>
+        <p:nvPr/>
+      </p:nvGrpSpPr>
+      <p:grpSpPr>
+        <a:xfrm>
+          <a:off x="0" y="0"/>
+          <a:ext cx="0" cy="0"/>
+          <a:chOff x="0" y="0"/>
+          <a:chExt cx="0" cy="0"/>
+        </a:xfrm>
+      </p:grpSpPr>
+      <p:sp>
+        <p:nvSpPr>
+          <p:cNvPr id="2" name="スライド イメージ プレースホルダー 1">
+            <a:extLst>
+              <a:ext uri="{FF2B5EF4-FFF2-40B4-BE49-F238E27FC236}">
+                <a16:creationId xmlns:a16="http://schemas.microsoft.com/office/drawing/2014/main" id="{4ADC6748-2506-80D8-94EC-2AD38FDA3D63}"/>
+              </a:ext>
+            </a:extLst>
+          </p:cNvPr>
+          <p:cNvSpPr>
+            <a:spLocks noGrp="1" noRot="1" noChangeAspect="1"/>
+          </p:cNvSpPr>
+          <p:nvPr>
+            <p:ph type="sldImg"/>
+          </p:nvPr>
+        </p:nvSpPr>
+        <p:spPr/>
+        <p:txBody>
+          <a:bodyPr/>
+          <a:lstStyle/>
+          <a:p>
+            <a:endParaRPr lang="ja-JP" altLang="en-US"/>
+          </a:p>
+        </p:txBody>
+      </p:sp>
+      <p:sp>
+        <p:nvSpPr>
+          <p:cNvPr id="3" name="ノート プレースホルダー 2">
+            <a:extLst>
+              <a:ext uri="{FF2B5EF4-FFF2-40B4-BE49-F238E27FC236}">
+                <a16:creationId xmlns:a16="http://schemas.microsoft.com/office/drawing/2014/main" id="{757B82AF-5656-E090-3068-A43D1E4852EF}"/>
+              </a:ext>
+            </a:extLst>
+          </p:cNvPr>
+          <p:cNvSpPr>
+            <a:spLocks noGrp="1"/>
+          </p:cNvSpPr>
+          <p:nvPr>
+            <p:ph type="body" idx="1"/>
+          </p:nvPr>
+        </p:nvSpPr>
+        <p:spPr/>
+        <p:txBody>
+          <a:bodyPr/>
+          <a:lstStyle/>
+          <a:p>
+            <a:endParaRPr kumimoji="1" lang="ja-JP" altLang="en-US" dirty="0"/>
+          </a:p>
+        </p:txBody>
+      </p:sp>
+      <p:sp>
+        <p:nvSpPr>
+          <p:cNvPr id="4" name="スライド番号プレースホルダー 3">
+            <a:extLst>
+              <a:ext uri="{FF2B5EF4-FFF2-40B4-BE49-F238E27FC236}">
+                <a16:creationId xmlns:a16="http://schemas.microsoft.com/office/drawing/2014/main" id="{FE98E68C-F970-906A-AB65-A97D035E95EB}"/>
+              </a:ext>
+            </a:extLst>
+          </p:cNvPr>
+          <p:cNvSpPr>
+            <a:spLocks noGrp="1"/>
+          </p:cNvSpPr>
+          <p:nvPr>
+            <p:ph type="sldNum" sz="quarter" idx="5"/>
+          </p:nvPr>
+        </p:nvSpPr>
+        <p:spPr/>
+        <p:txBody>
+          <a:bodyPr/>
+          <a:lstStyle/>
+          <a:p>
+            <a:fld id="{DA518C43-3AD6-4C5A-9E6E-E4C1457F78D0}" type="slidenum">
+              <a:rPr kumimoji="1" lang="ja-JP" altLang="en-US" smtClean="0"/>
+              <a:t>15</a:t>
+            </a:fld>
+            <a:endParaRPr kumimoji="1" lang="ja-JP" altLang="en-US"/>
+          </a:p>
+        </p:txBody>
+      </p:sp>
+    </p:spTree>
+    <p:extLst>
+      <p:ext uri="{BB962C8B-B14F-4D97-AF65-F5344CB8AC3E}">
+        <p14:creationId xmlns:p14="http://schemas.microsoft.com/office/powerpoint/2010/main" val="2432287790"/>
       </p:ext>
     </p:extLst>
   </p:cSld>
@@ -3467,7 +4165,7 @@
           <a:p>
             <a:fld id="{E0484DAA-C3B5-44F4-9200-4AF8B0FBAE1A}" type="datetime1">
               <a:rPr kumimoji="1" lang="ja-JP" altLang="en-US" smtClean="0"/>
-              <a:t>2026/2/21</a:t>
+              <a:t>2026/2/27</a:t>
             </a:fld>
             <a:endParaRPr kumimoji="1" lang="ja-JP" altLang="en-US"/>
           </a:p>
@@ -3723,7 +4421,7 @@
           <a:p>
             <a:fld id="{95D61B96-9514-4705-89D9-92806E92DA3C}" type="datetime1">
               <a:rPr kumimoji="1" lang="ja-JP" altLang="en-US" smtClean="0"/>
-              <a:t>2026/2/21</a:t>
+              <a:t>2026/2/27</a:t>
             </a:fld>
             <a:endParaRPr kumimoji="1" lang="ja-JP" altLang="en-US"/>
           </a:p>
@@ -4327,7 +5025,7 @@
           <a:p>
             <a:fld id="{1FCCFD67-B65E-4F1F-A7E9-33A8DD3FE8A4}" type="datetime1">
               <a:rPr kumimoji="1" lang="ja-JP" altLang="en-US" smtClean="0"/>
-              <a:t>2026/2/21</a:t>
+              <a:t>2026/2/27</a:t>
             </a:fld>
             <a:endParaRPr kumimoji="1" lang="ja-JP" altLang="en-US"/>
           </a:p>
@@ -4672,7 +5370,7 @@
           <a:p>
             <a:fld id="{EECD23D5-4953-48EC-9BD6-9F672EEAD81E}" type="datetime1">
               <a:rPr kumimoji="1" lang="ja-JP" altLang="en-US" smtClean="0"/>
-              <a:t>2026/2/21</a:t>
+              <a:t>2026/2/27</a:t>
             </a:fld>
             <a:endParaRPr kumimoji="1" lang="ja-JP" altLang="en-US"/>
           </a:p>
@@ -5164,7 +5862,7 @@
           <a:p>
             <a:fld id="{DEDA03B9-D085-40D4-88AC-E0DF4D6CC4C7}" type="datetime1">
               <a:rPr kumimoji="1" lang="ja-JP" altLang="en-US" smtClean="0"/>
-              <a:t>2026/2/21</a:t>
+              <a:t>2026/2/27</a:t>
             </a:fld>
             <a:endParaRPr kumimoji="1" lang="ja-JP" altLang="en-US"/>
           </a:p>
@@ -5321,7 +6019,7 @@
           <a:p>
             <a:fld id="{E0D848FA-23B7-42A2-A87B-F6ECE932BBB8}" type="datetime1">
               <a:rPr kumimoji="1" lang="ja-JP" altLang="en-US" smtClean="0"/>
-              <a:t>2026/2/21</a:t>
+              <a:t>2026/2/27</a:t>
             </a:fld>
             <a:endParaRPr kumimoji="1" lang="ja-JP" altLang="en-US"/>
           </a:p>
@@ -5450,7 +6148,7 @@
           <a:p>
             <a:fld id="{205ADBA9-D679-4B2D-B088-2474FEE86FAF}" type="datetime1">
               <a:rPr kumimoji="1" lang="ja-JP" altLang="en-US" smtClean="0"/>
-              <a:t>2026/2/21</a:t>
+              <a:t>2026/2/27</a:t>
             </a:fld>
             <a:endParaRPr kumimoji="1" lang="ja-JP" altLang="en-US"/>
           </a:p>
@@ -5809,7 +6507,7 @@
           <a:p>
             <a:fld id="{4D2BC66D-E74D-4F10-A234-4764544E1699}" type="datetime1">
               <a:rPr kumimoji="1" lang="ja-JP" altLang="en-US" smtClean="0"/>
-              <a:t>2026/2/21</a:t>
+              <a:t>2026/2/27</a:t>
             </a:fld>
             <a:endParaRPr kumimoji="1" lang="ja-JP" altLang="en-US"/>
           </a:p>
@@ -6113,7 +6811,7 @@
           <a:p>
             <a:fld id="{84FE09BC-A4DE-4553-A94A-9B24F83CE1AF}" type="datetime1">
               <a:rPr kumimoji="1" lang="ja-JP" altLang="en-US" smtClean="0"/>
-              <a:t>2026/2/21</a:t>
+              <a:t>2026/2/27</a:t>
             </a:fld>
             <a:endParaRPr kumimoji="1" lang="ja-JP" altLang="en-US"/>
           </a:p>
@@ -7229,6 +7927,2016 @@
   <p:cSld>
     <p:spTree>
       <p:nvGrpSpPr>
+        <p:cNvPr id="1" name="">
+          <a:extLst>
+            <a:ext uri="{FF2B5EF4-FFF2-40B4-BE49-F238E27FC236}">
+              <a16:creationId xmlns:a16="http://schemas.microsoft.com/office/drawing/2014/main" id="{4ACD60B2-8998-E960-7D59-5E93ED894F0A}"/>
+            </a:ext>
+          </a:extLst>
+        </p:cNvPr>
+        <p:cNvGrpSpPr/>
+        <p:nvPr/>
+      </p:nvGrpSpPr>
+      <p:grpSpPr>
+        <a:xfrm>
+          <a:off x="0" y="0"/>
+          <a:ext cx="0" cy="0"/>
+          <a:chOff x="0" y="0"/>
+          <a:chExt cx="0" cy="0"/>
+        </a:xfrm>
+      </p:grpSpPr>
+      <p:sp>
+        <p:nvSpPr>
+          <p:cNvPr id="2" name="スライド番号プレースホルダー 1">
+            <a:extLst>
+              <a:ext uri="{FF2B5EF4-FFF2-40B4-BE49-F238E27FC236}">
+                <a16:creationId xmlns:a16="http://schemas.microsoft.com/office/drawing/2014/main" id="{1DF5E796-38C6-6986-C481-CEFBA20A0B0D}"/>
+              </a:ext>
+            </a:extLst>
+          </p:cNvPr>
+          <p:cNvSpPr>
+            <a:spLocks noGrp="1"/>
+          </p:cNvSpPr>
+          <p:nvPr>
+            <p:ph type="sldNum" sz="quarter" idx="12"/>
+          </p:nvPr>
+        </p:nvSpPr>
+        <p:spPr/>
+        <p:txBody>
+          <a:bodyPr/>
+          <a:lstStyle/>
+          <a:p>
+            <a:fld id="{7A0ED1C7-8A26-48CF-81C0-2A5ADFEC2E18}" type="slidenum">
+              <a:rPr kumimoji="1" lang="ja-JP" altLang="en-US" smtClean="0"/>
+              <a:t>10</a:t>
+            </a:fld>
+            <a:endParaRPr kumimoji="1" lang="ja-JP" altLang="en-US"/>
+          </a:p>
+        </p:txBody>
+      </p:sp>
+      <p:pic>
+        <p:nvPicPr>
+          <p:cNvPr id="4" name="図 3" descr="ダイアグラム">
+            <a:extLst>
+              <a:ext uri="{FF2B5EF4-FFF2-40B4-BE49-F238E27FC236}">
+                <a16:creationId xmlns:a16="http://schemas.microsoft.com/office/drawing/2014/main" id="{5794BDDB-3BC9-C040-2FE5-C373D6BBC4A1}"/>
+              </a:ext>
+            </a:extLst>
+          </p:cNvPr>
+          <p:cNvPicPr>
+            <a:picLocks noChangeAspect="1"/>
+          </p:cNvPicPr>
+          <p:nvPr/>
+        </p:nvPicPr>
+        <p:blipFill>
+          <a:blip r:embed="rId3">
+            <a:extLst>
+              <a:ext uri="{28A0092B-C50C-407E-A947-70E740481C1C}">
+                <a14:useLocalDpi xmlns:a14="http://schemas.microsoft.com/office/drawing/2010/main" val="0"/>
+              </a:ext>
+            </a:extLst>
+          </a:blip>
+          <a:stretch>
+            <a:fillRect/>
+          </a:stretch>
+        </p:blipFill>
+        <p:spPr>
+          <a:xfrm>
+            <a:off x="-136769" y="-76933"/>
+            <a:ext cx="12465538" cy="7011865"/>
+          </a:xfrm>
+          <a:prstGeom prst="rect">
+            <a:avLst/>
+          </a:prstGeom>
+        </p:spPr>
+      </p:pic>
+      <p:sp>
+        <p:nvSpPr>
+          <p:cNvPr id="3" name="正方形/長方形 2">
+            <a:extLst>
+              <a:ext uri="{FF2B5EF4-FFF2-40B4-BE49-F238E27FC236}">
+                <a16:creationId xmlns:a16="http://schemas.microsoft.com/office/drawing/2014/main" id="{2389E41D-16B1-1760-BB57-B74B1A9892B6}"/>
+              </a:ext>
+            </a:extLst>
+          </p:cNvPr>
+          <p:cNvSpPr/>
+          <p:nvPr/>
+        </p:nvSpPr>
+        <p:spPr>
+          <a:xfrm>
+            <a:off x="-136768" y="3989070"/>
+            <a:ext cx="12465538" cy="2945862"/>
+          </a:xfrm>
+          <a:prstGeom prst="rect">
+            <a:avLst/>
+          </a:prstGeom>
+          <a:solidFill>
+            <a:schemeClr val="bg1">
+              <a:alpha val="95000"/>
+            </a:schemeClr>
+          </a:solidFill>
+          <a:ln>
+            <a:noFill/>
+          </a:ln>
+        </p:spPr>
+        <p:style>
+          <a:lnRef idx="2">
+            <a:schemeClr val="accent1">
+              <a:shade val="15000"/>
+            </a:schemeClr>
+          </a:lnRef>
+          <a:fillRef idx="1">
+            <a:schemeClr val="accent1"/>
+          </a:fillRef>
+          <a:effectRef idx="0">
+            <a:schemeClr val="accent1"/>
+          </a:effectRef>
+          <a:fontRef idx="minor">
+            <a:schemeClr val="lt1"/>
+          </a:fontRef>
+        </p:style>
+        <p:txBody>
+          <a:bodyPr rtlCol="0" anchor="ctr"/>
+          <a:lstStyle/>
+          <a:p>
+            <a:pPr algn="ctr"/>
+            <a:endParaRPr kumimoji="1" lang="ja-JP" altLang="en-US"/>
+          </a:p>
+        </p:txBody>
+      </p:sp>
+      <p:sp>
+        <p:nvSpPr>
+          <p:cNvPr id="5" name="正方形/長方形 4">
+            <a:extLst>
+              <a:ext uri="{FF2B5EF4-FFF2-40B4-BE49-F238E27FC236}">
+                <a16:creationId xmlns:a16="http://schemas.microsoft.com/office/drawing/2014/main" id="{CB4CB279-3E72-022A-7A95-E64C026DB0CE}"/>
+              </a:ext>
+            </a:extLst>
+          </p:cNvPr>
+          <p:cNvSpPr/>
+          <p:nvPr/>
+        </p:nvSpPr>
+        <p:spPr>
+          <a:xfrm>
+            <a:off x="3691890" y="3406140"/>
+            <a:ext cx="8636879" cy="582930"/>
+          </a:xfrm>
+          <a:prstGeom prst="rect">
+            <a:avLst/>
+          </a:prstGeom>
+          <a:solidFill>
+            <a:schemeClr val="bg1">
+              <a:alpha val="95000"/>
+            </a:schemeClr>
+          </a:solidFill>
+          <a:ln>
+            <a:noFill/>
+          </a:ln>
+        </p:spPr>
+        <p:style>
+          <a:lnRef idx="2">
+            <a:schemeClr val="accent1">
+              <a:shade val="15000"/>
+            </a:schemeClr>
+          </a:lnRef>
+          <a:fillRef idx="1">
+            <a:schemeClr val="accent1"/>
+          </a:fillRef>
+          <a:effectRef idx="0">
+            <a:schemeClr val="accent1"/>
+          </a:effectRef>
+          <a:fontRef idx="minor">
+            <a:schemeClr val="lt1"/>
+          </a:fontRef>
+        </p:style>
+        <p:txBody>
+          <a:bodyPr rtlCol="0" anchor="ctr"/>
+          <a:lstStyle/>
+          <a:p>
+            <a:pPr algn="ctr"/>
+            <a:endParaRPr kumimoji="1" lang="ja-JP" altLang="en-US"/>
+          </a:p>
+        </p:txBody>
+      </p:sp>
+      <p:sp>
+        <p:nvSpPr>
+          <p:cNvPr id="6" name="正方形/長方形 5">
+            <a:extLst>
+              <a:ext uri="{FF2B5EF4-FFF2-40B4-BE49-F238E27FC236}">
+                <a16:creationId xmlns:a16="http://schemas.microsoft.com/office/drawing/2014/main" id="{F2E01FDC-70E3-F788-F243-4895A5C65319}"/>
+              </a:ext>
+            </a:extLst>
+          </p:cNvPr>
+          <p:cNvSpPr/>
+          <p:nvPr/>
+        </p:nvSpPr>
+        <p:spPr>
+          <a:xfrm>
+            <a:off x="6640830" y="-76932"/>
+            <a:ext cx="5687939" cy="3483072"/>
+          </a:xfrm>
+          <a:prstGeom prst="rect">
+            <a:avLst/>
+          </a:prstGeom>
+          <a:solidFill>
+            <a:schemeClr val="bg1">
+              <a:alpha val="95000"/>
+            </a:schemeClr>
+          </a:solidFill>
+          <a:ln>
+            <a:noFill/>
+          </a:ln>
+        </p:spPr>
+        <p:style>
+          <a:lnRef idx="2">
+            <a:schemeClr val="accent1">
+              <a:shade val="15000"/>
+            </a:schemeClr>
+          </a:lnRef>
+          <a:fillRef idx="1">
+            <a:schemeClr val="accent1"/>
+          </a:fillRef>
+          <a:effectRef idx="0">
+            <a:schemeClr val="accent1"/>
+          </a:effectRef>
+          <a:fontRef idx="minor">
+            <a:schemeClr val="lt1"/>
+          </a:fontRef>
+        </p:style>
+        <p:txBody>
+          <a:bodyPr rtlCol="0" anchor="ctr"/>
+          <a:lstStyle/>
+          <a:p>
+            <a:pPr algn="ctr"/>
+            <a:endParaRPr kumimoji="1" lang="ja-JP" altLang="en-US"/>
+          </a:p>
+        </p:txBody>
+      </p:sp>
+    </p:spTree>
+    <p:extLst>
+      <p:ext uri="{BB962C8B-B14F-4D97-AF65-F5344CB8AC3E}">
+        <p14:creationId xmlns:p14="http://schemas.microsoft.com/office/powerpoint/2010/main" val="3863281803"/>
+      </p:ext>
+    </p:extLst>
+  </p:cSld>
+  <p:clrMapOvr>
+    <a:masterClrMapping/>
+  </p:clrMapOvr>
+</p:sld>
+</file>
+
+<file path=ppt/slides/slide11.xml><?xml version="1.0" encoding="utf-8"?>
+<p:sld xmlns:a="http://schemas.openxmlformats.org/drawingml/2006/main" xmlns:r="http://schemas.openxmlformats.org/officeDocument/2006/relationships" xmlns:p="http://schemas.openxmlformats.org/presentationml/2006/main">
+  <p:cSld>
+    <p:spTree>
+      <p:nvGrpSpPr>
+        <p:cNvPr id="1" name="">
+          <a:extLst>
+            <a:ext uri="{FF2B5EF4-FFF2-40B4-BE49-F238E27FC236}">
+              <a16:creationId xmlns:a16="http://schemas.microsoft.com/office/drawing/2014/main" id="{A5F25BB9-8C21-90C5-861E-36F4577E89A3}"/>
+            </a:ext>
+          </a:extLst>
+        </p:cNvPr>
+        <p:cNvGrpSpPr/>
+        <p:nvPr/>
+      </p:nvGrpSpPr>
+      <p:grpSpPr>
+        <a:xfrm>
+          <a:off x="0" y="0"/>
+          <a:ext cx="0" cy="0"/>
+          <a:chOff x="0" y="0"/>
+          <a:chExt cx="0" cy="0"/>
+        </a:xfrm>
+      </p:grpSpPr>
+      <p:sp>
+        <p:nvSpPr>
+          <p:cNvPr id="2" name="スライド番号プレースホルダー 1">
+            <a:extLst>
+              <a:ext uri="{FF2B5EF4-FFF2-40B4-BE49-F238E27FC236}">
+                <a16:creationId xmlns:a16="http://schemas.microsoft.com/office/drawing/2014/main" id="{6F5F4AC1-7C79-1259-52C8-56E9D538903D}"/>
+              </a:ext>
+            </a:extLst>
+          </p:cNvPr>
+          <p:cNvSpPr>
+            <a:spLocks noGrp="1"/>
+          </p:cNvSpPr>
+          <p:nvPr>
+            <p:ph type="sldNum" sz="quarter" idx="12"/>
+          </p:nvPr>
+        </p:nvSpPr>
+        <p:spPr/>
+        <p:txBody>
+          <a:bodyPr/>
+          <a:lstStyle/>
+          <a:p>
+            <a:fld id="{7A0ED1C7-8A26-48CF-81C0-2A5ADFEC2E18}" type="slidenum">
+              <a:rPr kumimoji="1" lang="ja-JP" altLang="en-US" smtClean="0"/>
+              <a:t>11</a:t>
+            </a:fld>
+            <a:endParaRPr kumimoji="1" lang="ja-JP" altLang="en-US"/>
+          </a:p>
+        </p:txBody>
+      </p:sp>
+      <p:pic>
+        <p:nvPicPr>
+          <p:cNvPr id="4" name="図 3" descr="ダイアグラム">
+            <a:extLst>
+              <a:ext uri="{FF2B5EF4-FFF2-40B4-BE49-F238E27FC236}">
+                <a16:creationId xmlns:a16="http://schemas.microsoft.com/office/drawing/2014/main" id="{B4FA759E-829B-C48F-5D13-187387EAD5FF}"/>
+              </a:ext>
+            </a:extLst>
+          </p:cNvPr>
+          <p:cNvPicPr>
+            <a:picLocks noChangeAspect="1"/>
+          </p:cNvPicPr>
+          <p:nvPr/>
+        </p:nvPicPr>
+        <p:blipFill>
+          <a:blip r:embed="rId3">
+            <a:extLst>
+              <a:ext uri="{28A0092B-C50C-407E-A947-70E740481C1C}">
+                <a14:useLocalDpi xmlns:a14="http://schemas.microsoft.com/office/drawing/2010/main" val="0"/>
+              </a:ext>
+            </a:extLst>
+          </a:blip>
+          <a:stretch>
+            <a:fillRect/>
+          </a:stretch>
+        </p:blipFill>
+        <p:spPr>
+          <a:xfrm>
+            <a:off x="-136769" y="-76933"/>
+            <a:ext cx="12465538" cy="7011865"/>
+          </a:xfrm>
+          <a:prstGeom prst="rect">
+            <a:avLst/>
+          </a:prstGeom>
+        </p:spPr>
+      </p:pic>
+      <p:sp>
+        <p:nvSpPr>
+          <p:cNvPr id="3" name="正方形/長方形 2">
+            <a:extLst>
+              <a:ext uri="{FF2B5EF4-FFF2-40B4-BE49-F238E27FC236}">
+                <a16:creationId xmlns:a16="http://schemas.microsoft.com/office/drawing/2014/main" id="{05001D5D-127E-FD60-2A83-5EF426A4DD84}"/>
+              </a:ext>
+            </a:extLst>
+          </p:cNvPr>
+          <p:cNvSpPr/>
+          <p:nvPr/>
+        </p:nvSpPr>
+        <p:spPr>
+          <a:xfrm>
+            <a:off x="-136768" y="3989070"/>
+            <a:ext cx="12465538" cy="2945862"/>
+          </a:xfrm>
+          <a:prstGeom prst="rect">
+            <a:avLst/>
+          </a:prstGeom>
+          <a:solidFill>
+            <a:schemeClr val="bg1">
+              <a:alpha val="95000"/>
+            </a:schemeClr>
+          </a:solidFill>
+          <a:ln>
+            <a:noFill/>
+          </a:ln>
+        </p:spPr>
+        <p:style>
+          <a:lnRef idx="2">
+            <a:schemeClr val="accent1">
+              <a:shade val="15000"/>
+            </a:schemeClr>
+          </a:lnRef>
+          <a:fillRef idx="1">
+            <a:schemeClr val="accent1"/>
+          </a:fillRef>
+          <a:effectRef idx="0">
+            <a:schemeClr val="accent1"/>
+          </a:effectRef>
+          <a:fontRef idx="minor">
+            <a:schemeClr val="lt1"/>
+          </a:fontRef>
+        </p:style>
+        <p:txBody>
+          <a:bodyPr rtlCol="0" anchor="ctr"/>
+          <a:lstStyle/>
+          <a:p>
+            <a:pPr algn="ctr"/>
+            <a:endParaRPr kumimoji="1" lang="ja-JP" altLang="en-US"/>
+          </a:p>
+        </p:txBody>
+      </p:sp>
+      <p:sp>
+        <p:nvSpPr>
+          <p:cNvPr id="5" name="正方形/長方形 4">
+            <a:extLst>
+              <a:ext uri="{FF2B5EF4-FFF2-40B4-BE49-F238E27FC236}">
+                <a16:creationId xmlns:a16="http://schemas.microsoft.com/office/drawing/2014/main" id="{90E25FCE-CF33-15A0-3F7A-1E3AC184EDD6}"/>
+              </a:ext>
+            </a:extLst>
+          </p:cNvPr>
+          <p:cNvSpPr/>
+          <p:nvPr/>
+        </p:nvSpPr>
+        <p:spPr>
+          <a:xfrm>
+            <a:off x="3691890" y="3406140"/>
+            <a:ext cx="8636879" cy="582930"/>
+          </a:xfrm>
+          <a:prstGeom prst="rect">
+            <a:avLst/>
+          </a:prstGeom>
+          <a:solidFill>
+            <a:schemeClr val="bg1">
+              <a:alpha val="95000"/>
+            </a:schemeClr>
+          </a:solidFill>
+          <a:ln>
+            <a:noFill/>
+          </a:ln>
+        </p:spPr>
+        <p:style>
+          <a:lnRef idx="2">
+            <a:schemeClr val="accent1">
+              <a:shade val="15000"/>
+            </a:schemeClr>
+          </a:lnRef>
+          <a:fillRef idx="1">
+            <a:schemeClr val="accent1"/>
+          </a:fillRef>
+          <a:effectRef idx="0">
+            <a:schemeClr val="accent1"/>
+          </a:effectRef>
+          <a:fontRef idx="minor">
+            <a:schemeClr val="lt1"/>
+          </a:fontRef>
+        </p:style>
+        <p:txBody>
+          <a:bodyPr rtlCol="0" anchor="ctr"/>
+          <a:lstStyle/>
+          <a:p>
+            <a:pPr algn="ctr"/>
+            <a:endParaRPr kumimoji="1" lang="ja-JP" altLang="en-US"/>
+          </a:p>
+        </p:txBody>
+      </p:sp>
+    </p:spTree>
+    <p:extLst>
+      <p:ext uri="{BB962C8B-B14F-4D97-AF65-F5344CB8AC3E}">
+        <p14:creationId xmlns:p14="http://schemas.microsoft.com/office/powerpoint/2010/main" val="1181002556"/>
+      </p:ext>
+    </p:extLst>
+  </p:cSld>
+  <p:clrMapOvr>
+    <a:masterClrMapping/>
+  </p:clrMapOvr>
+</p:sld>
+</file>
+
+<file path=ppt/slides/slide12.xml><?xml version="1.0" encoding="utf-8"?>
+<p:sld xmlns:a="http://schemas.openxmlformats.org/drawingml/2006/main" xmlns:r="http://schemas.openxmlformats.org/officeDocument/2006/relationships" xmlns:p="http://schemas.openxmlformats.org/presentationml/2006/main">
+  <p:cSld>
+    <p:spTree>
+      <p:nvGrpSpPr>
+        <p:cNvPr id="1" name="">
+          <a:extLst>
+            <a:ext uri="{FF2B5EF4-FFF2-40B4-BE49-F238E27FC236}">
+              <a16:creationId xmlns:a16="http://schemas.microsoft.com/office/drawing/2014/main" id="{C89D98FA-1FCD-7AA0-86BA-8FE18AEF3ECD}"/>
+            </a:ext>
+          </a:extLst>
+        </p:cNvPr>
+        <p:cNvGrpSpPr/>
+        <p:nvPr/>
+      </p:nvGrpSpPr>
+      <p:grpSpPr>
+        <a:xfrm>
+          <a:off x="0" y="0"/>
+          <a:ext cx="0" cy="0"/>
+          <a:chOff x="0" y="0"/>
+          <a:chExt cx="0" cy="0"/>
+        </a:xfrm>
+      </p:grpSpPr>
+      <p:sp>
+        <p:nvSpPr>
+          <p:cNvPr id="2" name="スライド番号プレースホルダー 1">
+            <a:extLst>
+              <a:ext uri="{FF2B5EF4-FFF2-40B4-BE49-F238E27FC236}">
+                <a16:creationId xmlns:a16="http://schemas.microsoft.com/office/drawing/2014/main" id="{D32F711D-19D9-902D-D309-8D002F44E8EC}"/>
+              </a:ext>
+            </a:extLst>
+          </p:cNvPr>
+          <p:cNvSpPr>
+            <a:spLocks noGrp="1"/>
+          </p:cNvSpPr>
+          <p:nvPr>
+            <p:ph type="sldNum" sz="quarter" idx="12"/>
+          </p:nvPr>
+        </p:nvSpPr>
+        <p:spPr/>
+        <p:txBody>
+          <a:bodyPr/>
+          <a:lstStyle/>
+          <a:p>
+            <a:fld id="{7A0ED1C7-8A26-48CF-81C0-2A5ADFEC2E18}" type="slidenum">
+              <a:rPr kumimoji="1" lang="ja-JP" altLang="en-US" smtClean="0"/>
+              <a:t>12</a:t>
+            </a:fld>
+            <a:endParaRPr kumimoji="1" lang="ja-JP" altLang="en-US"/>
+          </a:p>
+        </p:txBody>
+      </p:sp>
+      <p:pic>
+        <p:nvPicPr>
+          <p:cNvPr id="4" name="図 3" descr="ダイアグラム">
+            <a:extLst>
+              <a:ext uri="{FF2B5EF4-FFF2-40B4-BE49-F238E27FC236}">
+                <a16:creationId xmlns:a16="http://schemas.microsoft.com/office/drawing/2014/main" id="{2600F110-9E00-7EAB-6A5B-C837A17E48F3}"/>
+              </a:ext>
+            </a:extLst>
+          </p:cNvPr>
+          <p:cNvPicPr>
+            <a:picLocks noChangeAspect="1"/>
+          </p:cNvPicPr>
+          <p:nvPr/>
+        </p:nvPicPr>
+        <p:blipFill>
+          <a:blip r:embed="rId3">
+            <a:extLst>
+              <a:ext uri="{28A0092B-C50C-407E-A947-70E740481C1C}">
+                <a14:useLocalDpi xmlns:a14="http://schemas.microsoft.com/office/drawing/2010/main" val="0"/>
+              </a:ext>
+            </a:extLst>
+          </a:blip>
+          <a:stretch>
+            <a:fillRect/>
+          </a:stretch>
+        </p:blipFill>
+        <p:spPr>
+          <a:xfrm>
+            <a:off x="-136769" y="-76933"/>
+            <a:ext cx="12465538" cy="7011865"/>
+          </a:xfrm>
+          <a:prstGeom prst="rect">
+            <a:avLst/>
+          </a:prstGeom>
+        </p:spPr>
+      </p:pic>
+      <p:sp>
+        <p:nvSpPr>
+          <p:cNvPr id="3" name="正方形/長方形 2">
+            <a:extLst>
+              <a:ext uri="{FF2B5EF4-FFF2-40B4-BE49-F238E27FC236}">
+                <a16:creationId xmlns:a16="http://schemas.microsoft.com/office/drawing/2014/main" id="{F34928A8-4226-EEB0-3392-9FE30432B41E}"/>
+              </a:ext>
+            </a:extLst>
+          </p:cNvPr>
+          <p:cNvSpPr/>
+          <p:nvPr/>
+        </p:nvSpPr>
+        <p:spPr>
+          <a:xfrm>
+            <a:off x="-136768" y="-76933"/>
+            <a:ext cx="3531478" cy="7011865"/>
+          </a:xfrm>
+          <a:prstGeom prst="rect">
+            <a:avLst/>
+          </a:prstGeom>
+          <a:solidFill>
+            <a:schemeClr val="bg1">
+              <a:alpha val="95000"/>
+            </a:schemeClr>
+          </a:solidFill>
+          <a:ln>
+            <a:noFill/>
+          </a:ln>
+        </p:spPr>
+        <p:style>
+          <a:lnRef idx="2">
+            <a:schemeClr val="accent1">
+              <a:shade val="15000"/>
+            </a:schemeClr>
+          </a:lnRef>
+          <a:fillRef idx="1">
+            <a:schemeClr val="accent1"/>
+          </a:fillRef>
+          <a:effectRef idx="0">
+            <a:schemeClr val="accent1"/>
+          </a:effectRef>
+          <a:fontRef idx="minor">
+            <a:schemeClr val="lt1"/>
+          </a:fontRef>
+        </p:style>
+        <p:txBody>
+          <a:bodyPr rtlCol="0" anchor="ctr"/>
+          <a:lstStyle/>
+          <a:p>
+            <a:pPr algn="ctr"/>
+            <a:endParaRPr kumimoji="1" lang="ja-JP" altLang="en-US"/>
+          </a:p>
+        </p:txBody>
+      </p:sp>
+      <p:sp>
+        <p:nvSpPr>
+          <p:cNvPr id="6" name="正方形/長方形 5">
+            <a:extLst>
+              <a:ext uri="{FF2B5EF4-FFF2-40B4-BE49-F238E27FC236}">
+                <a16:creationId xmlns:a16="http://schemas.microsoft.com/office/drawing/2014/main" id="{257BBC9F-0114-035D-9446-BF1B10D33C73}"/>
+              </a:ext>
+            </a:extLst>
+          </p:cNvPr>
+          <p:cNvSpPr/>
+          <p:nvPr/>
+        </p:nvSpPr>
+        <p:spPr>
+          <a:xfrm>
+            <a:off x="3394710" y="4354830"/>
+            <a:ext cx="3383280" cy="2580102"/>
+          </a:xfrm>
+          <a:prstGeom prst="rect">
+            <a:avLst/>
+          </a:prstGeom>
+          <a:solidFill>
+            <a:schemeClr val="bg1">
+              <a:alpha val="95000"/>
+            </a:schemeClr>
+          </a:solidFill>
+          <a:ln>
+            <a:noFill/>
+          </a:ln>
+        </p:spPr>
+        <p:style>
+          <a:lnRef idx="2">
+            <a:schemeClr val="accent1">
+              <a:shade val="15000"/>
+            </a:schemeClr>
+          </a:lnRef>
+          <a:fillRef idx="1">
+            <a:schemeClr val="accent1"/>
+          </a:fillRef>
+          <a:effectRef idx="0">
+            <a:schemeClr val="accent1"/>
+          </a:effectRef>
+          <a:fontRef idx="minor">
+            <a:schemeClr val="lt1"/>
+          </a:fontRef>
+        </p:style>
+        <p:txBody>
+          <a:bodyPr rtlCol="0" anchor="ctr"/>
+          <a:lstStyle/>
+          <a:p>
+            <a:pPr algn="ctr"/>
+            <a:endParaRPr kumimoji="1" lang="ja-JP" altLang="en-US"/>
+          </a:p>
+        </p:txBody>
+      </p:sp>
+      <p:sp>
+        <p:nvSpPr>
+          <p:cNvPr id="7" name="正方形/長方形 6">
+            <a:extLst>
+              <a:ext uri="{FF2B5EF4-FFF2-40B4-BE49-F238E27FC236}">
+                <a16:creationId xmlns:a16="http://schemas.microsoft.com/office/drawing/2014/main" id="{09F967B5-84EA-031D-1B74-602D61CBE309}"/>
+              </a:ext>
+            </a:extLst>
+          </p:cNvPr>
+          <p:cNvSpPr/>
+          <p:nvPr/>
+        </p:nvSpPr>
+        <p:spPr>
+          <a:xfrm>
+            <a:off x="3394710" y="-76934"/>
+            <a:ext cx="3383280" cy="3277334"/>
+          </a:xfrm>
+          <a:prstGeom prst="rect">
+            <a:avLst/>
+          </a:prstGeom>
+          <a:solidFill>
+            <a:schemeClr val="bg1">
+              <a:alpha val="95000"/>
+            </a:schemeClr>
+          </a:solidFill>
+          <a:ln>
+            <a:noFill/>
+          </a:ln>
+        </p:spPr>
+        <p:style>
+          <a:lnRef idx="2">
+            <a:schemeClr val="accent1">
+              <a:shade val="15000"/>
+            </a:schemeClr>
+          </a:lnRef>
+          <a:fillRef idx="1">
+            <a:schemeClr val="accent1"/>
+          </a:fillRef>
+          <a:effectRef idx="0">
+            <a:schemeClr val="accent1"/>
+          </a:effectRef>
+          <a:fontRef idx="minor">
+            <a:schemeClr val="lt1"/>
+          </a:fontRef>
+        </p:style>
+        <p:txBody>
+          <a:bodyPr rtlCol="0" anchor="ctr"/>
+          <a:lstStyle/>
+          <a:p>
+            <a:pPr algn="ctr"/>
+            <a:endParaRPr kumimoji="1" lang="ja-JP" altLang="en-US"/>
+          </a:p>
+        </p:txBody>
+      </p:sp>
+      <p:sp>
+        <p:nvSpPr>
+          <p:cNvPr id="8" name="正方形/長方形 7">
+            <a:extLst>
+              <a:ext uri="{FF2B5EF4-FFF2-40B4-BE49-F238E27FC236}">
+                <a16:creationId xmlns:a16="http://schemas.microsoft.com/office/drawing/2014/main" id="{73679923-8705-4024-DE51-19EC116CD794}"/>
+              </a:ext>
+            </a:extLst>
+          </p:cNvPr>
+          <p:cNvSpPr/>
+          <p:nvPr/>
+        </p:nvSpPr>
+        <p:spPr>
+          <a:xfrm>
+            <a:off x="3394710" y="3200400"/>
+            <a:ext cx="2606040" cy="342900"/>
+          </a:xfrm>
+          <a:prstGeom prst="rect">
+            <a:avLst/>
+          </a:prstGeom>
+          <a:solidFill>
+            <a:schemeClr val="bg1">
+              <a:alpha val="95000"/>
+            </a:schemeClr>
+          </a:solidFill>
+          <a:ln>
+            <a:noFill/>
+          </a:ln>
+        </p:spPr>
+        <p:style>
+          <a:lnRef idx="2">
+            <a:schemeClr val="accent1">
+              <a:shade val="15000"/>
+            </a:schemeClr>
+          </a:lnRef>
+          <a:fillRef idx="1">
+            <a:schemeClr val="accent1"/>
+          </a:fillRef>
+          <a:effectRef idx="0">
+            <a:schemeClr val="accent1"/>
+          </a:effectRef>
+          <a:fontRef idx="minor">
+            <a:schemeClr val="lt1"/>
+          </a:fontRef>
+        </p:style>
+        <p:txBody>
+          <a:bodyPr rtlCol="0" anchor="ctr"/>
+          <a:lstStyle/>
+          <a:p>
+            <a:pPr algn="ctr"/>
+            <a:endParaRPr kumimoji="1" lang="ja-JP" altLang="en-US"/>
+          </a:p>
+        </p:txBody>
+      </p:sp>
+    </p:spTree>
+    <p:extLst>
+      <p:ext uri="{BB962C8B-B14F-4D97-AF65-F5344CB8AC3E}">
+        <p14:creationId xmlns:p14="http://schemas.microsoft.com/office/powerpoint/2010/main" val="2127575361"/>
+      </p:ext>
+    </p:extLst>
+  </p:cSld>
+  <p:clrMapOvr>
+    <a:masterClrMapping/>
+  </p:clrMapOvr>
+</p:sld>
+</file>
+
+<file path=ppt/slides/slide13.xml><?xml version="1.0" encoding="utf-8"?>
+<p:sld xmlns:a="http://schemas.openxmlformats.org/drawingml/2006/main" xmlns:r="http://schemas.openxmlformats.org/officeDocument/2006/relationships" xmlns:p="http://schemas.openxmlformats.org/presentationml/2006/main">
+  <p:cSld>
+    <p:spTree>
+      <p:nvGrpSpPr>
+        <p:cNvPr id="1" name="">
+          <a:extLst>
+            <a:ext uri="{FF2B5EF4-FFF2-40B4-BE49-F238E27FC236}">
+              <a16:creationId xmlns:a16="http://schemas.microsoft.com/office/drawing/2014/main" id="{BC443112-119D-2FB0-EE06-B1DE05EBF47E}"/>
+            </a:ext>
+          </a:extLst>
+        </p:cNvPr>
+        <p:cNvGrpSpPr/>
+        <p:nvPr/>
+      </p:nvGrpSpPr>
+      <p:grpSpPr>
+        <a:xfrm>
+          <a:off x="0" y="0"/>
+          <a:ext cx="0" cy="0"/>
+          <a:chOff x="0" y="0"/>
+          <a:chExt cx="0" cy="0"/>
+        </a:xfrm>
+      </p:grpSpPr>
+      <p:sp>
+        <p:nvSpPr>
+          <p:cNvPr id="2" name="スライド番号プレースホルダー 1">
+            <a:extLst>
+              <a:ext uri="{FF2B5EF4-FFF2-40B4-BE49-F238E27FC236}">
+                <a16:creationId xmlns:a16="http://schemas.microsoft.com/office/drawing/2014/main" id="{6DD6A527-DA24-6A38-9BE1-BB5E4C19D1E5}"/>
+              </a:ext>
+            </a:extLst>
+          </p:cNvPr>
+          <p:cNvSpPr>
+            <a:spLocks noGrp="1"/>
+          </p:cNvSpPr>
+          <p:nvPr>
+            <p:ph type="sldNum" sz="quarter" idx="12"/>
+          </p:nvPr>
+        </p:nvSpPr>
+        <p:spPr/>
+        <p:txBody>
+          <a:bodyPr/>
+          <a:lstStyle/>
+          <a:p>
+            <a:fld id="{7A0ED1C7-8A26-48CF-81C0-2A5ADFEC2E18}" type="slidenum">
+              <a:rPr kumimoji="1" lang="ja-JP" altLang="en-US" smtClean="0"/>
+              <a:t>13</a:t>
+            </a:fld>
+            <a:endParaRPr kumimoji="1" lang="ja-JP" altLang="en-US"/>
+          </a:p>
+        </p:txBody>
+      </p:sp>
+      <p:pic>
+        <p:nvPicPr>
+          <p:cNvPr id="4" name="図 3" descr="ダイアグラム">
+            <a:extLst>
+              <a:ext uri="{FF2B5EF4-FFF2-40B4-BE49-F238E27FC236}">
+                <a16:creationId xmlns:a16="http://schemas.microsoft.com/office/drawing/2014/main" id="{734D220E-8241-5512-0F0D-266289710F5D}"/>
+              </a:ext>
+            </a:extLst>
+          </p:cNvPr>
+          <p:cNvPicPr>
+            <a:picLocks noChangeAspect="1"/>
+          </p:cNvPicPr>
+          <p:nvPr/>
+        </p:nvPicPr>
+        <p:blipFill>
+          <a:blip r:embed="rId3">
+            <a:extLst>
+              <a:ext uri="{28A0092B-C50C-407E-A947-70E740481C1C}">
+                <a14:useLocalDpi xmlns:a14="http://schemas.microsoft.com/office/drawing/2010/main" val="0"/>
+              </a:ext>
+            </a:extLst>
+          </a:blip>
+          <a:stretch>
+            <a:fillRect/>
+          </a:stretch>
+        </p:blipFill>
+        <p:spPr>
+          <a:xfrm>
+            <a:off x="-136769" y="-76933"/>
+            <a:ext cx="12465538" cy="7011865"/>
+          </a:xfrm>
+          <a:prstGeom prst="rect">
+            <a:avLst/>
+          </a:prstGeom>
+        </p:spPr>
+      </p:pic>
+      <p:sp>
+        <p:nvSpPr>
+          <p:cNvPr id="3" name="正方形/長方形 2">
+            <a:extLst>
+              <a:ext uri="{FF2B5EF4-FFF2-40B4-BE49-F238E27FC236}">
+                <a16:creationId xmlns:a16="http://schemas.microsoft.com/office/drawing/2014/main" id="{1BA7CA5E-A368-48EF-9914-51261CA97175}"/>
+              </a:ext>
+            </a:extLst>
+          </p:cNvPr>
+          <p:cNvSpPr/>
+          <p:nvPr/>
+        </p:nvSpPr>
+        <p:spPr>
+          <a:xfrm>
+            <a:off x="-136768" y="-76935"/>
+            <a:ext cx="3531478" cy="4134585"/>
+          </a:xfrm>
+          <a:prstGeom prst="rect">
+            <a:avLst/>
+          </a:prstGeom>
+          <a:solidFill>
+            <a:schemeClr val="bg1">
+              <a:alpha val="95000"/>
+            </a:schemeClr>
+          </a:solidFill>
+          <a:ln>
+            <a:noFill/>
+          </a:ln>
+        </p:spPr>
+        <p:style>
+          <a:lnRef idx="2">
+            <a:schemeClr val="accent1">
+              <a:shade val="15000"/>
+            </a:schemeClr>
+          </a:lnRef>
+          <a:fillRef idx="1">
+            <a:schemeClr val="accent1"/>
+          </a:fillRef>
+          <a:effectRef idx="0">
+            <a:schemeClr val="accent1"/>
+          </a:effectRef>
+          <a:fontRef idx="minor">
+            <a:schemeClr val="lt1"/>
+          </a:fontRef>
+        </p:style>
+        <p:txBody>
+          <a:bodyPr rtlCol="0" anchor="ctr"/>
+          <a:lstStyle/>
+          <a:p>
+            <a:pPr algn="ctr"/>
+            <a:endParaRPr kumimoji="1" lang="ja-JP" altLang="en-US"/>
+          </a:p>
+        </p:txBody>
+      </p:sp>
+      <p:sp>
+        <p:nvSpPr>
+          <p:cNvPr id="6" name="正方形/長方形 5">
+            <a:extLst>
+              <a:ext uri="{FF2B5EF4-FFF2-40B4-BE49-F238E27FC236}">
+                <a16:creationId xmlns:a16="http://schemas.microsoft.com/office/drawing/2014/main" id="{CA7D83E2-9431-21DB-8C48-759891B9D04C}"/>
+              </a:ext>
+            </a:extLst>
+          </p:cNvPr>
+          <p:cNvSpPr/>
+          <p:nvPr/>
+        </p:nvSpPr>
+        <p:spPr>
+          <a:xfrm>
+            <a:off x="3097530" y="4057651"/>
+            <a:ext cx="9231238" cy="2877282"/>
+          </a:xfrm>
+          <a:prstGeom prst="rect">
+            <a:avLst/>
+          </a:prstGeom>
+          <a:solidFill>
+            <a:schemeClr val="bg1">
+              <a:alpha val="95000"/>
+            </a:schemeClr>
+          </a:solidFill>
+          <a:ln>
+            <a:noFill/>
+          </a:ln>
+        </p:spPr>
+        <p:style>
+          <a:lnRef idx="2">
+            <a:schemeClr val="accent1">
+              <a:shade val="15000"/>
+            </a:schemeClr>
+          </a:lnRef>
+          <a:fillRef idx="1">
+            <a:schemeClr val="accent1"/>
+          </a:fillRef>
+          <a:effectRef idx="0">
+            <a:schemeClr val="accent1"/>
+          </a:effectRef>
+          <a:fontRef idx="minor">
+            <a:schemeClr val="lt1"/>
+          </a:fontRef>
+        </p:style>
+        <p:txBody>
+          <a:bodyPr rtlCol="0" anchor="ctr"/>
+          <a:lstStyle/>
+          <a:p>
+            <a:pPr algn="ctr"/>
+            <a:endParaRPr kumimoji="1" lang="ja-JP" altLang="en-US"/>
+          </a:p>
+        </p:txBody>
+      </p:sp>
+      <p:sp>
+        <p:nvSpPr>
+          <p:cNvPr id="7" name="正方形/長方形 6">
+            <a:extLst>
+              <a:ext uri="{FF2B5EF4-FFF2-40B4-BE49-F238E27FC236}">
+                <a16:creationId xmlns:a16="http://schemas.microsoft.com/office/drawing/2014/main" id="{0BF3DCDA-A3BA-8991-8E4C-94F1986DF773}"/>
+              </a:ext>
+            </a:extLst>
+          </p:cNvPr>
+          <p:cNvSpPr/>
+          <p:nvPr/>
+        </p:nvSpPr>
+        <p:spPr>
+          <a:xfrm>
+            <a:off x="3394709" y="-76933"/>
+            <a:ext cx="8934059" cy="4134584"/>
+          </a:xfrm>
+          <a:prstGeom prst="rect">
+            <a:avLst/>
+          </a:prstGeom>
+          <a:solidFill>
+            <a:schemeClr val="bg1">
+              <a:alpha val="95000"/>
+            </a:schemeClr>
+          </a:solidFill>
+          <a:ln>
+            <a:noFill/>
+          </a:ln>
+        </p:spPr>
+        <p:style>
+          <a:lnRef idx="2">
+            <a:schemeClr val="accent1">
+              <a:shade val="15000"/>
+            </a:schemeClr>
+          </a:lnRef>
+          <a:fillRef idx="1">
+            <a:schemeClr val="accent1"/>
+          </a:fillRef>
+          <a:effectRef idx="0">
+            <a:schemeClr val="accent1"/>
+          </a:effectRef>
+          <a:fontRef idx="minor">
+            <a:schemeClr val="lt1"/>
+          </a:fontRef>
+        </p:style>
+        <p:txBody>
+          <a:bodyPr rtlCol="0" anchor="ctr"/>
+          <a:lstStyle/>
+          <a:p>
+            <a:pPr algn="ctr"/>
+            <a:endParaRPr kumimoji="1" lang="ja-JP" altLang="en-US"/>
+          </a:p>
+        </p:txBody>
+      </p:sp>
+      <p:sp>
+        <p:nvSpPr>
+          <p:cNvPr id="8" name="正方形/長方形 7">
+            <a:extLst>
+              <a:ext uri="{FF2B5EF4-FFF2-40B4-BE49-F238E27FC236}">
+                <a16:creationId xmlns:a16="http://schemas.microsoft.com/office/drawing/2014/main" id="{B1D7F3D0-F503-0038-22BA-B7338B6BF8A9}"/>
+              </a:ext>
+            </a:extLst>
+          </p:cNvPr>
+          <p:cNvSpPr/>
+          <p:nvPr/>
+        </p:nvSpPr>
+        <p:spPr>
+          <a:xfrm>
+            <a:off x="3394710" y="3200400"/>
+            <a:ext cx="2606040" cy="342900"/>
+          </a:xfrm>
+          <a:prstGeom prst="rect">
+            <a:avLst/>
+          </a:prstGeom>
+          <a:solidFill>
+            <a:schemeClr val="bg1">
+              <a:alpha val="95000"/>
+            </a:schemeClr>
+          </a:solidFill>
+          <a:ln>
+            <a:noFill/>
+          </a:ln>
+        </p:spPr>
+        <p:style>
+          <a:lnRef idx="2">
+            <a:schemeClr val="accent1">
+              <a:shade val="15000"/>
+            </a:schemeClr>
+          </a:lnRef>
+          <a:fillRef idx="1">
+            <a:schemeClr val="accent1"/>
+          </a:fillRef>
+          <a:effectRef idx="0">
+            <a:schemeClr val="accent1"/>
+          </a:effectRef>
+          <a:fontRef idx="minor">
+            <a:schemeClr val="lt1"/>
+          </a:fontRef>
+        </p:style>
+        <p:txBody>
+          <a:bodyPr rtlCol="0" anchor="ctr"/>
+          <a:lstStyle/>
+          <a:p>
+            <a:pPr algn="ctr"/>
+            <a:endParaRPr kumimoji="1" lang="ja-JP" altLang="en-US"/>
+          </a:p>
+        </p:txBody>
+      </p:sp>
+    </p:spTree>
+    <p:extLst>
+      <p:ext uri="{BB962C8B-B14F-4D97-AF65-F5344CB8AC3E}">
+        <p14:creationId xmlns:p14="http://schemas.microsoft.com/office/powerpoint/2010/main" val="3996539766"/>
+      </p:ext>
+    </p:extLst>
+  </p:cSld>
+  <p:clrMapOvr>
+    <a:masterClrMapping/>
+  </p:clrMapOvr>
+</p:sld>
+</file>
+
+<file path=ppt/slides/slide14.xml><?xml version="1.0" encoding="utf-8"?>
+<p:sld xmlns:a="http://schemas.openxmlformats.org/drawingml/2006/main" xmlns:r="http://schemas.openxmlformats.org/officeDocument/2006/relationships" xmlns:p="http://schemas.openxmlformats.org/presentationml/2006/main">
+  <p:cSld>
+    <p:spTree>
+      <p:nvGrpSpPr>
+        <p:cNvPr id="1" name="">
+          <a:extLst>
+            <a:ext uri="{FF2B5EF4-FFF2-40B4-BE49-F238E27FC236}">
+              <a16:creationId xmlns:a16="http://schemas.microsoft.com/office/drawing/2014/main" id="{59702C57-8D17-B65B-87F9-21B34C720FE3}"/>
+            </a:ext>
+          </a:extLst>
+        </p:cNvPr>
+        <p:cNvGrpSpPr/>
+        <p:nvPr/>
+      </p:nvGrpSpPr>
+      <p:grpSpPr>
+        <a:xfrm>
+          <a:off x="0" y="0"/>
+          <a:ext cx="0" cy="0"/>
+          <a:chOff x="0" y="0"/>
+          <a:chExt cx="0" cy="0"/>
+        </a:xfrm>
+      </p:grpSpPr>
+      <p:sp>
+        <p:nvSpPr>
+          <p:cNvPr id="2" name="スライド番号プレースホルダー 1">
+            <a:extLst>
+              <a:ext uri="{FF2B5EF4-FFF2-40B4-BE49-F238E27FC236}">
+                <a16:creationId xmlns:a16="http://schemas.microsoft.com/office/drawing/2014/main" id="{A7FDA617-C009-92DF-25B1-A7B473194C52}"/>
+              </a:ext>
+            </a:extLst>
+          </p:cNvPr>
+          <p:cNvSpPr>
+            <a:spLocks noGrp="1"/>
+          </p:cNvSpPr>
+          <p:nvPr>
+            <p:ph type="sldNum" sz="quarter" idx="12"/>
+          </p:nvPr>
+        </p:nvSpPr>
+        <p:spPr/>
+        <p:txBody>
+          <a:bodyPr/>
+          <a:lstStyle/>
+          <a:p>
+            <a:fld id="{7A0ED1C7-8A26-48CF-81C0-2A5ADFEC2E18}" type="slidenum">
+              <a:rPr kumimoji="1" lang="ja-JP" altLang="en-US" smtClean="0"/>
+              <a:t>14</a:t>
+            </a:fld>
+            <a:endParaRPr kumimoji="1" lang="ja-JP" altLang="en-US"/>
+          </a:p>
+        </p:txBody>
+      </p:sp>
+      <p:pic>
+        <p:nvPicPr>
+          <p:cNvPr id="4" name="図 3" descr="ダイアグラム">
+            <a:extLst>
+              <a:ext uri="{FF2B5EF4-FFF2-40B4-BE49-F238E27FC236}">
+                <a16:creationId xmlns:a16="http://schemas.microsoft.com/office/drawing/2014/main" id="{5CFF08C7-1639-8D67-ED7B-6DE42A8A5CF0}"/>
+              </a:ext>
+            </a:extLst>
+          </p:cNvPr>
+          <p:cNvPicPr>
+            <a:picLocks noChangeAspect="1"/>
+          </p:cNvPicPr>
+          <p:nvPr/>
+        </p:nvPicPr>
+        <p:blipFill>
+          <a:blip r:embed="rId3">
+            <a:extLst>
+              <a:ext uri="{28A0092B-C50C-407E-A947-70E740481C1C}">
+                <a14:useLocalDpi xmlns:a14="http://schemas.microsoft.com/office/drawing/2010/main" val="0"/>
+              </a:ext>
+            </a:extLst>
+          </a:blip>
+          <a:stretch>
+            <a:fillRect/>
+          </a:stretch>
+        </p:blipFill>
+        <p:spPr>
+          <a:xfrm>
+            <a:off x="-136769" y="-76933"/>
+            <a:ext cx="12465538" cy="7011865"/>
+          </a:xfrm>
+          <a:prstGeom prst="rect">
+            <a:avLst/>
+          </a:prstGeom>
+        </p:spPr>
+      </p:pic>
+      <p:sp>
+        <p:nvSpPr>
+          <p:cNvPr id="3" name="正方形/長方形 2">
+            <a:extLst>
+              <a:ext uri="{FF2B5EF4-FFF2-40B4-BE49-F238E27FC236}">
+                <a16:creationId xmlns:a16="http://schemas.microsoft.com/office/drawing/2014/main" id="{EA286C1C-B811-ABBC-9039-F49B1E7B7BFB}"/>
+              </a:ext>
+            </a:extLst>
+          </p:cNvPr>
+          <p:cNvSpPr/>
+          <p:nvPr/>
+        </p:nvSpPr>
+        <p:spPr>
+          <a:xfrm>
+            <a:off x="-136768" y="-76935"/>
+            <a:ext cx="3531478" cy="4134585"/>
+          </a:xfrm>
+          <a:prstGeom prst="rect">
+            <a:avLst/>
+          </a:prstGeom>
+          <a:solidFill>
+            <a:schemeClr val="bg1">
+              <a:alpha val="95000"/>
+            </a:schemeClr>
+          </a:solidFill>
+          <a:ln>
+            <a:noFill/>
+          </a:ln>
+        </p:spPr>
+        <p:style>
+          <a:lnRef idx="2">
+            <a:schemeClr val="accent1">
+              <a:shade val="15000"/>
+            </a:schemeClr>
+          </a:lnRef>
+          <a:fillRef idx="1">
+            <a:schemeClr val="accent1"/>
+          </a:fillRef>
+          <a:effectRef idx="0">
+            <a:schemeClr val="accent1"/>
+          </a:effectRef>
+          <a:fontRef idx="minor">
+            <a:schemeClr val="lt1"/>
+          </a:fontRef>
+        </p:style>
+        <p:txBody>
+          <a:bodyPr rtlCol="0" anchor="ctr"/>
+          <a:lstStyle/>
+          <a:p>
+            <a:pPr algn="ctr"/>
+            <a:endParaRPr kumimoji="1" lang="ja-JP" altLang="en-US"/>
+          </a:p>
+        </p:txBody>
+      </p:sp>
+      <p:sp>
+        <p:nvSpPr>
+          <p:cNvPr id="6" name="正方形/長方形 5">
+            <a:extLst>
+              <a:ext uri="{FF2B5EF4-FFF2-40B4-BE49-F238E27FC236}">
+                <a16:creationId xmlns:a16="http://schemas.microsoft.com/office/drawing/2014/main" id="{3E0C4D18-F561-9F1C-E7C2-D65DC4968609}"/>
+              </a:ext>
+            </a:extLst>
+          </p:cNvPr>
+          <p:cNvSpPr/>
+          <p:nvPr/>
+        </p:nvSpPr>
+        <p:spPr>
+          <a:xfrm>
+            <a:off x="6446520" y="4057651"/>
+            <a:ext cx="5882248" cy="2877282"/>
+          </a:xfrm>
+          <a:prstGeom prst="rect">
+            <a:avLst/>
+          </a:prstGeom>
+          <a:solidFill>
+            <a:schemeClr val="bg1">
+              <a:alpha val="95000"/>
+            </a:schemeClr>
+          </a:solidFill>
+          <a:ln>
+            <a:noFill/>
+          </a:ln>
+        </p:spPr>
+        <p:style>
+          <a:lnRef idx="2">
+            <a:schemeClr val="accent1">
+              <a:shade val="15000"/>
+            </a:schemeClr>
+          </a:lnRef>
+          <a:fillRef idx="1">
+            <a:schemeClr val="accent1"/>
+          </a:fillRef>
+          <a:effectRef idx="0">
+            <a:schemeClr val="accent1"/>
+          </a:effectRef>
+          <a:fontRef idx="minor">
+            <a:schemeClr val="lt1"/>
+          </a:fontRef>
+        </p:style>
+        <p:txBody>
+          <a:bodyPr rtlCol="0" anchor="ctr"/>
+          <a:lstStyle/>
+          <a:p>
+            <a:pPr algn="ctr"/>
+            <a:endParaRPr kumimoji="1" lang="ja-JP" altLang="en-US"/>
+          </a:p>
+        </p:txBody>
+      </p:sp>
+      <p:sp>
+        <p:nvSpPr>
+          <p:cNvPr id="7" name="正方形/長方形 6">
+            <a:extLst>
+              <a:ext uri="{FF2B5EF4-FFF2-40B4-BE49-F238E27FC236}">
+                <a16:creationId xmlns:a16="http://schemas.microsoft.com/office/drawing/2014/main" id="{E313BC4C-63DD-8953-2378-C106324E7D14}"/>
+              </a:ext>
+            </a:extLst>
+          </p:cNvPr>
+          <p:cNvSpPr/>
+          <p:nvPr/>
+        </p:nvSpPr>
+        <p:spPr>
+          <a:xfrm>
+            <a:off x="3394709" y="-76933"/>
+            <a:ext cx="8934059" cy="4134584"/>
+          </a:xfrm>
+          <a:prstGeom prst="rect">
+            <a:avLst/>
+          </a:prstGeom>
+          <a:solidFill>
+            <a:schemeClr val="bg1">
+              <a:alpha val="95000"/>
+            </a:schemeClr>
+          </a:solidFill>
+          <a:ln>
+            <a:noFill/>
+          </a:ln>
+        </p:spPr>
+        <p:style>
+          <a:lnRef idx="2">
+            <a:schemeClr val="accent1">
+              <a:shade val="15000"/>
+            </a:schemeClr>
+          </a:lnRef>
+          <a:fillRef idx="1">
+            <a:schemeClr val="accent1"/>
+          </a:fillRef>
+          <a:effectRef idx="0">
+            <a:schemeClr val="accent1"/>
+          </a:effectRef>
+          <a:fontRef idx="minor">
+            <a:schemeClr val="lt1"/>
+          </a:fontRef>
+        </p:style>
+        <p:txBody>
+          <a:bodyPr rtlCol="0" anchor="ctr"/>
+          <a:lstStyle/>
+          <a:p>
+            <a:pPr algn="ctr"/>
+            <a:endParaRPr kumimoji="1" lang="ja-JP" altLang="en-US"/>
+          </a:p>
+        </p:txBody>
+      </p:sp>
+      <p:sp>
+        <p:nvSpPr>
+          <p:cNvPr id="8" name="正方形/長方形 7">
+            <a:extLst>
+              <a:ext uri="{FF2B5EF4-FFF2-40B4-BE49-F238E27FC236}">
+                <a16:creationId xmlns:a16="http://schemas.microsoft.com/office/drawing/2014/main" id="{8445BC23-70E4-DB04-7819-15E86BEC5F0C}"/>
+              </a:ext>
+            </a:extLst>
+          </p:cNvPr>
+          <p:cNvSpPr/>
+          <p:nvPr/>
+        </p:nvSpPr>
+        <p:spPr>
+          <a:xfrm>
+            <a:off x="3394710" y="3200400"/>
+            <a:ext cx="2606040" cy="342900"/>
+          </a:xfrm>
+          <a:prstGeom prst="rect">
+            <a:avLst/>
+          </a:prstGeom>
+          <a:solidFill>
+            <a:schemeClr val="bg1">
+              <a:alpha val="95000"/>
+            </a:schemeClr>
+          </a:solidFill>
+          <a:ln>
+            <a:noFill/>
+          </a:ln>
+        </p:spPr>
+        <p:style>
+          <a:lnRef idx="2">
+            <a:schemeClr val="accent1">
+              <a:shade val="15000"/>
+            </a:schemeClr>
+          </a:lnRef>
+          <a:fillRef idx="1">
+            <a:schemeClr val="accent1"/>
+          </a:fillRef>
+          <a:effectRef idx="0">
+            <a:schemeClr val="accent1"/>
+          </a:effectRef>
+          <a:fontRef idx="minor">
+            <a:schemeClr val="lt1"/>
+          </a:fontRef>
+        </p:style>
+        <p:txBody>
+          <a:bodyPr rtlCol="0" anchor="ctr"/>
+          <a:lstStyle/>
+          <a:p>
+            <a:pPr algn="ctr"/>
+            <a:endParaRPr kumimoji="1" lang="ja-JP" altLang="en-US"/>
+          </a:p>
+        </p:txBody>
+      </p:sp>
+      <p:sp>
+        <p:nvSpPr>
+          <p:cNvPr id="5" name="正方形/長方形 4">
+            <a:extLst>
+              <a:ext uri="{FF2B5EF4-FFF2-40B4-BE49-F238E27FC236}">
+                <a16:creationId xmlns:a16="http://schemas.microsoft.com/office/drawing/2014/main" id="{09DDB9A0-0363-D245-4536-F636689C4F18}"/>
+              </a:ext>
+            </a:extLst>
+          </p:cNvPr>
+          <p:cNvSpPr/>
+          <p:nvPr/>
+        </p:nvSpPr>
+        <p:spPr>
+          <a:xfrm>
+            <a:off x="3257549" y="4057650"/>
+            <a:ext cx="3188969" cy="342900"/>
+          </a:xfrm>
+          <a:prstGeom prst="rect">
+            <a:avLst/>
+          </a:prstGeom>
+          <a:solidFill>
+            <a:schemeClr val="bg1">
+              <a:alpha val="95000"/>
+            </a:schemeClr>
+          </a:solidFill>
+          <a:ln>
+            <a:noFill/>
+          </a:ln>
+        </p:spPr>
+        <p:style>
+          <a:lnRef idx="2">
+            <a:schemeClr val="accent1">
+              <a:shade val="15000"/>
+            </a:schemeClr>
+          </a:lnRef>
+          <a:fillRef idx="1">
+            <a:schemeClr val="accent1"/>
+          </a:fillRef>
+          <a:effectRef idx="0">
+            <a:schemeClr val="accent1"/>
+          </a:effectRef>
+          <a:fontRef idx="minor">
+            <a:schemeClr val="lt1"/>
+          </a:fontRef>
+        </p:style>
+        <p:txBody>
+          <a:bodyPr rtlCol="0" anchor="ctr"/>
+          <a:lstStyle/>
+          <a:p>
+            <a:pPr algn="ctr"/>
+            <a:endParaRPr kumimoji="1" lang="ja-JP" altLang="en-US"/>
+          </a:p>
+        </p:txBody>
+      </p:sp>
+    </p:spTree>
+    <p:extLst>
+      <p:ext uri="{BB962C8B-B14F-4D97-AF65-F5344CB8AC3E}">
+        <p14:creationId xmlns:p14="http://schemas.microsoft.com/office/powerpoint/2010/main" val="505841242"/>
+      </p:ext>
+    </p:extLst>
+  </p:cSld>
+  <p:clrMapOvr>
+    <a:masterClrMapping/>
+  </p:clrMapOvr>
+</p:sld>
+</file>
+
+<file path=ppt/slides/slide15.xml><?xml version="1.0" encoding="utf-8"?>
+<p:sld xmlns:a="http://schemas.openxmlformats.org/drawingml/2006/main" xmlns:r="http://schemas.openxmlformats.org/officeDocument/2006/relationships" xmlns:p="http://schemas.openxmlformats.org/presentationml/2006/main">
+  <p:cSld>
+    <p:spTree>
+      <p:nvGrpSpPr>
+        <p:cNvPr id="1" name="">
+          <a:extLst>
+            <a:ext uri="{FF2B5EF4-FFF2-40B4-BE49-F238E27FC236}">
+              <a16:creationId xmlns:a16="http://schemas.microsoft.com/office/drawing/2014/main" id="{CD8799AC-A455-458E-DD6B-1A42C922C14B}"/>
+            </a:ext>
+          </a:extLst>
+        </p:cNvPr>
+        <p:cNvGrpSpPr/>
+        <p:nvPr/>
+      </p:nvGrpSpPr>
+      <p:grpSpPr>
+        <a:xfrm>
+          <a:off x="0" y="0"/>
+          <a:ext cx="0" cy="0"/>
+          <a:chOff x="0" y="0"/>
+          <a:chExt cx="0" cy="0"/>
+        </a:xfrm>
+      </p:grpSpPr>
+      <p:sp>
+        <p:nvSpPr>
+          <p:cNvPr id="2" name="スライド番号プレースホルダー 1">
+            <a:extLst>
+              <a:ext uri="{FF2B5EF4-FFF2-40B4-BE49-F238E27FC236}">
+                <a16:creationId xmlns:a16="http://schemas.microsoft.com/office/drawing/2014/main" id="{D4A60C57-F94A-DA8C-3099-476406B403C8}"/>
+              </a:ext>
+            </a:extLst>
+          </p:cNvPr>
+          <p:cNvSpPr>
+            <a:spLocks noGrp="1"/>
+          </p:cNvSpPr>
+          <p:nvPr>
+            <p:ph type="sldNum" sz="quarter" idx="12"/>
+          </p:nvPr>
+        </p:nvSpPr>
+        <p:spPr/>
+        <p:txBody>
+          <a:bodyPr/>
+          <a:lstStyle/>
+          <a:p>
+            <a:fld id="{7A0ED1C7-8A26-48CF-81C0-2A5ADFEC2E18}" type="slidenum">
+              <a:rPr kumimoji="1" lang="ja-JP" altLang="en-US" smtClean="0"/>
+              <a:t>15</a:t>
+            </a:fld>
+            <a:endParaRPr kumimoji="1" lang="ja-JP" altLang="en-US"/>
+          </a:p>
+        </p:txBody>
+      </p:sp>
+      <p:pic>
+        <p:nvPicPr>
+          <p:cNvPr id="4" name="図 3" descr="ダイアグラム">
+            <a:extLst>
+              <a:ext uri="{FF2B5EF4-FFF2-40B4-BE49-F238E27FC236}">
+                <a16:creationId xmlns:a16="http://schemas.microsoft.com/office/drawing/2014/main" id="{2C0029F0-0999-A6B4-9838-BD5217EEA187}"/>
+              </a:ext>
+            </a:extLst>
+          </p:cNvPr>
+          <p:cNvPicPr>
+            <a:picLocks noChangeAspect="1"/>
+          </p:cNvPicPr>
+          <p:nvPr/>
+        </p:nvPicPr>
+        <p:blipFill>
+          <a:blip r:embed="rId3">
+            <a:extLst>
+              <a:ext uri="{28A0092B-C50C-407E-A947-70E740481C1C}">
+                <a14:useLocalDpi xmlns:a14="http://schemas.microsoft.com/office/drawing/2010/main" val="0"/>
+              </a:ext>
+            </a:extLst>
+          </a:blip>
+          <a:stretch>
+            <a:fillRect/>
+          </a:stretch>
+        </p:blipFill>
+        <p:spPr>
+          <a:xfrm>
+            <a:off x="-136769" y="-76933"/>
+            <a:ext cx="12465538" cy="7011865"/>
+          </a:xfrm>
+          <a:prstGeom prst="rect">
+            <a:avLst/>
+          </a:prstGeom>
+        </p:spPr>
+      </p:pic>
+      <p:sp>
+        <p:nvSpPr>
+          <p:cNvPr id="3" name="正方形/長方形 2">
+            <a:extLst>
+              <a:ext uri="{FF2B5EF4-FFF2-40B4-BE49-F238E27FC236}">
+                <a16:creationId xmlns:a16="http://schemas.microsoft.com/office/drawing/2014/main" id="{CF8D18B5-650D-F757-3671-2C46998901DD}"/>
+              </a:ext>
+            </a:extLst>
+          </p:cNvPr>
+          <p:cNvSpPr/>
+          <p:nvPr/>
+        </p:nvSpPr>
+        <p:spPr>
+          <a:xfrm>
+            <a:off x="-136768" y="-76935"/>
+            <a:ext cx="3531478" cy="7011865"/>
+          </a:xfrm>
+          <a:prstGeom prst="rect">
+            <a:avLst/>
+          </a:prstGeom>
+          <a:solidFill>
+            <a:schemeClr val="bg1">
+              <a:alpha val="95000"/>
+            </a:schemeClr>
+          </a:solidFill>
+          <a:ln>
+            <a:noFill/>
+          </a:ln>
+        </p:spPr>
+        <p:style>
+          <a:lnRef idx="2">
+            <a:schemeClr val="accent1">
+              <a:shade val="15000"/>
+            </a:schemeClr>
+          </a:lnRef>
+          <a:fillRef idx="1">
+            <a:schemeClr val="accent1"/>
+          </a:fillRef>
+          <a:effectRef idx="0">
+            <a:schemeClr val="accent1"/>
+          </a:effectRef>
+          <a:fontRef idx="minor">
+            <a:schemeClr val="lt1"/>
+          </a:fontRef>
+        </p:style>
+        <p:txBody>
+          <a:bodyPr rtlCol="0" anchor="ctr"/>
+          <a:lstStyle/>
+          <a:p>
+            <a:pPr algn="ctr"/>
+            <a:endParaRPr kumimoji="1" lang="ja-JP" altLang="en-US"/>
+          </a:p>
+        </p:txBody>
+      </p:sp>
+      <p:sp>
+        <p:nvSpPr>
+          <p:cNvPr id="6" name="正方形/長方形 5">
+            <a:extLst>
+              <a:ext uri="{FF2B5EF4-FFF2-40B4-BE49-F238E27FC236}">
+                <a16:creationId xmlns:a16="http://schemas.microsoft.com/office/drawing/2014/main" id="{4174EDF6-546D-D6CE-46F1-ED4377E152ED}"/>
+              </a:ext>
+            </a:extLst>
+          </p:cNvPr>
+          <p:cNvSpPr/>
+          <p:nvPr/>
+        </p:nvSpPr>
+        <p:spPr>
+          <a:xfrm>
+            <a:off x="10675088" y="4057651"/>
+            <a:ext cx="1653680" cy="2877282"/>
+          </a:xfrm>
+          <a:prstGeom prst="rect">
+            <a:avLst/>
+          </a:prstGeom>
+          <a:solidFill>
+            <a:schemeClr val="bg1">
+              <a:alpha val="95000"/>
+            </a:schemeClr>
+          </a:solidFill>
+          <a:ln>
+            <a:noFill/>
+          </a:ln>
+        </p:spPr>
+        <p:style>
+          <a:lnRef idx="2">
+            <a:schemeClr val="accent1">
+              <a:shade val="15000"/>
+            </a:schemeClr>
+          </a:lnRef>
+          <a:fillRef idx="1">
+            <a:schemeClr val="accent1"/>
+          </a:fillRef>
+          <a:effectRef idx="0">
+            <a:schemeClr val="accent1"/>
+          </a:effectRef>
+          <a:fontRef idx="minor">
+            <a:schemeClr val="lt1"/>
+          </a:fontRef>
+        </p:style>
+        <p:txBody>
+          <a:bodyPr rtlCol="0" anchor="ctr"/>
+          <a:lstStyle/>
+          <a:p>
+            <a:pPr algn="ctr"/>
+            <a:endParaRPr kumimoji="1" lang="ja-JP" altLang="en-US"/>
+          </a:p>
+        </p:txBody>
+      </p:sp>
+      <p:sp>
+        <p:nvSpPr>
+          <p:cNvPr id="7" name="正方形/長方形 6">
+            <a:extLst>
+              <a:ext uri="{FF2B5EF4-FFF2-40B4-BE49-F238E27FC236}">
+                <a16:creationId xmlns:a16="http://schemas.microsoft.com/office/drawing/2014/main" id="{1F05A4D8-391C-9E29-705B-ABB4F79FB9A5}"/>
+              </a:ext>
+            </a:extLst>
+          </p:cNvPr>
+          <p:cNvSpPr/>
+          <p:nvPr/>
+        </p:nvSpPr>
+        <p:spPr>
+          <a:xfrm>
+            <a:off x="3394710" y="-76933"/>
+            <a:ext cx="3358036" cy="4134584"/>
+          </a:xfrm>
+          <a:prstGeom prst="rect">
+            <a:avLst/>
+          </a:prstGeom>
+          <a:solidFill>
+            <a:schemeClr val="bg1">
+              <a:alpha val="95000"/>
+            </a:schemeClr>
+          </a:solidFill>
+          <a:ln>
+            <a:noFill/>
+          </a:ln>
+        </p:spPr>
+        <p:style>
+          <a:lnRef idx="2">
+            <a:schemeClr val="accent1">
+              <a:shade val="15000"/>
+            </a:schemeClr>
+          </a:lnRef>
+          <a:fillRef idx="1">
+            <a:schemeClr val="accent1"/>
+          </a:fillRef>
+          <a:effectRef idx="0">
+            <a:schemeClr val="accent1"/>
+          </a:effectRef>
+          <a:fontRef idx="minor">
+            <a:schemeClr val="lt1"/>
+          </a:fontRef>
+        </p:style>
+        <p:txBody>
+          <a:bodyPr rtlCol="0" anchor="ctr"/>
+          <a:lstStyle/>
+          <a:p>
+            <a:pPr algn="ctr"/>
+            <a:endParaRPr kumimoji="1" lang="ja-JP" altLang="en-US"/>
+          </a:p>
+        </p:txBody>
+      </p:sp>
+      <p:sp>
+        <p:nvSpPr>
+          <p:cNvPr id="8" name="正方形/長方形 7">
+            <a:extLst>
+              <a:ext uri="{FF2B5EF4-FFF2-40B4-BE49-F238E27FC236}">
+                <a16:creationId xmlns:a16="http://schemas.microsoft.com/office/drawing/2014/main" id="{80B10DF5-A0DF-C311-9DA1-1750CDD7B532}"/>
+              </a:ext>
+            </a:extLst>
+          </p:cNvPr>
+          <p:cNvSpPr/>
+          <p:nvPr/>
+        </p:nvSpPr>
+        <p:spPr>
+          <a:xfrm>
+            <a:off x="3394710" y="3200400"/>
+            <a:ext cx="2606040" cy="342900"/>
+          </a:xfrm>
+          <a:prstGeom prst="rect">
+            <a:avLst/>
+          </a:prstGeom>
+          <a:solidFill>
+            <a:schemeClr val="bg1">
+              <a:alpha val="95000"/>
+            </a:schemeClr>
+          </a:solidFill>
+          <a:ln>
+            <a:noFill/>
+          </a:ln>
+        </p:spPr>
+        <p:style>
+          <a:lnRef idx="2">
+            <a:schemeClr val="accent1">
+              <a:shade val="15000"/>
+            </a:schemeClr>
+          </a:lnRef>
+          <a:fillRef idx="1">
+            <a:schemeClr val="accent1"/>
+          </a:fillRef>
+          <a:effectRef idx="0">
+            <a:schemeClr val="accent1"/>
+          </a:effectRef>
+          <a:fontRef idx="minor">
+            <a:schemeClr val="lt1"/>
+          </a:fontRef>
+        </p:style>
+        <p:txBody>
+          <a:bodyPr rtlCol="0" anchor="ctr"/>
+          <a:lstStyle/>
+          <a:p>
+            <a:pPr algn="ctr"/>
+            <a:endParaRPr kumimoji="1" lang="ja-JP" altLang="en-US"/>
+          </a:p>
+        </p:txBody>
+      </p:sp>
+      <p:sp>
+        <p:nvSpPr>
+          <p:cNvPr id="5" name="正方形/長方形 4">
+            <a:extLst>
+              <a:ext uri="{FF2B5EF4-FFF2-40B4-BE49-F238E27FC236}">
+                <a16:creationId xmlns:a16="http://schemas.microsoft.com/office/drawing/2014/main" id="{7C75B0B3-FE24-F0FE-6F8F-7FE73C6359BF}"/>
+              </a:ext>
+            </a:extLst>
+          </p:cNvPr>
+          <p:cNvSpPr/>
+          <p:nvPr/>
+        </p:nvSpPr>
+        <p:spPr>
+          <a:xfrm>
+            <a:off x="3394709" y="4057650"/>
+            <a:ext cx="3051809" cy="342900"/>
+          </a:xfrm>
+          <a:prstGeom prst="rect">
+            <a:avLst/>
+          </a:prstGeom>
+          <a:solidFill>
+            <a:schemeClr val="bg1">
+              <a:alpha val="95000"/>
+            </a:schemeClr>
+          </a:solidFill>
+          <a:ln>
+            <a:noFill/>
+          </a:ln>
+        </p:spPr>
+        <p:style>
+          <a:lnRef idx="2">
+            <a:schemeClr val="accent1">
+              <a:shade val="15000"/>
+            </a:schemeClr>
+          </a:lnRef>
+          <a:fillRef idx="1">
+            <a:schemeClr val="accent1"/>
+          </a:fillRef>
+          <a:effectRef idx="0">
+            <a:schemeClr val="accent1"/>
+          </a:effectRef>
+          <a:fontRef idx="minor">
+            <a:schemeClr val="lt1"/>
+          </a:fontRef>
+        </p:style>
+        <p:txBody>
+          <a:bodyPr rtlCol="0" anchor="ctr"/>
+          <a:lstStyle/>
+          <a:p>
+            <a:pPr algn="ctr"/>
+            <a:endParaRPr kumimoji="1" lang="ja-JP" altLang="en-US"/>
+          </a:p>
+        </p:txBody>
+      </p:sp>
+      <p:sp>
+        <p:nvSpPr>
+          <p:cNvPr id="9" name="正方形/長方形 8">
+            <a:extLst>
+              <a:ext uri="{FF2B5EF4-FFF2-40B4-BE49-F238E27FC236}">
+                <a16:creationId xmlns:a16="http://schemas.microsoft.com/office/drawing/2014/main" id="{5CFB8036-61F8-4E03-671C-54C2804C8E75}"/>
+              </a:ext>
+            </a:extLst>
+          </p:cNvPr>
+          <p:cNvSpPr/>
+          <p:nvPr/>
+        </p:nvSpPr>
+        <p:spPr>
+          <a:xfrm>
+            <a:off x="6752746" y="490654"/>
+            <a:ext cx="499877" cy="2881196"/>
+          </a:xfrm>
+          <a:prstGeom prst="rect">
+            <a:avLst/>
+          </a:prstGeom>
+          <a:solidFill>
+            <a:schemeClr val="bg1">
+              <a:alpha val="95000"/>
+            </a:schemeClr>
+          </a:solidFill>
+          <a:ln>
+            <a:noFill/>
+          </a:ln>
+        </p:spPr>
+        <p:style>
+          <a:lnRef idx="2">
+            <a:schemeClr val="accent1">
+              <a:shade val="15000"/>
+            </a:schemeClr>
+          </a:lnRef>
+          <a:fillRef idx="1">
+            <a:schemeClr val="accent1"/>
+          </a:fillRef>
+          <a:effectRef idx="0">
+            <a:schemeClr val="accent1"/>
+          </a:effectRef>
+          <a:fontRef idx="minor">
+            <a:schemeClr val="lt1"/>
+          </a:fontRef>
+        </p:style>
+        <p:txBody>
+          <a:bodyPr rtlCol="0" anchor="ctr"/>
+          <a:lstStyle/>
+          <a:p>
+            <a:pPr algn="ctr"/>
+            <a:endParaRPr kumimoji="1" lang="ja-JP" altLang="en-US"/>
+          </a:p>
+        </p:txBody>
+      </p:sp>
+      <p:sp>
+        <p:nvSpPr>
+          <p:cNvPr id="10" name="正方形/長方形 9">
+            <a:extLst>
+              <a:ext uri="{FF2B5EF4-FFF2-40B4-BE49-F238E27FC236}">
+                <a16:creationId xmlns:a16="http://schemas.microsoft.com/office/drawing/2014/main" id="{D3BA1700-FC5D-C4E4-312F-AAFFE525F1E9}"/>
+              </a:ext>
+            </a:extLst>
+          </p:cNvPr>
+          <p:cNvSpPr/>
+          <p:nvPr/>
+        </p:nvSpPr>
+        <p:spPr>
+          <a:xfrm>
+            <a:off x="3394707" y="4400550"/>
+            <a:ext cx="274043" cy="2534380"/>
+          </a:xfrm>
+          <a:prstGeom prst="rect">
+            <a:avLst/>
+          </a:prstGeom>
+          <a:solidFill>
+            <a:schemeClr val="bg1">
+              <a:alpha val="95000"/>
+            </a:schemeClr>
+          </a:solidFill>
+          <a:ln>
+            <a:noFill/>
+          </a:ln>
+        </p:spPr>
+        <p:style>
+          <a:lnRef idx="2">
+            <a:schemeClr val="accent1">
+              <a:shade val="15000"/>
+            </a:schemeClr>
+          </a:lnRef>
+          <a:fillRef idx="1">
+            <a:schemeClr val="accent1"/>
+          </a:fillRef>
+          <a:effectRef idx="0">
+            <a:schemeClr val="accent1"/>
+          </a:effectRef>
+          <a:fontRef idx="minor">
+            <a:schemeClr val="lt1"/>
+          </a:fontRef>
+        </p:style>
+        <p:txBody>
+          <a:bodyPr rtlCol="0" anchor="ctr"/>
+          <a:lstStyle/>
+          <a:p>
+            <a:pPr algn="ctr"/>
+            <a:endParaRPr kumimoji="1" lang="ja-JP" altLang="en-US"/>
+          </a:p>
+        </p:txBody>
+      </p:sp>
+      <p:sp>
+        <p:nvSpPr>
+          <p:cNvPr id="11" name="正方形/長方形 10">
+            <a:extLst>
+              <a:ext uri="{FF2B5EF4-FFF2-40B4-BE49-F238E27FC236}">
+                <a16:creationId xmlns:a16="http://schemas.microsoft.com/office/drawing/2014/main" id="{7FD3DB32-B70B-D6DC-B0E3-603339DF3BCC}"/>
+              </a:ext>
+            </a:extLst>
+          </p:cNvPr>
+          <p:cNvSpPr/>
+          <p:nvPr/>
+        </p:nvSpPr>
+        <p:spPr>
+          <a:xfrm>
+            <a:off x="6446518" y="4020219"/>
+            <a:ext cx="4228569" cy="171451"/>
+          </a:xfrm>
+          <a:prstGeom prst="rect">
+            <a:avLst/>
+          </a:prstGeom>
+          <a:solidFill>
+            <a:schemeClr val="bg1">
+              <a:alpha val="95000"/>
+            </a:schemeClr>
+          </a:solidFill>
+          <a:ln>
+            <a:noFill/>
+          </a:ln>
+        </p:spPr>
+        <p:style>
+          <a:lnRef idx="2">
+            <a:schemeClr val="accent1">
+              <a:shade val="15000"/>
+            </a:schemeClr>
+          </a:lnRef>
+          <a:fillRef idx="1">
+            <a:schemeClr val="accent1"/>
+          </a:fillRef>
+          <a:effectRef idx="0">
+            <a:schemeClr val="accent1"/>
+          </a:effectRef>
+          <a:fontRef idx="minor">
+            <a:schemeClr val="lt1"/>
+          </a:fontRef>
+        </p:style>
+        <p:txBody>
+          <a:bodyPr rtlCol="0" anchor="ctr"/>
+          <a:lstStyle/>
+          <a:p>
+            <a:pPr algn="ctr"/>
+            <a:endParaRPr kumimoji="1" lang="ja-JP" altLang="en-US"/>
+          </a:p>
+        </p:txBody>
+      </p:sp>
+    </p:spTree>
+    <p:extLst>
+      <p:ext uri="{BB962C8B-B14F-4D97-AF65-F5344CB8AC3E}">
+        <p14:creationId xmlns:p14="http://schemas.microsoft.com/office/powerpoint/2010/main" val="221311497"/>
+      </p:ext>
+    </p:extLst>
+  </p:cSld>
+  <p:clrMapOvr>
+    <a:masterClrMapping/>
+  </p:clrMapOvr>
+</p:sld>
+</file>
+
+<file path=ppt/slides/slide16.xml><?xml version="1.0" encoding="utf-8"?>
+<p:sld xmlns:a="http://schemas.openxmlformats.org/drawingml/2006/main" xmlns:r="http://schemas.openxmlformats.org/officeDocument/2006/relationships" xmlns:p="http://schemas.openxmlformats.org/presentationml/2006/main">
+  <p:cSld>
+    <p:spTree>
+      <p:nvGrpSpPr>
         <p:cNvPr id="1" name=""/>
         <p:cNvGrpSpPr/>
         <p:nvPr/>
@@ -7246,7 +9954,7 @@
           <p:cNvPr id="2" name="タイトル 1">
             <a:extLst>
               <a:ext uri="{FF2B5EF4-FFF2-40B4-BE49-F238E27FC236}">
-                <a16:creationId xmlns:a16="http://schemas.microsoft.com/office/drawing/2014/main" id="{06246764-42B4-2E7B-9810-175504DFDB8E}"/>
+                <a16:creationId xmlns:a16="http://schemas.microsoft.com/office/drawing/2014/main" id="{2C6ED66C-9339-EF73-CFF8-D2AE60E257E8}"/>
               </a:ext>
             </a:extLst>
           </p:cNvPr>
@@ -7259,25 +9967,141 @@
         </p:nvSpPr>
         <p:spPr/>
         <p:txBody>
-          <a:bodyPr/>
+          <a:bodyPr>
+            <a:normAutofit/>
+          </a:bodyPr>
           <a:lstStyle/>
           <a:p>
             <a:r>
-              <a:rPr kumimoji="1" lang="ja-JP" altLang="en-US" sz="5400" dirty="0"/>
-              <a:t>他</a:t>
-            </a:r>
-            <a:r>
-              <a:rPr kumimoji="1" lang="ja-JP" altLang="en-US" dirty="0"/>
-              <a:t>の</a:t>
-            </a:r>
-            <a:r>
-              <a:rPr kumimoji="1" lang="en-US" altLang="ja-JP" dirty="0"/>
+              <a:rPr kumimoji="1" lang="en-US" altLang="ja-JP" sz="6700" dirty="0"/>
+              <a:t>D</a:t>
+            </a:r>
+            <a:r>
+              <a:rPr kumimoji="1" lang="en-US" altLang="ja-JP" sz="5400" dirty="0"/>
+              <a:t>AWIY</a:t>
+            </a:r>
+            <a:r>
+              <a:rPr kumimoji="1" lang="ja-JP" altLang="en-US" sz="6000" dirty="0"/>
+              <a:t>プラグイン</a:t>
+            </a:r>
+            <a:r>
+              <a:rPr kumimoji="1" lang="ja-JP" altLang="en-US" sz="6600" dirty="0"/>
+              <a:t>①</a:t>
+            </a:r>
+            <a:endParaRPr kumimoji="1" lang="ja-JP" altLang="en-US" sz="5400" dirty="0"/>
+          </a:p>
+        </p:txBody>
+      </p:sp>
+      <p:sp>
+        <p:nvSpPr>
+          <p:cNvPr id="3" name="コンテンツ プレースホルダー 2">
+            <a:extLst>
+              <a:ext uri="{FF2B5EF4-FFF2-40B4-BE49-F238E27FC236}">
+                <a16:creationId xmlns:a16="http://schemas.microsoft.com/office/drawing/2014/main" id="{C4291D80-7378-CA5B-E8D3-D77F7FF5BC88}"/>
+              </a:ext>
+            </a:extLst>
+          </p:cNvPr>
+          <p:cNvSpPr>
+            <a:spLocks noGrp="1"/>
+          </p:cNvSpPr>
+          <p:nvPr>
+            <p:ph idx="1"/>
+          </p:nvPr>
+        </p:nvSpPr>
+        <p:spPr>
+          <a:xfrm>
+            <a:off x="367392" y="1389342"/>
+            <a:ext cx="10095453" cy="3718989"/>
+          </a:xfrm>
+        </p:spPr>
+        <p:txBody>
+          <a:bodyPr>
+            <a:normAutofit/>
+          </a:bodyPr>
+          <a:lstStyle/>
+          <a:p>
+            <a:r>
+              <a:rPr lang="en-US" altLang="ja-JP" sz="3200" dirty="0"/>
+              <a:t>DAW </a:t>
+            </a:r>
+            <a:r>
+              <a:rPr lang="ja-JP" altLang="en-US" sz="3200" dirty="0"/>
+              <a:t>の入出力・</a:t>
+            </a:r>
+            <a:r>
+              <a:rPr lang="en-US" altLang="ja-JP" sz="3200" dirty="0"/>
               <a:t>UI</a:t>
             </a:r>
             <a:r>
-              <a:rPr kumimoji="1" lang="ja-JP" altLang="en-US" dirty="0"/>
-              <a:t>系拡張システムとの比較</a:t>
-            </a:r>
+              <a:rPr lang="ja-JP" altLang="en-US" sz="3200" dirty="0"/>
+              <a:t>・操作等に介入する処理を拡張</a:t>
+            </a:r>
+            <a:endParaRPr lang="en-US" altLang="ja-JP" sz="3200" dirty="0"/>
+          </a:p>
+          <a:p>
+            <a:pPr marL="0" indent="0">
+              <a:buNone/>
+            </a:pPr>
+            <a:endParaRPr lang="en-US" altLang="ja-JP" sz="1200" dirty="0"/>
+          </a:p>
+          <a:p>
+            <a:pPr lvl="1"/>
+            <a:r>
+              <a:rPr kumimoji="1" lang="ja-JP" altLang="en-US" sz="2800" dirty="0"/>
+              <a:t>パッケージマネージャーで管理</a:t>
+            </a:r>
+            <a:endParaRPr kumimoji="1" lang="en-US" altLang="ja-JP" sz="2800" dirty="0"/>
+          </a:p>
+          <a:p>
+            <a:pPr lvl="1"/>
+            <a:r>
+              <a:rPr lang="ja-JP" altLang="en-US" sz="2800" dirty="0"/>
+              <a:t>インストール </a:t>
+            </a:r>
+            <a:r>
+              <a:rPr lang="en-US" altLang="ja-JP" sz="2800" dirty="0"/>
+              <a:t>/ </a:t>
+            </a:r>
+            <a:r>
+              <a:rPr lang="ja-JP" altLang="en-US" sz="2800" dirty="0"/>
+              <a:t>アンイストール</a:t>
+            </a:r>
+            <a:endParaRPr lang="en-US" altLang="ja-JP" sz="2800" dirty="0"/>
+          </a:p>
+          <a:p>
+            <a:pPr lvl="1"/>
+            <a:r>
+              <a:rPr kumimoji="1" lang="ja-JP" altLang="en-US" sz="2800" dirty="0"/>
+              <a:t>有効化 </a:t>
+            </a:r>
+            <a:r>
+              <a:rPr kumimoji="1" lang="en-US" altLang="ja-JP" sz="2800" dirty="0"/>
+              <a:t>/ </a:t>
+            </a:r>
+            <a:r>
+              <a:rPr kumimoji="1" lang="ja-JP" altLang="en-US" sz="2800" dirty="0"/>
+              <a:t>無効化</a:t>
+            </a:r>
+            <a:endParaRPr kumimoji="1" lang="en-US" altLang="ja-JP" sz="2800" dirty="0"/>
+          </a:p>
+          <a:p>
+            <a:pPr lvl="1"/>
+            <a:r>
+              <a:rPr lang="ja-JP" altLang="en-US" sz="2800" dirty="0"/>
+              <a:t>事前にダウンロードした</a:t>
+            </a:r>
+            <a:br>
+              <a:rPr lang="en-US" altLang="ja-JP" sz="2800" dirty="0"/>
+            </a:br>
+            <a:r>
+              <a:rPr lang="en-US" altLang="ja-JP" sz="2800" dirty="0"/>
+              <a:t>zip</a:t>
+            </a:r>
+            <a:r>
+              <a:rPr lang="ja-JP" altLang="en-US" sz="2800" dirty="0"/>
+              <a:t>ファイルの選択も可</a:t>
+            </a:r>
+            <a:endParaRPr kumimoji="1" lang="ja-JP" altLang="en-US" sz="2800" dirty="0"/>
           </a:p>
         </p:txBody>
       </p:sp>
@@ -7286,7 +10110,7 @@
           <p:cNvPr id="4" name="スライド番号プレースホルダー 3">
             <a:extLst>
               <a:ext uri="{FF2B5EF4-FFF2-40B4-BE49-F238E27FC236}">
-                <a16:creationId xmlns:a16="http://schemas.microsoft.com/office/drawing/2014/main" id="{8FBF7E72-3660-1714-56C3-E610E2A6CB3A}"/>
+                <a16:creationId xmlns:a16="http://schemas.microsoft.com/office/drawing/2014/main" id="{B02C7EEE-236D-04B8-76AD-A10E01D79565}"/>
               </a:ext>
             </a:extLst>
           </p:cNvPr>
@@ -7305,7 +10129,7 @@
             <a:fld id="{7A0ED1C7-8A26-48CF-81C0-2A5ADFEC2E18}" type="slidenum">
               <a:rPr lang="ja-JP" altLang="en-US" smtClean="0"/>
               <a:pPr/>
-              <a:t>10</a:t>
+              <a:t>16</a:t>
             </a:fld>
             <a:endParaRPr lang="ja-JP" altLang="en-US" dirty="0">
               <a:solidFill>
@@ -7315,188 +10139,48 @@
           </a:p>
         </p:txBody>
       </p:sp>
-      <p:cxnSp>
-        <p:nvCxnSpPr>
-          <p:cNvPr id="6" name="直線コネクタ 5">
-            <a:extLst>
-              <a:ext uri="{FF2B5EF4-FFF2-40B4-BE49-F238E27FC236}">
-                <a16:creationId xmlns:a16="http://schemas.microsoft.com/office/drawing/2014/main" id="{39E006CF-1CF5-4CEA-A653-08E3175BD5EC}"/>
-              </a:ext>
-            </a:extLst>
-          </p:cNvPr>
-          <p:cNvCxnSpPr>
-            <a:cxnSpLocks/>
-          </p:cNvCxnSpPr>
+      <p:pic>
+        <p:nvPicPr>
+          <p:cNvPr id="6" name="図 5" descr="グラフィカル ユーザー インターフェイス, テキスト, アプリケーション, チャットまたはテキスト メッセージ&#10;&#10;AI 生成コンテンツは誤りを含む可能性があります。">
+            <a:extLst>
+              <a:ext uri="{FF2B5EF4-FFF2-40B4-BE49-F238E27FC236}">
+                <a16:creationId xmlns:a16="http://schemas.microsoft.com/office/drawing/2014/main" id="{64D0E1AE-DCC7-6A5D-350F-17E560A04861}"/>
+              </a:ext>
+            </a:extLst>
+          </p:cNvPr>
+          <p:cNvPicPr>
+            <a:picLocks noChangeAspect="1"/>
+          </p:cNvPicPr>
           <p:nvPr/>
-        </p:nvCxnSpPr>
+        </p:nvPicPr>
+        <p:blipFill>
+          <a:blip r:embed="rId2">
+            <a:extLst>
+              <a:ext uri="{28A0092B-C50C-407E-A947-70E740481C1C}">
+                <a14:useLocalDpi xmlns:a14="http://schemas.microsoft.com/office/drawing/2010/main" val="0"/>
+              </a:ext>
+            </a:extLst>
+          </a:blip>
+          <a:stretch>
+            <a:fillRect/>
+          </a:stretch>
+        </p:blipFill>
         <p:spPr>
           <a:xfrm>
-            <a:off x="6078110" y="1421296"/>
-            <a:ext cx="0" cy="4919869"/>
+            <a:off x="6580190" y="1980108"/>
+            <a:ext cx="5244418" cy="4435094"/>
           </a:xfrm>
-          <a:prstGeom prst="line">
+          <a:prstGeom prst="rect">
             <a:avLst/>
           </a:prstGeom>
-          <a:ln w="76200" cap="rnd">
-            <a:solidFill>
-              <a:schemeClr val="tx1"/>
-            </a:solidFill>
-            <a:round/>
-          </a:ln>
         </p:spPr>
-        <p:style>
-          <a:lnRef idx="2">
-            <a:schemeClr val="accent1"/>
-          </a:lnRef>
-          <a:fillRef idx="0">
-            <a:schemeClr val="accent1"/>
-          </a:fillRef>
-          <a:effectRef idx="1">
-            <a:schemeClr val="accent1"/>
-          </a:effectRef>
-          <a:fontRef idx="minor">
-            <a:schemeClr val="tx1"/>
-          </a:fontRef>
-        </p:style>
-      </p:cxnSp>
-      <p:cxnSp>
-        <p:nvCxnSpPr>
-          <p:cNvPr id="8" name="直線コネクタ 7">
-            <a:extLst>
-              <a:ext uri="{FF2B5EF4-FFF2-40B4-BE49-F238E27FC236}">
-                <a16:creationId xmlns:a16="http://schemas.microsoft.com/office/drawing/2014/main" id="{CDF6C995-9621-4761-9F1D-D8E8D3E93116}"/>
-              </a:ext>
-            </a:extLst>
-          </p:cNvPr>
-          <p:cNvCxnSpPr>
-            <a:cxnSpLocks/>
-          </p:cNvCxnSpPr>
-          <p:nvPr/>
-        </p:nvCxnSpPr>
-        <p:spPr>
-          <a:xfrm>
-            <a:off x="655983" y="1977888"/>
-            <a:ext cx="10774017" cy="0"/>
-          </a:xfrm>
-          <a:prstGeom prst="line">
-            <a:avLst/>
-          </a:prstGeom>
-          <a:ln w="76200" cap="rnd">
-            <a:solidFill>
-              <a:schemeClr val="tx1"/>
-            </a:solidFill>
-            <a:round/>
-          </a:ln>
-        </p:spPr>
-        <p:style>
-          <a:lnRef idx="2">
-            <a:schemeClr val="accent1"/>
-          </a:lnRef>
-          <a:fillRef idx="0">
-            <a:schemeClr val="accent1"/>
-          </a:fillRef>
-          <a:effectRef idx="1">
-            <a:schemeClr val="accent1"/>
-          </a:effectRef>
-          <a:fontRef idx="minor">
-            <a:schemeClr val="tx1"/>
-          </a:fontRef>
-        </p:style>
-      </p:cxnSp>
-      <p:cxnSp>
-        <p:nvCxnSpPr>
-          <p:cNvPr id="15" name="直線コネクタ 14">
-            <a:extLst>
-              <a:ext uri="{FF2B5EF4-FFF2-40B4-BE49-F238E27FC236}">
-                <a16:creationId xmlns:a16="http://schemas.microsoft.com/office/drawing/2014/main" id="{6B22E70B-D21C-861B-6697-AF483F80C076}"/>
-              </a:ext>
-            </a:extLst>
-          </p:cNvPr>
-          <p:cNvCxnSpPr>
-            <a:cxnSpLocks/>
-          </p:cNvCxnSpPr>
-          <p:nvPr/>
-        </p:nvCxnSpPr>
-        <p:spPr>
-          <a:xfrm>
-            <a:off x="3245458" y="1421296"/>
-            <a:ext cx="0" cy="4919869"/>
-          </a:xfrm>
-          <a:prstGeom prst="line">
-            <a:avLst/>
-          </a:prstGeom>
-          <a:ln w="76200" cap="rnd">
-            <a:solidFill>
-              <a:schemeClr val="tx1"/>
-            </a:solidFill>
-            <a:round/>
-          </a:ln>
-        </p:spPr>
-        <p:style>
-          <a:lnRef idx="2">
-            <a:schemeClr val="accent1"/>
-          </a:lnRef>
-          <a:fillRef idx="0">
-            <a:schemeClr val="accent1"/>
-          </a:fillRef>
-          <a:effectRef idx="1">
-            <a:schemeClr val="accent1"/>
-          </a:effectRef>
-          <a:fontRef idx="minor">
-            <a:schemeClr val="tx1"/>
-          </a:fontRef>
-        </p:style>
-      </p:cxnSp>
-      <p:cxnSp>
-        <p:nvCxnSpPr>
-          <p:cNvPr id="16" name="直線コネクタ 15">
-            <a:extLst>
-              <a:ext uri="{FF2B5EF4-FFF2-40B4-BE49-F238E27FC236}">
-                <a16:creationId xmlns:a16="http://schemas.microsoft.com/office/drawing/2014/main" id="{9AD5BC08-15C7-371B-C821-A1550425F104}"/>
-              </a:ext>
-            </a:extLst>
-          </p:cNvPr>
-          <p:cNvCxnSpPr>
-            <a:cxnSpLocks/>
-          </p:cNvCxnSpPr>
-          <p:nvPr/>
-        </p:nvCxnSpPr>
-        <p:spPr>
-          <a:xfrm>
-            <a:off x="8880945" y="1421296"/>
-            <a:ext cx="0" cy="4919869"/>
-          </a:xfrm>
-          <a:prstGeom prst="line">
-            <a:avLst/>
-          </a:prstGeom>
-          <a:ln w="76200" cap="rnd">
-            <a:solidFill>
-              <a:schemeClr val="tx1"/>
-            </a:solidFill>
-            <a:round/>
-          </a:ln>
-        </p:spPr>
-        <p:style>
-          <a:lnRef idx="2">
-            <a:schemeClr val="accent1"/>
-          </a:lnRef>
-          <a:fillRef idx="0">
-            <a:schemeClr val="accent1"/>
-          </a:fillRef>
-          <a:effectRef idx="1">
-            <a:schemeClr val="accent1"/>
-          </a:effectRef>
-          <a:fontRef idx="minor">
-            <a:schemeClr val="tx1"/>
-          </a:fontRef>
-        </p:style>
-      </p:cxnSp>
+      </p:pic>
       <p:sp>
         <p:nvSpPr>
-          <p:cNvPr id="19" name="テキスト ボックス 18">
-            <a:extLst>
-              <a:ext uri="{FF2B5EF4-FFF2-40B4-BE49-F238E27FC236}">
-                <a16:creationId xmlns:a16="http://schemas.microsoft.com/office/drawing/2014/main" id="{950E9E89-0BA1-B22D-E720-A4D80E87CFA6}"/>
+          <p:cNvPr id="5" name="テキスト ボックス 4">
+            <a:extLst>
+              <a:ext uri="{FF2B5EF4-FFF2-40B4-BE49-F238E27FC236}">
+                <a16:creationId xmlns:a16="http://schemas.microsoft.com/office/drawing/2014/main" id="{0864503F-1AEE-0A0D-16DC-5FF5BDB61DA4}"/>
               </a:ext>
             </a:extLst>
           </p:cNvPr>
@@ -7505,8 +10189,8 @@
         </p:nvSpPr>
         <p:spPr>
           <a:xfrm>
-            <a:off x="3767263" y="1372565"/>
-            <a:ext cx="1789043" cy="584775"/>
+            <a:off x="7326705" y="872418"/>
+            <a:ext cx="3826327" cy="276999"/>
           </a:xfrm>
           <a:prstGeom prst="rect">
             <a:avLst/>
@@ -7514,160 +10198,72 @@
           <a:noFill/>
         </p:spPr>
         <p:txBody>
-          <a:bodyPr wrap="square" rtlCol="0">
+          <a:bodyPr wrap="square">
             <a:spAutoFit/>
           </a:bodyPr>
           <a:lstStyle/>
           <a:p>
-            <a:pPr algn="ctr"/>
-            <a:r>
-              <a:rPr kumimoji="1" lang="en-US" altLang="ja-JP" sz="3200" dirty="0">
-                <a:latin typeface="モボ-SemiBold" panose="02000700000000000000" pitchFamily="50" charset="-128"/>
-                <a:ea typeface="モボ-SemiBold" panose="02000700000000000000" pitchFamily="50" charset="-128"/>
+            <a:r>
+              <a:rPr lang="ja-JP" altLang="en-US" sz="1200" dirty="0">
+                <a:hlinkClick r:id="rId3"/>
               </a:rPr>
-              <a:t>DAWIY</a:t>
-            </a:r>
-            <a:endParaRPr kumimoji="1" lang="ja-JP" altLang="en-US" sz="3200" dirty="0">
-              <a:latin typeface="モボ-SemiBold" panose="02000700000000000000" pitchFamily="50" charset="-128"/>
-              <a:ea typeface="モボ-SemiBold" panose="02000700000000000000" pitchFamily="50" charset="-128"/>
-            </a:endParaRPr>
+              <a:t>https://github.com/NumberZero-0621/wam-studio</a:t>
+            </a:r>
+            <a:endParaRPr lang="ja-JP" altLang="en-US" sz="1200" dirty="0"/>
           </a:p>
         </p:txBody>
       </p:sp>
-      <p:sp>
-        <p:nvSpPr>
-          <p:cNvPr id="20" name="テキスト ボックス 19">
-            <a:extLst>
-              <a:ext uri="{FF2B5EF4-FFF2-40B4-BE49-F238E27FC236}">
-                <a16:creationId xmlns:a16="http://schemas.microsoft.com/office/drawing/2014/main" id="{8C248339-B3CF-E878-6425-FF1C11C47944}"/>
-              </a:ext>
-            </a:extLst>
-          </p:cNvPr>
-          <p:cNvSpPr txBox="1"/>
+      <p:pic>
+        <p:nvPicPr>
+          <p:cNvPr id="7" name="Picture 2">
+            <a:extLst>
+              <a:ext uri="{FF2B5EF4-FFF2-40B4-BE49-F238E27FC236}">
+                <a16:creationId xmlns:a16="http://schemas.microsoft.com/office/drawing/2014/main" id="{BA787C90-626A-0BA6-A73A-245A5272843F}"/>
+              </a:ext>
+            </a:extLst>
+          </p:cNvPr>
+          <p:cNvPicPr>
+            <a:picLocks noChangeAspect="1" noChangeArrowheads="1"/>
+          </p:cNvPicPr>
           <p:nvPr/>
-        </p:nvSpPr>
-        <p:spPr>
+        </p:nvPicPr>
+        <p:blipFill rotWithShape="1">
+          <a:blip r:embed="rId4">
+            <a:extLst>
+              <a:ext uri="{28A0092B-C50C-407E-A947-70E740481C1C}">
+                <a14:useLocalDpi xmlns:a14="http://schemas.microsoft.com/office/drawing/2010/main" val="0"/>
+              </a:ext>
+            </a:extLst>
+          </a:blip>
+          <a:srcRect l="7937" t="5904" r="9056" b="6185"/>
+          <a:stretch>
+            <a:fillRect/>
+          </a:stretch>
+        </p:blipFill>
+        <p:spPr bwMode="auto">
           <a:xfrm>
-            <a:off x="6401300" y="1382504"/>
-            <a:ext cx="2156458" cy="584775"/>
+            <a:off x="11100280" y="61498"/>
+            <a:ext cx="1002323" cy="1061543"/>
           </a:xfrm>
           <a:prstGeom prst="rect">
             <a:avLst/>
           </a:prstGeom>
           <a:noFill/>
+          <a:extLst>
+            <a:ext uri="{909E8E84-426E-40DD-AFC4-6F175D3DCCD1}">
+              <a14:hiddenFill xmlns:a14="http://schemas.microsoft.com/office/drawing/2010/main">
+                <a:solidFill>
+                  <a:srgbClr val="FFFFFF"/>
+                </a:solidFill>
+              </a14:hiddenFill>
+            </a:ext>
+          </a:extLst>
         </p:spPr>
-        <p:txBody>
-          <a:bodyPr wrap="square" rtlCol="0">
-            <a:spAutoFit/>
-          </a:bodyPr>
-          <a:lstStyle/>
-          <a:p>
-            <a:pPr algn="ctr"/>
-            <a:r>
-              <a:rPr kumimoji="1" lang="en-US" altLang="ja-JP" sz="3200" dirty="0">
-                <a:latin typeface="モボ-SemiBold" panose="02000700000000000000" pitchFamily="50" charset="-128"/>
-                <a:ea typeface="モボ-SemiBold" panose="02000700000000000000" pitchFamily="50" charset="-128"/>
-              </a:rPr>
-              <a:t>ReaScript</a:t>
-            </a:r>
-            <a:endParaRPr kumimoji="1" lang="ja-JP" altLang="en-US" sz="3200" dirty="0">
-              <a:latin typeface="モボ-SemiBold" panose="02000700000000000000" pitchFamily="50" charset="-128"/>
-              <a:ea typeface="モボ-SemiBold" panose="02000700000000000000" pitchFamily="50" charset="-128"/>
-            </a:endParaRPr>
-          </a:p>
-        </p:txBody>
-      </p:sp>
-      <p:sp>
-        <p:nvSpPr>
-          <p:cNvPr id="21" name="テキスト ボックス 20">
-            <a:extLst>
-              <a:ext uri="{FF2B5EF4-FFF2-40B4-BE49-F238E27FC236}">
-                <a16:creationId xmlns:a16="http://schemas.microsoft.com/office/drawing/2014/main" id="{F4CBCDE4-12F8-585A-8911-D81CBAF2B64D}"/>
-              </a:ext>
-            </a:extLst>
-          </p:cNvPr>
-          <p:cNvSpPr txBox="1"/>
-          <p:nvPr/>
-        </p:nvSpPr>
-        <p:spPr>
-          <a:xfrm>
-            <a:off x="9104743" y="1382505"/>
-            <a:ext cx="2156458" cy="584775"/>
-          </a:xfrm>
-          <a:prstGeom prst="rect">
-            <a:avLst/>
-          </a:prstGeom>
-          <a:noFill/>
-        </p:spPr>
-        <p:txBody>
-          <a:bodyPr wrap="square" rtlCol="0">
-            <a:spAutoFit/>
-          </a:bodyPr>
-          <a:lstStyle/>
-          <a:p>
-            <a:pPr algn="ctr"/>
-            <a:r>
-              <a:rPr kumimoji="1" lang="en-US" altLang="ja-JP" sz="3200" dirty="0">
-                <a:latin typeface="モボ-SemiBold" panose="02000700000000000000" pitchFamily="50" charset="-128"/>
-                <a:ea typeface="モボ-SemiBold" panose="02000700000000000000" pitchFamily="50" charset="-128"/>
-              </a:rPr>
-              <a:t>VST</a:t>
-            </a:r>
-            <a:endParaRPr kumimoji="1" lang="ja-JP" altLang="en-US" sz="3200" dirty="0">
-              <a:latin typeface="モボ-SemiBold" panose="02000700000000000000" pitchFamily="50" charset="-128"/>
-              <a:ea typeface="モボ-SemiBold" panose="02000700000000000000" pitchFamily="50" charset="-128"/>
-            </a:endParaRPr>
-          </a:p>
-        </p:txBody>
-      </p:sp>
-      <p:cxnSp>
-        <p:nvCxnSpPr>
-          <p:cNvPr id="22" name="直線コネクタ 21">
-            <a:extLst>
-              <a:ext uri="{FF2B5EF4-FFF2-40B4-BE49-F238E27FC236}">
-                <a16:creationId xmlns:a16="http://schemas.microsoft.com/office/drawing/2014/main" id="{5DC74464-B5D6-ABE0-9159-E403CB898940}"/>
-              </a:ext>
-            </a:extLst>
-          </p:cNvPr>
-          <p:cNvCxnSpPr>
-            <a:cxnSpLocks/>
-          </p:cNvCxnSpPr>
-          <p:nvPr/>
-        </p:nvCxnSpPr>
-        <p:spPr>
-          <a:xfrm>
-            <a:off x="664762" y="1454061"/>
-            <a:ext cx="2573655" cy="503279"/>
-          </a:xfrm>
-          <a:prstGeom prst="line">
-            <a:avLst/>
-          </a:prstGeom>
-          <a:ln w="76200" cap="rnd">
-            <a:solidFill>
-              <a:schemeClr val="tx1"/>
-            </a:solidFill>
-            <a:round/>
-          </a:ln>
-        </p:spPr>
-        <p:style>
-          <a:lnRef idx="2">
-            <a:schemeClr val="accent1"/>
-          </a:lnRef>
-          <a:fillRef idx="0">
-            <a:schemeClr val="accent1"/>
-          </a:fillRef>
-          <a:effectRef idx="1">
-            <a:schemeClr val="accent1"/>
-          </a:effectRef>
-          <a:fontRef idx="minor">
-            <a:schemeClr val="tx1"/>
-          </a:fontRef>
-        </p:style>
-      </p:cxnSp>
+      </p:pic>
     </p:spTree>
     <p:extLst>
       <p:ext uri="{BB962C8B-B14F-4D97-AF65-F5344CB8AC3E}">
-        <p14:creationId xmlns:p14="http://schemas.microsoft.com/office/powerpoint/2010/main" val="179236004"/>
+        <p14:creationId xmlns:p14="http://schemas.microsoft.com/office/powerpoint/2010/main" val="1670958027"/>
       </p:ext>
     </p:extLst>
   </p:cSld>
@@ -7677,7 +10273,789 @@
 </p:sld>
 </file>
 
-<file path=ppt/slides/slide11.xml><?xml version="1.0" encoding="utf-8"?>
+<file path=ppt/slides/slide17.xml><?xml version="1.0" encoding="utf-8"?>
+<p:sld xmlns:a="http://schemas.openxmlformats.org/drawingml/2006/main" xmlns:r="http://schemas.openxmlformats.org/officeDocument/2006/relationships" xmlns:p="http://schemas.openxmlformats.org/presentationml/2006/main">
+  <p:cSld>
+    <p:spTree>
+      <p:nvGrpSpPr>
+        <p:cNvPr id="1" name="">
+          <a:extLst>
+            <a:ext uri="{FF2B5EF4-FFF2-40B4-BE49-F238E27FC236}">
+              <a16:creationId xmlns:a16="http://schemas.microsoft.com/office/drawing/2014/main" id="{949FC6B7-9CBC-32B5-0A44-7B0273F4DD5F}"/>
+            </a:ext>
+          </a:extLst>
+        </p:cNvPr>
+        <p:cNvGrpSpPr/>
+        <p:nvPr/>
+      </p:nvGrpSpPr>
+      <p:grpSpPr>
+        <a:xfrm>
+          <a:off x="0" y="0"/>
+          <a:ext cx="0" cy="0"/>
+          <a:chOff x="0" y="0"/>
+          <a:chExt cx="0" cy="0"/>
+        </a:xfrm>
+      </p:grpSpPr>
+      <p:sp>
+        <p:nvSpPr>
+          <p:cNvPr id="2" name="タイトル 1">
+            <a:extLst>
+              <a:ext uri="{FF2B5EF4-FFF2-40B4-BE49-F238E27FC236}">
+                <a16:creationId xmlns:a16="http://schemas.microsoft.com/office/drawing/2014/main" id="{C10E2808-5425-1BC0-B431-B8395C9065ED}"/>
+              </a:ext>
+            </a:extLst>
+          </p:cNvPr>
+          <p:cNvSpPr>
+            <a:spLocks noGrp="1"/>
+          </p:cNvSpPr>
+          <p:nvPr>
+            <p:ph type="title"/>
+          </p:nvPr>
+        </p:nvSpPr>
+        <p:spPr/>
+        <p:txBody>
+          <a:bodyPr>
+            <a:normAutofit/>
+          </a:bodyPr>
+          <a:lstStyle/>
+          <a:p>
+            <a:r>
+              <a:rPr kumimoji="1" lang="en-US" altLang="ja-JP" sz="6700" dirty="0"/>
+              <a:t>D</a:t>
+            </a:r>
+            <a:r>
+              <a:rPr kumimoji="1" lang="en-US" altLang="ja-JP" sz="5400" dirty="0"/>
+              <a:t>AWIY</a:t>
+            </a:r>
+            <a:r>
+              <a:rPr kumimoji="1" lang="ja-JP" altLang="en-US" sz="6000" dirty="0"/>
+              <a:t>プラグイン</a:t>
+            </a:r>
+            <a:r>
+              <a:rPr lang="ja-JP" altLang="en-US" sz="6600" dirty="0"/>
+              <a:t>②</a:t>
+            </a:r>
+            <a:endParaRPr kumimoji="1" lang="ja-JP" altLang="en-US" sz="5400" dirty="0"/>
+          </a:p>
+        </p:txBody>
+      </p:sp>
+      <p:sp>
+        <p:nvSpPr>
+          <p:cNvPr id="3" name="コンテンツ プレースホルダー 2">
+            <a:extLst>
+              <a:ext uri="{FF2B5EF4-FFF2-40B4-BE49-F238E27FC236}">
+                <a16:creationId xmlns:a16="http://schemas.microsoft.com/office/drawing/2014/main" id="{47E1F5B0-FA4F-5ADB-CA2A-F7EF9AE1E9FD}"/>
+              </a:ext>
+            </a:extLst>
+          </p:cNvPr>
+          <p:cNvSpPr>
+            <a:spLocks noGrp="1"/>
+          </p:cNvSpPr>
+          <p:nvPr>
+            <p:ph idx="1"/>
+          </p:nvPr>
+        </p:nvSpPr>
+        <p:spPr>
+          <a:xfrm>
+            <a:off x="367393" y="1389342"/>
+            <a:ext cx="6921430" cy="5348036"/>
+          </a:xfrm>
+        </p:spPr>
+        <p:txBody>
+          <a:bodyPr>
+            <a:normAutofit/>
+          </a:bodyPr>
+          <a:lstStyle/>
+          <a:p>
+            <a:r>
+              <a:rPr lang="en-US" altLang="ja-JP" sz="3200" dirty="0"/>
+              <a:t>AI</a:t>
+            </a:r>
+            <a:r>
+              <a:rPr lang="ja-JP" altLang="en-US" sz="3200" dirty="0"/>
+              <a:t>アシスタント機能</a:t>
+            </a:r>
+            <a:endParaRPr lang="en-US" altLang="ja-JP" sz="3200" dirty="0"/>
+          </a:p>
+          <a:p>
+            <a:pPr marL="0" indent="0">
+              <a:buNone/>
+            </a:pPr>
+            <a:endParaRPr lang="en-US" altLang="ja-JP" sz="1000" dirty="0"/>
+          </a:p>
+          <a:p>
+            <a:pPr lvl="1"/>
+            <a:r>
+              <a:rPr kumimoji="1" lang="en-US" altLang="ja-JP" sz="2800" dirty="0"/>
+              <a:t>Gemini</a:t>
+            </a:r>
+            <a:r>
+              <a:rPr kumimoji="1" lang="ja-JP" altLang="en-US" sz="2800" dirty="0"/>
+              <a:t>や</a:t>
+            </a:r>
+            <a:r>
+              <a:rPr kumimoji="1" lang="en-US" altLang="ja-JP" sz="2800" dirty="0"/>
+              <a:t>O</a:t>
+            </a:r>
+            <a:r>
+              <a:rPr lang="en-US" altLang="ja-JP" sz="2800" dirty="0"/>
+              <a:t>penAI</a:t>
+            </a:r>
+            <a:r>
+              <a:rPr lang="ja-JP" altLang="en-US" sz="2800" dirty="0"/>
+              <a:t>の</a:t>
+            </a:r>
+            <a:r>
+              <a:rPr kumimoji="1" lang="en-US" altLang="ja-JP" sz="2800" dirty="0"/>
+              <a:t>API</a:t>
+            </a:r>
+            <a:r>
+              <a:rPr kumimoji="1" lang="ja-JP" altLang="en-US" sz="2800" dirty="0"/>
+              <a:t>を利用</a:t>
+            </a:r>
+            <a:endParaRPr lang="en-US" altLang="ja-JP" sz="2800" dirty="0"/>
+          </a:p>
+          <a:p>
+            <a:pPr marL="457200" lvl="1" indent="0">
+              <a:buNone/>
+            </a:pPr>
+            <a:endParaRPr kumimoji="1" lang="en-US" altLang="ja-JP" sz="1000" dirty="0"/>
+          </a:p>
+          <a:p>
+            <a:pPr marL="971550" lvl="1" indent="-514350">
+              <a:lnSpc>
+                <a:spcPct val="100000"/>
+              </a:lnSpc>
+              <a:buFont typeface="+mj-lt"/>
+              <a:buAutoNum type="arabicPeriod"/>
+            </a:pPr>
+            <a:r>
+              <a:rPr lang="ja-JP" altLang="en-US" sz="2800" dirty="0"/>
+              <a:t>対話を行い自然言語で要望を入力</a:t>
+            </a:r>
+            <a:endParaRPr lang="en-US" altLang="ja-JP" sz="2800" dirty="0"/>
+          </a:p>
+          <a:p>
+            <a:pPr marL="971550" lvl="1" indent="-514350">
+              <a:lnSpc>
+                <a:spcPct val="100000"/>
+              </a:lnSpc>
+              <a:buFont typeface="+mj-lt"/>
+              <a:buAutoNum type="arabicPeriod"/>
+            </a:pPr>
+            <a:r>
+              <a:rPr kumimoji="1" lang="en-US" altLang="ja-JP" sz="2800" dirty="0"/>
+              <a:t>LLM</a:t>
+            </a:r>
+            <a:r>
+              <a:rPr kumimoji="1" lang="ja-JP" altLang="en-US" sz="2800" dirty="0"/>
+              <a:t>がコードを生成</a:t>
+            </a:r>
+            <a:endParaRPr kumimoji="1" lang="en-US" altLang="ja-JP" sz="2800" dirty="0"/>
+          </a:p>
+          <a:p>
+            <a:pPr marL="971550" lvl="1" indent="-514350">
+              <a:lnSpc>
+                <a:spcPct val="100000"/>
+              </a:lnSpc>
+              <a:buFont typeface="+mj-lt"/>
+              <a:buAutoNum type="arabicPeriod"/>
+            </a:pPr>
+            <a:r>
+              <a:rPr lang="ja-JP" altLang="en-US" sz="2800" dirty="0"/>
+              <a:t>ユーザが承認</a:t>
+            </a:r>
+            <a:endParaRPr lang="en-US" altLang="ja-JP" sz="2800" dirty="0"/>
+          </a:p>
+          <a:p>
+            <a:pPr marL="971550" lvl="1" indent="-514350">
+              <a:lnSpc>
+                <a:spcPct val="100000"/>
+              </a:lnSpc>
+              <a:buFont typeface="+mj-lt"/>
+              <a:buAutoNum type="arabicPeriod"/>
+            </a:pPr>
+            <a:r>
+              <a:rPr kumimoji="1" lang="en-US" altLang="ja-JP" sz="2800" dirty="0"/>
+              <a:t>.ts</a:t>
+            </a:r>
+            <a:r>
+              <a:rPr kumimoji="1" lang="ja-JP" altLang="en-US" sz="2800" dirty="0"/>
+              <a:t>ファイルが自動生成される</a:t>
+            </a:r>
+            <a:endParaRPr kumimoji="1" lang="en-US" altLang="ja-JP" sz="2800" dirty="0"/>
+          </a:p>
+          <a:p>
+            <a:pPr marL="971550" lvl="1" indent="-514350">
+              <a:lnSpc>
+                <a:spcPct val="100000"/>
+              </a:lnSpc>
+              <a:buFont typeface="+mj-lt"/>
+              <a:buAutoNum type="arabicPeriod"/>
+            </a:pPr>
+            <a:r>
+              <a:rPr lang="ja-JP" altLang="en-US" sz="2800" dirty="0"/>
+              <a:t>ページをリロードすると</a:t>
+            </a:r>
+            <a:br>
+              <a:rPr lang="en-US" altLang="ja-JP" sz="2800" dirty="0"/>
+            </a:br>
+            <a:r>
+              <a:rPr lang="ja-JP" altLang="en-US" sz="2800" dirty="0"/>
+              <a:t>生成したプラグインが</a:t>
+            </a:r>
+            <a:br>
+              <a:rPr lang="en-US" altLang="ja-JP" sz="2800" dirty="0"/>
+            </a:br>
+            <a:r>
+              <a:rPr lang="ja-JP" altLang="en-US" sz="2800" dirty="0"/>
+              <a:t>反映されている</a:t>
+            </a:r>
+            <a:endParaRPr kumimoji="1" lang="en-US" altLang="ja-JP" sz="2800" dirty="0"/>
+          </a:p>
+        </p:txBody>
+      </p:sp>
+      <p:sp>
+        <p:nvSpPr>
+          <p:cNvPr id="4" name="スライド番号プレースホルダー 3">
+            <a:extLst>
+              <a:ext uri="{FF2B5EF4-FFF2-40B4-BE49-F238E27FC236}">
+                <a16:creationId xmlns:a16="http://schemas.microsoft.com/office/drawing/2014/main" id="{D9179D3B-9748-24B6-0817-8C909A16113F}"/>
+              </a:ext>
+            </a:extLst>
+          </p:cNvPr>
+          <p:cNvSpPr>
+            <a:spLocks noGrp="1"/>
+          </p:cNvSpPr>
+          <p:nvPr>
+            <p:ph type="sldNum" sz="quarter" idx="10"/>
+          </p:nvPr>
+        </p:nvSpPr>
+        <p:spPr/>
+        <p:txBody>
+          <a:bodyPr/>
+          <a:lstStyle/>
+          <a:p>
+            <a:fld id="{7A0ED1C7-8A26-48CF-81C0-2A5ADFEC2E18}" type="slidenum">
+              <a:rPr lang="ja-JP" altLang="en-US" smtClean="0"/>
+              <a:pPr/>
+              <a:t>17</a:t>
+            </a:fld>
+            <a:endParaRPr lang="ja-JP" altLang="en-US" dirty="0">
+              <a:solidFill>
+                <a:schemeClr val="tx1"/>
+              </a:solidFill>
+            </a:endParaRPr>
+          </a:p>
+        </p:txBody>
+      </p:sp>
+      <p:pic>
+        <p:nvPicPr>
+          <p:cNvPr id="7" name="図 6" descr="グラフィカル ユーザー インターフェイス, テキスト, アプリケーション, チャットまたはテキスト メッセージ">
+            <a:extLst>
+              <a:ext uri="{FF2B5EF4-FFF2-40B4-BE49-F238E27FC236}">
+                <a16:creationId xmlns:a16="http://schemas.microsoft.com/office/drawing/2014/main" id="{9FD8C321-0C31-3E19-73B1-AA6B5B0CA0C5}"/>
+              </a:ext>
+            </a:extLst>
+          </p:cNvPr>
+          <p:cNvPicPr>
+            <a:picLocks noChangeAspect="1"/>
+          </p:cNvPicPr>
+          <p:nvPr/>
+        </p:nvPicPr>
+        <p:blipFill>
+          <a:blip r:embed="rId2">
+            <a:extLst>
+              <a:ext uri="{28A0092B-C50C-407E-A947-70E740481C1C}">
+                <a14:useLocalDpi xmlns:a14="http://schemas.microsoft.com/office/drawing/2010/main" val="0"/>
+              </a:ext>
+            </a:extLst>
+          </a:blip>
+          <a:stretch>
+            <a:fillRect/>
+          </a:stretch>
+        </p:blipFill>
+        <p:spPr>
+          <a:xfrm>
+            <a:off x="6982136" y="1310214"/>
+            <a:ext cx="4637670" cy="5444909"/>
+          </a:xfrm>
+          <a:prstGeom prst="rect">
+            <a:avLst/>
+          </a:prstGeom>
+        </p:spPr>
+      </p:pic>
+      <p:sp>
+        <p:nvSpPr>
+          <p:cNvPr id="5" name="テキスト ボックス 4">
+            <a:extLst>
+              <a:ext uri="{FF2B5EF4-FFF2-40B4-BE49-F238E27FC236}">
+                <a16:creationId xmlns:a16="http://schemas.microsoft.com/office/drawing/2014/main" id="{D8CCB810-415D-05F4-8B33-3214F7955EC7}"/>
+              </a:ext>
+            </a:extLst>
+          </p:cNvPr>
+          <p:cNvSpPr txBox="1"/>
+          <p:nvPr/>
+        </p:nvSpPr>
+        <p:spPr>
+          <a:xfrm>
+            <a:off x="7326705" y="872418"/>
+            <a:ext cx="3826327" cy="276999"/>
+          </a:xfrm>
+          <a:prstGeom prst="rect">
+            <a:avLst/>
+          </a:prstGeom>
+          <a:noFill/>
+        </p:spPr>
+        <p:txBody>
+          <a:bodyPr wrap="square">
+            <a:spAutoFit/>
+          </a:bodyPr>
+          <a:lstStyle/>
+          <a:p>
+            <a:r>
+              <a:rPr lang="ja-JP" altLang="en-US" sz="1200" dirty="0">
+                <a:hlinkClick r:id="rId3"/>
+              </a:rPr>
+              <a:t>https://github.com/NumberZero-0621/wam-studio</a:t>
+            </a:r>
+            <a:endParaRPr lang="ja-JP" altLang="en-US" sz="1200" dirty="0"/>
+          </a:p>
+        </p:txBody>
+      </p:sp>
+      <p:pic>
+        <p:nvPicPr>
+          <p:cNvPr id="6" name="Picture 2">
+            <a:extLst>
+              <a:ext uri="{FF2B5EF4-FFF2-40B4-BE49-F238E27FC236}">
+                <a16:creationId xmlns:a16="http://schemas.microsoft.com/office/drawing/2014/main" id="{820439C8-7238-1AA5-A6E5-749C6971A84E}"/>
+              </a:ext>
+            </a:extLst>
+          </p:cNvPr>
+          <p:cNvPicPr>
+            <a:picLocks noChangeAspect="1" noChangeArrowheads="1"/>
+          </p:cNvPicPr>
+          <p:nvPr/>
+        </p:nvPicPr>
+        <p:blipFill rotWithShape="1">
+          <a:blip r:embed="rId4">
+            <a:extLst>
+              <a:ext uri="{28A0092B-C50C-407E-A947-70E740481C1C}">
+                <a14:useLocalDpi xmlns:a14="http://schemas.microsoft.com/office/drawing/2010/main" val="0"/>
+              </a:ext>
+            </a:extLst>
+          </a:blip>
+          <a:srcRect l="7937" t="5904" r="9056" b="6185"/>
+          <a:stretch>
+            <a:fillRect/>
+          </a:stretch>
+        </p:blipFill>
+        <p:spPr bwMode="auto">
+          <a:xfrm>
+            <a:off x="11100280" y="61498"/>
+            <a:ext cx="1002323" cy="1061543"/>
+          </a:xfrm>
+          <a:prstGeom prst="rect">
+            <a:avLst/>
+          </a:prstGeom>
+          <a:noFill/>
+          <a:extLst>
+            <a:ext uri="{909E8E84-426E-40DD-AFC4-6F175D3DCCD1}">
+              <a14:hiddenFill xmlns:a14="http://schemas.microsoft.com/office/drawing/2010/main">
+                <a:solidFill>
+                  <a:srgbClr val="FFFFFF"/>
+                </a:solidFill>
+              </a14:hiddenFill>
+            </a:ext>
+          </a:extLst>
+        </p:spPr>
+      </p:pic>
+    </p:spTree>
+    <p:extLst>
+      <p:ext uri="{BB962C8B-B14F-4D97-AF65-F5344CB8AC3E}">
+        <p14:creationId xmlns:p14="http://schemas.microsoft.com/office/powerpoint/2010/main" val="1987902239"/>
+      </p:ext>
+    </p:extLst>
+  </p:cSld>
+  <p:clrMapOvr>
+    <a:masterClrMapping/>
+  </p:clrMapOvr>
+</p:sld>
+</file>
+
+<file path=ppt/slides/slide18.xml><?xml version="1.0" encoding="utf-8"?>
+<p:sld xmlns:a="http://schemas.openxmlformats.org/drawingml/2006/main" xmlns:r="http://schemas.openxmlformats.org/officeDocument/2006/relationships" xmlns:p="http://schemas.openxmlformats.org/presentationml/2006/main">
+  <p:cSld>
+    <p:spTree>
+      <p:nvGrpSpPr>
+        <p:cNvPr id="1" name="">
+          <a:extLst>
+            <a:ext uri="{FF2B5EF4-FFF2-40B4-BE49-F238E27FC236}">
+              <a16:creationId xmlns:a16="http://schemas.microsoft.com/office/drawing/2014/main" id="{69956547-4DEC-1B52-A7C8-18752092F76E}"/>
+            </a:ext>
+          </a:extLst>
+        </p:cNvPr>
+        <p:cNvGrpSpPr/>
+        <p:nvPr/>
+      </p:nvGrpSpPr>
+      <p:grpSpPr>
+        <a:xfrm>
+          <a:off x="0" y="0"/>
+          <a:ext cx="0" cy="0"/>
+          <a:chOff x="0" y="0"/>
+          <a:chExt cx="0" cy="0"/>
+        </a:xfrm>
+      </p:grpSpPr>
+      <p:sp>
+        <p:nvSpPr>
+          <p:cNvPr id="2" name="タイトル 1">
+            <a:extLst>
+              <a:ext uri="{FF2B5EF4-FFF2-40B4-BE49-F238E27FC236}">
+                <a16:creationId xmlns:a16="http://schemas.microsoft.com/office/drawing/2014/main" id="{E72CE712-EF15-9335-D577-785C7F108682}"/>
+              </a:ext>
+            </a:extLst>
+          </p:cNvPr>
+          <p:cNvSpPr>
+            <a:spLocks noGrp="1"/>
+          </p:cNvSpPr>
+          <p:nvPr>
+            <p:ph type="title"/>
+          </p:nvPr>
+        </p:nvSpPr>
+        <p:spPr/>
+        <p:txBody>
+          <a:bodyPr>
+            <a:normAutofit/>
+          </a:bodyPr>
+          <a:lstStyle/>
+          <a:p>
+            <a:r>
+              <a:rPr kumimoji="1" lang="en-US" altLang="ja-JP" sz="6700" dirty="0"/>
+              <a:t>D</a:t>
+            </a:r>
+            <a:r>
+              <a:rPr kumimoji="1" lang="en-US" altLang="ja-JP" sz="5400" dirty="0"/>
+              <a:t>AWIY</a:t>
+            </a:r>
+            <a:r>
+              <a:rPr kumimoji="1" lang="ja-JP" altLang="en-US" sz="6000" dirty="0"/>
+              <a:t>プラグイン</a:t>
+            </a:r>
+            <a:r>
+              <a:rPr kumimoji="1" lang="ja-JP" altLang="en-US" sz="6600" dirty="0"/>
+              <a:t>③</a:t>
+            </a:r>
+            <a:endParaRPr kumimoji="1" lang="ja-JP" altLang="en-US" sz="5400" dirty="0"/>
+          </a:p>
+        </p:txBody>
+      </p:sp>
+      <p:sp>
+        <p:nvSpPr>
+          <p:cNvPr id="3" name="コンテンツ プレースホルダー 2">
+            <a:extLst>
+              <a:ext uri="{FF2B5EF4-FFF2-40B4-BE49-F238E27FC236}">
+                <a16:creationId xmlns:a16="http://schemas.microsoft.com/office/drawing/2014/main" id="{047A1730-4D68-9D81-B2BA-340362B672A8}"/>
+              </a:ext>
+            </a:extLst>
+          </p:cNvPr>
+          <p:cNvSpPr>
+            <a:spLocks noGrp="1"/>
+          </p:cNvSpPr>
+          <p:nvPr>
+            <p:ph idx="1"/>
+          </p:nvPr>
+        </p:nvSpPr>
+        <p:spPr>
+          <a:xfrm>
+            <a:off x="367393" y="1389341"/>
+            <a:ext cx="6921430" cy="5103533"/>
+          </a:xfrm>
+        </p:spPr>
+        <p:txBody>
+          <a:bodyPr>
+            <a:normAutofit/>
+          </a:bodyPr>
+          <a:lstStyle/>
+          <a:p>
+            <a:r>
+              <a:rPr lang="ja-JP" altLang="en-US" sz="3200" dirty="0"/>
+              <a:t>具体例</a:t>
+            </a:r>
+            <a:endParaRPr lang="en-US" altLang="ja-JP" sz="3200" dirty="0"/>
+          </a:p>
+          <a:p>
+            <a:pPr marL="0" indent="0">
+              <a:buNone/>
+            </a:pPr>
+            <a:endParaRPr lang="en-US" altLang="ja-JP" sz="700" dirty="0"/>
+          </a:p>
+          <a:p>
+            <a:pPr marL="971550" lvl="1" indent="-514350">
+              <a:lnSpc>
+                <a:spcPct val="100000"/>
+              </a:lnSpc>
+              <a:buFont typeface="+mj-lt"/>
+              <a:buAutoNum type="alphaUcParenR"/>
+            </a:pPr>
+            <a:r>
+              <a:rPr lang="en-US" altLang="ja-JP" sz="2800" dirty="0"/>
+              <a:t>Memo / Sticky Notes</a:t>
+            </a:r>
+          </a:p>
+          <a:p>
+            <a:pPr lvl="2">
+              <a:lnSpc>
+                <a:spcPct val="100000"/>
+              </a:lnSpc>
+            </a:pPr>
+            <a:r>
+              <a:rPr lang="ja-JP" altLang="en-US" sz="2400" dirty="0"/>
+              <a:t>画面上にフリーハンドや</a:t>
+            </a:r>
+            <a:br>
+              <a:rPr lang="en-US" altLang="ja-JP" sz="2400" dirty="0"/>
+            </a:br>
+            <a:r>
+              <a:rPr lang="ja-JP" altLang="en-US" sz="2400" dirty="0"/>
+              <a:t>テキストボックスを自由に配置</a:t>
+            </a:r>
+            <a:endParaRPr lang="en-US" altLang="ja-JP" sz="2400" dirty="0"/>
+          </a:p>
+          <a:p>
+            <a:pPr marL="914400" lvl="2" indent="0">
+              <a:lnSpc>
+                <a:spcPct val="100000"/>
+              </a:lnSpc>
+              <a:buNone/>
+            </a:pPr>
+            <a:endParaRPr lang="en-US" altLang="ja-JP" sz="800" dirty="0"/>
+          </a:p>
+          <a:p>
+            <a:pPr marL="971550" lvl="1" indent="-514350">
+              <a:lnSpc>
+                <a:spcPct val="100000"/>
+              </a:lnSpc>
+              <a:buFont typeface="+mj-lt"/>
+              <a:buAutoNum type="alphaUcParenR"/>
+            </a:pPr>
+            <a:r>
+              <a:rPr lang="en-US" altLang="ja-JP" sz="2800" dirty="0"/>
+              <a:t>Stochastic Note Generator</a:t>
+            </a:r>
+          </a:p>
+          <a:p>
+            <a:pPr lvl="2">
+              <a:lnSpc>
+                <a:spcPct val="100000"/>
+              </a:lnSpc>
+            </a:pPr>
+            <a:r>
+              <a:rPr lang="ja-JP" altLang="en-US" sz="2400" dirty="0"/>
+              <a:t>確率的に音符を配置しメロディを生成</a:t>
+            </a:r>
+            <a:endParaRPr lang="en-US" altLang="ja-JP" sz="2400" dirty="0"/>
+          </a:p>
+          <a:p>
+            <a:pPr marL="914400" lvl="2" indent="0">
+              <a:lnSpc>
+                <a:spcPct val="100000"/>
+              </a:lnSpc>
+              <a:buNone/>
+            </a:pPr>
+            <a:endParaRPr lang="en-US" altLang="ja-JP" sz="800" dirty="0"/>
+          </a:p>
+          <a:p>
+            <a:pPr marL="971550" lvl="1" indent="-514350">
+              <a:lnSpc>
+                <a:spcPct val="100000"/>
+              </a:lnSpc>
+              <a:buFont typeface="+mj-lt"/>
+              <a:buAutoNum type="alphaUcParenR"/>
+            </a:pPr>
+            <a:r>
+              <a:rPr lang="en-US" altLang="ja-JP" sz="2800" dirty="0"/>
+              <a:t>Sample IO &amp; UI Plugin</a:t>
+            </a:r>
+          </a:p>
+          <a:p>
+            <a:pPr lvl="2">
+              <a:lnSpc>
+                <a:spcPct val="100000"/>
+              </a:lnSpc>
+            </a:pPr>
+            <a:r>
+              <a:rPr lang="ja-JP" altLang="en-US" sz="2400" dirty="0"/>
+              <a:t>独自の形式（</a:t>
+            </a:r>
+            <a:r>
+              <a:rPr lang="en-US" altLang="ja-JP" sz="2400" dirty="0"/>
+              <a:t>.</a:t>
+            </a:r>
+            <a:r>
+              <a:rPr lang="en-US" altLang="ja-JP" sz="2400" dirty="0" err="1"/>
+              <a:t>sampletext</a:t>
+            </a:r>
+            <a:r>
+              <a:rPr lang="ja-JP" altLang="en-US" sz="2400" dirty="0"/>
+              <a:t>）の入出力</a:t>
+            </a:r>
+            <a:endParaRPr lang="en-US" altLang="ja-JP" sz="2400" dirty="0"/>
+          </a:p>
+          <a:p>
+            <a:pPr lvl="2">
+              <a:lnSpc>
+                <a:spcPct val="100000"/>
+              </a:lnSpc>
+            </a:pPr>
+            <a:r>
+              <a:rPr lang="ja-JP" altLang="en-US" sz="2400" dirty="0"/>
+              <a:t>サイドバーに独自の</a:t>
+            </a:r>
+            <a:r>
+              <a:rPr lang="en-US" altLang="ja-JP" sz="2400" dirty="0"/>
+              <a:t>UI</a:t>
+            </a:r>
+            <a:r>
+              <a:rPr lang="ja-JP" altLang="en-US" sz="2400" dirty="0"/>
+              <a:t>を追加</a:t>
+            </a:r>
+            <a:endParaRPr lang="en-US" altLang="ja-JP" sz="2400" dirty="0"/>
+          </a:p>
+        </p:txBody>
+      </p:sp>
+      <p:sp>
+        <p:nvSpPr>
+          <p:cNvPr id="4" name="スライド番号プレースホルダー 3">
+            <a:extLst>
+              <a:ext uri="{FF2B5EF4-FFF2-40B4-BE49-F238E27FC236}">
+                <a16:creationId xmlns:a16="http://schemas.microsoft.com/office/drawing/2014/main" id="{34C30F10-3900-6C2C-3816-1C6721F094E7}"/>
+              </a:ext>
+            </a:extLst>
+          </p:cNvPr>
+          <p:cNvSpPr>
+            <a:spLocks noGrp="1"/>
+          </p:cNvSpPr>
+          <p:nvPr>
+            <p:ph type="sldNum" sz="quarter" idx="10"/>
+          </p:nvPr>
+        </p:nvSpPr>
+        <p:spPr/>
+        <p:txBody>
+          <a:bodyPr/>
+          <a:lstStyle/>
+          <a:p>
+            <a:fld id="{7A0ED1C7-8A26-48CF-81C0-2A5ADFEC2E18}" type="slidenum">
+              <a:rPr lang="ja-JP" altLang="en-US" smtClean="0"/>
+              <a:pPr/>
+              <a:t>18</a:t>
+            </a:fld>
+            <a:endParaRPr lang="ja-JP" altLang="en-US" dirty="0">
+              <a:solidFill>
+                <a:schemeClr val="tx1"/>
+              </a:solidFill>
+            </a:endParaRPr>
+          </a:p>
+        </p:txBody>
+      </p:sp>
+      <p:sp>
+        <p:nvSpPr>
+          <p:cNvPr id="5" name="テキスト ボックス 4">
+            <a:extLst>
+              <a:ext uri="{FF2B5EF4-FFF2-40B4-BE49-F238E27FC236}">
+                <a16:creationId xmlns:a16="http://schemas.microsoft.com/office/drawing/2014/main" id="{56E6BCA4-514F-7DE8-99BC-463300D3737E}"/>
+              </a:ext>
+            </a:extLst>
+          </p:cNvPr>
+          <p:cNvSpPr txBox="1"/>
+          <p:nvPr/>
+        </p:nvSpPr>
+        <p:spPr>
+          <a:xfrm>
+            <a:off x="7326705" y="872418"/>
+            <a:ext cx="3826327" cy="276999"/>
+          </a:xfrm>
+          <a:prstGeom prst="rect">
+            <a:avLst/>
+          </a:prstGeom>
+          <a:noFill/>
+        </p:spPr>
+        <p:txBody>
+          <a:bodyPr wrap="square">
+            <a:spAutoFit/>
+          </a:bodyPr>
+          <a:lstStyle/>
+          <a:p>
+            <a:r>
+              <a:rPr lang="ja-JP" altLang="en-US" sz="1200" dirty="0">
+                <a:hlinkClick r:id="rId2"/>
+              </a:rPr>
+              <a:t>https://github.com/NumberZero-0621/wam-studio</a:t>
+            </a:r>
+            <a:endParaRPr lang="ja-JP" altLang="en-US" sz="1200" dirty="0"/>
+          </a:p>
+        </p:txBody>
+      </p:sp>
+      <p:pic>
+        <p:nvPicPr>
+          <p:cNvPr id="6" name="Picture 2">
+            <a:extLst>
+              <a:ext uri="{FF2B5EF4-FFF2-40B4-BE49-F238E27FC236}">
+                <a16:creationId xmlns:a16="http://schemas.microsoft.com/office/drawing/2014/main" id="{6A3472AE-3431-0720-8086-B555C5D0675F}"/>
+              </a:ext>
+            </a:extLst>
+          </p:cNvPr>
+          <p:cNvPicPr>
+            <a:picLocks noChangeAspect="1" noChangeArrowheads="1"/>
+          </p:cNvPicPr>
+          <p:nvPr/>
+        </p:nvPicPr>
+        <p:blipFill rotWithShape="1">
+          <a:blip r:embed="rId3">
+            <a:extLst>
+              <a:ext uri="{28A0092B-C50C-407E-A947-70E740481C1C}">
+                <a14:useLocalDpi xmlns:a14="http://schemas.microsoft.com/office/drawing/2010/main" val="0"/>
+              </a:ext>
+            </a:extLst>
+          </a:blip>
+          <a:srcRect l="7937" t="5904" r="9056" b="6185"/>
+          <a:stretch>
+            <a:fillRect/>
+          </a:stretch>
+        </p:blipFill>
+        <p:spPr bwMode="auto">
+          <a:xfrm>
+            <a:off x="11100280" y="61498"/>
+            <a:ext cx="1002323" cy="1061543"/>
+          </a:xfrm>
+          <a:prstGeom prst="rect">
+            <a:avLst/>
+          </a:prstGeom>
+          <a:noFill/>
+          <a:extLst>
+            <a:ext uri="{909E8E84-426E-40DD-AFC4-6F175D3DCCD1}">
+              <a14:hiddenFill xmlns:a14="http://schemas.microsoft.com/office/drawing/2010/main">
+                <a:solidFill>
+                  <a:srgbClr val="FFFFFF"/>
+                </a:solidFill>
+              </a14:hiddenFill>
+            </a:ext>
+          </a:extLst>
+        </p:spPr>
+      </p:pic>
+    </p:spTree>
+    <p:extLst>
+      <p:ext uri="{BB962C8B-B14F-4D97-AF65-F5344CB8AC3E}">
+        <p14:creationId xmlns:p14="http://schemas.microsoft.com/office/powerpoint/2010/main" val="3172991969"/>
+      </p:ext>
+    </p:extLst>
+  </p:cSld>
+  <p:clrMapOvr>
+    <a:masterClrMapping/>
+  </p:clrMapOvr>
+</p:sld>
+</file>
+
+<file path=ppt/slides/slide19.xml><?xml version="1.0" encoding="utf-8"?>
 <p:sld xmlns:a="http://schemas.openxmlformats.org/drawingml/2006/main" xmlns:r="http://schemas.openxmlformats.org/officeDocument/2006/relationships" xmlns:p="http://schemas.openxmlformats.org/presentationml/2006/main">
   <p:cSld>
     <p:spTree>
@@ -7730,8 +11108,13 @@
           <a:p>
             <a:r>
               <a:rPr kumimoji="1" lang="ja-JP" altLang="en-US" sz="6600" dirty="0"/>
-              <a:t>まとめ</a:t>
-            </a:r>
+              <a:t>ま</a:t>
+            </a:r>
+            <a:r>
+              <a:rPr kumimoji="1" lang="ja-JP" altLang="en-US" sz="5400" dirty="0"/>
+              <a:t>とめ</a:t>
+            </a:r>
+            <a:endParaRPr kumimoji="1" lang="ja-JP" altLang="en-US" sz="6600" dirty="0"/>
           </a:p>
         </p:txBody>
       </p:sp>
@@ -7759,7 +11142,7 @@
             <a:fld id="{7A0ED1C7-8A26-48CF-81C0-2A5ADFEC2E18}" type="slidenum">
               <a:rPr lang="ja-JP" altLang="en-US" smtClean="0"/>
               <a:pPr/>
-              <a:t>11</a:t>
+              <a:t>19</a:t>
             </a:fld>
             <a:endParaRPr lang="ja-JP" altLang="en-US" dirty="0">
               <a:solidFill>
@@ -8103,7 +11486,249 @@
 </p:sld>
 </file>
 
-<file path=ppt/slides/slide12.xml><?xml version="1.0" encoding="utf-8"?>
+<file path=ppt/slides/slide2.xml><?xml version="1.0" encoding="utf-8"?>
+<p:sld xmlns:a="http://schemas.openxmlformats.org/drawingml/2006/main" xmlns:r="http://schemas.openxmlformats.org/officeDocument/2006/relationships" xmlns:p="http://schemas.openxmlformats.org/presentationml/2006/main">
+  <p:cSld>
+    <p:spTree>
+      <p:nvGrpSpPr>
+        <p:cNvPr id="1" name=""/>
+        <p:cNvGrpSpPr/>
+        <p:nvPr/>
+      </p:nvGrpSpPr>
+      <p:grpSpPr>
+        <a:xfrm>
+          <a:off x="0" y="0"/>
+          <a:ext cx="0" cy="0"/>
+          <a:chOff x="0" y="0"/>
+          <a:chExt cx="0" cy="0"/>
+        </a:xfrm>
+      </p:grpSpPr>
+      <p:pic>
+        <p:nvPicPr>
+          <p:cNvPr id="9" name="図 8" descr="モニター, スコアボード, 画面, 座る が含まれている画像">
+            <a:extLst>
+              <a:ext uri="{FF2B5EF4-FFF2-40B4-BE49-F238E27FC236}">
+                <a16:creationId xmlns:a16="http://schemas.microsoft.com/office/drawing/2014/main" id="{947CBF56-C379-06E6-0816-EF099A07A595}"/>
+              </a:ext>
+            </a:extLst>
+          </p:cNvPr>
+          <p:cNvPicPr>
+            <a:picLocks noChangeAspect="1"/>
+          </p:cNvPicPr>
+          <p:nvPr/>
+        </p:nvPicPr>
+        <p:blipFill>
+          <a:blip r:embed="rId2">
+            <a:alphaModFix amt="20000"/>
+          </a:blip>
+          <a:srcRect t="2057" b="8622"/>
+          <a:stretch>
+            <a:fillRect/>
+          </a:stretch>
+        </p:blipFill>
+        <p:spPr>
+          <a:xfrm>
+            <a:off x="786014" y="1329642"/>
+            <a:ext cx="10723357" cy="5125987"/>
+          </a:xfrm>
+          <a:prstGeom prst="rect">
+            <a:avLst/>
+          </a:prstGeom>
+          <a:effectLst>
+            <a:softEdge rad="241300"/>
+          </a:effectLst>
+        </p:spPr>
+      </p:pic>
+      <p:sp>
+        <p:nvSpPr>
+          <p:cNvPr id="2" name="タイトル 1">
+            <a:extLst>
+              <a:ext uri="{FF2B5EF4-FFF2-40B4-BE49-F238E27FC236}">
+                <a16:creationId xmlns:a16="http://schemas.microsoft.com/office/drawing/2014/main" id="{C231FF74-E1FE-B9F4-2930-DC50319E09A9}"/>
+              </a:ext>
+            </a:extLst>
+          </p:cNvPr>
+          <p:cNvSpPr>
+            <a:spLocks noGrp="1"/>
+          </p:cNvSpPr>
+          <p:nvPr>
+            <p:ph type="title"/>
+          </p:nvPr>
+        </p:nvSpPr>
+        <p:spPr/>
+        <p:txBody>
+          <a:bodyPr>
+            <a:normAutofit/>
+          </a:bodyPr>
+          <a:lstStyle/>
+          <a:p>
+            <a:r>
+              <a:rPr kumimoji="1" lang="ja-JP" altLang="en-US" sz="6000" dirty="0"/>
+              <a:t>現</a:t>
+            </a:r>
+            <a:r>
+              <a:rPr kumimoji="1" lang="ja-JP" altLang="en-US" sz="5400" dirty="0"/>
+              <a:t>在私</a:t>
+            </a:r>
+            <a:r>
+              <a:rPr kumimoji="1" lang="ja-JP" altLang="en-US" dirty="0"/>
+              <a:t>が</a:t>
+            </a:r>
+            <a:r>
+              <a:rPr kumimoji="1" lang="ja-JP" altLang="en-US" sz="5400" dirty="0"/>
+              <a:t>開発中</a:t>
+            </a:r>
+            <a:r>
+              <a:rPr kumimoji="1" lang="ja-JP" altLang="en-US" dirty="0"/>
+              <a:t>の</a:t>
+            </a:r>
+            <a:r>
+              <a:rPr kumimoji="1" lang="ja-JP" altLang="en-US" sz="5400" dirty="0"/>
+              <a:t>リポジトリ</a:t>
+            </a:r>
+            <a:endParaRPr kumimoji="1" lang="ja-JP" altLang="en-US" sz="4800" dirty="0"/>
+          </a:p>
+        </p:txBody>
+      </p:sp>
+      <p:sp>
+        <p:nvSpPr>
+          <p:cNvPr id="4" name="スライド番号プレースホルダー 3">
+            <a:extLst>
+              <a:ext uri="{FF2B5EF4-FFF2-40B4-BE49-F238E27FC236}">
+                <a16:creationId xmlns:a16="http://schemas.microsoft.com/office/drawing/2014/main" id="{767CDCC5-2FDD-6F87-498A-94C5A2508D71}"/>
+              </a:ext>
+            </a:extLst>
+          </p:cNvPr>
+          <p:cNvSpPr>
+            <a:spLocks noGrp="1"/>
+          </p:cNvSpPr>
+          <p:nvPr>
+            <p:ph type="sldNum" sz="quarter" idx="10"/>
+          </p:nvPr>
+        </p:nvSpPr>
+        <p:spPr/>
+        <p:txBody>
+          <a:bodyPr/>
+          <a:lstStyle/>
+          <a:p>
+            <a:fld id="{7A0ED1C7-8A26-48CF-81C0-2A5ADFEC2E18}" type="slidenum">
+              <a:rPr lang="ja-JP" altLang="en-US" smtClean="0"/>
+              <a:pPr/>
+              <a:t>2</a:t>
+            </a:fld>
+            <a:endParaRPr lang="ja-JP" altLang="en-US" dirty="0">
+              <a:solidFill>
+                <a:schemeClr val="tx1"/>
+              </a:solidFill>
+            </a:endParaRPr>
+          </a:p>
+        </p:txBody>
+      </p:sp>
+      <p:sp>
+        <p:nvSpPr>
+          <p:cNvPr id="6" name="テキスト ボックス 5">
+            <a:extLst>
+              <a:ext uri="{FF2B5EF4-FFF2-40B4-BE49-F238E27FC236}">
+                <a16:creationId xmlns:a16="http://schemas.microsoft.com/office/drawing/2014/main" id="{75F76486-39CB-9131-219C-53ED0956A98C}"/>
+              </a:ext>
+            </a:extLst>
+          </p:cNvPr>
+          <p:cNvSpPr txBox="1"/>
+          <p:nvPr/>
+        </p:nvSpPr>
+        <p:spPr>
+          <a:xfrm>
+            <a:off x="1987412" y="5718951"/>
+            <a:ext cx="8320559" cy="461665"/>
+          </a:xfrm>
+          <a:prstGeom prst="rect">
+            <a:avLst/>
+          </a:prstGeom>
+          <a:noFill/>
+        </p:spPr>
+        <p:txBody>
+          <a:bodyPr wrap="square">
+            <a:spAutoFit/>
+          </a:bodyPr>
+          <a:lstStyle/>
+          <a:p>
+            <a:pPr algn="ctr"/>
+            <a:r>
+              <a:rPr lang="ja-JP" altLang="en-US" sz="2400" dirty="0">
+                <a:latin typeface="+mj-ea"/>
+                <a:ea typeface="+mj-ea"/>
+                <a:hlinkClick r:id="rId3"/>
+              </a:rPr>
+              <a:t>https://github.com/NumberZero-0621/wam-studio</a:t>
+            </a:r>
+            <a:endParaRPr lang="ja-JP" altLang="en-US" sz="2400" dirty="0">
+              <a:latin typeface="+mj-ea"/>
+              <a:ea typeface="+mj-ea"/>
+            </a:endParaRPr>
+          </a:p>
+        </p:txBody>
+      </p:sp>
+      <p:pic>
+        <p:nvPicPr>
+          <p:cNvPr id="7" name="Picture 2">
+            <a:extLst>
+              <a:ext uri="{FF2B5EF4-FFF2-40B4-BE49-F238E27FC236}">
+                <a16:creationId xmlns:a16="http://schemas.microsoft.com/office/drawing/2014/main" id="{A931FBB0-70F8-A00B-A92D-6163970042F4}"/>
+              </a:ext>
+            </a:extLst>
+          </p:cNvPr>
+          <p:cNvPicPr>
+            <a:picLocks noChangeAspect="1" noChangeArrowheads="1"/>
+          </p:cNvPicPr>
+          <p:nvPr/>
+        </p:nvPicPr>
+        <p:blipFill rotWithShape="1">
+          <a:blip r:embed="rId4">
+            <a:extLst>
+              <a:ext uri="{28A0092B-C50C-407E-A947-70E740481C1C}">
+                <a14:useLocalDpi xmlns:a14="http://schemas.microsoft.com/office/drawing/2010/main" val="0"/>
+              </a:ext>
+            </a:extLst>
+          </a:blip>
+          <a:srcRect l="3984" t="5904" r="3992" b="6185"/>
+          <a:stretch>
+            <a:fillRect/>
+          </a:stretch>
+        </p:blipFill>
+        <p:spPr bwMode="auto">
+          <a:xfrm>
+            <a:off x="3949431" y="1572122"/>
+            <a:ext cx="4309352" cy="4116698"/>
+          </a:xfrm>
+          <a:prstGeom prst="rect">
+            <a:avLst/>
+          </a:prstGeom>
+          <a:noFill/>
+          <a:extLst>
+            <a:ext uri="{909E8E84-426E-40DD-AFC4-6F175D3DCCD1}">
+              <a14:hiddenFill xmlns:a14="http://schemas.microsoft.com/office/drawing/2010/main">
+                <a:solidFill>
+                  <a:srgbClr val="FFFFFF"/>
+                </a:solidFill>
+              </a14:hiddenFill>
+            </a:ext>
+          </a:extLst>
+        </p:spPr>
+      </p:pic>
+    </p:spTree>
+    <p:extLst>
+      <p:ext uri="{BB962C8B-B14F-4D97-AF65-F5344CB8AC3E}">
+        <p14:creationId xmlns:p14="http://schemas.microsoft.com/office/powerpoint/2010/main" val="2093853378"/>
+      </p:ext>
+    </p:extLst>
+  </p:cSld>
+  <p:clrMapOvr>
+    <a:masterClrMapping/>
+  </p:clrMapOvr>
+</p:sld>
+</file>
+
+<file path=ppt/slides/slide20.xml><?xml version="1.0" encoding="utf-8"?>
 <p:sld xmlns:a="http://schemas.openxmlformats.org/drawingml/2006/main" xmlns:r="http://schemas.openxmlformats.org/officeDocument/2006/relationships" xmlns:p="http://schemas.openxmlformats.org/presentationml/2006/main" show="0">
   <p:cSld>
     <p:spTree>
@@ -8201,7 +11826,7 @@
             <a:fld id="{7A0ED1C7-8A26-48CF-81C0-2A5ADFEC2E18}" type="slidenum">
               <a:rPr lang="ja-JP" altLang="en-US" smtClean="0"/>
               <a:pPr/>
-              <a:t>12</a:t>
+              <a:t>20</a:t>
             </a:fld>
             <a:endParaRPr lang="ja-JP" altLang="en-US" dirty="0">
               <a:solidFill>
@@ -8591,7 +12216,7 @@
 </p:sld>
 </file>
 
-<file path=ppt/slides/slide13.xml><?xml version="1.0" encoding="utf-8"?>
+<file path=ppt/slides/slide21.xml><?xml version="1.0" encoding="utf-8"?>
 <p:sld xmlns:a="http://schemas.openxmlformats.org/drawingml/2006/main" xmlns:r="http://schemas.openxmlformats.org/officeDocument/2006/relationships" xmlns:p="http://schemas.openxmlformats.org/presentationml/2006/main" show="0">
   <p:cSld>
     <p:spTree>
@@ -8632,7 +12257,7 @@
             <a:fld id="{7A0ED1C7-8A26-48CF-81C0-2A5ADFEC2E18}" type="slidenum">
               <a:rPr lang="ja-JP" altLang="en-US" smtClean="0"/>
               <a:pPr/>
-              <a:t>13</a:t>
+              <a:t>21</a:t>
             </a:fld>
             <a:endParaRPr lang="ja-JP" altLang="en-US" dirty="0">
               <a:solidFill>
@@ -10246,7 +13871,7 @@
 </p:sld>
 </file>
 
-<file path=ppt/slides/slide14.xml><?xml version="1.0" encoding="utf-8"?>
+<file path=ppt/slides/slide22.xml><?xml version="1.0" encoding="utf-8"?>
 <p:sld xmlns:a="http://schemas.openxmlformats.org/drawingml/2006/main" xmlns:r="http://schemas.openxmlformats.org/officeDocument/2006/relationships" xmlns:p="http://schemas.openxmlformats.org/presentationml/2006/main" show="0">
   <p:cSld>
     <p:spTree>
@@ -10334,7 +13959,7 @@
             <a:fld id="{7A0ED1C7-8A26-48CF-81C0-2A5ADFEC2E18}" type="slidenum">
               <a:rPr lang="ja-JP" altLang="en-US" smtClean="0"/>
               <a:pPr/>
-              <a:t>14</a:t>
+              <a:t>22</a:t>
             </a:fld>
             <a:endParaRPr lang="ja-JP" altLang="en-US" dirty="0">
               <a:solidFill>
@@ -11943,7 +15568,7 @@
 </p:sld>
 </file>
 
-<file path=ppt/slides/slide15.xml><?xml version="1.0" encoding="utf-8"?>
+<file path=ppt/slides/slide23.xml><?xml version="1.0" encoding="utf-8"?>
 <p:sld xmlns:a="http://schemas.openxmlformats.org/drawingml/2006/main" xmlns:r="http://schemas.openxmlformats.org/officeDocument/2006/relationships" xmlns:p="http://schemas.openxmlformats.org/presentationml/2006/main" show="0">
   <p:cSld>
     <p:spTree>
@@ -12052,7 +15677,7 @@
             <a:fld id="{7A0ED1C7-8A26-48CF-81C0-2A5ADFEC2E18}" type="slidenum">
               <a:rPr lang="ja-JP" altLang="en-US" smtClean="0"/>
               <a:pPr/>
-              <a:t>15</a:t>
+              <a:t>23</a:t>
             </a:fld>
             <a:endParaRPr lang="ja-JP" altLang="en-US" dirty="0">
               <a:solidFill>
@@ -13569,7 +17194,7 @@
 </p:sld>
 </file>
 
-<file path=ppt/slides/slide16.xml><?xml version="1.0" encoding="utf-8"?>
+<file path=ppt/slides/slide24.xml><?xml version="1.0" encoding="utf-8"?>
 <p:sld xmlns:a="http://schemas.openxmlformats.org/drawingml/2006/main" xmlns:r="http://schemas.openxmlformats.org/officeDocument/2006/relationships" xmlns:p="http://schemas.openxmlformats.org/presentationml/2006/main" show="0">
   <p:cSld>
     <p:spTree>
@@ -13670,7 +17295,7 @@
             <a:fld id="{7A0ED1C7-8A26-48CF-81C0-2A5ADFEC2E18}" type="slidenum">
               <a:rPr lang="ja-JP" altLang="en-US" smtClean="0"/>
               <a:pPr/>
-              <a:t>16</a:t>
+              <a:t>24</a:t>
             </a:fld>
             <a:endParaRPr lang="ja-JP" altLang="en-US" dirty="0">
               <a:solidFill>
@@ -14051,7 +17676,7 @@
 </p:sld>
 </file>
 
-<file path=ppt/slides/slide17.xml><?xml version="1.0" encoding="utf-8"?>
+<file path=ppt/slides/slide25.xml><?xml version="1.0" encoding="utf-8"?>
 <p:sld xmlns:a="http://schemas.openxmlformats.org/drawingml/2006/main" xmlns:r="http://schemas.openxmlformats.org/officeDocument/2006/relationships" xmlns:p="http://schemas.openxmlformats.org/presentationml/2006/main" show="0">
   <p:cSld>
     <p:spTree>
@@ -14158,7 +17783,7 @@
             <a:fld id="{7A0ED1C7-8A26-48CF-81C0-2A5ADFEC2E18}" type="slidenum">
               <a:rPr lang="ja-JP" altLang="en-US" smtClean="0"/>
               <a:pPr/>
-              <a:t>17</a:t>
+              <a:t>25</a:t>
             </a:fld>
             <a:endParaRPr lang="ja-JP" altLang="en-US" dirty="0">
               <a:solidFill>
@@ -14558,7 +18183,7 @@
 </p:sld>
 </file>
 
-<file path=ppt/slides/slide18.xml><?xml version="1.0" encoding="utf-8"?>
+<file path=ppt/slides/slide26.xml><?xml version="1.0" encoding="utf-8"?>
 <p:sld xmlns:a="http://schemas.openxmlformats.org/drawingml/2006/main" xmlns:r="http://schemas.openxmlformats.org/officeDocument/2006/relationships" xmlns:p="http://schemas.openxmlformats.org/presentationml/2006/main" show="0">
   <p:cSld>
     <p:spTree>
@@ -14643,7 +18268,7 @@
             <a:fld id="{7A0ED1C7-8A26-48CF-81C0-2A5ADFEC2E18}" type="slidenum">
               <a:rPr lang="ja-JP" altLang="en-US" smtClean="0"/>
               <a:pPr/>
-              <a:t>18</a:t>
+              <a:t>26</a:t>
             </a:fld>
             <a:endParaRPr lang="ja-JP" altLang="en-US" dirty="0">
               <a:solidFill>
@@ -15265,7 +18890,7 @@
 </p:sld>
 </file>
 
-<file path=ppt/slides/slide19.xml><?xml version="1.0" encoding="utf-8"?>
+<file path=ppt/slides/slide27.xml><?xml version="1.0" encoding="utf-8"?>
 <p:sld xmlns:a="http://schemas.openxmlformats.org/drawingml/2006/main" xmlns:r="http://schemas.openxmlformats.org/officeDocument/2006/relationships" xmlns:p="http://schemas.openxmlformats.org/presentationml/2006/main" show="0">
   <p:cSld>
     <p:spTree>
@@ -15345,7 +18970,7 @@
             <a:fld id="{7A0ED1C7-8A26-48CF-81C0-2A5ADFEC2E18}" type="slidenum">
               <a:rPr lang="ja-JP" altLang="en-US" smtClean="0"/>
               <a:pPr/>
-              <a:t>19</a:t>
+              <a:t>27</a:t>
             </a:fld>
             <a:endParaRPr lang="ja-JP" altLang="en-US" dirty="0">
               <a:solidFill>
@@ -16050,249 +19675,7 @@
 </p:sld>
 </file>
 
-<file path=ppt/slides/slide2.xml><?xml version="1.0" encoding="utf-8"?>
-<p:sld xmlns:a="http://schemas.openxmlformats.org/drawingml/2006/main" xmlns:r="http://schemas.openxmlformats.org/officeDocument/2006/relationships" xmlns:p="http://schemas.openxmlformats.org/presentationml/2006/main">
-  <p:cSld>
-    <p:spTree>
-      <p:nvGrpSpPr>
-        <p:cNvPr id="1" name=""/>
-        <p:cNvGrpSpPr/>
-        <p:nvPr/>
-      </p:nvGrpSpPr>
-      <p:grpSpPr>
-        <a:xfrm>
-          <a:off x="0" y="0"/>
-          <a:ext cx="0" cy="0"/>
-          <a:chOff x="0" y="0"/>
-          <a:chExt cx="0" cy="0"/>
-        </a:xfrm>
-      </p:grpSpPr>
-      <p:pic>
-        <p:nvPicPr>
-          <p:cNvPr id="9" name="図 8" descr="モニター, スコアボード, 画面, 座る が含まれている画像">
-            <a:extLst>
-              <a:ext uri="{FF2B5EF4-FFF2-40B4-BE49-F238E27FC236}">
-                <a16:creationId xmlns:a16="http://schemas.microsoft.com/office/drawing/2014/main" id="{947CBF56-C379-06E6-0816-EF099A07A595}"/>
-              </a:ext>
-            </a:extLst>
-          </p:cNvPr>
-          <p:cNvPicPr>
-            <a:picLocks noChangeAspect="1"/>
-          </p:cNvPicPr>
-          <p:nvPr/>
-        </p:nvPicPr>
-        <p:blipFill>
-          <a:blip r:embed="rId2">
-            <a:alphaModFix amt="20000"/>
-          </a:blip>
-          <a:srcRect t="2057" b="8622"/>
-          <a:stretch>
-            <a:fillRect/>
-          </a:stretch>
-        </p:blipFill>
-        <p:spPr>
-          <a:xfrm>
-            <a:off x="786014" y="1329642"/>
-            <a:ext cx="10723357" cy="5125987"/>
-          </a:xfrm>
-          <a:prstGeom prst="rect">
-            <a:avLst/>
-          </a:prstGeom>
-          <a:effectLst>
-            <a:softEdge rad="241300"/>
-          </a:effectLst>
-        </p:spPr>
-      </p:pic>
-      <p:sp>
-        <p:nvSpPr>
-          <p:cNvPr id="2" name="タイトル 1">
-            <a:extLst>
-              <a:ext uri="{FF2B5EF4-FFF2-40B4-BE49-F238E27FC236}">
-                <a16:creationId xmlns:a16="http://schemas.microsoft.com/office/drawing/2014/main" id="{C231FF74-E1FE-B9F4-2930-DC50319E09A9}"/>
-              </a:ext>
-            </a:extLst>
-          </p:cNvPr>
-          <p:cNvSpPr>
-            <a:spLocks noGrp="1"/>
-          </p:cNvSpPr>
-          <p:nvPr>
-            <p:ph type="title"/>
-          </p:nvPr>
-        </p:nvSpPr>
-        <p:spPr/>
-        <p:txBody>
-          <a:bodyPr>
-            <a:normAutofit/>
-          </a:bodyPr>
-          <a:lstStyle/>
-          <a:p>
-            <a:r>
-              <a:rPr kumimoji="1" lang="ja-JP" altLang="en-US" sz="6000" dirty="0"/>
-              <a:t>現</a:t>
-            </a:r>
-            <a:r>
-              <a:rPr kumimoji="1" lang="ja-JP" altLang="en-US" sz="5400" dirty="0"/>
-              <a:t>在私</a:t>
-            </a:r>
-            <a:r>
-              <a:rPr kumimoji="1" lang="ja-JP" altLang="en-US" dirty="0"/>
-              <a:t>が</a:t>
-            </a:r>
-            <a:r>
-              <a:rPr kumimoji="1" lang="ja-JP" altLang="en-US" sz="5400" dirty="0"/>
-              <a:t>開発中</a:t>
-            </a:r>
-            <a:r>
-              <a:rPr kumimoji="1" lang="ja-JP" altLang="en-US" dirty="0"/>
-              <a:t>の</a:t>
-            </a:r>
-            <a:r>
-              <a:rPr kumimoji="1" lang="ja-JP" altLang="en-US" sz="5400" dirty="0"/>
-              <a:t>リポジトリ</a:t>
-            </a:r>
-            <a:endParaRPr kumimoji="1" lang="ja-JP" altLang="en-US" sz="4800" dirty="0"/>
-          </a:p>
-        </p:txBody>
-      </p:sp>
-      <p:sp>
-        <p:nvSpPr>
-          <p:cNvPr id="4" name="スライド番号プレースホルダー 3">
-            <a:extLst>
-              <a:ext uri="{FF2B5EF4-FFF2-40B4-BE49-F238E27FC236}">
-                <a16:creationId xmlns:a16="http://schemas.microsoft.com/office/drawing/2014/main" id="{767CDCC5-2FDD-6F87-498A-94C5A2508D71}"/>
-              </a:ext>
-            </a:extLst>
-          </p:cNvPr>
-          <p:cNvSpPr>
-            <a:spLocks noGrp="1"/>
-          </p:cNvSpPr>
-          <p:nvPr>
-            <p:ph type="sldNum" sz="quarter" idx="10"/>
-          </p:nvPr>
-        </p:nvSpPr>
-        <p:spPr/>
-        <p:txBody>
-          <a:bodyPr/>
-          <a:lstStyle/>
-          <a:p>
-            <a:fld id="{7A0ED1C7-8A26-48CF-81C0-2A5ADFEC2E18}" type="slidenum">
-              <a:rPr lang="ja-JP" altLang="en-US" smtClean="0"/>
-              <a:pPr/>
-              <a:t>2</a:t>
-            </a:fld>
-            <a:endParaRPr lang="ja-JP" altLang="en-US" dirty="0">
-              <a:solidFill>
-                <a:schemeClr val="tx1"/>
-              </a:solidFill>
-            </a:endParaRPr>
-          </a:p>
-        </p:txBody>
-      </p:sp>
-      <p:sp>
-        <p:nvSpPr>
-          <p:cNvPr id="6" name="テキスト ボックス 5">
-            <a:extLst>
-              <a:ext uri="{FF2B5EF4-FFF2-40B4-BE49-F238E27FC236}">
-                <a16:creationId xmlns:a16="http://schemas.microsoft.com/office/drawing/2014/main" id="{75F76486-39CB-9131-219C-53ED0956A98C}"/>
-              </a:ext>
-            </a:extLst>
-          </p:cNvPr>
-          <p:cNvSpPr txBox="1"/>
-          <p:nvPr/>
-        </p:nvSpPr>
-        <p:spPr>
-          <a:xfrm>
-            <a:off x="1987412" y="5718951"/>
-            <a:ext cx="8320559" cy="461665"/>
-          </a:xfrm>
-          <a:prstGeom prst="rect">
-            <a:avLst/>
-          </a:prstGeom>
-          <a:noFill/>
-        </p:spPr>
-        <p:txBody>
-          <a:bodyPr wrap="square">
-            <a:spAutoFit/>
-          </a:bodyPr>
-          <a:lstStyle/>
-          <a:p>
-            <a:pPr algn="ctr"/>
-            <a:r>
-              <a:rPr lang="ja-JP" altLang="en-US" sz="2400" dirty="0">
-                <a:latin typeface="+mj-ea"/>
-                <a:ea typeface="+mj-ea"/>
-                <a:hlinkClick r:id="rId3"/>
-              </a:rPr>
-              <a:t>https://github.com/NumberZero-0621/wam-studio</a:t>
-            </a:r>
-            <a:endParaRPr lang="ja-JP" altLang="en-US" sz="2400" dirty="0">
-              <a:latin typeface="+mj-ea"/>
-              <a:ea typeface="+mj-ea"/>
-            </a:endParaRPr>
-          </a:p>
-        </p:txBody>
-      </p:sp>
-      <p:pic>
-        <p:nvPicPr>
-          <p:cNvPr id="7" name="Picture 2">
-            <a:extLst>
-              <a:ext uri="{FF2B5EF4-FFF2-40B4-BE49-F238E27FC236}">
-                <a16:creationId xmlns:a16="http://schemas.microsoft.com/office/drawing/2014/main" id="{A931FBB0-70F8-A00B-A92D-6163970042F4}"/>
-              </a:ext>
-            </a:extLst>
-          </p:cNvPr>
-          <p:cNvPicPr>
-            <a:picLocks noChangeAspect="1" noChangeArrowheads="1"/>
-          </p:cNvPicPr>
-          <p:nvPr/>
-        </p:nvPicPr>
-        <p:blipFill rotWithShape="1">
-          <a:blip r:embed="rId4">
-            <a:extLst>
-              <a:ext uri="{28A0092B-C50C-407E-A947-70E740481C1C}">
-                <a14:useLocalDpi xmlns:a14="http://schemas.microsoft.com/office/drawing/2010/main" val="0"/>
-              </a:ext>
-            </a:extLst>
-          </a:blip>
-          <a:srcRect l="3984" t="5904" r="3992" b="6185"/>
-          <a:stretch>
-            <a:fillRect/>
-          </a:stretch>
-        </p:blipFill>
-        <p:spPr bwMode="auto">
-          <a:xfrm>
-            <a:off x="3949431" y="1572122"/>
-            <a:ext cx="4309352" cy="4116698"/>
-          </a:xfrm>
-          <a:prstGeom prst="rect">
-            <a:avLst/>
-          </a:prstGeom>
-          <a:noFill/>
-          <a:extLst>
-            <a:ext uri="{909E8E84-426E-40DD-AFC4-6F175D3DCCD1}">
-              <a14:hiddenFill xmlns:a14="http://schemas.microsoft.com/office/drawing/2010/main">
-                <a:solidFill>
-                  <a:srgbClr val="FFFFFF"/>
-                </a:solidFill>
-              </a14:hiddenFill>
-            </a:ext>
-          </a:extLst>
-        </p:spPr>
-      </p:pic>
-    </p:spTree>
-    <p:extLst>
-      <p:ext uri="{BB962C8B-B14F-4D97-AF65-F5344CB8AC3E}">
-        <p14:creationId xmlns:p14="http://schemas.microsoft.com/office/powerpoint/2010/main" val="2093853378"/>
-      </p:ext>
-    </p:extLst>
-  </p:cSld>
-  <p:clrMapOvr>
-    <a:masterClrMapping/>
-  </p:clrMapOvr>
-</p:sld>
-</file>
-
-<file path=ppt/slides/slide20.xml><?xml version="1.0" encoding="utf-8"?>
+<file path=ppt/slides/slide28.xml><?xml version="1.0" encoding="utf-8"?>
 <p:sld xmlns:a="http://schemas.openxmlformats.org/drawingml/2006/main" xmlns:r="http://schemas.openxmlformats.org/officeDocument/2006/relationships" xmlns:p="http://schemas.openxmlformats.org/presentationml/2006/main" show="0">
   <p:cSld>
     <p:spTree>
@@ -16378,7 +19761,7 @@
             <a:fld id="{7A0ED1C7-8A26-48CF-81C0-2A5ADFEC2E18}" type="slidenum">
               <a:rPr lang="ja-JP" altLang="en-US" smtClean="0"/>
               <a:pPr/>
-              <a:t>20</a:t>
+              <a:t>28</a:t>
             </a:fld>
             <a:endParaRPr lang="ja-JP" altLang="en-US" dirty="0">
               <a:solidFill>
@@ -16937,7 +20320,7 @@
 </p:sld>
 </file>
 
-<file path=ppt/slides/slide21.xml><?xml version="1.0" encoding="utf-8"?>
+<file path=ppt/slides/slide29.xml><?xml version="1.0" encoding="utf-8"?>
 <p:sld xmlns:a="http://schemas.openxmlformats.org/drawingml/2006/main" xmlns:r="http://schemas.openxmlformats.org/officeDocument/2006/relationships" xmlns:p="http://schemas.openxmlformats.org/presentationml/2006/main" show="0">
   <p:cSld>
     <p:spTree>
@@ -17012,7 +20395,7 @@
             <a:fld id="{7A0ED1C7-8A26-48CF-81C0-2A5ADFEC2E18}" type="slidenum">
               <a:rPr lang="ja-JP" altLang="en-US" smtClean="0"/>
               <a:pPr/>
-              <a:t>21</a:t>
+              <a:t>29</a:t>
             </a:fld>
             <a:endParaRPr lang="ja-JP" altLang="en-US" dirty="0">
               <a:solidFill>
@@ -17976,7 +21359,373 @@
 </p:sld>
 </file>
 
-<file path=ppt/slides/slide22.xml><?xml version="1.0" encoding="utf-8"?>
+<file path=ppt/slides/slide3.xml><?xml version="1.0" encoding="utf-8"?>
+<p:sld xmlns:a="http://schemas.openxmlformats.org/drawingml/2006/main" xmlns:r="http://schemas.openxmlformats.org/officeDocument/2006/relationships" xmlns:p="http://schemas.openxmlformats.org/presentationml/2006/main">
+  <p:cSld>
+    <p:spTree>
+      <p:nvGrpSpPr>
+        <p:cNvPr id="1" name=""/>
+        <p:cNvGrpSpPr/>
+        <p:nvPr/>
+      </p:nvGrpSpPr>
+      <p:grpSpPr>
+        <a:xfrm>
+          <a:off x="0" y="0"/>
+          <a:ext cx="0" cy="0"/>
+          <a:chOff x="0" y="0"/>
+          <a:chExt cx="0" cy="0"/>
+        </a:xfrm>
+      </p:grpSpPr>
+      <p:sp>
+        <p:nvSpPr>
+          <p:cNvPr id="2" name="タイトル 1">
+            <a:extLst>
+              <a:ext uri="{FF2B5EF4-FFF2-40B4-BE49-F238E27FC236}">
+                <a16:creationId xmlns:a16="http://schemas.microsoft.com/office/drawing/2014/main" id="{1ADC82C8-EC7E-7517-D63E-2879210F9391}"/>
+              </a:ext>
+            </a:extLst>
+          </p:cNvPr>
+          <p:cNvSpPr>
+            <a:spLocks noGrp="1"/>
+          </p:cNvSpPr>
+          <p:nvPr>
+            <p:ph type="title"/>
+          </p:nvPr>
+        </p:nvSpPr>
+        <p:spPr/>
+        <p:txBody>
+          <a:bodyPr>
+            <a:normAutofit/>
+          </a:bodyPr>
+          <a:lstStyle/>
+          <a:p>
+            <a:r>
+              <a:rPr lang="ja-JP" altLang="en-US" dirty="0"/>
+              <a:t>現時点</a:t>
+            </a:r>
+            <a:r>
+              <a:rPr lang="ja-JP" altLang="en-US" sz="4000" dirty="0"/>
+              <a:t>で</a:t>
+            </a:r>
+            <a:r>
+              <a:rPr lang="ja-JP" altLang="en-US" sz="6000" dirty="0"/>
+              <a:t>本</a:t>
+            </a:r>
+            <a:r>
+              <a:rPr lang="ja-JP" altLang="en-US" sz="4800" dirty="0"/>
+              <a:t>研究</a:t>
+            </a:r>
+            <a:r>
+              <a:rPr lang="ja-JP" altLang="en-US" dirty="0"/>
+              <a:t>の</a:t>
+            </a:r>
+            <a:r>
+              <a:rPr lang="ja-JP" altLang="en-US" sz="5400" dirty="0"/>
+              <a:t>対象</a:t>
+            </a:r>
+            <a:r>
+              <a:rPr lang="ja-JP" altLang="en-US" dirty="0"/>
+              <a:t>となる</a:t>
+            </a:r>
+            <a:r>
+              <a:rPr lang="ja-JP" altLang="en-US" sz="4800" dirty="0"/>
+              <a:t>ユーザー層</a:t>
+            </a:r>
+            <a:endParaRPr kumimoji="1" lang="ja-JP" altLang="en-US" dirty="0"/>
+          </a:p>
+        </p:txBody>
+      </p:sp>
+      <p:sp>
+        <p:nvSpPr>
+          <p:cNvPr id="3" name="コンテンツ プレースホルダー 2">
+            <a:extLst>
+              <a:ext uri="{FF2B5EF4-FFF2-40B4-BE49-F238E27FC236}">
+                <a16:creationId xmlns:a16="http://schemas.microsoft.com/office/drawing/2014/main" id="{49671C90-B829-EB66-151A-4CD196562D5C}"/>
+              </a:ext>
+            </a:extLst>
+          </p:cNvPr>
+          <p:cNvSpPr>
+            <a:spLocks noGrp="1"/>
+          </p:cNvSpPr>
+          <p:nvPr>
+            <p:ph idx="1"/>
+          </p:nvPr>
+        </p:nvSpPr>
+        <p:spPr>
+          <a:xfrm>
+            <a:off x="893173" y="1494846"/>
+            <a:ext cx="10536828" cy="4998029"/>
+          </a:xfrm>
+        </p:spPr>
+        <p:txBody>
+          <a:bodyPr>
+            <a:normAutofit/>
+          </a:bodyPr>
+          <a:lstStyle/>
+          <a:p>
+            <a:pPr>
+              <a:lnSpc>
+                <a:spcPct val="100000"/>
+              </a:lnSpc>
+            </a:pPr>
+            <a:r>
+              <a:rPr kumimoji="1" lang="en-US" altLang="ja-JP" sz="4000" dirty="0">
+                <a:latin typeface="モボ-SemiBold" panose="02000700000000000000" pitchFamily="50" charset="-128"/>
+                <a:ea typeface="モボ-SemiBold" panose="02000700000000000000" pitchFamily="50" charset="-128"/>
+              </a:rPr>
+              <a:t>DTM</a:t>
+            </a:r>
+            <a:r>
+              <a:rPr kumimoji="1" lang="ja-JP" altLang="en-US" sz="4000" dirty="0">
+                <a:latin typeface="モボ-SemiBold" panose="02000700000000000000" pitchFamily="50" charset="-128"/>
+                <a:ea typeface="モボ-SemiBold" panose="02000700000000000000" pitchFamily="50" charset="-128"/>
+              </a:rPr>
+              <a:t>にある程度以上慣れ親しんでいる人</a:t>
+            </a:r>
+            <a:endParaRPr kumimoji="1" lang="en-US" altLang="ja-JP" sz="4000" dirty="0">
+              <a:latin typeface="モボ-SemiBold" panose="02000700000000000000" pitchFamily="50" charset="-128"/>
+              <a:ea typeface="モボ-SemiBold" panose="02000700000000000000" pitchFamily="50" charset="-128"/>
+            </a:endParaRPr>
+          </a:p>
+          <a:p>
+            <a:pPr lvl="1">
+              <a:lnSpc>
+                <a:spcPct val="100000"/>
+              </a:lnSpc>
+            </a:pPr>
+            <a:r>
+              <a:rPr lang="ja-JP" altLang="en-US" sz="3600" dirty="0"/>
+              <a:t>プログラミングの経験は無くても良い</a:t>
+            </a:r>
+            <a:endParaRPr lang="en-US" altLang="ja-JP" sz="3600" dirty="0"/>
+          </a:p>
+          <a:p>
+            <a:pPr lvl="1">
+              <a:lnSpc>
+                <a:spcPct val="100000"/>
+              </a:lnSpc>
+            </a:pPr>
+            <a:r>
+              <a:rPr kumimoji="1" lang="ja-JP" altLang="en-US" sz="3600" dirty="0"/>
+              <a:t>これまでに他の</a:t>
+            </a:r>
+            <a:r>
+              <a:rPr kumimoji="1" lang="en-US" altLang="ja-JP" sz="3600" dirty="0"/>
+              <a:t>DAW</a:t>
+            </a:r>
+            <a:r>
+              <a:rPr kumimoji="1" lang="ja-JP" altLang="en-US" sz="3600" dirty="0"/>
+              <a:t>を使ったことがある</a:t>
+            </a:r>
+            <a:endParaRPr kumimoji="1" lang="en-US" altLang="ja-JP" sz="3600" dirty="0"/>
+          </a:p>
+          <a:p>
+            <a:pPr lvl="2">
+              <a:lnSpc>
+                <a:spcPct val="100000"/>
+              </a:lnSpc>
+            </a:pPr>
+            <a:r>
+              <a:rPr lang="en-US" altLang="ja-JP" sz="3200" dirty="0"/>
+              <a:t>DAW</a:t>
+            </a:r>
+            <a:r>
+              <a:rPr lang="ja-JP" altLang="en-US" sz="3200" dirty="0"/>
+              <a:t>に対して何かしらの不満を抱えている</a:t>
+            </a:r>
+            <a:endParaRPr lang="en-US" altLang="ja-JP" sz="3200" dirty="0"/>
+          </a:p>
+          <a:p>
+            <a:pPr lvl="2">
+              <a:lnSpc>
+                <a:spcPct val="100000"/>
+              </a:lnSpc>
+            </a:pPr>
+            <a:r>
+              <a:rPr kumimoji="1" lang="ja-JP" altLang="en-US" sz="3200" dirty="0"/>
+              <a:t>以前使っていた</a:t>
+            </a:r>
+            <a:r>
+              <a:rPr kumimoji="1" lang="en-US" altLang="ja-JP" sz="3200" dirty="0"/>
+              <a:t>DAW</a:t>
+            </a:r>
+            <a:r>
+              <a:rPr kumimoji="1" lang="ja-JP" altLang="en-US" sz="3200" dirty="0"/>
+              <a:t>が使えなくなった</a:t>
+            </a:r>
+            <a:endParaRPr kumimoji="1" lang="en-US" altLang="ja-JP" sz="3200" dirty="0"/>
+          </a:p>
+          <a:p>
+            <a:pPr marL="914400" lvl="2" indent="0">
+              <a:lnSpc>
+                <a:spcPct val="100000"/>
+              </a:lnSpc>
+              <a:buNone/>
+            </a:pPr>
+            <a:r>
+              <a:rPr lang="en-US" altLang="ja-JP" sz="3200" dirty="0"/>
+              <a:t>								       </a:t>
+            </a:r>
+            <a:r>
+              <a:rPr lang="ja-JP" altLang="en-US" sz="3200" dirty="0"/>
+              <a:t>等</a:t>
+            </a:r>
+            <a:endParaRPr lang="en-US" altLang="ja-JP" sz="3200" dirty="0"/>
+          </a:p>
+          <a:p>
+            <a:pPr>
+              <a:lnSpc>
+                <a:spcPct val="100000"/>
+              </a:lnSpc>
+            </a:pPr>
+            <a:r>
+              <a:rPr lang="ja-JP" altLang="en-US" sz="4000" dirty="0"/>
+              <a:t>それ以外でも創作をやっている方なら</a:t>
+            </a:r>
+            <a:br>
+              <a:rPr lang="en-US" altLang="ja-JP" sz="4000" dirty="0"/>
+            </a:br>
+            <a:r>
+              <a:rPr lang="ja-JP" altLang="en-US" sz="4000" dirty="0"/>
+              <a:t>興味を持っていただけるかもしれない</a:t>
+            </a:r>
+            <a:endParaRPr lang="en-US" altLang="ja-JP" sz="4000" dirty="0"/>
+          </a:p>
+        </p:txBody>
+      </p:sp>
+      <p:sp>
+        <p:nvSpPr>
+          <p:cNvPr id="4" name="スライド番号プレースホルダー 3">
+            <a:extLst>
+              <a:ext uri="{FF2B5EF4-FFF2-40B4-BE49-F238E27FC236}">
+                <a16:creationId xmlns:a16="http://schemas.microsoft.com/office/drawing/2014/main" id="{A9686BD0-8088-ACEA-977B-A986D82A1E5E}"/>
+              </a:ext>
+            </a:extLst>
+          </p:cNvPr>
+          <p:cNvSpPr>
+            <a:spLocks noGrp="1"/>
+          </p:cNvSpPr>
+          <p:nvPr>
+            <p:ph type="sldNum" sz="quarter" idx="10"/>
+          </p:nvPr>
+        </p:nvSpPr>
+        <p:spPr/>
+        <p:txBody>
+          <a:bodyPr/>
+          <a:lstStyle/>
+          <a:p>
+            <a:fld id="{7A0ED1C7-8A26-48CF-81C0-2A5ADFEC2E18}" type="slidenum">
+              <a:rPr lang="ja-JP" altLang="en-US" smtClean="0"/>
+              <a:pPr/>
+              <a:t>3</a:t>
+            </a:fld>
+            <a:endParaRPr lang="ja-JP" altLang="en-US" dirty="0">
+              <a:solidFill>
+                <a:schemeClr val="tx1"/>
+              </a:solidFill>
+            </a:endParaRPr>
+          </a:p>
+        </p:txBody>
+      </p:sp>
+      <p:sp>
+        <p:nvSpPr>
+          <p:cNvPr id="5" name="テキスト ボックス 4">
+            <a:extLst>
+              <a:ext uri="{FF2B5EF4-FFF2-40B4-BE49-F238E27FC236}">
+                <a16:creationId xmlns:a16="http://schemas.microsoft.com/office/drawing/2014/main" id="{E669767C-42D3-F22A-C1B0-A79CC1B2C503}"/>
+              </a:ext>
+            </a:extLst>
+          </p:cNvPr>
+          <p:cNvSpPr txBox="1"/>
+          <p:nvPr/>
+        </p:nvSpPr>
+        <p:spPr>
+          <a:xfrm>
+            <a:off x="7326705" y="872418"/>
+            <a:ext cx="3826327" cy="276999"/>
+          </a:xfrm>
+          <a:prstGeom prst="rect">
+            <a:avLst/>
+          </a:prstGeom>
+          <a:noFill/>
+        </p:spPr>
+        <p:txBody>
+          <a:bodyPr wrap="square">
+            <a:spAutoFit/>
+          </a:bodyPr>
+          <a:lstStyle/>
+          <a:p>
+            <a:r>
+              <a:rPr lang="ja-JP" altLang="en-US" sz="1200" dirty="0">
+                <a:hlinkClick r:id="rId2"/>
+              </a:rPr>
+              <a:t>https://github.com/NumberZero-0621/wam-studio</a:t>
+            </a:r>
+            <a:endParaRPr lang="ja-JP" altLang="en-US" sz="1200" dirty="0"/>
+          </a:p>
+        </p:txBody>
+      </p:sp>
+      <p:pic>
+        <p:nvPicPr>
+          <p:cNvPr id="6" name="Picture 2">
+            <a:extLst>
+              <a:ext uri="{FF2B5EF4-FFF2-40B4-BE49-F238E27FC236}">
+                <a16:creationId xmlns:a16="http://schemas.microsoft.com/office/drawing/2014/main" id="{43D55736-86BB-9F38-4DD8-ED4E2FFA98D3}"/>
+              </a:ext>
+            </a:extLst>
+          </p:cNvPr>
+          <p:cNvPicPr>
+            <a:picLocks noChangeAspect="1" noChangeArrowheads="1"/>
+          </p:cNvPicPr>
+          <p:nvPr/>
+        </p:nvPicPr>
+        <p:blipFill rotWithShape="1">
+          <a:blip r:embed="rId3">
+            <a:extLst>
+              <a:ext uri="{28A0092B-C50C-407E-A947-70E740481C1C}">
+                <a14:useLocalDpi xmlns:a14="http://schemas.microsoft.com/office/drawing/2010/main" val="0"/>
+              </a:ext>
+            </a:extLst>
+          </a:blip>
+          <a:srcRect l="7937" t="5904" r="9056" b="6185"/>
+          <a:stretch>
+            <a:fillRect/>
+          </a:stretch>
+        </p:blipFill>
+        <p:spPr bwMode="auto">
+          <a:xfrm>
+            <a:off x="11100280" y="61498"/>
+            <a:ext cx="1002323" cy="1061543"/>
+          </a:xfrm>
+          <a:prstGeom prst="rect">
+            <a:avLst/>
+          </a:prstGeom>
+          <a:noFill/>
+          <a:extLst>
+            <a:ext uri="{909E8E84-426E-40DD-AFC4-6F175D3DCCD1}">
+              <a14:hiddenFill xmlns:a14="http://schemas.microsoft.com/office/drawing/2010/main">
+                <a:solidFill>
+                  <a:srgbClr val="FFFFFF"/>
+                </a:solidFill>
+              </a14:hiddenFill>
+            </a:ext>
+          </a:extLst>
+        </p:spPr>
+      </p:pic>
+    </p:spTree>
+    <p:extLst>
+      <p:ext uri="{BB962C8B-B14F-4D97-AF65-F5344CB8AC3E}">
+        <p14:creationId xmlns:p14="http://schemas.microsoft.com/office/powerpoint/2010/main" val="738906218"/>
+      </p:ext>
+    </p:extLst>
+  </p:cSld>
+  <p:clrMapOvr>
+    <a:masterClrMapping/>
+  </p:clrMapOvr>
+</p:sld>
+</file>
+
+<file path=ppt/slides/slide30.xml><?xml version="1.0" encoding="utf-8"?>
 <p:sld xmlns:a="http://schemas.openxmlformats.org/drawingml/2006/main" xmlns:r="http://schemas.openxmlformats.org/officeDocument/2006/relationships" xmlns:p="http://schemas.openxmlformats.org/presentationml/2006/main" show="0">
   <p:cSld>
     <p:spTree>
@@ -18068,7 +21817,7 @@
             <a:fld id="{7A0ED1C7-8A26-48CF-81C0-2A5ADFEC2E18}" type="slidenum">
               <a:rPr lang="ja-JP" altLang="en-US" smtClean="0"/>
               <a:pPr/>
-              <a:t>22</a:t>
+              <a:t>30</a:t>
             </a:fld>
             <a:endParaRPr lang="ja-JP" altLang="en-US" dirty="0">
               <a:solidFill>
@@ -19597,7 +23346,7 @@
 </p:sld>
 </file>
 
-<file path=ppt/slides/slide3.xml><?xml version="1.0" encoding="utf-8"?>
+<file path=ppt/slides/slide4.xml><?xml version="1.0" encoding="utf-8"?>
 <p:sld xmlns:a="http://schemas.openxmlformats.org/drawingml/2006/main" xmlns:r="http://schemas.openxmlformats.org/officeDocument/2006/relationships" xmlns:p="http://schemas.openxmlformats.org/presentationml/2006/main">
   <p:cSld>
     <p:spTree>
@@ -19690,7 +23439,7 @@
             <a:fld id="{7A0ED1C7-8A26-48CF-81C0-2A5ADFEC2E18}" type="slidenum">
               <a:rPr lang="ja-JP" altLang="en-US" smtClean="0"/>
               <a:pPr/>
-              <a:t>3</a:t>
+              <a:t>4</a:t>
             </a:fld>
             <a:endParaRPr lang="ja-JP" altLang="en-US" dirty="0">
               <a:solidFill>
@@ -22382,6 +26131,91 @@
           </a:p>
         </p:txBody>
       </p:sp>
+      <p:sp>
+        <p:nvSpPr>
+          <p:cNvPr id="3" name="テキスト ボックス 2">
+            <a:extLst>
+              <a:ext uri="{FF2B5EF4-FFF2-40B4-BE49-F238E27FC236}">
+                <a16:creationId xmlns:a16="http://schemas.microsoft.com/office/drawing/2014/main" id="{C9B30B60-A21F-89E2-662C-09126A471066}"/>
+              </a:ext>
+            </a:extLst>
+          </p:cNvPr>
+          <p:cNvSpPr txBox="1"/>
+          <p:nvPr/>
+        </p:nvSpPr>
+        <p:spPr>
+          <a:xfrm>
+            <a:off x="7326705" y="872418"/>
+            <a:ext cx="3826327" cy="276999"/>
+          </a:xfrm>
+          <a:prstGeom prst="rect">
+            <a:avLst/>
+          </a:prstGeom>
+          <a:noFill/>
+        </p:spPr>
+        <p:txBody>
+          <a:bodyPr wrap="square">
+            <a:spAutoFit/>
+          </a:bodyPr>
+          <a:lstStyle/>
+          <a:p>
+            <a:r>
+              <a:rPr lang="ja-JP" altLang="en-US" sz="1200" dirty="0">
+                <a:hlinkClick r:id="rId15"/>
+              </a:rPr>
+              <a:t>https://github.com/NumberZero-0621/wam-studio</a:t>
+            </a:r>
+            <a:endParaRPr lang="ja-JP" altLang="en-US" sz="1200" dirty="0"/>
+          </a:p>
+        </p:txBody>
+      </p:sp>
+      <p:pic>
+        <p:nvPicPr>
+          <p:cNvPr id="5" name="Picture 2">
+            <a:extLst>
+              <a:ext uri="{FF2B5EF4-FFF2-40B4-BE49-F238E27FC236}">
+                <a16:creationId xmlns:a16="http://schemas.microsoft.com/office/drawing/2014/main" id="{CBBA3A2D-AF7A-2DB8-79B3-FFEA980A3322}"/>
+              </a:ext>
+            </a:extLst>
+          </p:cNvPr>
+          <p:cNvPicPr>
+            <a:picLocks noChangeAspect="1" noChangeArrowheads="1"/>
+          </p:cNvPicPr>
+          <p:nvPr/>
+        </p:nvPicPr>
+        <p:blipFill rotWithShape="1">
+          <a:blip r:embed="rId16">
+            <a:extLst>
+              <a:ext uri="{28A0092B-C50C-407E-A947-70E740481C1C}">
+                <a14:useLocalDpi xmlns:a14="http://schemas.microsoft.com/office/drawing/2010/main" val="0"/>
+              </a:ext>
+            </a:extLst>
+          </a:blip>
+          <a:srcRect l="7937" t="5904" r="9056" b="6185"/>
+          <a:stretch>
+            <a:fillRect/>
+          </a:stretch>
+        </p:blipFill>
+        <p:spPr bwMode="auto">
+          <a:xfrm>
+            <a:off x="11100280" y="61498"/>
+            <a:ext cx="1002323" cy="1061543"/>
+          </a:xfrm>
+          <a:prstGeom prst="rect">
+            <a:avLst/>
+          </a:prstGeom>
+          <a:noFill/>
+          <a:extLst>
+            <a:ext uri="{909E8E84-426E-40DD-AFC4-6F175D3DCCD1}">
+              <a14:hiddenFill xmlns:a14="http://schemas.microsoft.com/office/drawing/2010/main">
+                <a:solidFill>
+                  <a:srgbClr val="FFFFFF"/>
+                </a:solidFill>
+              </a14:hiddenFill>
+            </a:ext>
+          </a:extLst>
+        </p:spPr>
+      </p:pic>
     </p:spTree>
     <p:extLst>
       <p:ext uri="{BB962C8B-B14F-4D97-AF65-F5344CB8AC3E}">
@@ -22658,7 +26492,7 @@
 </p:sld>
 </file>
 
-<file path=ppt/slides/slide4.xml><?xml version="1.0" encoding="utf-8"?>
+<file path=ppt/slides/slide5.xml><?xml version="1.0" encoding="utf-8"?>
 <p:sld xmlns:a="http://schemas.openxmlformats.org/drawingml/2006/main" xmlns:r="http://schemas.openxmlformats.org/officeDocument/2006/relationships" xmlns:p="http://schemas.openxmlformats.org/presentationml/2006/main">
   <p:cSld>
     <p:spTree>
@@ -22745,7 +26579,7 @@
             <a:fld id="{7A0ED1C7-8A26-48CF-81C0-2A5ADFEC2E18}" type="slidenum">
               <a:rPr lang="ja-JP" altLang="en-US" smtClean="0"/>
               <a:pPr/>
-              <a:t>4</a:t>
+              <a:t>5</a:t>
             </a:fld>
             <a:endParaRPr lang="ja-JP" altLang="en-US" dirty="0">
               <a:solidFill>
@@ -24598,6 +28432,91 @@
           </a:p>
         </p:txBody>
       </p:sp>
+      <p:sp>
+        <p:nvSpPr>
+          <p:cNvPr id="6" name="テキスト ボックス 5">
+            <a:extLst>
+              <a:ext uri="{FF2B5EF4-FFF2-40B4-BE49-F238E27FC236}">
+                <a16:creationId xmlns:a16="http://schemas.microsoft.com/office/drawing/2014/main" id="{5A878599-1A99-1355-5BE8-61C9546225BD}"/>
+              </a:ext>
+            </a:extLst>
+          </p:cNvPr>
+          <p:cNvSpPr txBox="1"/>
+          <p:nvPr/>
+        </p:nvSpPr>
+        <p:spPr>
+          <a:xfrm>
+            <a:off x="7326705" y="872418"/>
+            <a:ext cx="3826327" cy="276999"/>
+          </a:xfrm>
+          <a:prstGeom prst="rect">
+            <a:avLst/>
+          </a:prstGeom>
+          <a:noFill/>
+        </p:spPr>
+        <p:txBody>
+          <a:bodyPr wrap="square">
+            <a:spAutoFit/>
+          </a:bodyPr>
+          <a:lstStyle/>
+          <a:p>
+            <a:r>
+              <a:rPr lang="ja-JP" altLang="en-US" sz="1200" dirty="0">
+                <a:hlinkClick r:id="rId3"/>
+              </a:rPr>
+              <a:t>https://github.com/NumberZero-0621/wam-studio</a:t>
+            </a:r>
+            <a:endParaRPr lang="ja-JP" altLang="en-US" sz="1200" dirty="0"/>
+          </a:p>
+        </p:txBody>
+      </p:sp>
+      <p:pic>
+        <p:nvPicPr>
+          <p:cNvPr id="7" name="Picture 2">
+            <a:extLst>
+              <a:ext uri="{FF2B5EF4-FFF2-40B4-BE49-F238E27FC236}">
+                <a16:creationId xmlns:a16="http://schemas.microsoft.com/office/drawing/2014/main" id="{F2768120-400A-3A88-44DF-4E5F18651FD7}"/>
+              </a:ext>
+            </a:extLst>
+          </p:cNvPr>
+          <p:cNvPicPr>
+            <a:picLocks noChangeAspect="1" noChangeArrowheads="1"/>
+          </p:cNvPicPr>
+          <p:nvPr/>
+        </p:nvPicPr>
+        <p:blipFill rotWithShape="1">
+          <a:blip r:embed="rId4">
+            <a:extLst>
+              <a:ext uri="{28A0092B-C50C-407E-A947-70E740481C1C}">
+                <a14:useLocalDpi xmlns:a14="http://schemas.microsoft.com/office/drawing/2010/main" val="0"/>
+              </a:ext>
+            </a:extLst>
+          </a:blip>
+          <a:srcRect l="7937" t="5904" r="9056" b="6185"/>
+          <a:stretch>
+            <a:fillRect/>
+          </a:stretch>
+        </p:blipFill>
+        <p:spPr bwMode="auto">
+          <a:xfrm>
+            <a:off x="11100280" y="61498"/>
+            <a:ext cx="1002323" cy="1061543"/>
+          </a:xfrm>
+          <a:prstGeom prst="rect">
+            <a:avLst/>
+          </a:prstGeom>
+          <a:noFill/>
+          <a:extLst>
+            <a:ext uri="{909E8E84-426E-40DD-AFC4-6F175D3DCCD1}">
+              <a14:hiddenFill xmlns:a14="http://schemas.microsoft.com/office/drawing/2010/main">
+                <a:solidFill>
+                  <a:srgbClr val="FFFFFF"/>
+                </a:solidFill>
+              </a14:hiddenFill>
+            </a:ext>
+          </a:extLst>
+        </p:spPr>
+      </p:pic>
     </p:spTree>
     <p:extLst>
       <p:ext uri="{BB962C8B-B14F-4D97-AF65-F5344CB8AC3E}">
@@ -24608,13 +28527,13 @@
   <p:clrMapOvr>
     <a:masterClrMapping/>
   </p:clrMapOvr>
-  <mc:AlternateContent xmlns:mc="http://schemas.openxmlformats.org/markup-compatibility/2006">
-    <mc:Choice xmlns:p159="http://schemas.microsoft.com/office/powerpoint/2015/09/main" Requires="p159">
+  <mc:AlternateContent xmlns:mc="http://schemas.openxmlformats.org/markup-compatibility/2006" xmlns:p159="http://schemas.microsoft.com/office/powerpoint/2015/09/main">
+    <mc:Choice Requires="p159">
       <p:transition xmlns:p14="http://schemas.microsoft.com/office/powerpoint/2010/main" spd="slow" p14:dur="2000">
         <p159:morph option="byObject"/>
       </p:transition>
     </mc:Choice>
-    <mc:Fallback>
+    <mc:Fallback xmlns="">
       <p:transition spd="slow">
         <p:fade/>
       </p:transition>
@@ -24803,7 +28722,7 @@
 </p:sld>
 </file>
 
-<file path=ppt/slides/slide5.xml><?xml version="1.0" encoding="utf-8"?>
+<file path=ppt/slides/slide6.xml><?xml version="1.0" encoding="utf-8"?>
 <p:sld xmlns:a="http://schemas.openxmlformats.org/drawingml/2006/main" xmlns:r="http://schemas.openxmlformats.org/officeDocument/2006/relationships" xmlns:p="http://schemas.openxmlformats.org/presentationml/2006/main">
   <p:cSld>
     <p:spTree>
@@ -24855,9 +28774,14 @@
           <a:lstStyle/>
           <a:p>
             <a:r>
-              <a:rPr kumimoji="1" lang="ja-JP" altLang="en-US" sz="6600" dirty="0"/>
-              <a:t>まとめ</a:t>
-            </a:r>
+              <a:rPr lang="ja-JP" altLang="en-US" sz="6600" dirty="0"/>
+              <a:t>要</a:t>
+            </a:r>
+            <a:r>
+              <a:rPr lang="ja-JP" altLang="en-US" sz="5400" dirty="0"/>
+              <a:t>件</a:t>
+            </a:r>
+            <a:endParaRPr kumimoji="1" lang="ja-JP" altLang="en-US" sz="6600" dirty="0"/>
           </a:p>
         </p:txBody>
       </p:sp>
@@ -24885,7 +28809,7 @@
             <a:fld id="{7A0ED1C7-8A26-48CF-81C0-2A5ADFEC2E18}" type="slidenum">
               <a:rPr lang="ja-JP" altLang="en-US" smtClean="0"/>
               <a:pPr/>
-              <a:t>5</a:t>
+              <a:t>6</a:t>
             </a:fld>
             <a:endParaRPr lang="ja-JP" altLang="en-US" dirty="0">
               <a:solidFill>
@@ -24910,7 +28834,7 @@
         <p:spPr>
           <a:xfrm>
             <a:off x="608347" y="1446015"/>
-            <a:ext cx="11100077" cy="4271747"/>
+            <a:ext cx="11100077" cy="3361754"/>
           </a:xfrm>
           <a:prstGeom prst="rect">
             <a:avLst/>
@@ -24961,7 +28885,15 @@
               <a:rPr lang="ja-JP" altLang="en-US" sz="2400" dirty="0"/>
               <a:t>するプラットフォーム</a:t>
             </a:r>
-            <a:endParaRPr lang="en-US" altLang="ja-JP" sz="1600" dirty="0"/>
+            <a:endParaRPr lang="en-US" altLang="ja-JP" sz="2400" dirty="0"/>
+          </a:p>
+          <a:p>
+            <a:pPr>
+              <a:lnSpc>
+                <a:spcPct val="120000"/>
+              </a:lnSpc>
+            </a:pPr>
+            <a:endParaRPr lang="en-US" altLang="ja-JP" sz="1100" dirty="0"/>
           </a:p>
           <a:p>
             <a:pPr marL="914400" lvl="1" indent="-457200">
@@ -24972,114 +28904,70 @@
               <a:buChar char="•"/>
             </a:pPr>
             <a:r>
+              <a:rPr lang="ja-JP" altLang="en-US" sz="3200" dirty="0"/>
+              <a:t>モジュール化された機能構成</a:t>
+            </a:r>
+          </a:p>
+          <a:p>
+            <a:pPr marL="914400" lvl="1" indent="-457200">
+              <a:lnSpc>
+                <a:spcPct val="120000"/>
+              </a:lnSpc>
+              <a:buFont typeface="Arial" panose="020B0604020202020204" pitchFamily="34" charset="0"/>
+              <a:buChar char="•"/>
+            </a:pPr>
+            <a:r>
+              <a:rPr lang="ja-JP" altLang="en-US" sz="3200" dirty="0"/>
+              <a:t>柔軟な </a:t>
+            </a:r>
+            <a:r>
+              <a:rPr lang="en-US" altLang="ja-JP" sz="3200" dirty="0"/>
+              <a:t>UI </a:t>
+            </a:r>
+            <a:r>
+              <a:rPr lang="ja-JP" altLang="en-US" sz="3200" dirty="0"/>
+              <a:t>カスタマイズ</a:t>
+            </a:r>
+          </a:p>
+          <a:p>
+            <a:pPr marL="914400" lvl="1" indent="-457200">
+              <a:lnSpc>
+                <a:spcPct val="120000"/>
+              </a:lnSpc>
+              <a:buFont typeface="Arial" panose="020B0604020202020204" pitchFamily="34" charset="0"/>
+              <a:buChar char="•"/>
+            </a:pPr>
+            <a:r>
+              <a:rPr lang="ja-JP" altLang="en-US" sz="3200" dirty="0"/>
+              <a:t>拡張可能なプラグインシステム</a:t>
+            </a:r>
+            <a:endParaRPr lang="en-US" altLang="ja-JP" sz="3200" dirty="0"/>
+          </a:p>
+          <a:p>
+            <a:pPr marL="1371600" lvl="2" indent="-457200">
+              <a:lnSpc>
+                <a:spcPct val="120000"/>
+              </a:lnSpc>
+              <a:buFont typeface="Arial" panose="020B0604020202020204" pitchFamily="34" charset="0"/>
+              <a:buChar char="•"/>
+            </a:pPr>
+            <a:r>
+              <a:rPr lang="en-US" altLang="ja-JP" sz="2800" dirty="0"/>
+              <a:t>VST</a:t>
+            </a:r>
+            <a:r>
               <a:rPr lang="ja-JP" altLang="en-US" sz="2800" dirty="0"/>
-              <a:t>モジュール化された機能構成</a:t>
-            </a:r>
-          </a:p>
-          <a:p>
-            <a:pPr marL="914400" lvl="1" indent="-457200">
-              <a:lnSpc>
-                <a:spcPct val="120000"/>
-              </a:lnSpc>
-              <a:buFont typeface="Arial" panose="020B0604020202020204" pitchFamily="34" charset="0"/>
-              <a:buChar char="•"/>
-            </a:pPr>
+              <a:t>プラグイン </a:t>
+            </a:r>
+            <a:r>
+              <a:rPr lang="en-US" altLang="ja-JP" sz="2800" dirty="0"/>
+              <a:t>/ DAWIY</a:t>
+            </a:r>
             <a:r>
               <a:rPr lang="ja-JP" altLang="en-US" sz="2800" dirty="0"/>
-              <a:t>柔軟な </a:t>
-            </a:r>
-            <a:r>
-              <a:rPr lang="en-US" altLang="ja-JP" sz="2800" dirty="0"/>
-              <a:t>UI </a:t>
-            </a:r>
-            <a:r>
-              <a:rPr lang="ja-JP" altLang="en-US" sz="2800" dirty="0"/>
-              <a:t>カスタマイズ</a:t>
-            </a:r>
-          </a:p>
-          <a:p>
-            <a:pPr marL="914400" lvl="1" indent="-457200">
-              <a:lnSpc>
-                <a:spcPct val="120000"/>
-              </a:lnSpc>
-              <a:buFont typeface="Arial" panose="020B0604020202020204" pitchFamily="34" charset="0"/>
-              <a:buChar char="•"/>
-            </a:pPr>
-            <a:r>
-              <a:rPr lang="ja-JP" altLang="en-US" sz="2800" dirty="0"/>
-              <a:t>拡張可能なプラグインシステム</a:t>
+              <a:t>プラグイン</a:t>
             </a:r>
             <a:endParaRPr lang="en-US" altLang="ja-JP" sz="2800" dirty="0"/>
-          </a:p>
-          <a:p>
-            <a:pPr marL="1371600" lvl="2" indent="-457200">
-              <a:lnSpc>
-                <a:spcPct val="120000"/>
-              </a:lnSpc>
-              <a:buFont typeface="Arial" panose="020B0604020202020204" pitchFamily="34" charset="0"/>
-              <a:buChar char="•"/>
-            </a:pPr>
-            <a:r>
-              <a:rPr lang="en-US" altLang="ja-JP" sz="2400" dirty="0"/>
-              <a:t>VST</a:t>
-            </a:r>
-            <a:r>
-              <a:rPr lang="ja-JP" altLang="en-US" sz="2400" dirty="0"/>
-              <a:t>プラグイン </a:t>
-            </a:r>
-            <a:r>
-              <a:rPr lang="en-US" altLang="ja-JP" sz="2400" dirty="0"/>
-              <a:t>/ DAWIY</a:t>
-            </a:r>
-            <a:r>
-              <a:rPr lang="ja-JP" altLang="en-US" sz="2400" dirty="0"/>
-              <a:t>プラグイン</a:t>
-            </a:r>
-            <a:endParaRPr lang="en-US" altLang="ja-JP" sz="2400" dirty="0"/>
-          </a:p>
-          <a:p>
-            <a:pPr>
-              <a:lnSpc>
-                <a:spcPct val="120000"/>
-              </a:lnSpc>
-            </a:pPr>
-            <a:r>
-              <a:rPr lang="ja-JP" altLang="en-US" sz="2800" dirty="0"/>
-              <a:t>デモセッションでは、</a:t>
-            </a:r>
-            <a:endParaRPr lang="en-US" altLang="ja-JP" sz="2800" dirty="0"/>
-          </a:p>
-          <a:p>
-            <a:pPr marL="914400" lvl="1" indent="-457200">
-              <a:lnSpc>
-                <a:spcPct val="120000"/>
-              </a:lnSpc>
-              <a:buFont typeface="Arial" panose="020B0604020202020204" pitchFamily="34" charset="0"/>
-              <a:buChar char="•"/>
-            </a:pPr>
-            <a:r>
-              <a:rPr lang="ja-JP" altLang="en-US" sz="2400" dirty="0"/>
-              <a:t>システムを体験</a:t>
-            </a:r>
-            <a:endParaRPr lang="en-US" altLang="ja-JP" sz="2400" dirty="0"/>
-          </a:p>
-          <a:p>
-            <a:pPr marL="914400" lvl="1" indent="-457200">
-              <a:lnSpc>
-                <a:spcPct val="120000"/>
-              </a:lnSpc>
-              <a:buFont typeface="Arial" panose="020B0604020202020204" pitchFamily="34" charset="0"/>
-              <a:buChar char="•"/>
-            </a:pPr>
-            <a:r>
-              <a:rPr lang="en-US" altLang="ja-JP" sz="2400" dirty="0"/>
-              <a:t>AI</a:t>
-            </a:r>
-            <a:r>
-              <a:rPr lang="ja-JP" altLang="en-US" sz="2400" dirty="0"/>
-              <a:t>アシスタントを体験</a:t>
-            </a:r>
-            <a:endParaRPr lang="en-US" altLang="ja-JP" sz="2400" dirty="0"/>
           </a:p>
         </p:txBody>
       </p:sp>
@@ -25168,153 +29056,10 @@
           </a:extLst>
         </p:spPr>
       </p:pic>
-      <p:sp>
-        <p:nvSpPr>
-          <p:cNvPr id="10" name="テキスト ボックス 9">
-            <a:extLst>
-              <a:ext uri="{FF2B5EF4-FFF2-40B4-BE49-F238E27FC236}">
-                <a16:creationId xmlns:a16="http://schemas.microsoft.com/office/drawing/2014/main" id="{1E4567D0-7BFA-401E-FF07-AB2CA5E1D560}"/>
-              </a:ext>
-            </a:extLst>
-          </p:cNvPr>
-          <p:cNvSpPr txBox="1"/>
-          <p:nvPr/>
-        </p:nvSpPr>
-        <p:spPr>
-          <a:xfrm>
-            <a:off x="1569639" y="5862498"/>
-            <a:ext cx="10622361" cy="461665"/>
-          </a:xfrm>
-          <a:prstGeom prst="rect">
-            <a:avLst/>
-          </a:prstGeom>
-          <a:noFill/>
-        </p:spPr>
-        <p:txBody>
-          <a:bodyPr wrap="square">
-            <a:spAutoFit/>
-          </a:bodyPr>
-          <a:lstStyle/>
-          <a:p>
-            <a:r>
-              <a:rPr lang="ja-JP" altLang="en-US" sz="1200" dirty="0"/>
-              <a:t>参考技術：</a:t>
-            </a:r>
-            <a:r>
-              <a:rPr lang="en-US" altLang="ja-JP" sz="1200" dirty="0"/>
-              <a:t>Buffa, M. and Vidal-</a:t>
-            </a:r>
-            <a:r>
-              <a:rPr lang="en-US" altLang="ja-JP" sz="1200" dirty="0" err="1"/>
-              <a:t>Mazuy</a:t>
-            </a:r>
-            <a:r>
-              <a:rPr lang="en-US" altLang="ja-JP" sz="1200" dirty="0"/>
-              <a:t>, A.: WAM-studio, a Digital Audio Workstation (DAW) for the Web, Companion Proceedings of the ACM Web Conference 2023, WWW ’23 Companion, New York, NY, USA, Association for Computing Machinery, pp. 543–548 (2023).</a:t>
-            </a:r>
-            <a:endParaRPr lang="ja-JP" altLang="en-US" sz="1200" dirty="0"/>
-          </a:p>
-        </p:txBody>
-      </p:sp>
     </p:spTree>
     <p:extLst>
       <p:ext uri="{BB962C8B-B14F-4D97-AF65-F5344CB8AC3E}">
         <p14:creationId xmlns:p14="http://schemas.microsoft.com/office/powerpoint/2010/main" val="199486289"/>
-      </p:ext>
-    </p:extLst>
-  </p:cSld>
-  <p:clrMapOvr>
-    <a:masterClrMapping/>
-  </p:clrMapOvr>
-</p:sld>
-</file>
-
-<file path=ppt/slides/slide6.xml><?xml version="1.0" encoding="utf-8"?>
-<p:sld xmlns:a="http://schemas.openxmlformats.org/drawingml/2006/main" xmlns:r="http://schemas.openxmlformats.org/officeDocument/2006/relationships" xmlns:p="http://schemas.openxmlformats.org/presentationml/2006/main">
-  <p:cSld>
-    <p:spTree>
-      <p:nvGrpSpPr>
-        <p:cNvPr id="1" name=""/>
-        <p:cNvGrpSpPr/>
-        <p:nvPr/>
-      </p:nvGrpSpPr>
-      <p:grpSpPr>
-        <a:xfrm>
-          <a:off x="0" y="0"/>
-          <a:ext cx="0" cy="0"/>
-          <a:chOff x="0" y="0"/>
-          <a:chExt cx="0" cy="0"/>
-        </a:xfrm>
-      </p:grpSpPr>
-      <p:sp>
-        <p:nvSpPr>
-          <p:cNvPr id="2" name="スライド番号プレースホルダー 1">
-            <a:extLst>
-              <a:ext uri="{FF2B5EF4-FFF2-40B4-BE49-F238E27FC236}">
-                <a16:creationId xmlns:a16="http://schemas.microsoft.com/office/drawing/2014/main" id="{37E5E4A2-A709-FBC5-6E50-77576EAA089E}"/>
-              </a:ext>
-            </a:extLst>
-          </p:cNvPr>
-          <p:cNvSpPr>
-            <a:spLocks noGrp="1"/>
-          </p:cNvSpPr>
-          <p:nvPr>
-            <p:ph type="sldNum" sz="quarter" idx="12"/>
-          </p:nvPr>
-        </p:nvSpPr>
-        <p:spPr/>
-        <p:txBody>
-          <a:bodyPr/>
-          <a:lstStyle/>
-          <a:p>
-            <a:fld id="{7A0ED1C7-8A26-48CF-81C0-2A5ADFEC2E18}" type="slidenum">
-              <a:rPr kumimoji="1" lang="ja-JP" altLang="en-US" smtClean="0"/>
-              <a:t>6</a:t>
-            </a:fld>
-            <a:endParaRPr kumimoji="1" lang="ja-JP" altLang="en-US"/>
-          </a:p>
-        </p:txBody>
-      </p:sp>
-      <p:pic>
-        <p:nvPicPr>
-          <p:cNvPr id="4" name="図 3" descr="ダイアグラム">
-            <a:extLst>
-              <a:ext uri="{FF2B5EF4-FFF2-40B4-BE49-F238E27FC236}">
-                <a16:creationId xmlns:a16="http://schemas.microsoft.com/office/drawing/2014/main" id="{FF6975CD-00B0-8F10-56EF-DE2F25F4FD08}"/>
-              </a:ext>
-            </a:extLst>
-          </p:cNvPr>
-          <p:cNvPicPr>
-            <a:picLocks noChangeAspect="1"/>
-          </p:cNvPicPr>
-          <p:nvPr/>
-        </p:nvPicPr>
-        <p:blipFill>
-          <a:blip r:embed="rId3">
-            <a:extLst>
-              <a:ext uri="{28A0092B-C50C-407E-A947-70E740481C1C}">
-                <a14:useLocalDpi xmlns:a14="http://schemas.microsoft.com/office/drawing/2010/main" val="0"/>
-              </a:ext>
-            </a:extLst>
-          </a:blip>
-          <a:stretch>
-            <a:fillRect/>
-          </a:stretch>
-        </p:blipFill>
-        <p:spPr>
-          <a:xfrm>
-            <a:off x="-136769" y="-76933"/>
-            <a:ext cx="12465538" cy="7011865"/>
-          </a:xfrm>
-          <a:prstGeom prst="rect">
-            <a:avLst/>
-          </a:prstGeom>
-        </p:spPr>
-      </p:pic>
-    </p:spTree>
-    <p:extLst>
-      <p:ext uri="{BB962C8B-B14F-4D97-AF65-F5344CB8AC3E}">
-        <p14:creationId xmlns:p14="http://schemas.microsoft.com/office/powerpoint/2010/main" val="3090274163"/>
       </p:ext>
     </p:extLst>
   </p:cSld>
@@ -25346,7 +29091,7 @@
           <p:cNvPr id="2" name="タイトル 1">
             <a:extLst>
               <a:ext uri="{FF2B5EF4-FFF2-40B4-BE49-F238E27FC236}">
-                <a16:creationId xmlns:a16="http://schemas.microsoft.com/office/drawing/2014/main" id="{2C6ED66C-9339-EF73-CFF8-D2AE60E257E8}"/>
+                <a16:creationId xmlns:a16="http://schemas.microsoft.com/office/drawing/2014/main" id="{06246764-42B4-2E7B-9810-175504DFDB8E}"/>
               </a:ext>
             </a:extLst>
           </p:cNvPr>
@@ -25359,141 +29104,17 @@
         </p:nvSpPr>
         <p:spPr/>
         <p:txBody>
-          <a:bodyPr>
-            <a:normAutofit/>
-          </a:bodyPr>
+          <a:bodyPr/>
           <a:lstStyle/>
           <a:p>
             <a:r>
-              <a:rPr kumimoji="1" lang="en-US" altLang="ja-JP" sz="6700" dirty="0"/>
-              <a:t>D</a:t>
-            </a:r>
-            <a:r>
-              <a:rPr kumimoji="1" lang="en-US" altLang="ja-JP" sz="5400" dirty="0"/>
-              <a:t>AWIY</a:t>
-            </a:r>
-            <a:r>
-              <a:rPr kumimoji="1" lang="ja-JP" altLang="en-US" sz="6000" dirty="0"/>
-              <a:t>プラグイン</a:t>
-            </a:r>
-            <a:r>
-              <a:rPr kumimoji="1" lang="ja-JP" altLang="en-US" sz="6600" dirty="0"/>
-              <a:t>①</a:t>
-            </a:r>
-            <a:endParaRPr kumimoji="1" lang="ja-JP" altLang="en-US" sz="5400" dirty="0"/>
-          </a:p>
-        </p:txBody>
-      </p:sp>
-      <p:sp>
-        <p:nvSpPr>
-          <p:cNvPr id="3" name="コンテンツ プレースホルダー 2">
-            <a:extLst>
-              <a:ext uri="{FF2B5EF4-FFF2-40B4-BE49-F238E27FC236}">
-                <a16:creationId xmlns:a16="http://schemas.microsoft.com/office/drawing/2014/main" id="{C4291D80-7378-CA5B-E8D3-D77F7FF5BC88}"/>
-              </a:ext>
-            </a:extLst>
-          </p:cNvPr>
-          <p:cNvSpPr>
-            <a:spLocks noGrp="1"/>
-          </p:cNvSpPr>
-          <p:nvPr>
-            <p:ph idx="1"/>
-          </p:nvPr>
-        </p:nvSpPr>
-        <p:spPr>
-          <a:xfrm>
-            <a:off x="367392" y="1389342"/>
-            <a:ext cx="10095453" cy="3718989"/>
-          </a:xfrm>
-        </p:spPr>
-        <p:txBody>
-          <a:bodyPr>
-            <a:normAutofit/>
-          </a:bodyPr>
-          <a:lstStyle/>
-          <a:p>
-            <a:r>
-              <a:rPr lang="en-US" altLang="ja-JP" sz="3200" dirty="0"/>
-              <a:t>DAW </a:t>
-            </a:r>
-            <a:r>
-              <a:rPr lang="ja-JP" altLang="en-US" sz="3200" dirty="0"/>
-              <a:t>の入出力・</a:t>
-            </a:r>
-            <a:r>
-              <a:rPr lang="en-US" altLang="ja-JP" sz="3200" dirty="0"/>
-              <a:t>UI</a:t>
-            </a:r>
-            <a:r>
-              <a:rPr lang="ja-JP" altLang="en-US" sz="3200" dirty="0"/>
-              <a:t>・操作等に介入する処理を拡張</a:t>
-            </a:r>
-            <a:endParaRPr lang="en-US" altLang="ja-JP" sz="3200" dirty="0"/>
-          </a:p>
-          <a:p>
-            <a:pPr marL="0" indent="0">
-              <a:buNone/>
-            </a:pPr>
-            <a:endParaRPr lang="en-US" altLang="ja-JP" sz="1200" dirty="0"/>
-          </a:p>
-          <a:p>
-            <a:pPr lvl="1"/>
-            <a:r>
-              <a:rPr kumimoji="1" lang="ja-JP" altLang="en-US" sz="2800" dirty="0"/>
-              <a:t>パッケージマネージャーで管理</a:t>
-            </a:r>
-            <a:endParaRPr kumimoji="1" lang="en-US" altLang="ja-JP" sz="2800" dirty="0"/>
-          </a:p>
-          <a:p>
-            <a:pPr lvl="1"/>
-            <a:r>
-              <a:rPr lang="ja-JP" altLang="en-US" sz="2800" dirty="0"/>
-              <a:t>インストール </a:t>
-            </a:r>
-            <a:r>
-              <a:rPr lang="en-US" altLang="ja-JP" sz="2800" dirty="0"/>
-              <a:t>/ </a:t>
-            </a:r>
-            <a:r>
-              <a:rPr lang="ja-JP" altLang="en-US" sz="2800" dirty="0"/>
-              <a:t>アンイストール</a:t>
-            </a:r>
-            <a:endParaRPr lang="en-US" altLang="ja-JP" sz="2800" dirty="0"/>
-          </a:p>
-          <a:p>
-            <a:pPr lvl="1"/>
-            <a:r>
-              <a:rPr kumimoji="1" lang="ja-JP" altLang="en-US" sz="2800" dirty="0"/>
-              <a:t>有効化 </a:t>
-            </a:r>
-            <a:r>
-              <a:rPr kumimoji="1" lang="en-US" altLang="ja-JP" sz="2800" dirty="0"/>
-              <a:t>/ </a:t>
-            </a:r>
-            <a:r>
-              <a:rPr kumimoji="1" lang="ja-JP" altLang="en-US" sz="2800" dirty="0"/>
-              <a:t>無効化</a:t>
-            </a:r>
-            <a:endParaRPr kumimoji="1" lang="en-US" altLang="ja-JP" sz="2800" dirty="0"/>
-          </a:p>
-          <a:p>
-            <a:pPr lvl="1"/>
-            <a:r>
-              <a:rPr lang="ja-JP" altLang="en-US" sz="2800" dirty="0"/>
-              <a:t>事前にダウンロードした</a:t>
-            </a:r>
-            <a:br>
-              <a:rPr lang="en-US" altLang="ja-JP" sz="2800" dirty="0"/>
-            </a:br>
-            <a:r>
-              <a:rPr lang="en-US" altLang="ja-JP" sz="2800" dirty="0"/>
-              <a:t>zip</a:t>
-            </a:r>
-            <a:r>
-              <a:rPr lang="ja-JP" altLang="en-US" sz="2800" dirty="0"/>
-              <a:t>ファイルの選択も可</a:t>
-            </a:r>
-            <a:endParaRPr kumimoji="1" lang="ja-JP" altLang="en-US" sz="2800" dirty="0"/>
+              <a:rPr kumimoji="1" lang="ja-JP" altLang="en-US" sz="5400" dirty="0"/>
+              <a:t>他</a:t>
+            </a:r>
+            <a:r>
+              <a:rPr kumimoji="1" lang="ja-JP" altLang="en-US" dirty="0"/>
+              <a:t>の拡張システムとの比較</a:t>
+            </a:r>
           </a:p>
         </p:txBody>
       </p:sp>
@@ -25502,7 +29123,7 @@
           <p:cNvPr id="4" name="スライド番号プレースホルダー 3">
             <a:extLst>
               <a:ext uri="{FF2B5EF4-FFF2-40B4-BE49-F238E27FC236}">
-                <a16:creationId xmlns:a16="http://schemas.microsoft.com/office/drawing/2014/main" id="{B02C7EEE-236D-04B8-76AD-A10E01D79565}"/>
+                <a16:creationId xmlns:a16="http://schemas.microsoft.com/office/drawing/2014/main" id="{8FBF7E72-3660-1714-56C3-E610E2A6CB3A}"/>
               </a:ext>
             </a:extLst>
           </p:cNvPr>
@@ -25531,46 +29152,2688 @@
           </a:p>
         </p:txBody>
       </p:sp>
+      <p:sp>
+        <p:nvSpPr>
+          <p:cNvPr id="3" name="テキスト ボックス 2">
+            <a:extLst>
+              <a:ext uri="{FF2B5EF4-FFF2-40B4-BE49-F238E27FC236}">
+                <a16:creationId xmlns:a16="http://schemas.microsoft.com/office/drawing/2014/main" id="{B56CEA20-B168-C355-2C29-668D1B474C44}"/>
+              </a:ext>
+            </a:extLst>
+          </p:cNvPr>
+          <p:cNvSpPr txBox="1"/>
+          <p:nvPr/>
+        </p:nvSpPr>
+        <p:spPr>
+          <a:xfrm>
+            <a:off x="7326705" y="872418"/>
+            <a:ext cx="3826327" cy="276999"/>
+          </a:xfrm>
+          <a:prstGeom prst="rect">
+            <a:avLst/>
+          </a:prstGeom>
+          <a:noFill/>
+        </p:spPr>
+        <p:txBody>
+          <a:bodyPr wrap="square">
+            <a:spAutoFit/>
+          </a:bodyPr>
+          <a:lstStyle/>
+          <a:p>
+            <a:r>
+              <a:rPr lang="ja-JP" altLang="en-US" sz="1200" dirty="0">
+                <a:hlinkClick r:id="rId2"/>
+              </a:rPr>
+              <a:t>https://github.com/NumberZero-0621/wam-studio</a:t>
+            </a:r>
+            <a:endParaRPr lang="ja-JP" altLang="en-US" sz="1200" dirty="0"/>
+          </a:p>
+        </p:txBody>
+      </p:sp>
       <p:pic>
         <p:nvPicPr>
-          <p:cNvPr id="6" name="図 5" descr="グラフィカル ユーザー インターフェイス, テキスト, アプリケーション, チャットまたはテキスト メッセージ&#10;&#10;AI 生成コンテンツは誤りを含む可能性があります。">
-            <a:extLst>
-              <a:ext uri="{FF2B5EF4-FFF2-40B4-BE49-F238E27FC236}">
-                <a16:creationId xmlns:a16="http://schemas.microsoft.com/office/drawing/2014/main" id="{64D0E1AE-DCC7-6A5D-350F-17E560A04861}"/>
+          <p:cNvPr id="5" name="Picture 2">
+            <a:extLst>
+              <a:ext uri="{FF2B5EF4-FFF2-40B4-BE49-F238E27FC236}">
+                <a16:creationId xmlns:a16="http://schemas.microsoft.com/office/drawing/2014/main" id="{7EF6DF48-87A6-51D2-8235-AC60AE404CA6}"/>
               </a:ext>
             </a:extLst>
           </p:cNvPr>
           <p:cNvPicPr>
-            <a:picLocks noChangeAspect="1"/>
+            <a:picLocks noChangeAspect="1" noChangeArrowheads="1"/>
           </p:cNvPicPr>
           <p:nvPr/>
         </p:nvPicPr>
-        <p:blipFill>
-          <a:blip r:embed="rId2">
+        <p:blipFill rotWithShape="1">
+          <a:blip r:embed="rId3">
             <a:extLst>
               <a:ext uri="{28A0092B-C50C-407E-A947-70E740481C1C}">
                 <a14:useLocalDpi xmlns:a14="http://schemas.microsoft.com/office/drawing/2010/main" val="0"/>
               </a:ext>
             </a:extLst>
           </a:blip>
+          <a:srcRect l="7937" t="5904" r="9056" b="6185"/>
           <a:stretch>
             <a:fillRect/>
           </a:stretch>
         </p:blipFill>
-        <p:spPr>
+        <p:spPr bwMode="auto">
           <a:xfrm>
-            <a:off x="6580190" y="1980108"/>
-            <a:ext cx="5244418" cy="4435094"/>
+            <a:off x="11100280" y="61498"/>
+            <a:ext cx="1002323" cy="1061543"/>
           </a:xfrm>
           <a:prstGeom prst="rect">
             <a:avLst/>
           </a:prstGeom>
+          <a:noFill/>
+          <a:extLst>
+            <a:ext uri="{909E8E84-426E-40DD-AFC4-6F175D3DCCD1}">
+              <a14:hiddenFill xmlns:a14="http://schemas.microsoft.com/office/drawing/2010/main">
+                <a:solidFill>
+                  <a:srgbClr val="FFFFFF"/>
+                </a:solidFill>
+              </a14:hiddenFill>
+            </a:ext>
+          </a:extLst>
         </p:spPr>
       </p:pic>
+      <p:graphicFrame>
+        <p:nvGraphicFramePr>
+          <p:cNvPr id="13" name="表 12">
+            <a:extLst>
+              <a:ext uri="{FF2B5EF4-FFF2-40B4-BE49-F238E27FC236}">
+                <a16:creationId xmlns:a16="http://schemas.microsoft.com/office/drawing/2014/main" id="{CCBB23F9-56E4-C118-49B0-698CD663FFFC}"/>
+              </a:ext>
+            </a:extLst>
+          </p:cNvPr>
+          <p:cNvGraphicFramePr>
+            <a:graphicFrameLocks noGrp="1"/>
+          </p:cNvGraphicFramePr>
+          <p:nvPr>
+            <p:extLst>
+              <p:ext uri="{D42A27DB-BD31-4B8C-83A1-F6EECF244321}">
+                <p14:modId xmlns:p14="http://schemas.microsoft.com/office/powerpoint/2010/main" val="3947538225"/>
+              </p:ext>
+            </p:extLst>
+          </p:nvPr>
+        </p:nvGraphicFramePr>
+        <p:xfrm>
+          <a:off x="281354" y="1218610"/>
+          <a:ext cx="11821248" cy="5444200"/>
+        </p:xfrm>
+        <a:graphic>
+          <a:graphicData uri="http://schemas.openxmlformats.org/drawingml/2006/table">
+            <a:tbl>
+              <a:tblPr firstRow="1" bandRow="1">
+                <a:tableStyleId>{5C22544A-7EE6-4342-B048-85BDC9FD1C3A}</a:tableStyleId>
+              </a:tblPr>
+              <a:tblGrid>
+                <a:gridCol w="1983047">
+                  <a:extLst>
+                    <a:ext uri="{9D8B030D-6E8A-4147-A177-3AD203B41FA5}">
+                      <a16:colId xmlns:a16="http://schemas.microsoft.com/office/drawing/2014/main" val="352138176"/>
+                    </a:ext>
+                  </a:extLst>
+                </a:gridCol>
+                <a:gridCol w="2745452">
+                  <a:extLst>
+                    <a:ext uri="{9D8B030D-6E8A-4147-A177-3AD203B41FA5}">
+                      <a16:colId xmlns:a16="http://schemas.microsoft.com/office/drawing/2014/main" val="3561984056"/>
+                    </a:ext>
+                  </a:extLst>
+                </a:gridCol>
+                <a:gridCol w="2552116">
+                  <a:extLst>
+                    <a:ext uri="{9D8B030D-6E8A-4147-A177-3AD203B41FA5}">
+                      <a16:colId xmlns:a16="http://schemas.microsoft.com/office/drawing/2014/main" val="556708219"/>
+                    </a:ext>
+                  </a:extLst>
+                </a:gridCol>
+                <a:gridCol w="2308834">
+                  <a:extLst>
+                    <a:ext uri="{9D8B030D-6E8A-4147-A177-3AD203B41FA5}">
+                      <a16:colId xmlns:a16="http://schemas.microsoft.com/office/drawing/2014/main" val="603071920"/>
+                    </a:ext>
+                  </a:extLst>
+                </a:gridCol>
+                <a:gridCol w="2231799">
+                  <a:extLst>
+                    <a:ext uri="{9D8B030D-6E8A-4147-A177-3AD203B41FA5}">
+                      <a16:colId xmlns:a16="http://schemas.microsoft.com/office/drawing/2014/main" val="3328478171"/>
+                    </a:ext>
+                  </a:extLst>
+                </a:gridCol>
+              </a:tblGrid>
+              <a:tr h="590824">
+                <a:tc>
+                  <a:txBody>
+                    <a:bodyPr/>
+                    <a:lstStyle/>
+                    <a:p>
+                      <a:pPr algn="ctr"/>
+                      <a:endParaRPr kumimoji="1" lang="ja-JP" altLang="en-US" sz="3200" b="0" dirty="0">
+                        <a:solidFill>
+                          <a:schemeClr val="tx1"/>
+                        </a:solidFill>
+                        <a:latin typeface="+mj-ea"/>
+                        <a:ea typeface="+mj-ea"/>
+                      </a:endParaRPr>
+                    </a:p>
+                  </a:txBody>
+                  <a:tcPr anchor="ctr">
+                    <a:lnL w="38100" cap="flat" cmpd="sng" algn="ctr">
+                      <a:noFill/>
+                      <a:prstDash val="solid"/>
+                      <a:round/>
+                      <a:headEnd type="none" w="med" len="med"/>
+                      <a:tailEnd type="none" w="med" len="med"/>
+                    </a:lnL>
+                    <a:lnR w="38100" cap="flat" cmpd="sng" algn="ctr">
+                      <a:solidFill>
+                        <a:schemeClr val="tx1"/>
+                      </a:solidFill>
+                      <a:prstDash val="solid"/>
+                      <a:round/>
+                      <a:headEnd type="none" w="med" len="med"/>
+                      <a:tailEnd type="none" w="med" len="med"/>
+                    </a:lnR>
+                    <a:lnT w="38100" cap="flat" cmpd="sng" algn="ctr">
+                      <a:noFill/>
+                      <a:prstDash val="solid"/>
+                      <a:round/>
+                      <a:headEnd type="none" w="med" len="med"/>
+                      <a:tailEnd type="none" w="med" len="med"/>
+                    </a:lnT>
+                    <a:lnB w="38100" cap="flat" cmpd="sng" algn="ctr">
+                      <a:solidFill>
+                        <a:schemeClr val="tx1"/>
+                      </a:solidFill>
+                      <a:prstDash val="solid"/>
+                      <a:round/>
+                      <a:headEnd type="none" w="med" len="med"/>
+                      <a:tailEnd type="none" w="med" len="med"/>
+                    </a:lnB>
+                    <a:lnTlToBr w="38100" cap="flat" cmpd="sng" algn="ctr">
+                      <a:solidFill>
+                        <a:schemeClr val="tx1"/>
+                      </a:solidFill>
+                      <a:prstDash val="solid"/>
+                      <a:round/>
+                      <a:headEnd type="none" w="med" len="med"/>
+                      <a:tailEnd type="none" w="med" len="med"/>
+                    </a:lnTlToBr>
+                    <a:solidFill>
+                      <a:schemeClr val="bg1">
+                        <a:lumMod val="75000"/>
+                      </a:schemeClr>
+                    </a:solidFill>
+                  </a:tcPr>
+                </a:tc>
+                <a:tc>
+                  <a:txBody>
+                    <a:bodyPr/>
+                    <a:lstStyle/>
+                    <a:p>
+                      <a:pPr algn="ctr"/>
+                      <a:r>
+                        <a:rPr kumimoji="1" lang="en-US" altLang="ja-JP" sz="3200" b="0" dirty="0">
+                          <a:solidFill>
+                            <a:schemeClr val="tx1"/>
+                          </a:solidFill>
+                          <a:latin typeface="+mj-ea"/>
+                          <a:ea typeface="+mj-ea"/>
+                        </a:rPr>
+                        <a:t>DAWIY</a:t>
+                      </a:r>
+                      <a:r>
+                        <a:rPr kumimoji="1" lang="ja-JP" altLang="en-US" sz="1800" b="0" dirty="0">
+                          <a:solidFill>
+                            <a:schemeClr val="tx1"/>
+                          </a:solidFill>
+                          <a:latin typeface="+mj-ea"/>
+                          <a:ea typeface="+mj-ea"/>
+                        </a:rPr>
+                        <a:t>プラグイン</a:t>
+                      </a:r>
+                      <a:endParaRPr kumimoji="1" lang="ja-JP" altLang="en-US" sz="3200" b="0" dirty="0">
+                        <a:solidFill>
+                          <a:schemeClr val="tx1"/>
+                        </a:solidFill>
+                        <a:latin typeface="+mj-ea"/>
+                        <a:ea typeface="+mj-ea"/>
+                      </a:endParaRPr>
+                    </a:p>
+                  </a:txBody>
+                  <a:tcPr anchor="ctr">
+                    <a:lnL w="38100" cap="flat" cmpd="sng" algn="ctr">
+                      <a:solidFill>
+                        <a:schemeClr val="tx1"/>
+                      </a:solidFill>
+                      <a:prstDash val="solid"/>
+                      <a:round/>
+                      <a:headEnd type="none" w="med" len="med"/>
+                      <a:tailEnd type="none" w="med" len="med"/>
+                    </a:lnL>
+                    <a:lnR w="38100" cap="flat" cmpd="sng" algn="ctr">
+                      <a:solidFill>
+                        <a:schemeClr val="tx1"/>
+                      </a:solidFill>
+                      <a:prstDash val="solid"/>
+                      <a:round/>
+                      <a:headEnd type="none" w="med" len="med"/>
+                      <a:tailEnd type="none" w="med" len="med"/>
+                    </a:lnR>
+                    <a:lnT w="38100" cap="flat" cmpd="sng" algn="ctr">
+                      <a:noFill/>
+                      <a:prstDash val="solid"/>
+                      <a:round/>
+                      <a:headEnd type="none" w="med" len="med"/>
+                      <a:tailEnd type="none" w="med" len="med"/>
+                    </a:lnT>
+                    <a:lnB w="38100" cap="flat" cmpd="sng" algn="ctr">
+                      <a:solidFill>
+                        <a:schemeClr val="tx1"/>
+                      </a:solidFill>
+                      <a:prstDash val="solid"/>
+                      <a:round/>
+                      <a:headEnd type="none" w="med" len="med"/>
+                      <a:tailEnd type="none" w="med" len="med"/>
+                    </a:lnB>
+                    <a:solidFill>
+                      <a:schemeClr val="bg1">
+                        <a:lumMod val="85000"/>
+                      </a:schemeClr>
+                    </a:solidFill>
+                  </a:tcPr>
+                </a:tc>
+                <a:tc>
+                  <a:txBody>
+                    <a:bodyPr/>
+                    <a:lstStyle/>
+                    <a:p>
+                      <a:pPr algn="ctr"/>
+                      <a:r>
+                        <a:rPr kumimoji="1" lang="en-US" altLang="ja-JP" sz="3200" b="0" dirty="0">
+                          <a:solidFill>
+                            <a:schemeClr val="tx1"/>
+                          </a:solidFill>
+                          <a:latin typeface="+mj-ea"/>
+                          <a:ea typeface="+mj-ea"/>
+                        </a:rPr>
+                        <a:t>ReaScript</a:t>
+                      </a:r>
+                      <a:endParaRPr kumimoji="1" lang="ja-JP" altLang="en-US" sz="3200" b="0" dirty="0">
+                        <a:solidFill>
+                          <a:schemeClr val="tx1"/>
+                        </a:solidFill>
+                        <a:latin typeface="+mj-ea"/>
+                        <a:ea typeface="+mj-ea"/>
+                      </a:endParaRPr>
+                    </a:p>
+                  </a:txBody>
+                  <a:tcPr anchor="ctr">
+                    <a:lnL w="38100" cap="flat" cmpd="sng" algn="ctr">
+                      <a:solidFill>
+                        <a:schemeClr val="tx1"/>
+                      </a:solidFill>
+                      <a:prstDash val="solid"/>
+                      <a:round/>
+                      <a:headEnd type="none" w="med" len="med"/>
+                      <a:tailEnd type="none" w="med" len="med"/>
+                    </a:lnL>
+                    <a:lnR w="38100" cap="flat" cmpd="sng" algn="ctr">
+                      <a:solidFill>
+                        <a:schemeClr val="tx1"/>
+                      </a:solidFill>
+                      <a:prstDash val="solid"/>
+                      <a:round/>
+                      <a:headEnd type="none" w="med" len="med"/>
+                      <a:tailEnd type="none" w="med" len="med"/>
+                    </a:lnR>
+                    <a:lnT w="38100" cap="flat" cmpd="sng" algn="ctr">
+                      <a:noFill/>
+                      <a:prstDash val="solid"/>
+                      <a:round/>
+                      <a:headEnd type="none" w="med" len="med"/>
+                      <a:tailEnd type="none" w="med" len="med"/>
+                    </a:lnT>
+                    <a:lnB w="38100" cap="flat" cmpd="sng" algn="ctr">
+                      <a:solidFill>
+                        <a:schemeClr val="tx1"/>
+                      </a:solidFill>
+                      <a:prstDash val="solid"/>
+                      <a:round/>
+                      <a:headEnd type="none" w="med" len="med"/>
+                      <a:tailEnd type="none" w="med" len="med"/>
+                    </a:lnB>
+                    <a:solidFill>
+                      <a:schemeClr val="bg1">
+                        <a:lumMod val="85000"/>
+                      </a:schemeClr>
+                    </a:solidFill>
+                  </a:tcPr>
+                </a:tc>
+                <a:tc>
+                  <a:txBody>
+                    <a:bodyPr/>
+                    <a:lstStyle/>
+                    <a:p>
+                      <a:pPr algn="ctr"/>
+                      <a:r>
+                        <a:rPr kumimoji="1" lang="en-US" altLang="ja-JP" sz="3200" b="0" dirty="0">
+                          <a:solidFill>
+                            <a:schemeClr val="tx1"/>
+                          </a:solidFill>
+                          <a:latin typeface="+mj-ea"/>
+                          <a:ea typeface="+mj-ea"/>
+                        </a:rPr>
+                        <a:t>JUCE</a:t>
+                      </a:r>
+                      <a:endParaRPr kumimoji="1" lang="ja-JP" altLang="en-US" sz="3200" b="0" dirty="0">
+                        <a:solidFill>
+                          <a:schemeClr val="tx1"/>
+                        </a:solidFill>
+                        <a:latin typeface="+mj-ea"/>
+                        <a:ea typeface="+mj-ea"/>
+                      </a:endParaRPr>
+                    </a:p>
+                  </a:txBody>
+                  <a:tcPr anchor="ctr">
+                    <a:lnL w="38100" cap="flat" cmpd="sng" algn="ctr">
+                      <a:solidFill>
+                        <a:schemeClr val="tx1"/>
+                      </a:solidFill>
+                      <a:prstDash val="solid"/>
+                      <a:round/>
+                      <a:headEnd type="none" w="med" len="med"/>
+                      <a:tailEnd type="none" w="med" len="med"/>
+                    </a:lnL>
+                    <a:lnR w="38100" cap="flat" cmpd="sng" algn="ctr">
+                      <a:solidFill>
+                        <a:schemeClr val="tx1"/>
+                      </a:solidFill>
+                      <a:prstDash val="solid"/>
+                      <a:round/>
+                      <a:headEnd type="none" w="med" len="med"/>
+                      <a:tailEnd type="none" w="med" len="med"/>
+                    </a:lnR>
+                    <a:lnT w="38100" cap="flat" cmpd="sng" algn="ctr">
+                      <a:noFill/>
+                      <a:prstDash val="solid"/>
+                      <a:round/>
+                      <a:headEnd type="none" w="med" len="med"/>
+                      <a:tailEnd type="none" w="med" len="med"/>
+                    </a:lnT>
+                    <a:lnB w="38100" cap="flat" cmpd="sng" algn="ctr">
+                      <a:solidFill>
+                        <a:schemeClr val="tx1"/>
+                      </a:solidFill>
+                      <a:prstDash val="solid"/>
+                      <a:round/>
+                      <a:headEnd type="none" w="med" len="med"/>
+                      <a:tailEnd type="none" w="med" len="med"/>
+                    </a:lnB>
+                    <a:solidFill>
+                      <a:schemeClr val="bg1">
+                        <a:lumMod val="85000"/>
+                      </a:schemeClr>
+                    </a:solidFill>
+                  </a:tcPr>
+                </a:tc>
+                <a:tc>
+                  <a:txBody>
+                    <a:bodyPr/>
+                    <a:lstStyle/>
+                    <a:p>
+                      <a:pPr algn="ctr"/>
+                      <a:r>
+                        <a:rPr kumimoji="1" lang="en-US" altLang="ja-JP" sz="3200" b="0" dirty="0">
+                          <a:solidFill>
+                            <a:schemeClr val="tx1"/>
+                          </a:solidFill>
+                          <a:latin typeface="+mj-ea"/>
+                          <a:ea typeface="+mj-ea"/>
+                        </a:rPr>
+                        <a:t>VST</a:t>
+                      </a:r>
+                      <a:endParaRPr kumimoji="1" lang="ja-JP" altLang="en-US" sz="3200" b="0" dirty="0">
+                        <a:solidFill>
+                          <a:schemeClr val="tx1"/>
+                        </a:solidFill>
+                        <a:latin typeface="+mj-ea"/>
+                        <a:ea typeface="+mj-ea"/>
+                      </a:endParaRPr>
+                    </a:p>
+                  </a:txBody>
+                  <a:tcPr anchor="ctr">
+                    <a:lnL w="38100" cap="flat" cmpd="sng" algn="ctr">
+                      <a:solidFill>
+                        <a:schemeClr val="tx1"/>
+                      </a:solidFill>
+                      <a:prstDash val="solid"/>
+                      <a:round/>
+                      <a:headEnd type="none" w="med" len="med"/>
+                      <a:tailEnd type="none" w="med" len="med"/>
+                    </a:lnL>
+                    <a:lnR w="38100" cap="flat" cmpd="sng" algn="ctr">
+                      <a:noFill/>
+                      <a:prstDash val="solid"/>
+                      <a:round/>
+                      <a:headEnd type="none" w="med" len="med"/>
+                      <a:tailEnd type="none" w="med" len="med"/>
+                    </a:lnR>
+                    <a:lnT w="38100" cap="flat" cmpd="sng" algn="ctr">
+                      <a:noFill/>
+                      <a:prstDash val="solid"/>
+                      <a:round/>
+                      <a:headEnd type="none" w="med" len="med"/>
+                      <a:tailEnd type="none" w="med" len="med"/>
+                    </a:lnT>
+                    <a:lnB w="38100" cap="flat" cmpd="sng" algn="ctr">
+                      <a:solidFill>
+                        <a:schemeClr val="tx1"/>
+                      </a:solidFill>
+                      <a:prstDash val="solid"/>
+                      <a:round/>
+                      <a:headEnd type="none" w="med" len="med"/>
+                      <a:tailEnd type="none" w="med" len="med"/>
+                    </a:lnB>
+                    <a:solidFill>
+                      <a:schemeClr val="bg1">
+                        <a:lumMod val="85000"/>
+                      </a:schemeClr>
+                    </a:solidFill>
+                  </a:tcPr>
+                </a:tc>
+                <a:extLst>
+                  <a:ext uri="{0D108BD9-81ED-4DB2-BD59-A6C34878D82A}">
+                    <a16:rowId xmlns:a16="http://schemas.microsoft.com/office/drawing/2014/main" val="941711864"/>
+                  </a:ext>
+                </a:extLst>
+              </a:tr>
+              <a:tr h="1098863">
+                <a:tc>
+                  <a:txBody>
+                    <a:bodyPr/>
+                    <a:lstStyle/>
+                    <a:p>
+                      <a:pPr algn="ctr"/>
+                      <a:r>
+                        <a:rPr kumimoji="1" lang="ja-JP" altLang="en-US" sz="3200" b="0" baseline="0" dirty="0">
+                          <a:solidFill>
+                            <a:schemeClr val="tx1"/>
+                          </a:solidFill>
+                          <a:latin typeface="+mj-ea"/>
+                          <a:ea typeface="+mj-ea"/>
+                        </a:rPr>
+                        <a:t>主目的</a:t>
+                      </a:r>
+                    </a:p>
+                  </a:txBody>
+                  <a:tcPr anchor="ctr">
+                    <a:lnL w="38100" cap="flat" cmpd="sng" algn="ctr">
+                      <a:noFill/>
+                      <a:prstDash val="solid"/>
+                      <a:round/>
+                      <a:headEnd type="none" w="med" len="med"/>
+                      <a:tailEnd type="none" w="med" len="med"/>
+                    </a:lnL>
+                    <a:lnR w="38100" cap="flat" cmpd="sng" algn="ctr">
+                      <a:solidFill>
+                        <a:schemeClr val="tx1"/>
+                      </a:solidFill>
+                      <a:prstDash val="solid"/>
+                      <a:round/>
+                      <a:headEnd type="none" w="med" len="med"/>
+                      <a:tailEnd type="none" w="med" len="med"/>
+                    </a:lnR>
+                    <a:lnT w="38100" cap="flat" cmpd="sng" algn="ctr">
+                      <a:solidFill>
+                        <a:schemeClr val="tx1"/>
+                      </a:solidFill>
+                      <a:prstDash val="solid"/>
+                      <a:round/>
+                      <a:headEnd type="none" w="med" len="med"/>
+                      <a:tailEnd type="none" w="med" len="med"/>
+                    </a:lnT>
+                    <a:lnB w="38100" cap="flat" cmpd="sng" algn="ctr">
+                      <a:solidFill>
+                        <a:schemeClr val="tx1"/>
+                      </a:solidFill>
+                      <a:prstDash val="solid"/>
+                      <a:round/>
+                      <a:headEnd type="none" w="med" len="med"/>
+                      <a:tailEnd type="none" w="med" len="med"/>
+                    </a:lnB>
+                    <a:solidFill>
+                      <a:schemeClr val="bg1">
+                        <a:lumMod val="85000"/>
+                      </a:schemeClr>
+                    </a:solidFill>
+                  </a:tcPr>
+                </a:tc>
+                <a:tc>
+                  <a:txBody>
+                    <a:bodyPr/>
+                    <a:lstStyle/>
+                    <a:p>
+                      <a:pPr algn="ctr"/>
+                      <a:r>
+                        <a:rPr kumimoji="1" lang="en-US" altLang="ja-JP" sz="2000" b="0" dirty="0">
+                          <a:solidFill>
+                            <a:schemeClr val="tx1"/>
+                          </a:solidFill>
+                        </a:rPr>
+                        <a:t> DAWIY</a:t>
+                      </a:r>
+                      <a:r>
+                        <a:rPr kumimoji="1" lang="ja-JP" altLang="en-US" sz="2000" b="0" dirty="0">
+                          <a:solidFill>
+                            <a:schemeClr val="tx1"/>
+                          </a:solidFill>
+                        </a:rPr>
+                        <a:t>本体の入出力、</a:t>
+                      </a:r>
+                      <a:br>
+                        <a:rPr kumimoji="1" lang="en-US" altLang="ja-JP" sz="2000" b="0" dirty="0">
+                          <a:solidFill>
+                            <a:schemeClr val="tx1"/>
+                          </a:solidFill>
+                        </a:rPr>
+                      </a:br>
+                      <a:r>
+                        <a:rPr kumimoji="1" lang="en-US" altLang="ja-JP" sz="2000" b="0" dirty="0">
+                          <a:solidFill>
+                            <a:schemeClr val="tx1"/>
+                          </a:solidFill>
+                        </a:rPr>
+                        <a:t>UI</a:t>
+                      </a:r>
+                      <a:r>
+                        <a:rPr kumimoji="1" lang="ja-JP" altLang="en-US" sz="2000" b="0" dirty="0">
+                          <a:solidFill>
+                            <a:schemeClr val="tx1"/>
+                          </a:solidFill>
+                        </a:rPr>
+                        <a:t>、機能の拡張、</a:t>
+                      </a:r>
+                      <a:r>
+                        <a:rPr kumimoji="1" lang="en-US" altLang="ja-JP" sz="2000" b="0" dirty="0">
+                          <a:solidFill>
+                            <a:schemeClr val="tx1"/>
+                          </a:solidFill>
+                        </a:rPr>
+                        <a:t>DIY</a:t>
+                      </a:r>
+                      <a:endParaRPr kumimoji="1" lang="ja-JP" altLang="en-US" sz="2000" b="0" dirty="0">
+                        <a:solidFill>
+                          <a:schemeClr val="tx1"/>
+                        </a:solidFill>
+                      </a:endParaRPr>
+                    </a:p>
+                  </a:txBody>
+                  <a:tcPr anchor="ctr">
+                    <a:lnL w="38100" cap="flat" cmpd="sng" algn="ctr">
+                      <a:solidFill>
+                        <a:schemeClr val="tx1"/>
+                      </a:solidFill>
+                      <a:prstDash val="solid"/>
+                      <a:round/>
+                      <a:headEnd type="none" w="med" len="med"/>
+                      <a:tailEnd type="none" w="med" len="med"/>
+                    </a:lnL>
+                    <a:lnR w="38100" cap="flat" cmpd="sng" algn="ctr">
+                      <a:solidFill>
+                        <a:schemeClr val="tx1"/>
+                      </a:solidFill>
+                      <a:prstDash val="solid"/>
+                      <a:round/>
+                      <a:headEnd type="none" w="med" len="med"/>
+                      <a:tailEnd type="none" w="med" len="med"/>
+                    </a:lnR>
+                    <a:lnT w="38100" cap="flat" cmpd="sng" algn="ctr">
+                      <a:solidFill>
+                        <a:schemeClr val="tx1"/>
+                      </a:solidFill>
+                      <a:prstDash val="solid"/>
+                      <a:round/>
+                      <a:headEnd type="none" w="med" len="med"/>
+                      <a:tailEnd type="none" w="med" len="med"/>
+                    </a:lnT>
+                    <a:lnB w="38100" cap="flat" cmpd="sng" algn="ctr">
+                      <a:solidFill>
+                        <a:schemeClr val="tx1"/>
+                      </a:solidFill>
+                      <a:prstDash val="solid"/>
+                      <a:round/>
+                      <a:headEnd type="none" w="med" len="med"/>
+                      <a:tailEnd type="none" w="med" len="med"/>
+                    </a:lnB>
+                    <a:noFill/>
+                  </a:tcPr>
+                </a:tc>
+                <a:tc>
+                  <a:txBody>
+                    <a:bodyPr/>
+                    <a:lstStyle/>
+                    <a:p>
+                      <a:pPr algn="ctr"/>
+                      <a:r>
+                        <a:rPr kumimoji="1" lang="en-US" altLang="ja-JP" sz="2000" b="0" dirty="0">
+                          <a:solidFill>
+                            <a:schemeClr val="tx1"/>
+                          </a:solidFill>
+                        </a:rPr>
+                        <a:t> REAPER</a:t>
+                      </a:r>
+                      <a:r>
+                        <a:rPr kumimoji="1" lang="ja-JP" altLang="en-US" sz="2000" b="0" dirty="0">
+                          <a:solidFill>
+                            <a:schemeClr val="tx1"/>
+                          </a:solidFill>
+                        </a:rPr>
+                        <a:t>の機能拡張、自働化、マクロ作成</a:t>
+                      </a:r>
+                    </a:p>
+                  </a:txBody>
+                  <a:tcPr anchor="ctr">
+                    <a:lnL w="38100" cap="flat" cmpd="sng" algn="ctr">
+                      <a:solidFill>
+                        <a:schemeClr val="tx1"/>
+                      </a:solidFill>
+                      <a:prstDash val="solid"/>
+                      <a:round/>
+                      <a:headEnd type="none" w="med" len="med"/>
+                      <a:tailEnd type="none" w="med" len="med"/>
+                    </a:lnL>
+                    <a:lnR w="38100" cap="flat" cmpd="sng" algn="ctr">
+                      <a:solidFill>
+                        <a:schemeClr val="tx1"/>
+                      </a:solidFill>
+                      <a:prstDash val="solid"/>
+                      <a:round/>
+                      <a:headEnd type="none" w="med" len="med"/>
+                      <a:tailEnd type="none" w="med" len="med"/>
+                    </a:lnR>
+                    <a:lnT w="38100" cap="flat" cmpd="sng" algn="ctr">
+                      <a:solidFill>
+                        <a:schemeClr val="tx1"/>
+                      </a:solidFill>
+                      <a:prstDash val="solid"/>
+                      <a:round/>
+                      <a:headEnd type="none" w="med" len="med"/>
+                      <a:tailEnd type="none" w="med" len="med"/>
+                    </a:lnT>
+                    <a:lnB w="38100" cap="flat" cmpd="sng" algn="ctr">
+                      <a:solidFill>
+                        <a:schemeClr val="tx1"/>
+                      </a:solidFill>
+                      <a:prstDash val="solid"/>
+                      <a:round/>
+                      <a:headEnd type="none" w="med" len="med"/>
+                      <a:tailEnd type="none" w="med" len="med"/>
+                    </a:lnB>
+                    <a:noFill/>
+                  </a:tcPr>
+                </a:tc>
+                <a:tc>
+                  <a:txBody>
+                    <a:bodyPr/>
+                    <a:lstStyle/>
+                    <a:p>
+                      <a:pPr algn="ctr"/>
+                      <a:r>
+                        <a:rPr kumimoji="1" lang="ja-JP" altLang="en-US" sz="2000" b="0" dirty="0">
+                          <a:solidFill>
+                            <a:schemeClr val="tx1"/>
+                          </a:solidFill>
+                        </a:rPr>
+                        <a:t>オーディオアプリや</a:t>
+                      </a:r>
+                      <a:r>
+                        <a:rPr kumimoji="1" lang="en-US" altLang="ja-JP" sz="2000" b="0" dirty="0">
+                          <a:solidFill>
+                            <a:schemeClr val="tx1"/>
+                          </a:solidFill>
+                        </a:rPr>
+                        <a:t>VST</a:t>
+                      </a:r>
+                      <a:r>
+                        <a:rPr kumimoji="1" lang="ja-JP" altLang="en-US" sz="2000" b="0" dirty="0">
+                          <a:solidFill>
+                            <a:schemeClr val="tx1"/>
+                          </a:solidFill>
+                        </a:rPr>
+                        <a:t>等の</a:t>
+                      </a:r>
+                      <a:br>
+                        <a:rPr kumimoji="1" lang="en-US" altLang="ja-JP" sz="2000" b="0" dirty="0">
+                          <a:solidFill>
+                            <a:schemeClr val="tx1"/>
+                          </a:solidFill>
+                        </a:rPr>
+                      </a:br>
+                      <a:r>
+                        <a:rPr kumimoji="1" lang="ja-JP" altLang="en-US" sz="2000" b="0" dirty="0">
+                          <a:solidFill>
+                            <a:schemeClr val="tx1"/>
+                          </a:solidFill>
+                        </a:rPr>
+                        <a:t>開発基盤</a:t>
+                      </a:r>
+                    </a:p>
+                  </a:txBody>
+                  <a:tcPr anchor="ctr">
+                    <a:lnL w="38100" cap="flat" cmpd="sng" algn="ctr">
+                      <a:solidFill>
+                        <a:schemeClr val="tx1"/>
+                      </a:solidFill>
+                      <a:prstDash val="solid"/>
+                      <a:round/>
+                      <a:headEnd type="none" w="med" len="med"/>
+                      <a:tailEnd type="none" w="med" len="med"/>
+                    </a:lnL>
+                    <a:lnR w="38100" cap="flat" cmpd="sng" algn="ctr">
+                      <a:solidFill>
+                        <a:schemeClr val="tx1"/>
+                      </a:solidFill>
+                      <a:prstDash val="solid"/>
+                      <a:round/>
+                      <a:headEnd type="none" w="med" len="med"/>
+                      <a:tailEnd type="none" w="med" len="med"/>
+                    </a:lnR>
+                    <a:lnT w="38100" cap="flat" cmpd="sng" algn="ctr">
+                      <a:solidFill>
+                        <a:schemeClr val="tx1"/>
+                      </a:solidFill>
+                      <a:prstDash val="solid"/>
+                      <a:round/>
+                      <a:headEnd type="none" w="med" len="med"/>
+                      <a:tailEnd type="none" w="med" len="med"/>
+                    </a:lnT>
+                    <a:lnB w="38100" cap="flat" cmpd="sng" algn="ctr">
+                      <a:solidFill>
+                        <a:schemeClr val="tx1"/>
+                      </a:solidFill>
+                      <a:prstDash val="solid"/>
+                      <a:round/>
+                      <a:headEnd type="none" w="med" len="med"/>
+                      <a:tailEnd type="none" w="med" len="med"/>
+                    </a:lnB>
+                    <a:noFill/>
+                  </a:tcPr>
+                </a:tc>
+                <a:tc>
+                  <a:txBody>
+                    <a:bodyPr/>
+                    <a:lstStyle/>
+                    <a:p>
+                      <a:pPr algn="ctr"/>
+                      <a:r>
+                        <a:rPr kumimoji="1" lang="ja-JP" altLang="en-US" sz="2000" b="0" dirty="0">
+                          <a:solidFill>
+                            <a:schemeClr val="tx1"/>
+                          </a:solidFill>
+                        </a:rPr>
+                        <a:t>音声の加工</a:t>
+                      </a:r>
+                      <a:br>
+                        <a:rPr kumimoji="1" lang="en-US" altLang="ja-JP" sz="2000" b="0" dirty="0">
+                          <a:solidFill>
+                            <a:schemeClr val="tx1"/>
+                          </a:solidFill>
+                        </a:rPr>
+                      </a:br>
+                      <a:r>
+                        <a:rPr kumimoji="1" lang="ja-JP" altLang="en-US" sz="2000" b="0" dirty="0">
+                          <a:solidFill>
+                            <a:schemeClr val="tx1"/>
+                          </a:solidFill>
+                        </a:rPr>
+                        <a:t>（エフェクト）</a:t>
+                      </a:r>
+                      <a:br>
+                        <a:rPr kumimoji="1" lang="en-US" altLang="ja-JP" sz="2000" b="0" dirty="0">
+                          <a:solidFill>
+                            <a:schemeClr val="tx1"/>
+                          </a:solidFill>
+                        </a:rPr>
+                      </a:br>
+                      <a:r>
+                        <a:rPr kumimoji="1" lang="ja-JP" altLang="en-US" sz="2000" b="0" dirty="0">
+                          <a:solidFill>
+                            <a:schemeClr val="tx1"/>
+                          </a:solidFill>
+                        </a:rPr>
+                        <a:t>や生成（音源）</a:t>
+                      </a:r>
+                    </a:p>
+                  </a:txBody>
+                  <a:tcPr anchor="ctr">
+                    <a:lnL w="38100" cap="flat" cmpd="sng" algn="ctr">
+                      <a:solidFill>
+                        <a:schemeClr val="tx1"/>
+                      </a:solidFill>
+                      <a:prstDash val="solid"/>
+                      <a:round/>
+                      <a:headEnd type="none" w="med" len="med"/>
+                      <a:tailEnd type="none" w="med" len="med"/>
+                    </a:lnL>
+                    <a:lnR w="38100" cap="flat" cmpd="sng" algn="ctr">
+                      <a:noFill/>
+                      <a:prstDash val="solid"/>
+                      <a:round/>
+                      <a:headEnd type="none" w="med" len="med"/>
+                      <a:tailEnd type="none" w="med" len="med"/>
+                    </a:lnR>
+                    <a:lnT w="38100" cap="flat" cmpd="sng" algn="ctr">
+                      <a:solidFill>
+                        <a:schemeClr val="tx1"/>
+                      </a:solidFill>
+                      <a:prstDash val="solid"/>
+                      <a:round/>
+                      <a:headEnd type="none" w="med" len="med"/>
+                      <a:tailEnd type="none" w="med" len="med"/>
+                    </a:lnT>
+                    <a:lnB w="38100" cap="flat" cmpd="sng" algn="ctr">
+                      <a:solidFill>
+                        <a:schemeClr val="tx1"/>
+                      </a:solidFill>
+                      <a:prstDash val="solid"/>
+                      <a:round/>
+                      <a:headEnd type="none" w="med" len="med"/>
+                      <a:tailEnd type="none" w="med" len="med"/>
+                    </a:lnB>
+                    <a:noFill/>
+                  </a:tcPr>
+                </a:tc>
+                <a:extLst>
+                  <a:ext uri="{0D108BD9-81ED-4DB2-BD59-A6C34878D82A}">
+                    <a16:rowId xmlns:a16="http://schemas.microsoft.com/office/drawing/2014/main" val="1615774661"/>
+                  </a:ext>
+                </a:extLst>
+              </a:tr>
+              <a:tr h="828433">
+                <a:tc>
+                  <a:txBody>
+                    <a:bodyPr/>
+                    <a:lstStyle/>
+                    <a:p>
+                      <a:pPr algn="ctr"/>
+                      <a:r>
+                        <a:rPr kumimoji="1" lang="ja-JP" altLang="en-US" sz="3200" b="0" baseline="0" dirty="0">
+                          <a:solidFill>
+                            <a:schemeClr val="tx1"/>
+                          </a:solidFill>
+                          <a:latin typeface="+mj-ea"/>
+                          <a:ea typeface="+mj-ea"/>
+                        </a:rPr>
+                        <a:t>開発言語</a:t>
+                      </a:r>
+                    </a:p>
+                  </a:txBody>
+                  <a:tcPr anchor="ctr">
+                    <a:lnL w="38100" cap="flat" cmpd="sng" algn="ctr">
+                      <a:noFill/>
+                      <a:prstDash val="solid"/>
+                      <a:round/>
+                      <a:headEnd type="none" w="med" len="med"/>
+                      <a:tailEnd type="none" w="med" len="med"/>
+                    </a:lnL>
+                    <a:lnR w="38100" cap="flat" cmpd="sng" algn="ctr">
+                      <a:solidFill>
+                        <a:schemeClr val="tx1"/>
+                      </a:solidFill>
+                      <a:prstDash val="solid"/>
+                      <a:round/>
+                      <a:headEnd type="none" w="med" len="med"/>
+                      <a:tailEnd type="none" w="med" len="med"/>
+                    </a:lnR>
+                    <a:lnT w="38100" cap="flat" cmpd="sng" algn="ctr">
+                      <a:solidFill>
+                        <a:schemeClr val="tx1"/>
+                      </a:solidFill>
+                      <a:prstDash val="solid"/>
+                      <a:round/>
+                      <a:headEnd type="none" w="med" len="med"/>
+                      <a:tailEnd type="none" w="med" len="med"/>
+                    </a:lnT>
+                    <a:lnB w="38100" cap="flat" cmpd="sng" algn="ctr">
+                      <a:solidFill>
+                        <a:schemeClr val="tx1"/>
+                      </a:solidFill>
+                      <a:prstDash val="solid"/>
+                      <a:round/>
+                      <a:headEnd type="none" w="med" len="med"/>
+                      <a:tailEnd type="none" w="med" len="med"/>
+                    </a:lnB>
+                    <a:solidFill>
+                      <a:schemeClr val="bg1">
+                        <a:lumMod val="85000"/>
+                      </a:schemeClr>
+                    </a:solidFill>
+                  </a:tcPr>
+                </a:tc>
+                <a:tc>
+                  <a:txBody>
+                    <a:bodyPr/>
+                    <a:lstStyle/>
+                    <a:p>
+                      <a:pPr algn="ctr"/>
+                      <a:r>
+                        <a:rPr kumimoji="1" lang="en-US" altLang="ja-JP" sz="2000" b="0" dirty="0">
+                          <a:solidFill>
+                            <a:schemeClr val="tx1"/>
+                          </a:solidFill>
+                        </a:rPr>
+                        <a:t>TypeScript / JavaScript</a:t>
+                      </a:r>
+                      <a:endParaRPr kumimoji="1" lang="ja-JP" altLang="en-US" sz="2000" b="0" dirty="0">
+                        <a:solidFill>
+                          <a:schemeClr val="tx1"/>
+                        </a:solidFill>
+                      </a:endParaRPr>
+                    </a:p>
+                  </a:txBody>
+                  <a:tcPr anchor="ctr">
+                    <a:lnL w="38100" cap="flat" cmpd="sng" algn="ctr">
+                      <a:solidFill>
+                        <a:schemeClr val="tx1"/>
+                      </a:solidFill>
+                      <a:prstDash val="solid"/>
+                      <a:round/>
+                      <a:headEnd type="none" w="med" len="med"/>
+                      <a:tailEnd type="none" w="med" len="med"/>
+                    </a:lnL>
+                    <a:lnR w="38100" cap="flat" cmpd="sng" algn="ctr">
+                      <a:solidFill>
+                        <a:schemeClr val="tx1"/>
+                      </a:solidFill>
+                      <a:prstDash val="solid"/>
+                      <a:round/>
+                      <a:headEnd type="none" w="med" len="med"/>
+                      <a:tailEnd type="none" w="med" len="med"/>
+                    </a:lnR>
+                    <a:lnT w="38100" cap="flat" cmpd="sng" algn="ctr">
+                      <a:solidFill>
+                        <a:schemeClr val="tx1"/>
+                      </a:solidFill>
+                      <a:prstDash val="solid"/>
+                      <a:round/>
+                      <a:headEnd type="none" w="med" len="med"/>
+                      <a:tailEnd type="none" w="med" len="med"/>
+                    </a:lnT>
+                    <a:lnB w="38100" cap="flat" cmpd="sng" algn="ctr">
+                      <a:solidFill>
+                        <a:schemeClr val="tx1"/>
+                      </a:solidFill>
+                      <a:prstDash val="solid"/>
+                      <a:round/>
+                      <a:headEnd type="none" w="med" len="med"/>
+                      <a:tailEnd type="none" w="med" len="med"/>
+                    </a:lnB>
+                    <a:noFill/>
+                  </a:tcPr>
+                </a:tc>
+                <a:tc>
+                  <a:txBody>
+                    <a:bodyPr/>
+                    <a:lstStyle/>
+                    <a:p>
+                      <a:pPr algn="ctr"/>
+                      <a:r>
+                        <a:rPr kumimoji="1" lang="en-US" altLang="ja-JP" sz="2000" b="0" i="0" kern="1200" dirty="0">
+                          <a:solidFill>
+                            <a:schemeClr val="dk1"/>
+                          </a:solidFill>
+                          <a:effectLst/>
+                          <a:latin typeface="+mn-lt"/>
+                          <a:ea typeface="+mn-ea"/>
+                          <a:cs typeface="+mn-cs"/>
+                        </a:rPr>
+                        <a:t>Lua, Python, EEL2 (C/C++</a:t>
+                      </a:r>
+                      <a:r>
+                        <a:rPr kumimoji="1" lang="ja-JP" altLang="en-US" sz="2000" b="0" i="0" kern="1200" dirty="0">
+                          <a:solidFill>
+                            <a:schemeClr val="dk1"/>
+                          </a:solidFill>
+                          <a:effectLst/>
+                          <a:latin typeface="+mn-lt"/>
+                          <a:ea typeface="+mn-ea"/>
+                          <a:cs typeface="+mn-cs"/>
+                        </a:rPr>
+                        <a:t>も可</a:t>
+                      </a:r>
+                      <a:r>
+                        <a:rPr kumimoji="1" lang="en-US" altLang="ja-JP" sz="2000" b="0" i="0" kern="1200" dirty="0">
+                          <a:solidFill>
+                            <a:schemeClr val="dk1"/>
+                          </a:solidFill>
+                          <a:effectLst/>
+                          <a:latin typeface="+mn-lt"/>
+                          <a:ea typeface="+mn-ea"/>
+                          <a:cs typeface="+mn-cs"/>
+                        </a:rPr>
+                        <a:t>)</a:t>
+                      </a:r>
+                      <a:endParaRPr kumimoji="1" lang="ja-JP" altLang="en-US" sz="2400" b="0" dirty="0">
+                        <a:solidFill>
+                          <a:schemeClr val="tx1"/>
+                        </a:solidFill>
+                      </a:endParaRPr>
+                    </a:p>
+                  </a:txBody>
+                  <a:tcPr anchor="ctr">
+                    <a:lnL w="38100" cap="flat" cmpd="sng" algn="ctr">
+                      <a:solidFill>
+                        <a:schemeClr val="tx1"/>
+                      </a:solidFill>
+                      <a:prstDash val="solid"/>
+                      <a:round/>
+                      <a:headEnd type="none" w="med" len="med"/>
+                      <a:tailEnd type="none" w="med" len="med"/>
+                    </a:lnL>
+                    <a:lnR w="38100" cap="flat" cmpd="sng" algn="ctr">
+                      <a:solidFill>
+                        <a:schemeClr val="tx1"/>
+                      </a:solidFill>
+                      <a:prstDash val="solid"/>
+                      <a:round/>
+                      <a:headEnd type="none" w="med" len="med"/>
+                      <a:tailEnd type="none" w="med" len="med"/>
+                    </a:lnR>
+                    <a:lnT w="38100" cap="flat" cmpd="sng" algn="ctr">
+                      <a:solidFill>
+                        <a:schemeClr val="tx1"/>
+                      </a:solidFill>
+                      <a:prstDash val="solid"/>
+                      <a:round/>
+                      <a:headEnd type="none" w="med" len="med"/>
+                      <a:tailEnd type="none" w="med" len="med"/>
+                    </a:lnT>
+                    <a:lnB w="38100" cap="flat" cmpd="sng" algn="ctr">
+                      <a:solidFill>
+                        <a:schemeClr val="tx1"/>
+                      </a:solidFill>
+                      <a:prstDash val="solid"/>
+                      <a:round/>
+                      <a:headEnd type="none" w="med" len="med"/>
+                      <a:tailEnd type="none" w="med" len="med"/>
+                    </a:lnB>
+                    <a:noFill/>
+                  </a:tcPr>
+                </a:tc>
+                <a:tc>
+                  <a:txBody>
+                    <a:bodyPr/>
+                    <a:lstStyle/>
+                    <a:p>
+                      <a:pPr algn="ctr"/>
+                      <a:r>
+                        <a:rPr kumimoji="1" lang="en-US" altLang="ja-JP" sz="2000" b="0" dirty="0">
+                          <a:solidFill>
+                            <a:schemeClr val="tx1"/>
+                          </a:solidFill>
+                        </a:rPr>
+                        <a:t>C++</a:t>
+                      </a:r>
+                      <a:endParaRPr kumimoji="1" lang="ja-JP" altLang="en-US" sz="2000" b="0" dirty="0">
+                        <a:solidFill>
+                          <a:schemeClr val="tx1"/>
+                        </a:solidFill>
+                      </a:endParaRPr>
+                    </a:p>
+                  </a:txBody>
+                  <a:tcPr anchor="ctr">
+                    <a:lnL w="38100" cap="flat" cmpd="sng" algn="ctr">
+                      <a:solidFill>
+                        <a:schemeClr val="tx1"/>
+                      </a:solidFill>
+                      <a:prstDash val="solid"/>
+                      <a:round/>
+                      <a:headEnd type="none" w="med" len="med"/>
+                      <a:tailEnd type="none" w="med" len="med"/>
+                    </a:lnL>
+                    <a:lnR w="38100" cap="flat" cmpd="sng" algn="ctr">
+                      <a:solidFill>
+                        <a:schemeClr val="tx1"/>
+                      </a:solidFill>
+                      <a:prstDash val="solid"/>
+                      <a:round/>
+                      <a:headEnd type="none" w="med" len="med"/>
+                      <a:tailEnd type="none" w="med" len="med"/>
+                    </a:lnR>
+                    <a:lnT w="38100" cap="flat" cmpd="sng" algn="ctr">
+                      <a:solidFill>
+                        <a:schemeClr val="tx1"/>
+                      </a:solidFill>
+                      <a:prstDash val="solid"/>
+                      <a:round/>
+                      <a:headEnd type="none" w="med" len="med"/>
+                      <a:tailEnd type="none" w="med" len="med"/>
+                    </a:lnT>
+                    <a:lnB w="38100" cap="flat" cmpd="sng" algn="ctr">
+                      <a:solidFill>
+                        <a:schemeClr val="tx1"/>
+                      </a:solidFill>
+                      <a:prstDash val="solid"/>
+                      <a:round/>
+                      <a:headEnd type="none" w="med" len="med"/>
+                      <a:tailEnd type="none" w="med" len="med"/>
+                    </a:lnB>
+                    <a:noFill/>
+                  </a:tcPr>
+                </a:tc>
+                <a:tc>
+                  <a:txBody>
+                    <a:bodyPr/>
+                    <a:lstStyle/>
+                    <a:p>
+                      <a:pPr algn="ctr"/>
+                      <a:r>
+                        <a:rPr kumimoji="1" lang="ja-JP" altLang="en-US" sz="2000" b="0" dirty="0">
+                          <a:solidFill>
+                            <a:schemeClr val="tx1"/>
+                          </a:solidFill>
+                        </a:rPr>
+                        <a:t>主に</a:t>
+                      </a:r>
+                      <a:r>
+                        <a:rPr kumimoji="1" lang="en-US" altLang="ja-JP" sz="2000" b="0" dirty="0">
+                          <a:solidFill>
+                            <a:schemeClr val="tx1"/>
+                          </a:solidFill>
+                        </a:rPr>
+                        <a:t>C++</a:t>
+                      </a:r>
+                      <a:endParaRPr kumimoji="1" lang="ja-JP" altLang="en-US" sz="2000" b="0" dirty="0">
+                        <a:solidFill>
+                          <a:schemeClr val="tx1"/>
+                        </a:solidFill>
+                      </a:endParaRPr>
+                    </a:p>
+                  </a:txBody>
+                  <a:tcPr anchor="ctr">
+                    <a:lnL w="38100" cap="flat" cmpd="sng" algn="ctr">
+                      <a:solidFill>
+                        <a:schemeClr val="tx1"/>
+                      </a:solidFill>
+                      <a:prstDash val="solid"/>
+                      <a:round/>
+                      <a:headEnd type="none" w="med" len="med"/>
+                      <a:tailEnd type="none" w="med" len="med"/>
+                    </a:lnL>
+                    <a:lnR w="38100" cap="flat" cmpd="sng" algn="ctr">
+                      <a:noFill/>
+                      <a:prstDash val="solid"/>
+                      <a:round/>
+                      <a:headEnd type="none" w="med" len="med"/>
+                      <a:tailEnd type="none" w="med" len="med"/>
+                    </a:lnR>
+                    <a:lnT w="38100" cap="flat" cmpd="sng" algn="ctr">
+                      <a:solidFill>
+                        <a:schemeClr val="tx1"/>
+                      </a:solidFill>
+                      <a:prstDash val="solid"/>
+                      <a:round/>
+                      <a:headEnd type="none" w="med" len="med"/>
+                      <a:tailEnd type="none" w="med" len="med"/>
+                    </a:lnT>
+                    <a:lnB w="38100" cap="flat" cmpd="sng" algn="ctr">
+                      <a:solidFill>
+                        <a:schemeClr val="tx1"/>
+                      </a:solidFill>
+                      <a:prstDash val="solid"/>
+                      <a:round/>
+                      <a:headEnd type="none" w="med" len="med"/>
+                      <a:tailEnd type="none" w="med" len="med"/>
+                    </a:lnB>
+                    <a:noFill/>
+                  </a:tcPr>
+                </a:tc>
+                <a:extLst>
+                  <a:ext uri="{0D108BD9-81ED-4DB2-BD59-A6C34878D82A}">
+                    <a16:rowId xmlns:a16="http://schemas.microsoft.com/office/drawing/2014/main" val="960681412"/>
+                  </a:ext>
+                </a:extLst>
+              </a:tr>
+              <a:tr h="1232398">
+                <a:tc>
+                  <a:txBody>
+                    <a:bodyPr/>
+                    <a:lstStyle/>
+                    <a:p>
+                      <a:pPr algn="ctr"/>
+                      <a:r>
+                        <a:rPr kumimoji="1" lang="en-US" altLang="ja-JP" sz="3200" b="0" baseline="0" dirty="0">
+                          <a:solidFill>
+                            <a:schemeClr val="tx1"/>
+                          </a:solidFill>
+                          <a:latin typeface="+mj-ea"/>
+                          <a:ea typeface="+mj-ea"/>
+                        </a:rPr>
+                        <a:t>DAW</a:t>
+                      </a:r>
+                      <a:r>
+                        <a:rPr kumimoji="1" lang="ja-JP" altLang="en-US" sz="3200" b="0" baseline="0" dirty="0">
+                          <a:solidFill>
+                            <a:schemeClr val="tx1"/>
+                          </a:solidFill>
+                          <a:latin typeface="+mj-ea"/>
+                          <a:ea typeface="+mj-ea"/>
+                        </a:rPr>
+                        <a:t>への</a:t>
+                      </a:r>
+                      <a:br>
+                        <a:rPr kumimoji="1" lang="en-US" altLang="ja-JP" sz="3200" b="0" baseline="0" dirty="0">
+                          <a:solidFill>
+                            <a:schemeClr val="tx1"/>
+                          </a:solidFill>
+                          <a:latin typeface="+mj-ea"/>
+                          <a:ea typeface="+mj-ea"/>
+                        </a:rPr>
+                      </a:br>
+                      <a:r>
+                        <a:rPr kumimoji="1" lang="ja-JP" altLang="en-US" sz="3200" b="0" baseline="0" dirty="0">
+                          <a:solidFill>
+                            <a:schemeClr val="tx1"/>
+                          </a:solidFill>
+                          <a:latin typeface="+mj-ea"/>
+                          <a:ea typeface="+mj-ea"/>
+                        </a:rPr>
+                        <a:t>介入度</a:t>
+                      </a:r>
+                    </a:p>
+                  </a:txBody>
+                  <a:tcPr anchor="ctr">
+                    <a:lnL w="38100" cap="flat" cmpd="sng" algn="ctr">
+                      <a:noFill/>
+                      <a:prstDash val="solid"/>
+                      <a:round/>
+                      <a:headEnd type="none" w="med" len="med"/>
+                      <a:tailEnd type="none" w="med" len="med"/>
+                    </a:lnL>
+                    <a:lnR w="38100" cap="flat" cmpd="sng" algn="ctr">
+                      <a:solidFill>
+                        <a:schemeClr val="tx1"/>
+                      </a:solidFill>
+                      <a:prstDash val="solid"/>
+                      <a:round/>
+                      <a:headEnd type="none" w="med" len="med"/>
+                      <a:tailEnd type="none" w="med" len="med"/>
+                    </a:lnR>
+                    <a:lnT w="38100" cap="flat" cmpd="sng" algn="ctr">
+                      <a:solidFill>
+                        <a:schemeClr val="tx1"/>
+                      </a:solidFill>
+                      <a:prstDash val="solid"/>
+                      <a:round/>
+                      <a:headEnd type="none" w="med" len="med"/>
+                      <a:tailEnd type="none" w="med" len="med"/>
+                    </a:lnT>
+                    <a:lnB w="38100" cap="flat" cmpd="sng" algn="ctr">
+                      <a:solidFill>
+                        <a:schemeClr val="tx1"/>
+                      </a:solidFill>
+                      <a:prstDash val="solid"/>
+                      <a:round/>
+                      <a:headEnd type="none" w="med" len="med"/>
+                      <a:tailEnd type="none" w="med" len="med"/>
+                    </a:lnB>
+                    <a:solidFill>
+                      <a:schemeClr val="bg1">
+                        <a:lumMod val="85000"/>
+                      </a:schemeClr>
+                    </a:solidFill>
+                  </a:tcPr>
+                </a:tc>
+                <a:tc>
+                  <a:txBody>
+                    <a:bodyPr/>
+                    <a:lstStyle/>
+                    <a:p>
+                      <a:pPr algn="ctr"/>
+                      <a:r>
+                        <a:rPr kumimoji="1" lang="ja-JP" altLang="en-US" sz="2000" b="0" i="0" kern="1200" dirty="0">
+                          <a:solidFill>
+                            <a:schemeClr val="dk1"/>
+                          </a:solidFill>
+                          <a:effectLst/>
+                          <a:latin typeface="モボ-SemiBold" panose="02000700000000000000" pitchFamily="50" charset="-128"/>
+                          <a:ea typeface="モボ-SemiBold" panose="02000700000000000000" pitchFamily="50" charset="-128"/>
+                          <a:cs typeface="+mn-cs"/>
+                        </a:rPr>
+                        <a:t>大</a:t>
+                      </a:r>
+                      <a:r>
+                        <a:rPr kumimoji="1" lang="ja-JP" altLang="en-US" sz="2000" b="0" i="0" kern="1200" dirty="0">
+                          <a:solidFill>
+                            <a:schemeClr val="dk1"/>
+                          </a:solidFill>
+                          <a:effectLst/>
+                          <a:latin typeface="+mn-lt"/>
+                          <a:ea typeface="+mn-ea"/>
+                          <a:cs typeface="+mn-cs"/>
+                        </a:rPr>
+                        <a:t>（</a:t>
+                      </a:r>
+                      <a:r>
+                        <a:rPr kumimoji="1" lang="en-US" altLang="ja-JP" sz="2000" b="0" i="0" kern="1200" dirty="0">
+                          <a:solidFill>
+                            <a:schemeClr val="dk1"/>
+                          </a:solidFill>
+                          <a:effectLst/>
+                          <a:latin typeface="+mn-lt"/>
+                          <a:ea typeface="+mn-ea"/>
+                          <a:cs typeface="+mn-cs"/>
+                        </a:rPr>
+                        <a:t>DOM</a:t>
+                      </a:r>
+                      <a:r>
+                        <a:rPr kumimoji="1" lang="ja-JP" altLang="en-US" sz="2000" b="0" i="0" kern="1200" dirty="0">
+                          <a:solidFill>
+                            <a:schemeClr val="dk1"/>
+                          </a:solidFill>
+                          <a:effectLst/>
+                          <a:latin typeface="+mn-lt"/>
+                          <a:ea typeface="+mn-ea"/>
+                          <a:cs typeface="+mn-cs"/>
+                        </a:rPr>
+                        <a:t>操作で</a:t>
+                      </a:r>
+                      <a:r>
+                        <a:rPr kumimoji="1" lang="en-US" altLang="ja-JP" sz="2000" b="0" i="0" kern="1200" dirty="0">
+                          <a:solidFill>
+                            <a:schemeClr val="dk1"/>
+                          </a:solidFill>
+                          <a:effectLst/>
+                          <a:latin typeface="+mn-lt"/>
+                          <a:ea typeface="+mn-ea"/>
+                          <a:cs typeface="+mn-cs"/>
+                        </a:rPr>
+                        <a:t>UI</a:t>
+                      </a:r>
+                      <a:r>
+                        <a:rPr kumimoji="1" lang="ja-JP" altLang="en-US" sz="2000" b="0" i="0" kern="1200" dirty="0">
+                          <a:solidFill>
+                            <a:schemeClr val="dk1"/>
+                          </a:solidFill>
+                          <a:effectLst/>
+                          <a:latin typeface="+mn-lt"/>
+                          <a:ea typeface="+mn-ea"/>
+                          <a:cs typeface="+mn-cs"/>
+                        </a:rPr>
+                        <a:t>を</a:t>
+                      </a:r>
+                      <a:br>
+                        <a:rPr kumimoji="1" lang="en-US" altLang="ja-JP" sz="2000" b="0" i="0" kern="1200" dirty="0">
+                          <a:solidFill>
+                            <a:schemeClr val="dk1"/>
+                          </a:solidFill>
+                          <a:effectLst/>
+                          <a:latin typeface="+mn-lt"/>
+                          <a:ea typeface="+mn-ea"/>
+                          <a:cs typeface="+mn-cs"/>
+                        </a:rPr>
+                      </a:br>
+                      <a:r>
+                        <a:rPr kumimoji="1" lang="ja-JP" altLang="en-US" sz="2000" b="0" i="0" kern="1200" dirty="0">
+                          <a:solidFill>
+                            <a:schemeClr val="dk1"/>
+                          </a:solidFill>
+                          <a:effectLst/>
+                          <a:latin typeface="+mn-lt"/>
+                          <a:ea typeface="+mn-ea"/>
+                          <a:cs typeface="+mn-cs"/>
+                        </a:rPr>
+                        <a:t>根本から変更可能、</a:t>
+                      </a:r>
+                      <a:r>
+                        <a:rPr kumimoji="1" lang="en-US" altLang="ja-JP" sz="2000" b="0" i="0" kern="1200" dirty="0">
+                          <a:solidFill>
+                            <a:schemeClr val="dk1"/>
+                          </a:solidFill>
+                          <a:effectLst/>
+                          <a:latin typeface="+mn-lt"/>
+                          <a:ea typeface="+mn-ea"/>
+                          <a:cs typeface="+mn-cs"/>
+                        </a:rPr>
+                        <a:t>DAW</a:t>
+                      </a:r>
+                      <a:r>
+                        <a:rPr kumimoji="1" lang="ja-JP" altLang="en-US" sz="2000" b="0" i="0" kern="1200" dirty="0">
+                          <a:solidFill>
+                            <a:schemeClr val="dk1"/>
+                          </a:solidFill>
+                          <a:effectLst/>
+                          <a:latin typeface="+mn-lt"/>
+                          <a:ea typeface="+mn-ea"/>
+                          <a:cs typeface="+mn-cs"/>
+                        </a:rPr>
+                        <a:t>のコア操作</a:t>
+                      </a:r>
+                      <a:r>
+                        <a:rPr kumimoji="1" lang="en-US" altLang="ja-JP" sz="2000" b="0" i="0" kern="1200" dirty="0">
+                          <a:solidFill>
+                            <a:schemeClr val="dk1"/>
+                          </a:solidFill>
+                          <a:effectLst/>
+                          <a:latin typeface="+mn-lt"/>
+                          <a:ea typeface="+mn-ea"/>
+                          <a:cs typeface="+mn-cs"/>
+                        </a:rPr>
+                        <a:t>API</a:t>
+                      </a:r>
+                      <a:br>
+                        <a:rPr kumimoji="1" lang="en-US" altLang="ja-JP" sz="2000" b="0" i="0" kern="1200" dirty="0">
+                          <a:solidFill>
+                            <a:schemeClr val="dk1"/>
+                          </a:solidFill>
+                          <a:effectLst/>
+                          <a:latin typeface="+mn-lt"/>
+                          <a:ea typeface="+mn-ea"/>
+                          <a:cs typeface="+mn-cs"/>
+                        </a:rPr>
+                      </a:br>
+                      <a:r>
+                        <a:rPr kumimoji="1" lang="ja-JP" altLang="en-US" sz="2000" b="0" i="0" kern="1200" dirty="0">
+                          <a:solidFill>
+                            <a:schemeClr val="dk1"/>
+                          </a:solidFill>
+                          <a:effectLst/>
+                          <a:latin typeface="+mn-lt"/>
+                          <a:ea typeface="+mn-ea"/>
+                          <a:cs typeface="+mn-cs"/>
+                        </a:rPr>
+                        <a:t>にも直接アクセス）</a:t>
+                      </a:r>
+                      <a:endParaRPr kumimoji="1" lang="ja-JP" altLang="en-US" sz="2400" b="0" dirty="0">
+                        <a:solidFill>
+                          <a:schemeClr val="tx1"/>
+                        </a:solidFill>
+                      </a:endParaRPr>
+                    </a:p>
+                  </a:txBody>
+                  <a:tcPr anchor="ctr">
+                    <a:lnL w="38100" cap="flat" cmpd="sng" algn="ctr">
+                      <a:solidFill>
+                        <a:schemeClr val="tx1"/>
+                      </a:solidFill>
+                      <a:prstDash val="solid"/>
+                      <a:round/>
+                      <a:headEnd type="none" w="med" len="med"/>
+                      <a:tailEnd type="none" w="med" len="med"/>
+                    </a:lnL>
+                    <a:lnR w="38100" cap="flat" cmpd="sng" algn="ctr">
+                      <a:solidFill>
+                        <a:schemeClr val="tx1"/>
+                      </a:solidFill>
+                      <a:prstDash val="solid"/>
+                      <a:round/>
+                      <a:headEnd type="none" w="med" len="med"/>
+                      <a:tailEnd type="none" w="med" len="med"/>
+                    </a:lnR>
+                    <a:lnT w="38100" cap="flat" cmpd="sng" algn="ctr">
+                      <a:solidFill>
+                        <a:schemeClr val="tx1"/>
+                      </a:solidFill>
+                      <a:prstDash val="solid"/>
+                      <a:round/>
+                      <a:headEnd type="none" w="med" len="med"/>
+                      <a:tailEnd type="none" w="med" len="med"/>
+                    </a:lnT>
+                    <a:lnB w="38100" cap="flat" cmpd="sng" algn="ctr">
+                      <a:solidFill>
+                        <a:schemeClr val="tx1"/>
+                      </a:solidFill>
+                      <a:prstDash val="solid"/>
+                      <a:round/>
+                      <a:headEnd type="none" w="med" len="med"/>
+                      <a:tailEnd type="none" w="med" len="med"/>
+                    </a:lnB>
+                    <a:noFill/>
+                  </a:tcPr>
+                </a:tc>
+                <a:tc>
+                  <a:txBody>
+                    <a:bodyPr/>
+                    <a:lstStyle/>
+                    <a:p>
+                      <a:pPr algn="ctr"/>
+                      <a:r>
+                        <a:rPr kumimoji="1" lang="ja-JP" altLang="en-US" sz="2000" b="0" i="0" kern="1200" dirty="0">
+                          <a:solidFill>
+                            <a:schemeClr val="dk1"/>
+                          </a:solidFill>
+                          <a:effectLst/>
+                          <a:latin typeface="モボ-SemiBold" panose="02000700000000000000" pitchFamily="50" charset="-128"/>
+                          <a:ea typeface="モボ-SemiBold" panose="02000700000000000000" pitchFamily="50" charset="-128"/>
+                          <a:cs typeface="+mn-cs"/>
+                        </a:rPr>
+                        <a:t>中</a:t>
+                      </a:r>
+                      <a:r>
+                        <a:rPr kumimoji="1" lang="en-US" altLang="ja-JP" sz="2000" b="0" i="0" kern="1200" dirty="0">
+                          <a:solidFill>
+                            <a:schemeClr val="dk1"/>
+                          </a:solidFill>
+                          <a:effectLst/>
+                          <a:latin typeface="モボ-SemiBold" panose="02000700000000000000" pitchFamily="50" charset="-128"/>
+                          <a:ea typeface="モボ-SemiBold" panose="02000700000000000000" pitchFamily="50" charset="-128"/>
+                          <a:cs typeface="+mn-cs"/>
+                        </a:rPr>
+                        <a:t>〜</a:t>
+                      </a:r>
+                      <a:r>
+                        <a:rPr kumimoji="1" lang="ja-JP" altLang="en-US" sz="2000" b="0" i="0" kern="1200" dirty="0">
+                          <a:solidFill>
+                            <a:schemeClr val="dk1"/>
+                          </a:solidFill>
+                          <a:effectLst/>
+                          <a:latin typeface="モボ-SemiBold" panose="02000700000000000000" pitchFamily="50" charset="-128"/>
+                          <a:ea typeface="モボ-SemiBold" panose="02000700000000000000" pitchFamily="50" charset="-128"/>
+                          <a:cs typeface="+mn-cs"/>
+                        </a:rPr>
+                        <a:t>大</a:t>
+                      </a:r>
+                      <a:r>
+                        <a:rPr kumimoji="1" lang="ja-JP" altLang="en-US" sz="2000" b="0" i="0" kern="1200" dirty="0">
+                          <a:solidFill>
+                            <a:schemeClr val="dk1"/>
+                          </a:solidFill>
+                          <a:effectLst/>
+                          <a:latin typeface="+mn-lt"/>
+                          <a:ea typeface="+mn-ea"/>
+                          <a:cs typeface="+mn-cs"/>
+                        </a:rPr>
+                        <a:t>（</a:t>
+                      </a:r>
+                      <a:r>
+                        <a:rPr kumimoji="1" lang="en-US" altLang="ja-JP" sz="2000" b="0" i="0" kern="1200" dirty="0">
+                          <a:solidFill>
+                            <a:schemeClr val="dk1"/>
+                          </a:solidFill>
+                          <a:effectLst/>
+                          <a:latin typeface="+mn-lt"/>
+                          <a:ea typeface="+mn-ea"/>
+                          <a:cs typeface="+mn-cs"/>
+                        </a:rPr>
+                        <a:t>API</a:t>
+                      </a:r>
+                      <a:r>
+                        <a:rPr kumimoji="1" lang="ja-JP" altLang="en-US" sz="2000" b="0" i="0" kern="1200" dirty="0">
+                          <a:solidFill>
+                            <a:schemeClr val="dk1"/>
+                          </a:solidFill>
+                          <a:effectLst/>
+                          <a:latin typeface="+mn-lt"/>
+                          <a:ea typeface="+mn-ea"/>
+                          <a:cs typeface="+mn-cs"/>
+                        </a:rPr>
+                        <a:t>経由で</a:t>
+                      </a:r>
+                      <a:br>
+                        <a:rPr kumimoji="1" lang="en-US" altLang="ja-JP" sz="2000" b="0" i="0" kern="1200" dirty="0">
+                          <a:solidFill>
+                            <a:schemeClr val="dk1"/>
+                          </a:solidFill>
+                          <a:effectLst/>
+                          <a:latin typeface="+mn-lt"/>
+                          <a:ea typeface="+mn-ea"/>
+                          <a:cs typeface="+mn-cs"/>
+                        </a:rPr>
+                      </a:br>
+                      <a:r>
+                        <a:rPr kumimoji="1" lang="ja-JP" altLang="en-US" sz="2000" b="0" i="0" kern="1200" dirty="0">
+                          <a:solidFill>
+                            <a:schemeClr val="dk1"/>
+                          </a:solidFill>
+                          <a:effectLst/>
+                          <a:latin typeface="+mn-lt"/>
+                          <a:ea typeface="+mn-ea"/>
+                          <a:cs typeface="+mn-cs"/>
+                        </a:rPr>
+                        <a:t>操作やカスタム</a:t>
+                      </a:r>
+                      <a:r>
+                        <a:rPr kumimoji="1" lang="en-US" altLang="ja-JP" sz="2000" b="0" i="0" kern="1200" dirty="0">
+                          <a:solidFill>
+                            <a:schemeClr val="dk1"/>
+                          </a:solidFill>
+                          <a:effectLst/>
+                          <a:latin typeface="+mn-lt"/>
+                          <a:ea typeface="+mn-ea"/>
+                          <a:cs typeface="+mn-cs"/>
+                        </a:rPr>
+                        <a:t>GUI</a:t>
+                      </a:r>
+                      <a:r>
+                        <a:rPr kumimoji="1" lang="ja-JP" altLang="en-US" sz="2000" b="0" i="0" kern="1200" dirty="0">
+                          <a:solidFill>
+                            <a:schemeClr val="dk1"/>
+                          </a:solidFill>
+                          <a:effectLst/>
+                          <a:latin typeface="+mn-lt"/>
+                          <a:ea typeface="+mn-ea"/>
+                          <a:cs typeface="+mn-cs"/>
+                        </a:rPr>
+                        <a:t>の作成が可能）</a:t>
+                      </a:r>
+                      <a:endParaRPr kumimoji="1" lang="ja-JP" altLang="en-US" sz="2400" b="0" dirty="0">
+                        <a:solidFill>
+                          <a:schemeClr val="tx1"/>
+                        </a:solidFill>
+                      </a:endParaRPr>
+                    </a:p>
+                  </a:txBody>
+                  <a:tcPr anchor="ctr">
+                    <a:lnL w="38100" cap="flat" cmpd="sng" algn="ctr">
+                      <a:solidFill>
+                        <a:schemeClr val="tx1"/>
+                      </a:solidFill>
+                      <a:prstDash val="solid"/>
+                      <a:round/>
+                      <a:headEnd type="none" w="med" len="med"/>
+                      <a:tailEnd type="none" w="med" len="med"/>
+                    </a:lnL>
+                    <a:lnR w="38100" cap="flat" cmpd="sng" algn="ctr">
+                      <a:solidFill>
+                        <a:schemeClr val="tx1"/>
+                      </a:solidFill>
+                      <a:prstDash val="solid"/>
+                      <a:round/>
+                      <a:headEnd type="none" w="med" len="med"/>
+                      <a:tailEnd type="none" w="med" len="med"/>
+                    </a:lnR>
+                    <a:lnT w="38100" cap="flat" cmpd="sng" algn="ctr">
+                      <a:solidFill>
+                        <a:schemeClr val="tx1"/>
+                      </a:solidFill>
+                      <a:prstDash val="solid"/>
+                      <a:round/>
+                      <a:headEnd type="none" w="med" len="med"/>
+                      <a:tailEnd type="none" w="med" len="med"/>
+                    </a:lnT>
+                    <a:lnB w="38100" cap="flat" cmpd="sng" algn="ctr">
+                      <a:solidFill>
+                        <a:schemeClr val="tx1"/>
+                      </a:solidFill>
+                      <a:prstDash val="solid"/>
+                      <a:round/>
+                      <a:headEnd type="none" w="med" len="med"/>
+                      <a:tailEnd type="none" w="med" len="med"/>
+                    </a:lnB>
+                    <a:noFill/>
+                  </a:tcPr>
+                </a:tc>
+                <a:tc>
+                  <a:txBody>
+                    <a:bodyPr/>
+                    <a:lstStyle/>
+                    <a:p>
+                      <a:pPr algn="ctr"/>
+                      <a:r>
+                        <a:rPr kumimoji="1" lang="ja-JP" altLang="en-US" sz="2000" b="0" dirty="0">
+                          <a:solidFill>
+                            <a:schemeClr val="tx1"/>
+                          </a:solidFill>
+                        </a:rPr>
+                        <a:t>そもそも</a:t>
+                      </a:r>
+                      <a:r>
+                        <a:rPr kumimoji="1" lang="en-US" altLang="ja-JP" sz="2000" b="0" dirty="0">
+                          <a:solidFill>
+                            <a:schemeClr val="tx1"/>
+                          </a:solidFill>
+                        </a:rPr>
+                        <a:t>DAW</a:t>
+                      </a:r>
+                      <a:r>
+                        <a:rPr kumimoji="1" lang="ja-JP" altLang="en-US" sz="2000" b="0" dirty="0">
+                          <a:solidFill>
+                            <a:schemeClr val="tx1"/>
+                          </a:solidFill>
+                        </a:rPr>
+                        <a:t>や</a:t>
+                      </a:r>
+                      <a:r>
+                        <a:rPr kumimoji="1" lang="en-US" altLang="ja-JP" sz="2000" b="0" dirty="0">
+                          <a:solidFill>
+                            <a:schemeClr val="tx1"/>
+                          </a:solidFill>
+                        </a:rPr>
+                        <a:t>VST</a:t>
+                      </a:r>
+                      <a:r>
+                        <a:rPr kumimoji="1" lang="ja-JP" altLang="en-US" sz="2000" b="0" dirty="0">
+                          <a:solidFill>
+                            <a:schemeClr val="tx1"/>
+                          </a:solidFill>
+                        </a:rPr>
+                        <a:t>を作るためのツールなので全て自由に開発可能</a:t>
+                      </a:r>
+                    </a:p>
+                  </a:txBody>
+                  <a:tcPr anchor="ctr">
+                    <a:lnL w="38100" cap="flat" cmpd="sng" algn="ctr">
+                      <a:solidFill>
+                        <a:schemeClr val="tx1"/>
+                      </a:solidFill>
+                      <a:prstDash val="solid"/>
+                      <a:round/>
+                      <a:headEnd type="none" w="med" len="med"/>
+                      <a:tailEnd type="none" w="med" len="med"/>
+                    </a:lnL>
+                    <a:lnR w="38100" cap="flat" cmpd="sng" algn="ctr">
+                      <a:solidFill>
+                        <a:schemeClr val="tx1"/>
+                      </a:solidFill>
+                      <a:prstDash val="solid"/>
+                      <a:round/>
+                      <a:headEnd type="none" w="med" len="med"/>
+                      <a:tailEnd type="none" w="med" len="med"/>
+                    </a:lnR>
+                    <a:lnT w="38100" cap="flat" cmpd="sng" algn="ctr">
+                      <a:solidFill>
+                        <a:schemeClr val="tx1"/>
+                      </a:solidFill>
+                      <a:prstDash val="solid"/>
+                      <a:round/>
+                      <a:headEnd type="none" w="med" len="med"/>
+                      <a:tailEnd type="none" w="med" len="med"/>
+                    </a:lnT>
+                    <a:lnB w="38100" cap="flat" cmpd="sng" algn="ctr">
+                      <a:solidFill>
+                        <a:schemeClr val="tx1"/>
+                      </a:solidFill>
+                      <a:prstDash val="solid"/>
+                      <a:round/>
+                      <a:headEnd type="none" w="med" len="med"/>
+                      <a:tailEnd type="none" w="med" len="med"/>
+                    </a:lnB>
+                    <a:noFill/>
+                  </a:tcPr>
+                </a:tc>
+                <a:tc>
+                  <a:txBody>
+                    <a:bodyPr/>
+                    <a:lstStyle/>
+                    <a:p>
+                      <a:pPr algn="ctr"/>
+                      <a:r>
+                        <a:rPr kumimoji="1" lang="ja-JP" altLang="en-US" sz="2000" b="0" i="0" kern="1200" dirty="0">
+                          <a:solidFill>
+                            <a:schemeClr val="dk1"/>
+                          </a:solidFill>
+                          <a:effectLst/>
+                          <a:latin typeface="モボ-SemiBold" panose="02000700000000000000" pitchFamily="50" charset="-128"/>
+                          <a:ea typeface="モボ-SemiBold" panose="02000700000000000000" pitchFamily="50" charset="-128"/>
+                          <a:cs typeface="+mn-cs"/>
+                        </a:rPr>
+                        <a:t>小</a:t>
+                      </a:r>
+                      <a:r>
+                        <a:rPr kumimoji="1" lang="ja-JP" altLang="en-US" sz="2000" b="0" i="0" kern="1200" dirty="0">
+                          <a:solidFill>
+                            <a:schemeClr val="dk1"/>
+                          </a:solidFill>
+                          <a:effectLst/>
+                          <a:latin typeface="+mn-lt"/>
+                          <a:ea typeface="+mn-ea"/>
+                          <a:cs typeface="+mn-cs"/>
+                        </a:rPr>
+                        <a:t>（ホスト内の</a:t>
+                      </a:r>
+                      <a:br>
+                        <a:rPr kumimoji="1" lang="en-US" altLang="ja-JP" sz="2000" b="0" i="0" kern="1200" dirty="0">
+                          <a:solidFill>
+                            <a:schemeClr val="dk1"/>
+                          </a:solidFill>
+                          <a:effectLst/>
+                          <a:latin typeface="+mn-lt"/>
+                          <a:ea typeface="+mn-ea"/>
+                          <a:cs typeface="+mn-cs"/>
+                        </a:rPr>
+                      </a:br>
+                      <a:r>
+                        <a:rPr kumimoji="1" lang="ja-JP" altLang="en-US" sz="2000" b="0" i="0" kern="1200" dirty="0">
+                          <a:solidFill>
+                            <a:schemeClr val="dk1"/>
+                          </a:solidFill>
+                          <a:effectLst/>
+                          <a:latin typeface="+mn-lt"/>
+                          <a:ea typeface="+mn-ea"/>
+                          <a:cs typeface="+mn-cs"/>
+                        </a:rPr>
+                        <a:t>専用ウィンドウに</a:t>
+                      </a:r>
+                      <a:br>
+                        <a:rPr kumimoji="1" lang="en-US" altLang="ja-JP" sz="2000" b="0" i="0" kern="1200" dirty="0">
+                          <a:solidFill>
+                            <a:schemeClr val="dk1"/>
+                          </a:solidFill>
+                          <a:effectLst/>
+                          <a:latin typeface="+mn-lt"/>
+                          <a:ea typeface="+mn-ea"/>
+                          <a:cs typeface="+mn-cs"/>
+                        </a:rPr>
+                      </a:br>
+                      <a:r>
+                        <a:rPr kumimoji="1" lang="ja-JP" altLang="en-US" sz="2000" b="0" i="0" kern="1200" dirty="0">
+                          <a:solidFill>
+                            <a:schemeClr val="dk1"/>
+                          </a:solidFill>
+                          <a:effectLst/>
+                          <a:latin typeface="+mn-lt"/>
+                          <a:ea typeface="+mn-ea"/>
+                          <a:cs typeface="+mn-cs"/>
+                        </a:rPr>
+                        <a:t>隔離、</a:t>
+                      </a:r>
+                      <a:r>
+                        <a:rPr kumimoji="1" lang="en-US" altLang="ja-JP" sz="2000" b="0" i="0" kern="1200" dirty="0">
+                          <a:solidFill>
+                            <a:schemeClr val="dk1"/>
+                          </a:solidFill>
+                          <a:effectLst/>
+                          <a:latin typeface="+mn-lt"/>
+                          <a:ea typeface="+mn-ea"/>
+                          <a:cs typeface="+mn-cs"/>
+                        </a:rPr>
+                        <a:t>DAW</a:t>
+                      </a:r>
+                      <a:r>
+                        <a:rPr kumimoji="1" lang="ja-JP" altLang="en-US" sz="2000" b="0" i="0" kern="1200" dirty="0">
+                          <a:solidFill>
+                            <a:schemeClr val="dk1"/>
+                          </a:solidFill>
+                          <a:effectLst/>
+                          <a:latin typeface="+mn-lt"/>
+                          <a:ea typeface="+mn-ea"/>
+                          <a:cs typeface="+mn-cs"/>
+                        </a:rPr>
+                        <a:t>自体</a:t>
+                      </a:r>
+                      <a:br>
+                        <a:rPr kumimoji="1" lang="en-US" altLang="ja-JP" sz="2000" b="0" i="0" kern="1200" dirty="0">
+                          <a:solidFill>
+                            <a:schemeClr val="dk1"/>
+                          </a:solidFill>
+                          <a:effectLst/>
+                          <a:latin typeface="+mn-lt"/>
+                          <a:ea typeface="+mn-ea"/>
+                          <a:cs typeface="+mn-cs"/>
+                        </a:rPr>
+                      </a:br>
+                      <a:r>
+                        <a:rPr kumimoji="1" lang="ja-JP" altLang="en-US" sz="2000" b="0" i="0" kern="1200" dirty="0">
+                          <a:solidFill>
+                            <a:schemeClr val="dk1"/>
+                          </a:solidFill>
+                          <a:effectLst/>
+                          <a:latin typeface="+mn-lt"/>
+                          <a:ea typeface="+mn-ea"/>
+                          <a:cs typeface="+mn-cs"/>
+                        </a:rPr>
+                        <a:t>の</a:t>
+                      </a:r>
+                      <a:r>
+                        <a:rPr kumimoji="1" lang="en-US" altLang="ja-JP" sz="2000" b="0" i="0" kern="1200" dirty="0">
+                          <a:solidFill>
+                            <a:schemeClr val="dk1"/>
+                          </a:solidFill>
+                          <a:effectLst/>
+                          <a:latin typeface="+mn-lt"/>
+                          <a:ea typeface="+mn-ea"/>
+                          <a:cs typeface="+mn-cs"/>
+                        </a:rPr>
+                        <a:t>UI</a:t>
+                      </a:r>
+                      <a:r>
+                        <a:rPr kumimoji="1" lang="ja-JP" altLang="en-US" sz="2000" b="0" i="0" kern="1200" dirty="0">
+                          <a:solidFill>
+                            <a:schemeClr val="dk1"/>
+                          </a:solidFill>
+                          <a:effectLst/>
+                          <a:latin typeface="+mn-lt"/>
+                          <a:ea typeface="+mn-ea"/>
+                          <a:cs typeface="+mn-cs"/>
+                        </a:rPr>
+                        <a:t>や機能は</a:t>
+                      </a:r>
+                      <a:br>
+                        <a:rPr kumimoji="1" lang="en-US" altLang="ja-JP" sz="2000" b="0" i="0" kern="1200" dirty="0">
+                          <a:solidFill>
+                            <a:schemeClr val="dk1"/>
+                          </a:solidFill>
+                          <a:effectLst/>
+                          <a:latin typeface="+mn-lt"/>
+                          <a:ea typeface="+mn-ea"/>
+                          <a:cs typeface="+mn-cs"/>
+                        </a:rPr>
+                      </a:br>
+                      <a:r>
+                        <a:rPr kumimoji="1" lang="ja-JP" altLang="en-US" sz="2000" b="0" i="0" kern="1200" dirty="0">
+                          <a:solidFill>
+                            <a:schemeClr val="dk1"/>
+                          </a:solidFill>
+                          <a:effectLst/>
+                          <a:latin typeface="+mn-lt"/>
+                          <a:ea typeface="+mn-ea"/>
+                          <a:cs typeface="+mn-cs"/>
+                        </a:rPr>
+                        <a:t>変えられない）</a:t>
+                      </a:r>
+                      <a:endParaRPr kumimoji="1" lang="ja-JP" altLang="en-US" sz="2400" b="0" dirty="0">
+                        <a:solidFill>
+                          <a:schemeClr val="tx1"/>
+                        </a:solidFill>
+                      </a:endParaRPr>
+                    </a:p>
+                  </a:txBody>
+                  <a:tcPr anchor="ctr">
+                    <a:lnL w="38100" cap="flat" cmpd="sng" algn="ctr">
+                      <a:solidFill>
+                        <a:schemeClr val="tx1"/>
+                      </a:solidFill>
+                      <a:prstDash val="solid"/>
+                      <a:round/>
+                      <a:headEnd type="none" w="med" len="med"/>
+                      <a:tailEnd type="none" w="med" len="med"/>
+                    </a:lnL>
+                    <a:lnR w="38100" cap="flat" cmpd="sng" algn="ctr">
+                      <a:noFill/>
+                      <a:prstDash val="solid"/>
+                      <a:round/>
+                      <a:headEnd type="none" w="med" len="med"/>
+                      <a:tailEnd type="none" w="med" len="med"/>
+                    </a:lnR>
+                    <a:lnT w="38100" cap="flat" cmpd="sng" algn="ctr">
+                      <a:solidFill>
+                        <a:schemeClr val="tx1"/>
+                      </a:solidFill>
+                      <a:prstDash val="solid"/>
+                      <a:round/>
+                      <a:headEnd type="none" w="med" len="med"/>
+                      <a:tailEnd type="none" w="med" len="med"/>
+                    </a:lnT>
+                    <a:lnB w="38100" cap="flat" cmpd="sng" algn="ctr">
+                      <a:solidFill>
+                        <a:schemeClr val="tx1"/>
+                      </a:solidFill>
+                      <a:prstDash val="solid"/>
+                      <a:round/>
+                      <a:headEnd type="none" w="med" len="med"/>
+                      <a:tailEnd type="none" w="med" len="med"/>
+                    </a:lnB>
+                    <a:noFill/>
+                  </a:tcPr>
+                </a:tc>
+                <a:extLst>
+                  <a:ext uri="{0D108BD9-81ED-4DB2-BD59-A6C34878D82A}">
+                    <a16:rowId xmlns:a16="http://schemas.microsoft.com/office/drawing/2014/main" val="3327329443"/>
+                  </a:ext>
+                </a:extLst>
+              </a:tr>
+              <a:tr h="1232398">
+                <a:tc>
+                  <a:txBody>
+                    <a:bodyPr/>
+                    <a:lstStyle/>
+                    <a:p>
+                      <a:pPr algn="ctr"/>
+                      <a:r>
+                        <a:rPr kumimoji="1" lang="ja-JP" altLang="en-US" sz="3200" b="0" baseline="0" dirty="0">
+                          <a:solidFill>
+                            <a:schemeClr val="tx1"/>
+                          </a:solidFill>
+                          <a:latin typeface="+mj-ea"/>
+                          <a:ea typeface="+mj-ea"/>
+                        </a:rPr>
+                        <a:t>開発</a:t>
+                      </a:r>
+                      <a:br>
+                        <a:rPr kumimoji="1" lang="en-US" altLang="ja-JP" sz="3200" b="0" baseline="0" dirty="0">
+                          <a:solidFill>
+                            <a:schemeClr val="tx1"/>
+                          </a:solidFill>
+                          <a:latin typeface="+mj-ea"/>
+                          <a:ea typeface="+mj-ea"/>
+                        </a:rPr>
+                      </a:br>
+                      <a:r>
+                        <a:rPr kumimoji="1" lang="ja-JP" altLang="en-US" sz="3200" b="0" baseline="0" dirty="0">
+                          <a:solidFill>
+                            <a:schemeClr val="tx1"/>
+                          </a:solidFill>
+                          <a:latin typeface="+mj-ea"/>
+                          <a:ea typeface="+mj-ea"/>
+                        </a:rPr>
+                        <a:t>ハードル</a:t>
+                      </a:r>
+                    </a:p>
+                  </a:txBody>
+                  <a:tcPr anchor="ctr">
+                    <a:lnL w="38100" cap="flat" cmpd="sng" algn="ctr">
+                      <a:noFill/>
+                      <a:prstDash val="solid"/>
+                      <a:round/>
+                      <a:headEnd type="none" w="med" len="med"/>
+                      <a:tailEnd type="none" w="med" len="med"/>
+                    </a:lnL>
+                    <a:lnR w="38100" cap="flat" cmpd="sng" algn="ctr">
+                      <a:solidFill>
+                        <a:schemeClr val="tx1"/>
+                      </a:solidFill>
+                      <a:prstDash val="solid"/>
+                      <a:round/>
+                      <a:headEnd type="none" w="med" len="med"/>
+                      <a:tailEnd type="none" w="med" len="med"/>
+                    </a:lnR>
+                    <a:lnT w="38100" cap="flat" cmpd="sng" algn="ctr">
+                      <a:solidFill>
+                        <a:schemeClr val="tx1"/>
+                      </a:solidFill>
+                      <a:prstDash val="solid"/>
+                      <a:round/>
+                      <a:headEnd type="none" w="med" len="med"/>
+                      <a:tailEnd type="none" w="med" len="med"/>
+                    </a:lnT>
+                    <a:lnB w="38100" cap="flat" cmpd="sng" algn="ctr">
+                      <a:noFill/>
+                      <a:prstDash val="solid"/>
+                      <a:round/>
+                      <a:headEnd type="none" w="med" len="med"/>
+                      <a:tailEnd type="none" w="med" len="med"/>
+                    </a:lnB>
+                    <a:solidFill>
+                      <a:schemeClr val="bg1">
+                        <a:lumMod val="85000"/>
+                      </a:schemeClr>
+                    </a:solidFill>
+                  </a:tcPr>
+                </a:tc>
+                <a:tc>
+                  <a:txBody>
+                    <a:bodyPr/>
+                    <a:lstStyle/>
+                    <a:p>
+                      <a:pPr algn="ctr"/>
+                      <a:r>
+                        <a:rPr kumimoji="1" lang="ja-JP" altLang="en-US" sz="2000" b="0" i="0" kern="1200" dirty="0">
+                          <a:solidFill>
+                            <a:schemeClr val="dk1"/>
+                          </a:solidFill>
+                          <a:effectLst/>
+                          <a:latin typeface="モボ-SemiBold" panose="02000700000000000000" pitchFamily="50" charset="-128"/>
+                          <a:ea typeface="モボ-SemiBold" panose="02000700000000000000" pitchFamily="50" charset="-128"/>
+                          <a:cs typeface="+mn-cs"/>
+                        </a:rPr>
+                        <a:t>低</a:t>
+                      </a:r>
+                      <a:r>
+                        <a:rPr kumimoji="1" lang="ja-JP" altLang="en-US" sz="2000" b="0" i="0" kern="1200" dirty="0">
+                          <a:solidFill>
+                            <a:schemeClr val="dk1"/>
+                          </a:solidFill>
+                          <a:effectLst/>
+                          <a:latin typeface="+mn-lt"/>
+                          <a:ea typeface="+mn-ea"/>
+                          <a:cs typeface="+mn-cs"/>
+                        </a:rPr>
+                        <a:t>（</a:t>
+                      </a:r>
+                      <a:r>
+                        <a:rPr kumimoji="1" lang="en-US" altLang="ja-JP" sz="2000" b="0" i="0" kern="1200" dirty="0">
+                          <a:solidFill>
+                            <a:schemeClr val="dk1"/>
+                          </a:solidFill>
+                          <a:effectLst/>
+                          <a:latin typeface="+mn-lt"/>
+                          <a:ea typeface="+mn-ea"/>
+                          <a:cs typeface="+mn-cs"/>
+                        </a:rPr>
+                        <a:t>AI</a:t>
+                      </a:r>
+                      <a:r>
+                        <a:rPr kumimoji="1" lang="ja-JP" altLang="en-US" sz="2000" b="0" i="0" kern="1200" dirty="0">
+                          <a:solidFill>
+                            <a:schemeClr val="dk1"/>
+                          </a:solidFill>
+                          <a:effectLst/>
+                          <a:latin typeface="+mn-lt"/>
+                          <a:ea typeface="+mn-ea"/>
+                          <a:cs typeface="+mn-cs"/>
+                        </a:rPr>
+                        <a:t>アシスタント</a:t>
+                      </a:r>
+                      <a:br>
+                        <a:rPr kumimoji="1" lang="en-US" altLang="ja-JP" sz="2000" b="0" i="0" kern="1200" dirty="0">
+                          <a:solidFill>
+                            <a:schemeClr val="dk1"/>
+                          </a:solidFill>
+                          <a:effectLst/>
+                          <a:latin typeface="+mn-lt"/>
+                          <a:ea typeface="+mn-ea"/>
+                          <a:cs typeface="+mn-cs"/>
+                        </a:rPr>
+                      </a:br>
+                      <a:r>
+                        <a:rPr kumimoji="1" lang="ja-JP" altLang="en-US" sz="2000" b="0" i="0" kern="1200" dirty="0">
+                          <a:solidFill>
+                            <a:schemeClr val="dk1"/>
+                          </a:solidFill>
+                          <a:effectLst/>
+                          <a:latin typeface="+mn-lt"/>
+                          <a:ea typeface="+mn-ea"/>
+                          <a:cs typeface="+mn-cs"/>
+                        </a:rPr>
+                        <a:t>機能を用いたバイブ</a:t>
+                      </a:r>
+                      <a:br>
+                        <a:rPr kumimoji="1" lang="en-US" altLang="ja-JP" sz="2000" b="0" i="0" kern="1200" dirty="0">
+                          <a:solidFill>
+                            <a:schemeClr val="dk1"/>
+                          </a:solidFill>
+                          <a:effectLst/>
+                          <a:latin typeface="+mn-lt"/>
+                          <a:ea typeface="+mn-ea"/>
+                          <a:cs typeface="+mn-cs"/>
+                        </a:rPr>
+                      </a:br>
+                      <a:r>
+                        <a:rPr kumimoji="1" lang="ja-JP" altLang="en-US" sz="2000" b="0" i="0" kern="1200" dirty="0">
+                          <a:solidFill>
+                            <a:schemeClr val="dk1"/>
+                          </a:solidFill>
+                          <a:effectLst/>
+                          <a:latin typeface="+mn-lt"/>
+                          <a:ea typeface="+mn-ea"/>
+                          <a:cs typeface="+mn-cs"/>
+                        </a:rPr>
+                        <a:t>コーディングが可能）</a:t>
+                      </a:r>
+                      <a:endParaRPr kumimoji="1" lang="ja-JP" altLang="en-US" sz="2400" b="0" dirty="0">
+                        <a:solidFill>
+                          <a:schemeClr val="tx1"/>
+                        </a:solidFill>
+                      </a:endParaRPr>
+                    </a:p>
+                  </a:txBody>
+                  <a:tcPr anchor="ctr">
+                    <a:lnL w="38100" cap="flat" cmpd="sng" algn="ctr">
+                      <a:solidFill>
+                        <a:schemeClr val="tx1"/>
+                      </a:solidFill>
+                      <a:prstDash val="solid"/>
+                      <a:round/>
+                      <a:headEnd type="none" w="med" len="med"/>
+                      <a:tailEnd type="none" w="med" len="med"/>
+                    </a:lnL>
+                    <a:lnR w="38100" cap="flat" cmpd="sng" algn="ctr">
+                      <a:solidFill>
+                        <a:schemeClr val="tx1"/>
+                      </a:solidFill>
+                      <a:prstDash val="solid"/>
+                      <a:round/>
+                      <a:headEnd type="none" w="med" len="med"/>
+                      <a:tailEnd type="none" w="med" len="med"/>
+                    </a:lnR>
+                    <a:lnT w="38100" cap="flat" cmpd="sng" algn="ctr">
+                      <a:solidFill>
+                        <a:schemeClr val="tx1"/>
+                      </a:solidFill>
+                      <a:prstDash val="solid"/>
+                      <a:round/>
+                      <a:headEnd type="none" w="med" len="med"/>
+                      <a:tailEnd type="none" w="med" len="med"/>
+                    </a:lnT>
+                    <a:lnB w="38100" cap="flat" cmpd="sng" algn="ctr">
+                      <a:noFill/>
+                      <a:prstDash val="solid"/>
+                      <a:round/>
+                      <a:headEnd type="none" w="med" len="med"/>
+                      <a:tailEnd type="none" w="med" len="med"/>
+                    </a:lnB>
+                    <a:noFill/>
+                  </a:tcPr>
+                </a:tc>
+                <a:tc>
+                  <a:txBody>
+                    <a:bodyPr/>
+                    <a:lstStyle/>
+                    <a:p>
+                      <a:pPr algn="ctr"/>
+                      <a:r>
+                        <a:rPr kumimoji="1" lang="ja-JP" altLang="en-US" sz="2000" b="1" i="0" kern="1200" dirty="0">
+                          <a:solidFill>
+                            <a:schemeClr val="dk1"/>
+                          </a:solidFill>
+                          <a:effectLst/>
+                          <a:latin typeface="+mn-lt"/>
+                          <a:ea typeface="+mn-ea"/>
+                          <a:cs typeface="+mn-cs"/>
+                        </a:rPr>
+                        <a:t>低</a:t>
+                      </a:r>
+                      <a:r>
+                        <a:rPr kumimoji="1" lang="en-US" altLang="ja-JP" sz="2000" b="1" i="0" kern="1200" dirty="0">
+                          <a:solidFill>
+                            <a:schemeClr val="dk1"/>
+                          </a:solidFill>
+                          <a:effectLst/>
+                          <a:latin typeface="+mn-lt"/>
+                          <a:ea typeface="+mn-ea"/>
+                          <a:cs typeface="+mn-cs"/>
+                        </a:rPr>
+                        <a:t>〜</a:t>
+                      </a:r>
+                      <a:r>
+                        <a:rPr kumimoji="1" lang="ja-JP" altLang="en-US" sz="2000" b="1" i="0" kern="1200" dirty="0">
+                          <a:solidFill>
+                            <a:schemeClr val="dk1"/>
+                          </a:solidFill>
+                          <a:effectLst/>
+                          <a:latin typeface="+mn-lt"/>
+                          <a:ea typeface="+mn-ea"/>
+                          <a:cs typeface="+mn-cs"/>
+                        </a:rPr>
+                        <a:t>中</a:t>
+                      </a:r>
+                      <a:r>
+                        <a:rPr kumimoji="1" lang="ja-JP" altLang="en-US" sz="2000" b="0" i="0" kern="1200" dirty="0">
+                          <a:solidFill>
+                            <a:schemeClr val="dk1"/>
+                          </a:solidFill>
+                          <a:effectLst/>
+                          <a:latin typeface="+mn-lt"/>
+                          <a:ea typeface="+mn-ea"/>
+                          <a:cs typeface="+mn-cs"/>
+                        </a:rPr>
+                        <a:t>（各種</a:t>
+                      </a:r>
+                      <a:br>
+                        <a:rPr kumimoji="1" lang="en-US" altLang="ja-JP" sz="2000" b="0" i="0" kern="1200" dirty="0">
+                          <a:solidFill>
+                            <a:schemeClr val="dk1"/>
+                          </a:solidFill>
+                          <a:effectLst/>
+                          <a:latin typeface="+mn-lt"/>
+                          <a:ea typeface="+mn-ea"/>
+                          <a:cs typeface="+mn-cs"/>
+                        </a:rPr>
+                      </a:br>
+                      <a:r>
+                        <a:rPr kumimoji="1" lang="ja-JP" altLang="en-US" sz="2000" b="0" i="0" kern="1200" dirty="0">
+                          <a:solidFill>
+                            <a:schemeClr val="dk1"/>
+                          </a:solidFill>
+                          <a:effectLst/>
+                          <a:latin typeface="+mn-lt"/>
+                          <a:ea typeface="+mn-ea"/>
+                          <a:cs typeface="+mn-cs"/>
+                        </a:rPr>
+                        <a:t>スクリプト言語の</a:t>
+                      </a:r>
+                      <a:br>
+                        <a:rPr kumimoji="1" lang="en-US" altLang="ja-JP" sz="2000" b="0" i="0" kern="1200" dirty="0">
+                          <a:solidFill>
+                            <a:schemeClr val="dk1"/>
+                          </a:solidFill>
+                          <a:effectLst/>
+                          <a:latin typeface="+mn-lt"/>
+                          <a:ea typeface="+mn-ea"/>
+                          <a:cs typeface="+mn-cs"/>
+                        </a:rPr>
+                      </a:br>
+                      <a:r>
+                        <a:rPr kumimoji="1" lang="ja-JP" altLang="en-US" sz="2000" b="0" i="0" kern="1200" dirty="0">
+                          <a:solidFill>
+                            <a:schemeClr val="dk1"/>
+                          </a:solidFill>
+                          <a:effectLst/>
+                          <a:latin typeface="+mn-lt"/>
+                          <a:ea typeface="+mn-ea"/>
+                          <a:cs typeface="+mn-cs"/>
+                        </a:rPr>
+                        <a:t>学習が必要）</a:t>
+                      </a:r>
+                      <a:endParaRPr kumimoji="1" lang="ja-JP" altLang="en-US" sz="2400" b="0" dirty="0">
+                        <a:solidFill>
+                          <a:schemeClr val="tx1"/>
+                        </a:solidFill>
+                      </a:endParaRPr>
+                    </a:p>
+                  </a:txBody>
+                  <a:tcPr anchor="ctr">
+                    <a:lnL w="38100" cap="flat" cmpd="sng" algn="ctr">
+                      <a:solidFill>
+                        <a:schemeClr val="tx1"/>
+                      </a:solidFill>
+                      <a:prstDash val="solid"/>
+                      <a:round/>
+                      <a:headEnd type="none" w="med" len="med"/>
+                      <a:tailEnd type="none" w="med" len="med"/>
+                    </a:lnL>
+                    <a:lnR w="38100" cap="flat" cmpd="sng" algn="ctr">
+                      <a:solidFill>
+                        <a:schemeClr val="tx1"/>
+                      </a:solidFill>
+                      <a:prstDash val="solid"/>
+                      <a:round/>
+                      <a:headEnd type="none" w="med" len="med"/>
+                      <a:tailEnd type="none" w="med" len="med"/>
+                    </a:lnR>
+                    <a:lnT w="38100" cap="flat" cmpd="sng" algn="ctr">
+                      <a:solidFill>
+                        <a:schemeClr val="tx1"/>
+                      </a:solidFill>
+                      <a:prstDash val="solid"/>
+                      <a:round/>
+                      <a:headEnd type="none" w="med" len="med"/>
+                      <a:tailEnd type="none" w="med" len="med"/>
+                    </a:lnT>
+                    <a:lnB w="38100" cap="flat" cmpd="sng" algn="ctr">
+                      <a:noFill/>
+                      <a:prstDash val="solid"/>
+                      <a:round/>
+                      <a:headEnd type="none" w="med" len="med"/>
+                      <a:tailEnd type="none" w="med" len="med"/>
+                    </a:lnB>
+                    <a:noFill/>
+                  </a:tcPr>
+                </a:tc>
+                <a:tc>
+                  <a:txBody>
+                    <a:bodyPr/>
+                    <a:lstStyle/>
+                    <a:p>
+                      <a:pPr algn="ctr"/>
+                      <a:r>
+                        <a:rPr kumimoji="1" lang="ja-JP" altLang="en-US" sz="2000" b="0" i="0" kern="1200" dirty="0">
+                          <a:solidFill>
+                            <a:schemeClr val="dk1"/>
+                          </a:solidFill>
+                          <a:effectLst/>
+                          <a:latin typeface="モボ-SemiBold" panose="02000700000000000000" pitchFamily="50" charset="-128"/>
+                          <a:ea typeface="モボ-SemiBold" panose="02000700000000000000" pitchFamily="50" charset="-128"/>
+                          <a:cs typeface="+mn-cs"/>
+                        </a:rPr>
+                        <a:t>高</a:t>
+                      </a:r>
+                      <a:r>
+                        <a:rPr kumimoji="1" lang="ja-JP" altLang="en-US" sz="2000" b="0" i="0" kern="1200" dirty="0">
+                          <a:solidFill>
+                            <a:schemeClr val="dk1"/>
+                          </a:solidFill>
+                          <a:effectLst/>
+                          <a:latin typeface="+mn-lt"/>
+                          <a:ea typeface="+mn-ea"/>
+                          <a:cs typeface="+mn-cs"/>
+                        </a:rPr>
+                        <a:t>（</a:t>
+                      </a:r>
+                      <a:r>
+                        <a:rPr kumimoji="1" lang="en-US" altLang="ja-JP" sz="2000" b="0" i="0" kern="1200" dirty="0">
+                          <a:solidFill>
+                            <a:schemeClr val="dk1"/>
+                          </a:solidFill>
+                          <a:effectLst/>
+                          <a:latin typeface="+mn-lt"/>
+                          <a:ea typeface="+mn-ea"/>
+                          <a:cs typeface="+mn-cs"/>
+                        </a:rPr>
+                        <a:t>C++</a:t>
+                      </a:r>
+                      <a:r>
+                        <a:rPr kumimoji="1" lang="ja-JP" altLang="en-US" sz="2000" b="0" i="0" kern="1200" dirty="0">
+                          <a:solidFill>
+                            <a:schemeClr val="dk1"/>
+                          </a:solidFill>
+                          <a:effectLst/>
+                          <a:latin typeface="+mn-lt"/>
+                          <a:ea typeface="+mn-ea"/>
+                          <a:cs typeface="+mn-cs"/>
+                        </a:rPr>
+                        <a:t>の知識、</a:t>
+                      </a:r>
+                      <a:br>
+                        <a:rPr kumimoji="1" lang="en-US" altLang="ja-JP" sz="2000" b="0" i="0" kern="1200" dirty="0">
+                          <a:solidFill>
+                            <a:schemeClr val="dk1"/>
+                          </a:solidFill>
+                          <a:effectLst/>
+                          <a:latin typeface="+mn-lt"/>
+                          <a:ea typeface="+mn-ea"/>
+                          <a:cs typeface="+mn-cs"/>
+                        </a:rPr>
+                      </a:br>
+                      <a:r>
+                        <a:rPr kumimoji="1" lang="ja-JP" altLang="en-US" sz="2000" b="0" i="0" kern="1200" dirty="0">
+                          <a:solidFill>
+                            <a:schemeClr val="dk1"/>
+                          </a:solidFill>
+                          <a:effectLst/>
+                          <a:latin typeface="+mn-lt"/>
+                          <a:ea typeface="+mn-ea"/>
+                          <a:cs typeface="+mn-cs"/>
+                        </a:rPr>
+                        <a:t>ビルド環境構築が</a:t>
+                      </a:r>
+                      <a:br>
+                        <a:rPr kumimoji="1" lang="en-US" altLang="ja-JP" sz="2000" b="0" i="0" kern="1200" dirty="0">
+                          <a:solidFill>
+                            <a:schemeClr val="dk1"/>
+                          </a:solidFill>
+                          <a:effectLst/>
+                          <a:latin typeface="+mn-lt"/>
+                          <a:ea typeface="+mn-ea"/>
+                          <a:cs typeface="+mn-cs"/>
+                        </a:rPr>
+                      </a:br>
+                      <a:r>
+                        <a:rPr kumimoji="1" lang="ja-JP" altLang="en-US" sz="2000" b="0" i="0" kern="1200" dirty="0">
+                          <a:solidFill>
+                            <a:schemeClr val="dk1"/>
+                          </a:solidFill>
+                          <a:effectLst/>
+                          <a:latin typeface="+mn-lt"/>
+                          <a:ea typeface="+mn-ea"/>
+                          <a:cs typeface="+mn-cs"/>
+                        </a:rPr>
+                        <a:t>必須）</a:t>
+                      </a:r>
+                      <a:endParaRPr kumimoji="1" lang="ja-JP" altLang="en-US" sz="2400" b="0" dirty="0">
+                        <a:solidFill>
+                          <a:schemeClr val="tx1"/>
+                        </a:solidFill>
+                      </a:endParaRPr>
+                    </a:p>
+                  </a:txBody>
+                  <a:tcPr anchor="ctr">
+                    <a:lnL w="38100" cap="flat" cmpd="sng" algn="ctr">
+                      <a:solidFill>
+                        <a:schemeClr val="tx1"/>
+                      </a:solidFill>
+                      <a:prstDash val="solid"/>
+                      <a:round/>
+                      <a:headEnd type="none" w="med" len="med"/>
+                      <a:tailEnd type="none" w="med" len="med"/>
+                    </a:lnL>
+                    <a:lnR w="38100" cap="flat" cmpd="sng" algn="ctr">
+                      <a:solidFill>
+                        <a:schemeClr val="tx1"/>
+                      </a:solidFill>
+                      <a:prstDash val="solid"/>
+                      <a:round/>
+                      <a:headEnd type="none" w="med" len="med"/>
+                      <a:tailEnd type="none" w="med" len="med"/>
+                    </a:lnR>
+                    <a:lnT w="38100" cap="flat" cmpd="sng" algn="ctr">
+                      <a:solidFill>
+                        <a:schemeClr val="tx1"/>
+                      </a:solidFill>
+                      <a:prstDash val="solid"/>
+                      <a:round/>
+                      <a:headEnd type="none" w="med" len="med"/>
+                      <a:tailEnd type="none" w="med" len="med"/>
+                    </a:lnT>
+                    <a:lnB w="38100" cap="flat" cmpd="sng" algn="ctr">
+                      <a:noFill/>
+                      <a:prstDash val="solid"/>
+                      <a:round/>
+                      <a:headEnd type="none" w="med" len="med"/>
+                      <a:tailEnd type="none" w="med" len="med"/>
+                    </a:lnB>
+                    <a:noFill/>
+                  </a:tcPr>
+                </a:tc>
+                <a:tc>
+                  <a:txBody>
+                    <a:bodyPr/>
+                    <a:lstStyle/>
+                    <a:p>
+                      <a:pPr algn="ctr"/>
+                      <a:r>
+                        <a:rPr kumimoji="1" lang="ja-JP" altLang="en-US" sz="2000" b="0" i="0" kern="1200" dirty="0">
+                          <a:solidFill>
+                            <a:schemeClr val="dk1"/>
+                          </a:solidFill>
+                          <a:effectLst/>
+                          <a:latin typeface="モボ-SemiBold" panose="02000700000000000000" pitchFamily="50" charset="-128"/>
+                          <a:ea typeface="モボ-SemiBold" panose="02000700000000000000" pitchFamily="50" charset="-128"/>
+                          <a:cs typeface="+mn-cs"/>
+                        </a:rPr>
+                        <a:t>高（</a:t>
+                      </a:r>
+                      <a:r>
+                        <a:rPr kumimoji="1" lang="en-US" altLang="ja-JP" sz="2000" b="0" i="0" kern="1200" dirty="0">
+                          <a:solidFill>
+                            <a:schemeClr val="dk1"/>
+                          </a:solidFill>
+                          <a:effectLst/>
+                          <a:latin typeface="+mn-lt"/>
+                          <a:ea typeface="+mn-ea"/>
+                          <a:cs typeface="+mn-cs"/>
+                        </a:rPr>
+                        <a:t>C++</a:t>
+                      </a:r>
+                      <a:r>
+                        <a:rPr kumimoji="1" lang="ja-JP" altLang="en-US" sz="2000" b="0" i="0" kern="1200" dirty="0">
+                          <a:solidFill>
+                            <a:schemeClr val="dk1"/>
+                          </a:solidFill>
+                          <a:effectLst/>
+                          <a:latin typeface="+mn-lt"/>
+                          <a:ea typeface="+mn-ea"/>
+                          <a:cs typeface="+mn-cs"/>
+                        </a:rPr>
+                        <a:t>や</a:t>
+                      </a:r>
+                      <a:br>
+                        <a:rPr kumimoji="1" lang="en-US" altLang="ja-JP" sz="2000" b="0" i="0" kern="1200" dirty="0">
+                          <a:solidFill>
+                            <a:schemeClr val="dk1"/>
+                          </a:solidFill>
+                          <a:effectLst/>
+                          <a:latin typeface="+mn-lt"/>
+                          <a:ea typeface="+mn-ea"/>
+                          <a:cs typeface="+mn-cs"/>
+                        </a:rPr>
+                      </a:br>
+                      <a:r>
+                        <a:rPr kumimoji="1" lang="ja-JP" altLang="en-US" sz="2000" b="0" i="0" kern="1200" dirty="0">
+                          <a:solidFill>
+                            <a:schemeClr val="dk1"/>
+                          </a:solidFill>
+                          <a:effectLst/>
+                          <a:latin typeface="+mn-lt"/>
+                          <a:ea typeface="+mn-ea"/>
+                          <a:cs typeface="+mn-cs"/>
+                        </a:rPr>
+                        <a:t>デジタル信号処理</a:t>
+                      </a:r>
+                      <a:br>
+                        <a:rPr kumimoji="1" lang="en-US" altLang="ja-JP" sz="2000" b="0" i="0" kern="1200" dirty="0">
+                          <a:solidFill>
+                            <a:schemeClr val="dk1"/>
+                          </a:solidFill>
+                          <a:effectLst/>
+                          <a:latin typeface="+mn-lt"/>
+                          <a:ea typeface="+mn-ea"/>
+                          <a:cs typeface="+mn-cs"/>
+                        </a:rPr>
+                      </a:br>
+                      <a:r>
+                        <a:rPr kumimoji="1" lang="ja-JP" altLang="en-US" sz="2000" b="0" i="0" kern="1200" dirty="0">
+                          <a:solidFill>
+                            <a:schemeClr val="dk1"/>
+                          </a:solidFill>
+                          <a:effectLst/>
+                          <a:latin typeface="+mn-lt"/>
+                          <a:ea typeface="+mn-ea"/>
+                          <a:cs typeface="+mn-cs"/>
+                        </a:rPr>
+                        <a:t>の深い知識、開発環境が必要）</a:t>
+                      </a:r>
+                      <a:endParaRPr kumimoji="1" lang="ja-JP" altLang="en-US" sz="2400" b="0" dirty="0">
+                        <a:solidFill>
+                          <a:schemeClr val="tx1"/>
+                        </a:solidFill>
+                      </a:endParaRPr>
+                    </a:p>
+                  </a:txBody>
+                  <a:tcPr anchor="ctr">
+                    <a:lnL w="38100" cap="flat" cmpd="sng" algn="ctr">
+                      <a:solidFill>
+                        <a:schemeClr val="tx1"/>
+                      </a:solidFill>
+                      <a:prstDash val="solid"/>
+                      <a:round/>
+                      <a:headEnd type="none" w="med" len="med"/>
+                      <a:tailEnd type="none" w="med" len="med"/>
+                    </a:lnL>
+                    <a:lnR w="38100" cap="flat" cmpd="sng" algn="ctr">
+                      <a:noFill/>
+                      <a:prstDash val="solid"/>
+                      <a:round/>
+                      <a:headEnd type="none" w="med" len="med"/>
+                      <a:tailEnd type="none" w="med" len="med"/>
+                    </a:lnR>
+                    <a:lnT w="38100" cap="flat" cmpd="sng" algn="ctr">
+                      <a:solidFill>
+                        <a:schemeClr val="tx1"/>
+                      </a:solidFill>
+                      <a:prstDash val="solid"/>
+                      <a:round/>
+                      <a:headEnd type="none" w="med" len="med"/>
+                      <a:tailEnd type="none" w="med" len="med"/>
+                    </a:lnT>
+                    <a:lnB w="38100" cap="flat" cmpd="sng" algn="ctr">
+                      <a:noFill/>
+                      <a:prstDash val="solid"/>
+                      <a:round/>
+                      <a:headEnd type="none" w="med" len="med"/>
+                      <a:tailEnd type="none" w="med" len="med"/>
+                    </a:lnB>
+                    <a:noFill/>
+                  </a:tcPr>
+                </a:tc>
+                <a:extLst>
+                  <a:ext uri="{0D108BD9-81ED-4DB2-BD59-A6C34878D82A}">
+                    <a16:rowId xmlns:a16="http://schemas.microsoft.com/office/drawing/2014/main" val="3386243383"/>
+                  </a:ext>
+                </a:extLst>
+              </a:tr>
+            </a:tbl>
+          </a:graphicData>
+        </a:graphic>
+      </p:graphicFrame>
     </p:spTree>
     <p:extLst>
       <p:ext uri="{BB962C8B-B14F-4D97-AF65-F5344CB8AC3E}">
-        <p14:creationId xmlns:p14="http://schemas.microsoft.com/office/powerpoint/2010/main" val="1670958027"/>
+        <p14:creationId xmlns:p14="http://schemas.microsoft.com/office/powerpoint/2010/main" val="179236004"/>
       </p:ext>
     </p:extLst>
   </p:cSld>
@@ -25585,13 +31848,7 @@
   <p:cSld>
     <p:spTree>
       <p:nvGrpSpPr>
-        <p:cNvPr id="1" name="">
-          <a:extLst>
-            <a:ext uri="{FF2B5EF4-FFF2-40B4-BE49-F238E27FC236}">
-              <a16:creationId xmlns:a16="http://schemas.microsoft.com/office/drawing/2014/main" id="{949FC6B7-9CBC-32B5-0A44-7B0273F4DD5F}"/>
-            </a:ext>
-          </a:extLst>
-        </p:cNvPr>
+        <p:cNvPr id="1" name=""/>
         <p:cNvGrpSpPr/>
         <p:nvPr/>
       </p:nvGrpSpPr>
@@ -25605,229 +31862,10 @@
       </p:grpSpPr>
       <p:sp>
         <p:nvSpPr>
-          <p:cNvPr id="2" name="タイトル 1">
-            <a:extLst>
-              <a:ext uri="{FF2B5EF4-FFF2-40B4-BE49-F238E27FC236}">
-                <a16:creationId xmlns:a16="http://schemas.microsoft.com/office/drawing/2014/main" id="{C10E2808-5425-1BC0-B431-B8395C9065ED}"/>
-              </a:ext>
-            </a:extLst>
-          </p:cNvPr>
-          <p:cNvSpPr>
-            <a:spLocks noGrp="1"/>
-          </p:cNvSpPr>
-          <p:nvPr>
-            <p:ph type="title"/>
-          </p:nvPr>
-        </p:nvSpPr>
-        <p:spPr/>
-        <p:txBody>
-          <a:bodyPr>
-            <a:normAutofit/>
-          </a:bodyPr>
-          <a:lstStyle/>
-          <a:p>
-            <a:r>
-              <a:rPr kumimoji="1" lang="en-US" altLang="ja-JP" sz="6700" dirty="0"/>
-              <a:t>D</a:t>
-            </a:r>
-            <a:r>
-              <a:rPr kumimoji="1" lang="en-US" altLang="ja-JP" sz="5400" dirty="0"/>
-              <a:t>AWIY</a:t>
-            </a:r>
-            <a:r>
-              <a:rPr kumimoji="1" lang="ja-JP" altLang="en-US" sz="6000" dirty="0"/>
-              <a:t>プラグイン</a:t>
-            </a:r>
-            <a:r>
-              <a:rPr lang="ja-JP" altLang="en-US" sz="6600" dirty="0"/>
-              <a:t>②</a:t>
-            </a:r>
-            <a:endParaRPr kumimoji="1" lang="ja-JP" altLang="en-US" sz="5400" dirty="0"/>
-          </a:p>
-        </p:txBody>
-      </p:sp>
-      <p:sp>
-        <p:nvSpPr>
-          <p:cNvPr id="3" name="コンテンツ プレースホルダー 2">
-            <a:extLst>
-              <a:ext uri="{FF2B5EF4-FFF2-40B4-BE49-F238E27FC236}">
-                <a16:creationId xmlns:a16="http://schemas.microsoft.com/office/drawing/2014/main" id="{47E1F5B0-FA4F-5ADB-CA2A-F7EF9AE1E9FD}"/>
-              </a:ext>
-            </a:extLst>
-          </p:cNvPr>
-          <p:cNvSpPr>
-            <a:spLocks noGrp="1"/>
-          </p:cNvSpPr>
-          <p:nvPr>
-            <p:ph idx="1"/>
-          </p:nvPr>
-        </p:nvSpPr>
-        <p:spPr>
-          <a:xfrm>
-            <a:off x="367393" y="1389342"/>
-            <a:ext cx="6921430" cy="5348036"/>
-          </a:xfrm>
-        </p:spPr>
-        <p:txBody>
-          <a:bodyPr>
-            <a:normAutofit/>
-          </a:bodyPr>
-          <a:lstStyle/>
-          <a:p>
-            <a:r>
-              <a:rPr lang="en-US" altLang="ja-JP" sz="3200" dirty="0"/>
-              <a:t>AI</a:t>
-            </a:r>
-            <a:r>
-              <a:rPr lang="ja-JP" altLang="en-US" sz="3200" dirty="0"/>
-              <a:t>アシスタント機能</a:t>
-            </a:r>
-            <a:endParaRPr lang="en-US" altLang="ja-JP" sz="3200" dirty="0"/>
-          </a:p>
-          <a:p>
-            <a:pPr marL="0" indent="0">
-              <a:buNone/>
-            </a:pPr>
-            <a:endParaRPr lang="en-US" altLang="ja-JP" sz="1000" dirty="0"/>
-          </a:p>
-          <a:p>
-            <a:pPr lvl="1"/>
-            <a:r>
-              <a:rPr kumimoji="1" lang="en-US" altLang="ja-JP" sz="2800" dirty="0"/>
-              <a:t>Gemini</a:t>
-            </a:r>
-            <a:r>
-              <a:rPr kumimoji="1" lang="ja-JP" altLang="en-US" sz="2800" dirty="0"/>
-              <a:t>や</a:t>
-            </a:r>
-            <a:r>
-              <a:rPr kumimoji="1" lang="en-US" altLang="ja-JP" sz="2800" dirty="0"/>
-              <a:t>O</a:t>
-            </a:r>
-            <a:r>
-              <a:rPr lang="en-US" altLang="ja-JP" sz="2800" dirty="0"/>
-              <a:t>penAI</a:t>
-            </a:r>
-            <a:r>
-              <a:rPr lang="ja-JP" altLang="en-US" sz="2800" dirty="0"/>
-              <a:t>の</a:t>
-            </a:r>
-            <a:r>
-              <a:rPr kumimoji="1" lang="en-US" altLang="ja-JP" sz="2800" dirty="0"/>
-              <a:t>API</a:t>
-            </a:r>
-            <a:r>
-              <a:rPr kumimoji="1" lang="ja-JP" altLang="en-US" sz="2800" dirty="0"/>
-              <a:t>を利用</a:t>
-            </a:r>
-            <a:endParaRPr lang="en-US" altLang="ja-JP" sz="2800" dirty="0"/>
-          </a:p>
-          <a:p>
-            <a:pPr marL="457200" lvl="1" indent="0">
-              <a:buNone/>
-            </a:pPr>
-            <a:endParaRPr kumimoji="1" lang="en-US" altLang="ja-JP" sz="1000" dirty="0"/>
-          </a:p>
-          <a:p>
-            <a:pPr marL="971550" lvl="1" indent="-514350">
-              <a:lnSpc>
-                <a:spcPct val="100000"/>
-              </a:lnSpc>
-              <a:buFont typeface="+mj-lt"/>
-              <a:buAutoNum type="arabicPeriod"/>
-            </a:pPr>
-            <a:r>
-              <a:rPr lang="ja-JP" altLang="en-US" sz="2800" dirty="0"/>
-              <a:t>対話を行い自然言語で要望を入力</a:t>
-            </a:r>
-            <a:endParaRPr lang="en-US" altLang="ja-JP" sz="2800" dirty="0"/>
-          </a:p>
-          <a:p>
-            <a:pPr marL="971550" lvl="1" indent="-514350">
-              <a:lnSpc>
-                <a:spcPct val="100000"/>
-              </a:lnSpc>
-              <a:buFont typeface="+mj-lt"/>
-              <a:buAutoNum type="arabicPeriod"/>
-            </a:pPr>
-            <a:r>
-              <a:rPr kumimoji="1" lang="en-US" altLang="ja-JP" sz="2800" dirty="0"/>
-              <a:t>LLM</a:t>
-            </a:r>
-            <a:r>
-              <a:rPr kumimoji="1" lang="ja-JP" altLang="en-US" sz="2800" dirty="0"/>
-              <a:t>がコードを生成</a:t>
-            </a:r>
-            <a:endParaRPr kumimoji="1" lang="en-US" altLang="ja-JP" sz="2800" dirty="0"/>
-          </a:p>
-          <a:p>
-            <a:pPr marL="971550" lvl="1" indent="-514350">
-              <a:lnSpc>
-                <a:spcPct val="100000"/>
-              </a:lnSpc>
-              <a:buFont typeface="+mj-lt"/>
-              <a:buAutoNum type="arabicPeriod"/>
-            </a:pPr>
-            <a:r>
-              <a:rPr lang="ja-JP" altLang="en-US" sz="2800" dirty="0"/>
-              <a:t>ユーザが承認</a:t>
-            </a:r>
-            <a:endParaRPr lang="en-US" altLang="ja-JP" sz="2800" dirty="0"/>
-          </a:p>
-          <a:p>
-            <a:pPr marL="971550" lvl="1" indent="-514350">
-              <a:lnSpc>
-                <a:spcPct val="100000"/>
-              </a:lnSpc>
-              <a:buFont typeface="+mj-lt"/>
-              <a:buAutoNum type="arabicPeriod"/>
-            </a:pPr>
-            <a:r>
-              <a:rPr kumimoji="1" lang="en-US" altLang="ja-JP" sz="2800" dirty="0"/>
-              <a:t>.ts</a:t>
-            </a:r>
-            <a:r>
-              <a:rPr kumimoji="1" lang="ja-JP" altLang="en-US" sz="2800" dirty="0"/>
-              <a:t>ファイルが自動生成される</a:t>
-            </a:r>
-            <a:endParaRPr kumimoji="1" lang="en-US" altLang="ja-JP" sz="2800" dirty="0"/>
-          </a:p>
-          <a:p>
-            <a:pPr marL="971550" lvl="1" indent="-514350">
-              <a:lnSpc>
-                <a:spcPct val="100000"/>
-              </a:lnSpc>
-              <a:buFont typeface="+mj-lt"/>
-              <a:buAutoNum type="arabicPeriod"/>
-            </a:pPr>
-            <a:r>
-              <a:rPr lang="ja-JP" altLang="en-US" sz="2800" dirty="0"/>
-              <a:t>ページをリロードすると</a:t>
-            </a:r>
-            <a:br>
-              <a:rPr lang="en-US" altLang="ja-JP" sz="2800" dirty="0"/>
-            </a:br>
-            <a:r>
-              <a:rPr lang="ja-JP" altLang="en-US" sz="2800" dirty="0"/>
-              <a:t>生成したプラグインが</a:t>
-            </a:r>
-            <a:br>
-              <a:rPr lang="en-US" altLang="ja-JP" sz="2800" dirty="0"/>
-            </a:br>
-            <a:r>
-              <a:rPr lang="ja-JP" altLang="en-US" sz="2800" dirty="0"/>
-              <a:t>反映されている</a:t>
-            </a:r>
-            <a:endParaRPr kumimoji="1" lang="en-US" altLang="ja-JP" sz="2800" dirty="0"/>
-          </a:p>
-        </p:txBody>
-      </p:sp>
-      <p:sp>
-        <p:nvSpPr>
-          <p:cNvPr id="4" name="スライド番号プレースホルダー 3">
-            <a:extLst>
-              <a:ext uri="{FF2B5EF4-FFF2-40B4-BE49-F238E27FC236}">
-                <a16:creationId xmlns:a16="http://schemas.microsoft.com/office/drawing/2014/main" id="{D9179D3B-9748-24B6-0817-8C909A16113F}"/>
+          <p:cNvPr id="3" name="スライド番号プレースホルダー 2">
+            <a:extLst>
+              <a:ext uri="{FF2B5EF4-FFF2-40B4-BE49-F238E27FC236}">
+                <a16:creationId xmlns:a16="http://schemas.microsoft.com/office/drawing/2014/main" id="{8EDB9F5E-1E29-5C7D-93EA-D1C25FB37DA1}"/>
               </a:ext>
             </a:extLst>
           </p:cNvPr>
@@ -25856,46 +31894,125 @@
           </a:p>
         </p:txBody>
       </p:sp>
-      <p:pic>
-        <p:nvPicPr>
-          <p:cNvPr id="7" name="図 6" descr="グラフィカル ユーザー インターフェイス, テキスト, アプリケーション, チャットまたはテキスト メッセージ">
-            <a:extLst>
-              <a:ext uri="{FF2B5EF4-FFF2-40B4-BE49-F238E27FC236}">
-                <a16:creationId xmlns:a16="http://schemas.microsoft.com/office/drawing/2014/main" id="{9FD8C321-0C31-3E19-73B1-AA6B5B0CA0C5}"/>
-              </a:ext>
-            </a:extLst>
-          </p:cNvPr>
-          <p:cNvPicPr>
-            <a:picLocks noChangeAspect="1"/>
-          </p:cNvPicPr>
-          <p:nvPr/>
-        </p:nvPicPr>
-        <p:blipFill>
-          <a:blip r:embed="rId2">
-            <a:extLst>
-              <a:ext uri="{28A0092B-C50C-407E-A947-70E740481C1C}">
-                <a14:useLocalDpi xmlns:a14="http://schemas.microsoft.com/office/drawing/2010/main" val="0"/>
-              </a:ext>
-            </a:extLst>
-          </a:blip>
-          <a:stretch>
-            <a:fillRect/>
-          </a:stretch>
-        </p:blipFill>
+      <p:sp>
+        <p:nvSpPr>
+          <p:cNvPr id="4" name="タイトル 3">
+            <a:extLst>
+              <a:ext uri="{FF2B5EF4-FFF2-40B4-BE49-F238E27FC236}">
+                <a16:creationId xmlns:a16="http://schemas.microsoft.com/office/drawing/2014/main" id="{9B341DC5-2132-E496-0CD1-912010C49F0C}"/>
+              </a:ext>
+            </a:extLst>
+          </p:cNvPr>
+          <p:cNvSpPr>
+            <a:spLocks noGrp="1"/>
+          </p:cNvSpPr>
+          <p:nvPr>
+            <p:ph type="title"/>
+          </p:nvPr>
+        </p:nvSpPr>
         <p:spPr>
           <a:xfrm>
-            <a:off x="6982136" y="1310214"/>
-            <a:ext cx="4637670" cy="5444909"/>
+            <a:off x="838200" y="2331878"/>
+            <a:ext cx="10515600" cy="1325563"/>
           </a:xfrm>
-          <a:prstGeom prst="rect">
+        </p:spPr>
+        <p:txBody>
+          <a:bodyPr>
+            <a:normAutofit/>
+          </a:bodyPr>
+          <a:lstStyle/>
+          <a:p>
+            <a:pPr algn="ctr"/>
+            <a:r>
+              <a:rPr kumimoji="1" lang="en-US" altLang="ja-JP" sz="6600" dirty="0"/>
+              <a:t>D</a:t>
+            </a:r>
+            <a:r>
+              <a:rPr kumimoji="1" lang="en-US" altLang="ja-JP" sz="6000" dirty="0"/>
+              <a:t>AWIY</a:t>
+            </a:r>
+            <a:r>
+              <a:rPr kumimoji="1" lang="ja-JP" altLang="en-US" sz="6000" dirty="0"/>
+              <a:t>全体</a:t>
+            </a:r>
+            <a:r>
+              <a:rPr kumimoji="1" lang="ja-JP" altLang="en-US" sz="5400" dirty="0"/>
+              <a:t>の</a:t>
+            </a:r>
+            <a:r>
+              <a:rPr kumimoji="1" lang="ja-JP" altLang="en-US" sz="6000" dirty="0"/>
+              <a:t>システム</a:t>
+            </a:r>
+            <a:r>
+              <a:rPr kumimoji="1" lang="ja-JP" altLang="en-US" sz="5400" dirty="0"/>
+              <a:t>の</a:t>
+            </a:r>
+            <a:r>
+              <a:rPr kumimoji="1" lang="ja-JP" altLang="en-US" sz="6600" dirty="0"/>
+              <a:t>流れ</a:t>
+            </a:r>
+          </a:p>
+        </p:txBody>
+      </p:sp>
+      <p:cxnSp>
+        <p:nvCxnSpPr>
+          <p:cNvPr id="5" name="直線コネクタ 4">
+            <a:extLst>
+              <a:ext uri="{FF2B5EF4-FFF2-40B4-BE49-F238E27FC236}">
+                <a16:creationId xmlns:a16="http://schemas.microsoft.com/office/drawing/2014/main" id="{26255875-4B32-CE88-83A3-C40BAB3756CB}"/>
+              </a:ext>
+            </a:extLst>
+          </p:cNvPr>
+          <p:cNvCxnSpPr>
+            <a:cxnSpLocks/>
+          </p:cNvCxnSpPr>
+          <p:nvPr/>
+        </p:nvCxnSpPr>
+        <p:spPr>
+          <a:xfrm>
+            <a:off x="697230" y="3461793"/>
+            <a:ext cx="10812780" cy="0"/>
+          </a:xfrm>
+          <a:prstGeom prst="line">
             <a:avLst/>
           </a:prstGeom>
+          <a:ln w="76200" cap="rnd">
+            <a:gradFill>
+              <a:gsLst>
+                <a:gs pos="0">
+                  <a:schemeClr val="tx1"/>
+                </a:gs>
+                <a:gs pos="50000">
+                  <a:srgbClr val="919191"/>
+                </a:gs>
+                <a:gs pos="100000">
+                  <a:schemeClr val="bg1"/>
+                </a:gs>
+              </a:gsLst>
+              <a:lin ang="0" scaled="0"/>
+            </a:gradFill>
+            <a:round/>
+          </a:ln>
         </p:spPr>
-      </p:pic>
+        <p:style>
+          <a:lnRef idx="2">
+            <a:schemeClr val="accent1"/>
+          </a:lnRef>
+          <a:fillRef idx="0">
+            <a:schemeClr val="accent1"/>
+          </a:fillRef>
+          <a:effectRef idx="1">
+            <a:schemeClr val="accent1"/>
+          </a:effectRef>
+          <a:fontRef idx="minor">
+            <a:schemeClr val="tx1"/>
+          </a:fontRef>
+        </p:style>
+      </p:cxnSp>
     </p:spTree>
     <p:extLst>
       <p:ext uri="{BB962C8B-B14F-4D97-AF65-F5344CB8AC3E}">
-        <p14:creationId xmlns:p14="http://schemas.microsoft.com/office/powerpoint/2010/main" val="1987902239"/>
+        <p14:creationId xmlns:p14="http://schemas.microsoft.com/office/powerpoint/2010/main" val="495021117"/>
       </p:ext>
     </p:extLst>
   </p:cSld>
@@ -25910,13 +32027,7 @@
   <p:cSld>
     <p:spTree>
       <p:nvGrpSpPr>
-        <p:cNvPr id="1" name="">
-          <a:extLst>
-            <a:ext uri="{FF2B5EF4-FFF2-40B4-BE49-F238E27FC236}">
-              <a16:creationId xmlns:a16="http://schemas.microsoft.com/office/drawing/2014/main" id="{69956547-4DEC-1B52-A7C8-18752092F76E}"/>
-            </a:ext>
-          </a:extLst>
-        </p:cNvPr>
+        <p:cNvPr id="1" name=""/>
         <p:cNvGrpSpPr/>
         <p:nvPr/>
       </p:nvGrpSpPr>
@@ -25930,10 +32041,10 @@
       </p:grpSpPr>
       <p:sp>
         <p:nvSpPr>
-          <p:cNvPr id="2" name="タイトル 1">
-            <a:extLst>
-              <a:ext uri="{FF2B5EF4-FFF2-40B4-BE49-F238E27FC236}">
-                <a16:creationId xmlns:a16="http://schemas.microsoft.com/office/drawing/2014/main" id="{E72CE712-EF15-9335-D577-785C7F108682}"/>
+          <p:cNvPr id="2" name="スライド番号プレースホルダー 1">
+            <a:extLst>
+              <a:ext uri="{FF2B5EF4-FFF2-40B4-BE49-F238E27FC236}">
+                <a16:creationId xmlns:a16="http://schemas.microsoft.com/office/drawing/2014/main" id="{37E5E4A2-A709-FBC5-6E50-77576EAA089E}"/>
               </a:ext>
             </a:extLst>
           </p:cNvPr>
@@ -25941,224 +32052,7 @@
             <a:spLocks noGrp="1"/>
           </p:cNvSpPr>
           <p:nvPr>
-            <p:ph type="title"/>
-          </p:nvPr>
-        </p:nvSpPr>
-        <p:spPr/>
-        <p:txBody>
-          <a:bodyPr>
-            <a:normAutofit/>
-          </a:bodyPr>
-          <a:lstStyle/>
-          <a:p>
-            <a:r>
-              <a:rPr kumimoji="1" lang="en-US" altLang="ja-JP" sz="6700" dirty="0"/>
-              <a:t>D</a:t>
-            </a:r>
-            <a:r>
-              <a:rPr kumimoji="1" lang="en-US" altLang="ja-JP" sz="5400" dirty="0"/>
-              <a:t>AWIY</a:t>
-            </a:r>
-            <a:r>
-              <a:rPr kumimoji="1" lang="ja-JP" altLang="en-US" sz="6000" dirty="0"/>
-              <a:t>プラグイン</a:t>
-            </a:r>
-            <a:r>
-              <a:rPr kumimoji="1" lang="ja-JP" altLang="en-US" sz="6600" dirty="0"/>
-              <a:t>③</a:t>
-            </a:r>
-            <a:endParaRPr kumimoji="1" lang="ja-JP" altLang="en-US" sz="5400" dirty="0"/>
-          </a:p>
-        </p:txBody>
-      </p:sp>
-      <p:sp>
-        <p:nvSpPr>
-          <p:cNvPr id="3" name="コンテンツ プレースホルダー 2">
-            <a:extLst>
-              <a:ext uri="{FF2B5EF4-FFF2-40B4-BE49-F238E27FC236}">
-                <a16:creationId xmlns:a16="http://schemas.microsoft.com/office/drawing/2014/main" id="{047A1730-4D68-9D81-B2BA-340362B672A8}"/>
-              </a:ext>
-            </a:extLst>
-          </p:cNvPr>
-          <p:cNvSpPr>
-            <a:spLocks noGrp="1"/>
-          </p:cNvSpPr>
-          <p:nvPr>
-            <p:ph idx="1"/>
-          </p:nvPr>
-        </p:nvSpPr>
-        <p:spPr>
-          <a:xfrm>
-            <a:off x="367393" y="1389341"/>
-            <a:ext cx="6921430" cy="5103533"/>
-          </a:xfrm>
-        </p:spPr>
-        <p:txBody>
-          <a:bodyPr>
-            <a:normAutofit/>
-          </a:bodyPr>
-          <a:lstStyle/>
-          <a:p>
-            <a:r>
-              <a:rPr lang="ja-JP" altLang="en-US" sz="3200" dirty="0"/>
-              <a:t>具体例</a:t>
-            </a:r>
-            <a:endParaRPr lang="en-US" altLang="ja-JP" sz="3200" dirty="0"/>
-          </a:p>
-          <a:p>
-            <a:pPr marL="0" indent="0">
-              <a:buNone/>
-            </a:pPr>
-            <a:endParaRPr lang="en-US" altLang="ja-JP" sz="700" dirty="0"/>
-          </a:p>
-          <a:p>
-            <a:pPr marL="971550" lvl="1" indent="-514350">
-              <a:lnSpc>
-                <a:spcPct val="100000"/>
-              </a:lnSpc>
-              <a:buFont typeface="+mj-lt"/>
-              <a:buAutoNum type="alphaUcParenR"/>
-            </a:pPr>
-            <a:r>
-              <a:rPr lang="en-US" altLang="ja-JP" sz="2800" dirty="0"/>
-              <a:t>Memo / Sticky Notes</a:t>
-            </a:r>
-          </a:p>
-          <a:p>
-            <a:pPr lvl="2">
-              <a:lnSpc>
-                <a:spcPct val="100000"/>
-              </a:lnSpc>
-            </a:pPr>
-            <a:r>
-              <a:rPr lang="ja-JP" altLang="en-US" sz="2400" dirty="0"/>
-              <a:t>画面上にフリーハンドや</a:t>
-            </a:r>
-            <a:br>
-              <a:rPr lang="en-US" altLang="ja-JP" sz="2400" dirty="0"/>
-            </a:br>
-            <a:r>
-              <a:rPr lang="ja-JP" altLang="en-US" sz="2400" dirty="0"/>
-              <a:t>テキストボックスを自由に配置</a:t>
-            </a:r>
-            <a:endParaRPr lang="en-US" altLang="ja-JP" sz="2400" dirty="0"/>
-          </a:p>
-          <a:p>
-            <a:pPr marL="914400" lvl="2" indent="0">
-              <a:lnSpc>
-                <a:spcPct val="100000"/>
-              </a:lnSpc>
-              <a:buNone/>
-            </a:pPr>
-            <a:endParaRPr lang="en-US" altLang="ja-JP" sz="800" dirty="0"/>
-          </a:p>
-          <a:p>
-            <a:pPr marL="971550" lvl="1" indent="-514350">
-              <a:lnSpc>
-                <a:spcPct val="100000"/>
-              </a:lnSpc>
-              <a:buFont typeface="+mj-lt"/>
-              <a:buAutoNum type="alphaUcParenR"/>
-            </a:pPr>
-            <a:r>
-              <a:rPr lang="en-US" altLang="ja-JP" sz="2800" dirty="0"/>
-              <a:t>Stochastic Note Generator</a:t>
-            </a:r>
-          </a:p>
-          <a:p>
-            <a:pPr lvl="2">
-              <a:lnSpc>
-                <a:spcPct val="100000"/>
-              </a:lnSpc>
-            </a:pPr>
-            <a:r>
-              <a:rPr lang="ja-JP" altLang="en-US" sz="2400" dirty="0"/>
-              <a:t>確率的に音符を配置しメロディを生成</a:t>
-            </a:r>
-            <a:endParaRPr lang="en-US" altLang="ja-JP" sz="2400" dirty="0"/>
-          </a:p>
-          <a:p>
-            <a:pPr marL="914400" lvl="2" indent="0">
-              <a:lnSpc>
-                <a:spcPct val="100000"/>
-              </a:lnSpc>
-              <a:buNone/>
-            </a:pPr>
-            <a:endParaRPr lang="en-US" altLang="ja-JP" sz="800" dirty="0"/>
-          </a:p>
-          <a:p>
-            <a:pPr marL="971550" lvl="1" indent="-514350">
-              <a:lnSpc>
-                <a:spcPct val="100000"/>
-              </a:lnSpc>
-              <a:buFont typeface="+mj-lt"/>
-              <a:buAutoNum type="alphaUcParenR"/>
-            </a:pPr>
-            <a:r>
-              <a:rPr lang="en-US" altLang="ja-JP" sz="2800" dirty="0"/>
-              <a:t>Sample IO &amp; UI Plugin</a:t>
-            </a:r>
-          </a:p>
-          <a:p>
-            <a:pPr lvl="2">
-              <a:lnSpc>
-                <a:spcPct val="100000"/>
-              </a:lnSpc>
-            </a:pPr>
-            <a:r>
-              <a:rPr lang="ja-JP" altLang="en-US" sz="2400" dirty="0"/>
-              <a:t>独自の形式（</a:t>
-            </a:r>
-            <a:r>
-              <a:rPr lang="en-US" altLang="ja-JP" sz="2400" dirty="0"/>
-              <a:t>.</a:t>
-            </a:r>
-            <a:r>
-              <a:rPr lang="en-US" altLang="ja-JP" sz="2400" dirty="0" err="1"/>
-              <a:t>sampletext</a:t>
-            </a:r>
-            <a:r>
-              <a:rPr lang="ja-JP" altLang="en-US" sz="2400" dirty="0"/>
-              <a:t>）の入出力</a:t>
-            </a:r>
-            <a:endParaRPr lang="en-US" altLang="ja-JP" sz="2400" dirty="0"/>
-          </a:p>
-          <a:p>
-            <a:pPr lvl="2">
-              <a:lnSpc>
-                <a:spcPct val="100000"/>
-              </a:lnSpc>
-            </a:pPr>
-            <a:r>
-              <a:rPr lang="ja-JP" altLang="en-US" sz="2400" dirty="0"/>
-              <a:t>サイドバーに独自の</a:t>
-            </a:r>
-            <a:r>
-              <a:rPr lang="en-US" altLang="ja-JP" sz="2400" dirty="0"/>
-              <a:t>UI</a:t>
-            </a:r>
-            <a:r>
-              <a:rPr lang="ja-JP" altLang="en-US" sz="2400" dirty="0"/>
-              <a:t>を追加</a:t>
-            </a:r>
-            <a:endParaRPr lang="en-US" altLang="ja-JP" sz="2400" dirty="0"/>
-          </a:p>
-        </p:txBody>
-      </p:sp>
-      <p:sp>
-        <p:nvSpPr>
-          <p:cNvPr id="4" name="スライド番号プレースホルダー 3">
-            <a:extLst>
-              <a:ext uri="{FF2B5EF4-FFF2-40B4-BE49-F238E27FC236}">
-                <a16:creationId xmlns:a16="http://schemas.microsoft.com/office/drawing/2014/main" id="{34C30F10-3900-6C2C-3816-1C6721F094E7}"/>
-              </a:ext>
-            </a:extLst>
-          </p:cNvPr>
-          <p:cNvSpPr>
-            <a:spLocks noGrp="1"/>
-          </p:cNvSpPr>
-          <p:nvPr>
-            <p:ph type="sldNum" sz="quarter" idx="10"/>
+            <p:ph type="sldNum" sz="quarter" idx="12"/>
           </p:nvPr>
         </p:nvSpPr>
         <p:spPr/>
@@ -26167,22 +32061,161 @@
           <a:lstStyle/>
           <a:p>
             <a:fld id="{7A0ED1C7-8A26-48CF-81C0-2A5ADFEC2E18}" type="slidenum">
-              <a:rPr lang="ja-JP" altLang="en-US" smtClean="0"/>
-              <a:pPr/>
+              <a:rPr kumimoji="1" lang="ja-JP" altLang="en-US" smtClean="0"/>
               <a:t>9</a:t>
             </a:fld>
-            <a:endParaRPr lang="ja-JP" altLang="en-US" dirty="0">
-              <a:solidFill>
-                <a:schemeClr val="tx1"/>
-              </a:solidFill>
-            </a:endParaRPr>
+            <a:endParaRPr kumimoji="1" lang="ja-JP" altLang="en-US"/>
+          </a:p>
+        </p:txBody>
+      </p:sp>
+      <p:pic>
+        <p:nvPicPr>
+          <p:cNvPr id="4" name="図 3" descr="ダイアグラム">
+            <a:extLst>
+              <a:ext uri="{FF2B5EF4-FFF2-40B4-BE49-F238E27FC236}">
+                <a16:creationId xmlns:a16="http://schemas.microsoft.com/office/drawing/2014/main" id="{FF6975CD-00B0-8F10-56EF-DE2F25F4FD08}"/>
+              </a:ext>
+            </a:extLst>
+          </p:cNvPr>
+          <p:cNvPicPr>
+            <a:picLocks noChangeAspect="1"/>
+          </p:cNvPicPr>
+          <p:nvPr/>
+        </p:nvPicPr>
+        <p:blipFill>
+          <a:blip r:embed="rId3">
+            <a:extLst>
+              <a:ext uri="{28A0092B-C50C-407E-A947-70E740481C1C}">
+                <a14:useLocalDpi xmlns:a14="http://schemas.microsoft.com/office/drawing/2010/main" val="0"/>
+              </a:ext>
+            </a:extLst>
+          </a:blip>
+          <a:stretch>
+            <a:fillRect/>
+          </a:stretch>
+        </p:blipFill>
+        <p:spPr>
+          <a:xfrm>
+            <a:off x="-136769" y="-76933"/>
+            <a:ext cx="12465538" cy="7011865"/>
+          </a:xfrm>
+          <a:prstGeom prst="rect">
+            <a:avLst/>
+          </a:prstGeom>
+        </p:spPr>
+      </p:pic>
+      <p:sp>
+        <p:nvSpPr>
+          <p:cNvPr id="3" name="正方形/長方形 2">
+            <a:extLst>
+              <a:ext uri="{FF2B5EF4-FFF2-40B4-BE49-F238E27FC236}">
+                <a16:creationId xmlns:a16="http://schemas.microsoft.com/office/drawing/2014/main" id="{E3486BB8-BBCE-CF0B-0C21-16F3C05E0084}"/>
+              </a:ext>
+            </a:extLst>
+          </p:cNvPr>
+          <p:cNvSpPr/>
+          <p:nvPr/>
+        </p:nvSpPr>
+        <p:spPr>
+          <a:xfrm>
+            <a:off x="-136768" y="3989070"/>
+            <a:ext cx="12465538" cy="2945862"/>
+          </a:xfrm>
+          <a:prstGeom prst="rect">
+            <a:avLst/>
+          </a:prstGeom>
+          <a:solidFill>
+            <a:schemeClr val="bg1">
+              <a:alpha val="95000"/>
+            </a:schemeClr>
+          </a:solidFill>
+          <a:ln>
+            <a:noFill/>
+          </a:ln>
+        </p:spPr>
+        <p:style>
+          <a:lnRef idx="2">
+            <a:schemeClr val="accent1">
+              <a:shade val="15000"/>
+            </a:schemeClr>
+          </a:lnRef>
+          <a:fillRef idx="1">
+            <a:schemeClr val="accent1"/>
+          </a:fillRef>
+          <a:effectRef idx="0">
+            <a:schemeClr val="accent1"/>
+          </a:effectRef>
+          <a:fontRef idx="minor">
+            <a:schemeClr val="lt1"/>
+          </a:fontRef>
+        </p:style>
+        <p:txBody>
+          <a:bodyPr rtlCol="0" anchor="ctr"/>
+          <a:lstStyle/>
+          <a:p>
+            <a:pPr algn="ctr"/>
+            <a:endParaRPr kumimoji="1" lang="ja-JP" altLang="en-US"/>
+          </a:p>
+        </p:txBody>
+      </p:sp>
+      <p:sp>
+        <p:nvSpPr>
+          <p:cNvPr id="5" name="正方形/長方形 4">
+            <a:extLst>
+              <a:ext uri="{FF2B5EF4-FFF2-40B4-BE49-F238E27FC236}">
+                <a16:creationId xmlns:a16="http://schemas.microsoft.com/office/drawing/2014/main" id="{0F073B93-CCDA-469D-7BFF-CFDFD18F64AC}"/>
+              </a:ext>
+            </a:extLst>
+          </p:cNvPr>
+          <p:cNvSpPr/>
+          <p:nvPr/>
+        </p:nvSpPr>
+        <p:spPr>
+          <a:xfrm>
+            <a:off x="3326130" y="-76933"/>
+            <a:ext cx="9002639" cy="4066003"/>
+          </a:xfrm>
+          <a:prstGeom prst="rect">
+            <a:avLst/>
+          </a:prstGeom>
+          <a:solidFill>
+            <a:schemeClr val="bg1">
+              <a:alpha val="95000"/>
+            </a:schemeClr>
+          </a:solidFill>
+          <a:ln>
+            <a:noFill/>
+          </a:ln>
+        </p:spPr>
+        <p:style>
+          <a:lnRef idx="2">
+            <a:schemeClr val="accent1">
+              <a:shade val="15000"/>
+            </a:schemeClr>
+          </a:lnRef>
+          <a:fillRef idx="1">
+            <a:schemeClr val="accent1"/>
+          </a:fillRef>
+          <a:effectRef idx="0">
+            <a:schemeClr val="accent1"/>
+          </a:effectRef>
+          <a:fontRef idx="minor">
+            <a:schemeClr val="lt1"/>
+          </a:fontRef>
+        </p:style>
+        <p:txBody>
+          <a:bodyPr rtlCol="0" anchor="ctr"/>
+          <a:lstStyle/>
+          <a:p>
+            <a:pPr algn="ctr"/>
+            <a:endParaRPr kumimoji="1" lang="ja-JP" altLang="en-US"/>
           </a:p>
         </p:txBody>
       </p:sp>
     </p:spTree>
     <p:extLst>
       <p:ext uri="{BB962C8B-B14F-4D97-AF65-F5344CB8AC3E}">
-        <p14:creationId xmlns:p14="http://schemas.microsoft.com/office/powerpoint/2010/main" val="3172991969"/>
+        <p14:creationId xmlns:p14="http://schemas.microsoft.com/office/powerpoint/2010/main" val="3090274163"/>
       </p:ext>
     </p:extLst>
   </p:cSld>
